--- a/docs/contributing-guide.pptx
+++ b/docs/contributing-guide.pptx
@@ -123,7 +123,7 @@
   <p:extLst>
     <p:ext uri="{521415D9-36F7-43E2-AB2F-B90AF26B5E84}">
       <p14:sectionLst xmlns:p14="http://schemas.microsoft.com/office/powerpoint/2010/main">
-        <p14:section name="Introduction" id="{8b03bfb0-9b73-b216-5f47-f97f1252b825}">
+        <p14:section name="Introduction" id="{5fdf0a29-7778-b0e6-5535-ceaff9938cea}">
           <p14:sldIdLst>
             <p14:sldId id="256"/>
             <p14:sldId id="257"/>
@@ -131,21 +131,21 @@
             <p14:sldId id="259"/>
           </p14:sldIdLst>
         </p14:section>
-        <p14:section name="The process" id="{f39dd1c1-9127-70d5-9554-dded323ad2ac}">
+        <p14:section name="The process" id="{a74f4ee0-a2f5-f152-eb35-b97691be64ee}">
           <p14:sldIdLst>
             <p14:sldId id="260"/>
             <p14:sldId id="261"/>
             <p14:sldId id="262"/>
           </p14:sldIdLst>
         </p14:section>
-        <p14:section name="Design" id="{5c399425-2926-a77e-f816-5085aa081d84}">
+        <p14:section name="Design" id="{989c19f3-9953-79a0-71a2-2f9ca80f92dc}">
           <p14:sldIdLst>
             <p14:sldId id="263"/>
             <p14:sldId id="264"/>
             <p14:sldId id="265"/>
           </p14:sldIdLst>
         </p14:section>
-        <p14:section name="Build and send" id="{11f36671-39f7-a24a-8171-0e9ea735c9c8}">
+        <p14:section name="Build and send" id="{2a838541-0485-d6b2-5be1-b3d55819e91a}">
           <p14:sldIdLst>
             <p14:sldId id="266"/>
             <p14:sldId id="267"/>
@@ -155,7 +155,7 @@
             <p14:sldId id="271"/>
           </p14:sldIdLst>
         </p14:section>
-        <p14:section name="Summary" id="{b74ff6d0-da2d-f7ce-037f-28b7524a7b68}">
+        <p14:section name="Summary" id="{64de48a1-fae5-ef04-8a6b-5490b1ff3929}">
           <p14:sldIdLst>
             <p14:sldId id="272"/>
           </p14:sldIdLst>
@@ -1180,7 +1180,7 @@
           <a:p>
             <a:r>
               <a:rPr lang="en-US" dirty="0"/>
-              <a:t>If the piece came from an idea, the pull request closes that idea issue when it is merged, and the card leaves the Ideas board because the piece now has its own tab.</a:t>
+              <a:t>If the piece came from an idea, the pull request closes that idea issue when it is merged, and the card leaves the Ideas board because the piece now has its own page in the top menu.</a:t>
             </a:r>
             <a:endParaRPr lang="en-US" dirty="0"/>
           </a:p>
@@ -1356,7 +1356,7 @@
           <a:p>
             <a:r>
               <a:rPr lang="en-US" dirty="0"/>
-              <a:t>Two configurators exist today. Live at mfprado.github.io/open-source-modular-furniture. Your contribution would add a third tab, or improve one of these.</a:t>
+              <a:t>Two configurators exist today. Live at mfprado.github.io/open-source-modular-furniture. Your contribution would add a new page to the top menu, or improve one of these.</a:t>
             </a:r>
             <a:endParaRPr lang="en-US" dirty="0"/>
           </a:p>
@@ -4873,7 +4873,7 @@
                   <a:schemeClr val="tx1"/>
                 </a:solidFill>
               </a:rPr>
-              <a:t>Read the parts list</a:t>
+              <a:t>Find it in the top menu</a:t>
             </a:r>
             <a:endParaRPr lang="en-US" sz="1400" dirty="0"/>
           </a:p>
@@ -6813,7 +6813,7 @@
                   <a:schemeClr val="accent2"/>
                 </a:solidFill>
               </a:rPr>
-              <a:t>Standard parts you can buy anywhere, snapped together into furniture people size themselves. Each piece is a tab on the site: a configurator.</a:t>
+              <a:t>Standard parts you can buy anywhere, snapped together into furniture people size themselves. Each piece is a page on the site, picked from the top menu: a configurator.</a:t>
             </a:r>
             <a:endParaRPr lang="en-US" sz="1500" dirty="0"/>
           </a:p>
@@ -9780,7 +9780,7 @@
                   <a:schemeClr val="tx1"/>
                 </a:solidFill>
               </a:rPr>
-              <a:t>The Ideas tab lists pieces nobody has designed yet, as proposed, each with an open GitHub issue.</a:t>
+              <a:t>The Ideas page (top bar, right) lists pieces nobody has designed yet, as proposed, each with an open GitHub issue.</a:t>
             </a:r>
             <a:endParaRPr lang="en-US" sz="1400" dirty="0"/>
           </a:p>

--- a/docs/contributing-guide.pptx
+++ b/docs/contributing-guide.pptx
@@ -25,9 +25,10 @@
     <p:sldId id="273" r:id="rId19"/>
     <p:sldId id="274" r:id="rId20"/>
     <p:sldId id="275" r:id="rId21"/>
+    <p:sldId id="276" r:id="rId22"/>
   </p:sldIdLst>
   <p:notesMasterIdLst>
-    <p:notesMasterId r:id="rId22"/>
+    <p:notesMasterId r:id="rId23"/>
   </p:notesMasterIdLst>
   <p:sldSz cx="9144000" cy="5143500"/>
   <p:notesSz cx="5143500" cy="9144000"/>
@@ -126,7 +127,7 @@
   <p:extLst>
     <p:ext uri="{521415D9-36F7-43E2-AB2F-B90AF26B5E84}">
       <p14:sectionLst xmlns:p14="http://schemas.microsoft.com/office/powerpoint/2010/main">
-        <p14:section name="Why" id="{0c80bd50-a310-7d22-25e4-222bc42e5d97}">
+        <p14:section name="Why" id="{b585ef0c-63b0-dcbc-da5a-b4295a5a6df8}">
           <p14:sldIdLst>
             <p14:sldId id="256"/>
             <p14:sldId id="257"/>
@@ -136,7 +137,7 @@
             <p14:sldId id="261"/>
           </p14:sldIdLst>
         </p14:section>
-        <p14:section name="Get started" id="{eacdad69-ffe3-067c-731e-c3555247923f}">
+        <p14:section name="Get started" id="{8860b6eb-1a8a-3393-354e-c4d0300ba3da}">
           <p14:sldIdLst>
             <p14:sldId id="262"/>
             <p14:sldId id="263"/>
@@ -144,26 +145,27 @@
             <p14:sldId id="265"/>
             <p14:sldId id="266"/>
             <p14:sldId id="267"/>
+            <p14:sldId id="268"/>
           </p14:sldIdLst>
         </p14:section>
-        <p14:section name="Work in rounds" id="{e0f077b8-840a-3545-c16c-a1c3cd94ff74}">
+        <p14:section name="Work in rounds" id="{b1fab110-30ea-2f1c-cf75-8cc3e3e223fd}">
           <p14:sldIdLst>
-            <p14:sldId id="268"/>
             <p14:sldId id="269"/>
             <p14:sldId id="270"/>
             <p14:sldId id="271"/>
             <p14:sldId id="272"/>
+            <p14:sldId id="273"/>
           </p14:sldIdLst>
         </p14:section>
-        <p14:section name="Send it" id="{8f7081b7-26f5-051d-a06e-3014820ea64e}">
+        <p14:section name="Send it" id="{1687a5d4-e924-0e6c-3374-05af743ea20a}">
           <p14:sldIdLst>
-            <p14:sldId id="273"/>
             <p14:sldId id="274"/>
+            <p14:sldId id="275"/>
           </p14:sldIdLst>
         </p14:section>
-        <p14:section name="Summary" id="{393f5e00-e12d-3c97-d90e-19f362fac100}">
+        <p14:section name="Summary" id="{a4ef734b-6af7-5277-6996-954ccebc9628}">
           <p14:sldIdLst>
-            <p14:sldId id="275"/>
+            <p14:sldId id="276"/>
           </p14:sldIdLst>
         </p14:section>
       </p14:sectionLst>
@@ -658,7 +660,7 @@
           <a:p>
             <a:r>
               <a:rPr lang="en-US" dirty="0"/>
-              <a:t>Illustration of the repository picker. The first time, the app asks you to connect your GitHub account.</a:t>
+              <a:t>Illustration. Claude needs Git for this; if it is missing, Claude gives you the one link to install it.</a:t>
             </a:r>
             <a:endParaRPr lang="en-US" dirty="0"/>
           </a:p>
@@ -746,7 +748,7 @@
           <a:p>
             <a:r>
               <a:rPr lang="en-US" dirty="0"/>
-              <a:t>Simulated conversation; exact wording will vary. The instructions Claude follows live in the project itself (the contribute skill), so every session works the same way.</a:t>
+              <a:t>Illustration of the folder picker. Everything Claude needs (instructions, how to start the site) is inside this folder.</a:t>
             </a:r>
             <a:endParaRPr lang="en-US" dirty="0"/>
           </a:p>
@@ -834,7 +836,7 @@
           <a:p>
             <a:r>
               <a:rPr lang="en-US" dirty="0"/>
-              <a:t>The clamp lamp (issue 2) is the idea used in the simulated examples.</a:t>
+              <a:t>Simulated conversation; exact wording will vary. The instructions Claude follows live in the project itself (the contribute skill), so every session works the same way.</a:t>
             </a:r>
             <a:endParaRPr lang="en-US" dirty="0"/>
           </a:p>
@@ -922,7 +924,7 @@
           <a:p>
             <a:r>
               <a:rPr lang="en-US" dirty="0"/>
-              <a:t>Real screenshot of the site in a browser at localhost:8000. "localhost" just means "this computer"; 8000 is the door number Claude opened it on. Breaking something here cannot break the real site.</a:t>
+              <a:t>The clamp lamp (issue 2) is the idea used in the simulated examples.</a:t>
             </a:r>
             <a:endParaRPr lang="en-US" dirty="0"/>
           </a:p>
@@ -1010,7 +1012,7 @@
           <a:p>
             <a:r>
               <a:rPr lang="en-US" dirty="0"/>
-              <a:t>If Chrome says the site cannot be reached, the private copy is not running, usually because the session was closed. Ask Claude to start it again.</a:t>
+              <a:t>Real screenshot of the site in a browser at localhost:8000. "localhost" just means "this computer"; 8000 is the door number Claude opened it on. Breaking something here cannot break the real site.</a:t>
             </a:r>
             <a:endParaRPr lang="en-US" dirty="0"/>
           </a:p>
@@ -1098,7 +1100,7 @@
           <a:p>
             <a:r>
               <a:rPr lang="en-US" dirty="0"/>
-              <a:t>Simulated round for the clamp lamp. A new piece usually takes five rounds: parts list, page and settings, 3D model, part info, PDF guide.</a:t>
+              <a:t>If Chrome says the site cannot be reached, the private copy is not running, usually because the session was closed. Ask Claude to start it again. The same site can also show inside the Claude app: press Cmd+Shift+B (Mac) or Ctrl+Shift+B (Windows) for its Browser pane.</a:t>
             </a:r>
             <a:endParaRPr lang="en-US" dirty="0"/>
           </a:p>
@@ -1186,7 +1188,7 @@
           <a:p>
             <a:r>
               <a:rPr lang="en-US" dirty="0"/>
-              <a:t>Simulated brief for the clamp lamp; the rule values are examples. The brief is also the first thing the owner reviews.</a:t>
+              <a:t>Simulated round for the clamp lamp. A new piece usually takes five rounds: parts list, page and settings, 3D model, part info, PDF guide.</a:t>
             </a:r>
             <a:endParaRPr lang="en-US" dirty="0"/>
           </a:p>
@@ -1274,7 +1276,7 @@
           <a:p>
             <a:r>
               <a:rPr lang="en-US" dirty="0"/>
-              <a:t>Claude reads this list out one item at a time and waits for your answer.</a:t>
+              <a:t>Simulated brief for the clamp lamp; the rule values are examples. The brief is also the first thing the owner reviews.</a:t>
             </a:r>
             <a:endParaRPr lang="en-US" dirty="0"/>
           </a:p>
@@ -1362,7 +1364,7 @@
           <a:p>
             <a:r>
               <a:rPr lang="en-US" dirty="0"/>
-              <a:t>GitHub only accepts images uploaded through the page, which is why the screenshots are the one manual step.</a:t>
+              <a:t>Claude reads this list out one item at a time and waits for your answer.</a:t>
             </a:r>
             <a:endParaRPr lang="en-US" dirty="0"/>
           </a:p>
@@ -1450,7 +1452,7 @@
           <a:p>
             <a:r>
               <a:rPr lang="en-US" dirty="0"/>
-              <a:t>If the piece came from an idea, the pull request closes that idea issue when merged, and the card leaves the Ideas board because the piece now has its own page.</a:t>
+              <a:t>GitHub only accepts images uploaded through the page, which is why the screenshots are the one manual step.</a:t>
             </a:r>
             <a:endParaRPr lang="en-US" dirty="0"/>
           </a:p>
@@ -1626,7 +1628,7 @@
           <a:p>
             <a:r>
               <a:rPr lang="en-US" dirty="0"/>
-              <a:t>That is all you need to remember. Start each one in a new session in the Code section, with the project selected.</a:t>
+              <a:t>If the piece came from an idea, the pull request closes that idea issue when merged, and the card leaves the Ideas board because the piece now has its own page.</a:t>
             </a:r>
             <a:endParaRPr lang="en-US" dirty="0"/>
           </a:p>
@@ -1650,6 +1652,94 @@
             <a:fld id="{F7021451-1387-4CA6-816F-3879F97B5CBC}" type="slidenum">
               <a:rPr lang="en-US"/>
               <a:t>20</a:t>
+            </a:fld>
+            <a:endParaRPr lang="en-US"/>
+          </a:p>
+        </p:txBody>
+      </p:sp>
+    </p:spTree>
+    <p:extLst>
+      <p:ext uri="{BB962C8B-B14F-4D97-AF65-F5344CB8AC3E}">
+        <p14:creationId xmlns:p14="http://schemas.microsoft.com/office/powerpoint/2010/main" val="1024086991"/>
+      </p:ext>
+    </p:extLst>
+  </p:cSld>
+  <p:clrMapOvr>
+    <a:masterClrMapping/>
+  </p:clrMapOvr>
+</p:notes>
+</file>
+
+<file path=ppt/notesSlides/notesSlide21.xml><?xml version="1.0" encoding="utf-8"?>
+<p:notes xmlns:a="http://schemas.openxmlformats.org/drawingml/2006/main" xmlns:r="http://schemas.openxmlformats.org/officeDocument/2006/relationships" xmlns:p="http://schemas.openxmlformats.org/presentationml/2006/main">
+  <p:cSld>
+    <p:spTree>
+      <p:nvGrpSpPr>
+        <p:cNvPr id="1" name=""/>
+        <p:cNvGrpSpPr/>
+        <p:nvPr/>
+      </p:nvGrpSpPr>
+      <p:grpSpPr>
+        <a:xfrm>
+          <a:off x="0" y="0"/>
+          <a:ext cx="0" cy="0"/>
+          <a:chOff x="0" y="0"/>
+          <a:chExt cx="0" cy="0"/>
+        </a:xfrm>
+      </p:grpSpPr>
+      <p:sp>
+        <p:nvSpPr>
+          <p:cNvPr id="2" name="Slide Image Placeholder 1"/>
+          <p:cNvSpPr>
+            <a:spLocks noGrp="1" noRot="1" noChangeAspect="1"/>
+          </p:cNvSpPr>
+          <p:nvPr>
+            <p:ph type="sldImg"/>
+          </p:nvPr>
+        </p:nvSpPr>
+        <p:spPr/>
+      </p:sp>
+      <p:sp>
+        <p:nvSpPr>
+          <p:cNvPr id="3" name="Notes Placeholder 2"/>
+          <p:cNvSpPr>
+            <a:spLocks noGrp="1"/>
+          </p:cNvSpPr>
+          <p:nvPr>
+            <p:ph type="body" idx="1"/>
+          </p:nvPr>
+        </p:nvSpPr>
+        <p:spPr/>
+        <p:txBody>
+          <a:bodyPr/>
+          <a:lstStyle/>
+          <a:p>
+            <a:r>
+              <a:rPr lang="en-US" dirty="0"/>
+              <a:t>That is all you need to remember. Start each one in a new session in the Code section, with the project selected.</a:t>
+            </a:r>
+            <a:endParaRPr lang="en-US" dirty="0"/>
+          </a:p>
+        </p:txBody>
+      </p:sp>
+      <p:sp>
+        <p:nvSpPr>
+          <p:cNvPr id="4" name="Slide Number Placeholder 3"/>
+          <p:cNvSpPr>
+            <a:spLocks noGrp="1"/>
+          </p:cNvSpPr>
+          <p:nvPr>
+            <p:ph type="sldNum" sz="quarter" idx="10"/>
+          </p:nvPr>
+        </p:nvSpPr>
+        <p:spPr/>
+        <p:txBody>
+          <a:bodyPr/>
+          <a:lstStyle/>
+          <a:p>
+            <a:fld id="{F7021451-1387-4CA6-816F-3879F97B5CBC}" type="slidenum">
+              <a:rPr lang="en-US"/>
+              <a:t>21</a:t>
             </a:fld>
             <a:endParaRPr lang="en-US"/>
           </a:p>
@@ -2242,7 +2332,7 @@
           <a:p>
             <a:r>
               <a:rPr lang="en-US" dirty="0"/>
-              <a:t>Illustration: the Code section in the sidebar. Menu names may differ slightly between app versions.</a:t>
+              <a:t>Illustration. Local matters: a Cloud session runs on Anthropic's computers, and then the private copy of the site would not open in your browser.</a:t>
             </a:r>
             <a:endParaRPr lang="en-US" dirty="0"/>
           </a:p>
@@ -3045,7 +3135,7 @@
                   <a:schemeClr val="tx1"/>
                 </a:solidFill>
               </a:rPr>
-              <a:t>Step 2: select the repository</a:t>
+              <a:t>First time only: get the project</a:t>
             </a:r>
             <a:endParaRPr lang="en-US" sz="2400" dirty="0"/>
           </a:p>
@@ -3091,7 +3181,7 @@
       </p:sp>
       <p:pic>
         <p:nvPicPr>
-          <p:cNvPr id="4" name="Step 2: select the repository" descr="small/app-repo.jpg">    </p:cNvPr>
+          <p:cNvPr id="4" name="First time only: get the project" descr="small/app-first.jpg">    </p:cNvPr>
           <p:cNvPicPr>
             <a:picLocks noChangeAspect="1"/>
           </p:cNvPicPr>
@@ -3106,7 +3196,7 @@
         <p:spPr>
           <a:xfrm>
             <a:off x="457200" y="1051560"/>
-            <a:ext cx="5852160" cy="3323191"/>
+            <a:ext cx="5852160" cy="3331551"/>
           </a:xfrm>
           <a:prstGeom prst="rect">
             <a:avLst/>
@@ -3152,7 +3242,7 @@
                   <a:schemeClr val="bg1"/>
                 </a:solidFill>
               </a:rPr>
-              <a:t>2</a:t>
+              <a:t>1×</a:t>
             </a:r>
             <a:endParaRPr lang="en-US" sz="1400" dirty="0"/>
           </a:p>
@@ -3188,7 +3278,7 @@
                   <a:schemeClr val="tx1"/>
                 </a:solidFill>
               </a:rPr>
-              <a:t>Pick the project</a:t>
+              <a:t>Claude downloads it</a:t>
             </a:r>
             <a:endParaRPr lang="en-US" sz="1400" dirty="0"/>
           </a:p>
@@ -3216,7 +3306,7 @@
                   <a:schemeClr val="accent2"/>
                 </a:solidFill>
               </a:rPr>
-              <a:t>Click Select repository and choose open-source-modular-furniture. A repository is just the project's folder on GitHub.</a:t>
+              <a:t>Choose your Documents folder and ask Claude to download the project. Do this once; afterwards the project lives in Documents.</a:t>
             </a:r>
             <a:endParaRPr lang="en-US" sz="1400" dirty="0"/>
           </a:p>
@@ -3324,7 +3414,7 @@
                   <a:schemeClr val="tx1"/>
                 </a:solidFill>
               </a:rPr>
-              <a:t>Step 3: say "let's work on this"</a:t>
+              <a:t>Step 2: choose the project folder</a:t>
             </a:r>
             <a:endParaRPr lang="en-US" sz="2400" dirty="0"/>
           </a:p>
@@ -3332,20 +3422,20 @@
       </p:sp>
       <p:sp>
         <p:nvSpPr>
-          <p:cNvPr id="3" name="Simulation tag"/>
+          <p:cNvPr id="3" name="Illustration tag"/>
           <p:cNvSpPr txBox="1"/>
           <p:nvPr/>
         </p:nvSpPr>
         <p:spPr>
           <a:xfrm>
-            <a:off x="6949440" y="466344"/>
-            <a:ext cx="1737360" cy="256032"/>
+            <a:off x="7315200" y="466344"/>
+            <a:ext cx="1371600" cy="256032"/>
           </a:xfrm>
           <a:prstGeom prst="rect">
             <a:avLst/>
           </a:prstGeom>
           <a:solidFill>
-            <a:schemeClr val="accent1"/>
+            <a:schemeClr val="accent2"/>
           </a:solidFill>
           <a:ln/>
         </p:spPr>
@@ -3362,7 +3452,7 @@
                   <a:schemeClr val="bg1"/>
                 </a:solidFill>
               </a:rPr>
-              <a:t>SIMULATED EXAMPLE</a:t>
+              <a:t>ILLUSTRATION</a:t>
             </a:r>
             <a:endParaRPr lang="en-US" sz="1000" dirty="0"/>
           </a:p>
@@ -3370,7 +3460,7 @@
       </p:sp>
       <p:pic>
         <p:nvPicPr>
-          <p:cNvPr id="4" name="Simulated first conversation" descr="small/sim-start.jpg">    </p:cNvPr>
+          <p:cNvPr id="4" name="Step 2: choose the project folder" descr="small/app-folder.jpg">    </p:cNvPr>
           <p:cNvPicPr>
             <a:picLocks noChangeAspect="1"/>
           </p:cNvPicPr>
@@ -3385,7 +3475,7 @@
         <p:spPr>
           <a:xfrm>
             <a:off x="457200" y="1051560"/>
-            <a:ext cx="5394960" cy="3117516"/>
+            <a:ext cx="5852160" cy="3331551"/>
           </a:xfrm>
           <a:prstGeom prst="rect">
             <a:avLst/>
@@ -3407,8 +3497,46 @@
         </p:nvSpPr>
         <p:spPr>
           <a:xfrm>
-            <a:off x="6126480" y="1188720"/>
-            <a:ext cx="2651760" cy="3474720"/>
+            <a:off x="6583680" y="1188720"/>
+            <a:ext cx="548640" cy="548640"/>
+          </a:xfrm>
+          <a:prstGeom prst="ellipse">
+            <a:avLst/>
+          </a:prstGeom>
+          <a:solidFill>
+            <a:schemeClr val="accent1"/>
+          </a:solidFill>
+          <a:ln/>
+        </p:spPr>
+        <p:txBody>
+          <a:bodyPr wrap="square" lIns="0" tIns="0" rIns="0" bIns="0" rtlCol="0" anchor="ctr"/>
+          <a:lstStyle/>
+          <a:p>
+            <a:pPr algn="ctr" indent="0" marL="0">
+              <a:buNone/>
+            </a:pPr>
+            <a:r>
+              <a:rPr lang="en-US" sz="1400" b="1" dirty="0">
+                <a:solidFill>
+                  <a:schemeClr val="bg1"/>
+                </a:solidFill>
+              </a:rPr>
+              <a:t>2</a:t>
+            </a:r>
+            <a:endParaRPr lang="en-US" sz="1400" dirty="0"/>
+          </a:p>
+        </p:txBody>
+      </p:sp>
+      <p:sp>
+        <p:nvSpPr>
+          <p:cNvPr id="6" name="Text 3"/>
+          <p:cNvSpPr txBox="1"/>
+          <p:nvPr/>
+        </p:nvSpPr>
+        <p:spPr>
+          <a:xfrm>
+            <a:off x="6583680" y="1920240"/>
+            <a:ext cx="2194560" cy="2651760"/>
           </a:xfrm>
           <a:prstGeom prst="rect">
             <a:avLst/>
@@ -3424,12 +3552,12 @@
               <a:buNone/>
             </a:pPr>
             <a:r>
-              <a:rPr lang="en-US" sz="1400" b="1" dirty="0">
+              <a:rPr lang="en-US" sz="1700" b="1" dirty="0">
                 <a:solidFill>
                   <a:schemeClr val="tx1"/>
                 </a:solidFill>
               </a:rPr>
-              <a:t>Everything is prepared</a:t>
+              <a:t>Pick the folder</a:t>
             </a:r>
             <a:endParaRPr lang="en-US" sz="1400" dirty="0"/>
           </a:p>
@@ -3438,96 +3566,26 @@
               <a:buNone/>
             </a:pPr>
             <a:r>
+              <a:rPr lang="en-US" sz="800" dirty="0">
+                <a:solidFill>
+                  <a:schemeClr val="tx1"/>
+                </a:solidFill>
+              </a:rPr>
+              <a:t> </a:t>
+            </a:r>
+            <a:endParaRPr lang="en-US" sz="1400" dirty="0"/>
+          </a:p>
+          <a:p>
+            <a:pPr indent="0" marL="0">
+              <a:buNone/>
+            </a:pPr>
+            <a:r>
               <a:rPr lang="en-US" sz="1400" dirty="0">
                 <a:solidFill>
                   <a:schemeClr val="accent2"/>
                 </a:solidFill>
               </a:rPr>
-              <a:t>The project carries step-by-step instructions for Claude, so it knows how to guide you.</a:t>
-            </a:r>
-            <a:endParaRPr lang="en-US" sz="1400" dirty="0"/>
-          </a:p>
-          <a:p>
-            <a:pPr indent="0" marL="0">
-              <a:buNone/>
-            </a:pPr>
-            <a:r>
-              <a:rPr lang="en-US" sz="800" dirty="0">
-                <a:solidFill>
-                  <a:schemeClr val="tx1"/>
-                </a:solidFill>
-              </a:rPr>
-              <a:t> </a:t>
-            </a:r>
-            <a:endParaRPr lang="en-US" sz="1400" dirty="0"/>
-          </a:p>
-          <a:p>
-            <a:pPr indent="0" marL="0">
-              <a:buNone/>
-            </a:pPr>
-            <a:r>
-              <a:rPr lang="en-US" sz="1400" b="1" dirty="0">
-                <a:solidFill>
-                  <a:schemeClr val="tx1"/>
-                </a:solidFill>
-              </a:rPr>
-              <a:t>It asks what you want</a:t>
-            </a:r>
-            <a:endParaRPr lang="en-US" sz="1400" dirty="0"/>
-          </a:p>
-          <a:p>
-            <a:pPr indent="0" marL="0">
-              <a:buNone/>
-            </a:pPr>
-            <a:r>
-              <a:rPr lang="en-US" sz="1400" dirty="0">
-                <a:solidFill>
-                  <a:schemeClr val="accent2"/>
-                </a:solidFill>
-              </a:rPr>
-              <a:t>Design a new piece, improve one, add an idea, or something else.</a:t>
-            </a:r>
-            <a:endParaRPr lang="en-US" sz="1400" dirty="0"/>
-          </a:p>
-          <a:p>
-            <a:pPr indent="0" marL="0">
-              <a:buNone/>
-            </a:pPr>
-            <a:r>
-              <a:rPr lang="en-US" sz="800" dirty="0">
-                <a:solidFill>
-                  <a:schemeClr val="tx1"/>
-                </a:solidFill>
-              </a:rPr>
-              <a:t> </a:t>
-            </a:r>
-            <a:endParaRPr lang="en-US" sz="1400" dirty="0"/>
-          </a:p>
-          <a:p>
-            <a:pPr indent="0" marL="0">
-              <a:buNone/>
-            </a:pPr>
-            <a:r>
-              <a:rPr lang="en-US" sz="1400" b="1" dirty="0">
-                <a:solidFill>
-                  <a:schemeClr val="tx1"/>
-                </a:solidFill>
-              </a:rPr>
-              <a:t>It starts your private copy</a:t>
-            </a:r>
-            <a:endParaRPr lang="en-US" sz="1400" dirty="0"/>
-          </a:p>
-          <a:p>
-            <a:pPr indent="0" marL="0">
-              <a:buNone/>
-            </a:pPr>
-            <a:r>
-              <a:rPr lang="en-US" sz="1400" dirty="0">
-                <a:solidFill>
-                  <a:schemeClr val="accent2"/>
-                </a:solidFill>
-              </a:rPr>
-              <a:t>And tells you where to open it.</a:t>
+              <a:t>Click Choose folder and pick open-source-modular-furniture in your Documents. Do this at the start of every session.</a:t>
             </a:r>
             <a:endParaRPr lang="en-US" sz="1400" dirty="0"/>
           </a:p>
@@ -3635,15 +3693,53 @@
                   <a:schemeClr val="tx1"/>
                 </a:solidFill>
               </a:rPr>
-              <a:t>Not sure what to make?</a:t>
+              <a:t>Step 3: say "let's work on this"</a:t>
             </a:r>
             <a:endParaRPr lang="en-US" sz="2400" dirty="0"/>
+          </a:p>
+        </p:txBody>
+      </p:sp>
+      <p:sp>
+        <p:nvSpPr>
+          <p:cNvPr id="3" name="Simulation tag"/>
+          <p:cNvSpPr txBox="1"/>
+          <p:nvPr/>
+        </p:nvSpPr>
+        <p:spPr>
+          <a:xfrm>
+            <a:off x="6949440" y="466344"/>
+            <a:ext cx="1737360" cy="256032"/>
+          </a:xfrm>
+          <a:prstGeom prst="rect">
+            <a:avLst/>
+          </a:prstGeom>
+          <a:solidFill>
+            <a:schemeClr val="accent1"/>
+          </a:solidFill>
+          <a:ln/>
+        </p:spPr>
+        <p:txBody>
+          <a:bodyPr wrap="square" lIns="0" tIns="0" rIns="0" bIns="0" rtlCol="0" anchor="ctr"/>
+          <a:lstStyle/>
+          <a:p>
+            <a:pPr algn="ctr" indent="0" marL="0">
+              <a:buNone/>
+            </a:pPr>
+            <a:r>
+              <a:rPr lang="en-US" sz="1000" b="1" dirty="0">
+                <a:solidFill>
+                  <a:schemeClr val="bg1"/>
+                </a:solidFill>
+              </a:rPr>
+              <a:t>SIMULATED EXAMPLE</a:t>
+            </a:r>
+            <a:endParaRPr lang="en-US" sz="1000" dirty="0"/>
           </a:p>
         </p:txBody>
       </p:sp>
       <p:pic>
         <p:nvPicPr>
-          <p:cNvPr id="3" name="Ideas board" descr="small/ideas.jpg">    </p:cNvPr>
+          <p:cNvPr id="4" name="Simulated first conversation" descr="small/sim-start.jpg">    </p:cNvPr>
           <p:cNvPicPr>
             <a:picLocks noChangeAspect="1"/>
           </p:cNvPicPr>
@@ -3658,7 +3754,7 @@
         <p:spPr>
           <a:xfrm>
             <a:off x="457200" y="1051560"/>
-            <a:ext cx="5120640" cy="2923420"/>
+            <a:ext cx="5394960" cy="3117516"/>
           </a:xfrm>
           <a:prstGeom prst="rect">
             <a:avLst/>
@@ -3674,14 +3770,14 @@
       </p:pic>
       <p:sp>
         <p:nvSpPr>
-          <p:cNvPr id="4" name="Text 1"/>
+          <p:cNvPr id="5" name="Text 2"/>
           <p:cNvSpPr txBox="1"/>
           <p:nvPr/>
         </p:nvSpPr>
         <p:spPr>
           <a:xfrm>
-            <a:off x="5852160" y="1188720"/>
-            <a:ext cx="2926080" cy="3383280"/>
+            <a:off x="6126480" y="1188720"/>
+            <a:ext cx="2651760" cy="3474720"/>
           </a:xfrm>
           <a:prstGeom prst="rect">
             <a:avLst/>
@@ -3697,12 +3793,40 @@
               <a:buNone/>
             </a:pPr>
             <a:r>
+              <a:rPr lang="en-US" sz="1400" b="1" dirty="0">
+                <a:solidFill>
+                  <a:schemeClr val="tx1"/>
+                </a:solidFill>
+              </a:rPr>
+              <a:t>Everything is prepared</a:t>
+            </a:r>
+            <a:endParaRPr lang="en-US" sz="1400" dirty="0"/>
+          </a:p>
+          <a:p>
+            <a:pPr indent="0" marL="0">
+              <a:buNone/>
+            </a:pPr>
+            <a:r>
               <a:rPr lang="en-US" sz="1400" dirty="0">
                 <a:solidFill>
+                  <a:schemeClr val="accent2"/>
+                </a:solidFill>
+              </a:rPr>
+              <a:t>The project carries step-by-step instructions for Claude, so it knows how to guide you.</a:t>
+            </a:r>
+            <a:endParaRPr lang="en-US" sz="1400" dirty="0"/>
+          </a:p>
+          <a:p>
+            <a:pPr indent="0" marL="0">
+              <a:buNone/>
+            </a:pPr>
+            <a:r>
+              <a:rPr lang="en-US" sz="800" dirty="0">
+                <a:solidFill>
                   <a:schemeClr val="tx1"/>
                 </a:solidFill>
               </a:rPr>
-              <a:t>The Ideas page (top bar, right) lists pieces nobody has designed yet, each with an open GitHub issue.</a:t>
+              <a:t> </a:t>
             </a:r>
             <a:endParaRPr lang="en-US" sz="1400" dirty="0"/>
           </a:p>
@@ -3711,8 +3835,36 @@
               <a:buNone/>
             </a:pPr>
             <a:r>
+              <a:rPr lang="en-US" sz="1400" b="1" dirty="0">
+                <a:solidFill>
+                  <a:schemeClr val="tx1"/>
+                </a:solidFill>
+              </a:rPr>
+              <a:t>It asks what you want</a:t>
+            </a:r>
+            <a:endParaRPr lang="en-US" sz="1400" dirty="0"/>
+          </a:p>
+          <a:p>
+            <a:pPr indent="0" marL="0">
+              <a:buNone/>
+            </a:pPr>
+            <a:r>
               <a:rPr lang="en-US" sz="1400" dirty="0">
                 <a:solidFill>
+                  <a:schemeClr val="accent2"/>
+                </a:solidFill>
+              </a:rPr>
+              <a:t>Design a new piece, improve one, add an idea, or something else.</a:t>
+            </a:r>
+            <a:endParaRPr lang="en-US" sz="1400" dirty="0"/>
+          </a:p>
+          <a:p>
+            <a:pPr indent="0" marL="0">
+              <a:buNone/>
+            </a:pPr>
+            <a:r>
+              <a:rPr lang="en-US" sz="800" dirty="0">
+                <a:solidFill>
                   <a:schemeClr val="tx1"/>
                 </a:solidFill>
               </a:rPr>
@@ -3730,7 +3882,7 @@
                   <a:schemeClr val="tx1"/>
                 </a:solidFill>
               </a:rPr>
-              <a:t>Pick one, or bring your own.</a:t>
+              <a:t>It starts your private copy</a:t>
             </a:r>
             <a:endParaRPr lang="en-US" sz="1400" dirty="0"/>
           </a:p>
@@ -3741,24 +3893,10 @@
             <a:r>
               <a:rPr lang="en-US" sz="1400" dirty="0">
                 <a:solidFill>
-                  <a:schemeClr val="tx1"/>
-                </a:solidFill>
-              </a:rPr>
-              <a:t> </a:t>
-            </a:r>
-            <a:endParaRPr lang="en-US" sz="1400" dirty="0"/>
-          </a:p>
-          <a:p>
-            <a:pPr indent="0" marL="0">
-              <a:buNone/>
-            </a:pPr>
-            <a:r>
-              <a:rPr lang="en-US" sz="1400" dirty="0">
-                <a:solidFill>
                   <a:schemeClr val="accent2"/>
                 </a:solidFill>
               </a:rPr>
-              <a:t>Tell Claude which one; it reads the issue and its pictures.</a:t>
+              <a:t>And tells you where to open it.</a:t>
             </a:r>
             <a:endParaRPr lang="en-US" sz="1400" dirty="0"/>
           </a:p>
@@ -3866,7 +4004,7 @@
                   <a:schemeClr val="tx1"/>
                 </a:solidFill>
               </a:rPr>
-              <a:t>Your private copy of the site</a:t>
+              <a:t>Not sure what to make?</a:t>
             </a:r>
             <a:endParaRPr lang="en-US" sz="2400" dirty="0"/>
           </a:p>
@@ -3874,7 +4012,7 @@
       </p:sp>
       <p:pic>
         <p:nvPicPr>
-          <p:cNvPr id="3" name="Local site open in Chrome" descr="small/sim-browser.jpg">    </p:cNvPr>
+          <p:cNvPr id="3" name="Ideas board" descr="small/ideas.jpg">    </p:cNvPr>
           <p:cNvPicPr>
             <a:picLocks noChangeAspect="1"/>
           </p:cNvPicPr>
@@ -3889,7 +4027,7 @@
         <p:spPr>
           <a:xfrm>
             <a:off x="457200" y="1051560"/>
-            <a:ext cx="5120640" cy="3386938"/>
+            <a:ext cx="5120640" cy="2923420"/>
           </a:xfrm>
           <a:prstGeom prst="rect">
             <a:avLst/>
@@ -3905,41 +4043,14 @@
       </p:pic>
       <p:sp>
         <p:nvSpPr>
-          <p:cNvPr id="4" name="Shape 1"/>
-          <p:cNvSpPr/>
-          <p:nvPr/>
-        </p:nvSpPr>
-        <p:spPr>
-          <a:xfrm>
-            <a:off x="5852160" y="1051560"/>
-            <a:ext cx="2834640" cy="1554480"/>
-          </a:xfrm>
-          <a:prstGeom prst="roundRect">
-            <a:avLst>
-              <a:gd name="adj" fmla="val 4706"/>
-            </a:avLst>
-          </a:prstGeom>
-          <a:solidFill>
-            <a:schemeClr val="bg2"/>
-          </a:solidFill>
-          <a:ln w="12700">
-            <a:solidFill>
-              <a:schemeClr val="bg2"/>
-            </a:solidFill>
-            <a:prstDash val="solid"/>
-          </a:ln>
-        </p:spPr>
-      </p:sp>
-      <p:sp>
-        <p:nvSpPr>
-          <p:cNvPr id="5" name="Text 2"/>
+          <p:cNvPr id="4" name="Text 1"/>
           <p:cNvSpPr txBox="1"/>
           <p:nvPr/>
         </p:nvSpPr>
         <p:spPr>
           <a:xfrm>
-            <a:off x="6035040" y="1188720"/>
-            <a:ext cx="2514600" cy="1371600"/>
+            <a:off x="5852160" y="1188720"/>
+            <a:ext cx="2926080" cy="3383280"/>
           </a:xfrm>
           <a:prstGeom prst="rect">
             <a:avLst/>
@@ -3955,12 +4066,12 @@
               <a:buNone/>
             </a:pPr>
             <a:r>
-              <a:rPr lang="en-US" sz="1500" b="1" dirty="0">
+              <a:rPr lang="en-US" sz="1400" dirty="0">
                 <a:solidFill>
                   <a:schemeClr val="tx1"/>
                 </a:solidFill>
               </a:rPr>
-              <a:t>The real site</a:t>
+              <a:t>The Ideas page (top bar, right) lists pieces nobody has designed yet, each with an open GitHub issue.</a:t>
             </a:r>
             <a:endParaRPr lang="en-US" sz="1400" dirty="0"/>
           </a:p>
@@ -3969,123 +4080,54 @@
               <a:buNone/>
             </a:pPr>
             <a:r>
-              <a:rPr lang="en-US" sz="1200" dirty="0">
+              <a:rPr lang="en-US" sz="1400" dirty="0">
+                <a:solidFill>
+                  <a:schemeClr val="tx1"/>
+                </a:solidFill>
+              </a:rPr>
+              <a:t> </a:t>
+            </a:r>
+            <a:endParaRPr lang="en-US" sz="1400" dirty="0"/>
+          </a:p>
+          <a:p>
+            <a:pPr indent="0" marL="0">
+              <a:buNone/>
+            </a:pPr>
+            <a:r>
+              <a:rPr lang="en-US" sz="1400" b="1" dirty="0">
+                <a:solidFill>
+                  <a:schemeClr val="tx1"/>
+                </a:solidFill>
+              </a:rPr>
+              <a:t>Pick one, or bring your own.</a:t>
+            </a:r>
+            <a:endParaRPr lang="en-US" sz="1400" dirty="0"/>
+          </a:p>
+          <a:p>
+            <a:pPr indent="0" marL="0">
+              <a:buNone/>
+            </a:pPr>
+            <a:r>
+              <a:rPr lang="en-US" sz="1400" dirty="0">
+                <a:solidFill>
+                  <a:schemeClr val="tx1"/>
+                </a:solidFill>
+              </a:rPr>
+              <a:t> </a:t>
+            </a:r>
+            <a:endParaRPr lang="en-US" sz="1400" dirty="0"/>
+          </a:p>
+          <a:p>
+            <a:pPr indent="0" marL="0">
+              <a:buNone/>
+            </a:pPr>
+            <a:r>
+              <a:rPr lang="en-US" sz="1400" dirty="0">
                 <a:solidFill>
                   <a:schemeClr val="accent2"/>
                 </a:solidFill>
-                <a:latin typeface="Courier New" pitchFamily="34" charset="0"/>
-                <a:ea typeface="Courier New" pitchFamily="34" charset="-122"/>
-                <a:cs typeface="Courier New" pitchFamily="34" charset="-120"/>
-              </a:rPr>
-              <a:t>mfprado.github.io/…</a:t>
-            </a:r>
-            <a:endParaRPr lang="en-US" sz="1400" dirty="0"/>
-          </a:p>
-          <a:p>
-            <a:pPr indent="0" marL="0">
-              <a:buNone/>
-            </a:pPr>
-            <a:r>
-              <a:rPr lang="en-US" sz="1300" dirty="0">
-                <a:solidFill>
-                  <a:schemeClr val="accent2"/>
-                </a:solidFill>
-              </a:rPr>
-              <a:t>Production: the shop window. Everyone sees it. It only changes after the owner approves.</a:t>
-            </a:r>
-            <a:endParaRPr lang="en-US" sz="1400" dirty="0"/>
-          </a:p>
-        </p:txBody>
-      </p:sp>
-      <p:sp>
-        <p:nvSpPr>
-          <p:cNvPr id="6" name="Shape 3"/>
-          <p:cNvSpPr/>
-          <p:nvPr/>
-        </p:nvSpPr>
-        <p:spPr>
-          <a:xfrm>
-            <a:off x="5852160" y="2788920"/>
-            <a:ext cx="2834640" cy="1737360"/>
-          </a:xfrm>
-          <a:prstGeom prst="roundRect">
-            <a:avLst>
-              <a:gd name="adj" fmla="val 4211"/>
-            </a:avLst>
-          </a:prstGeom>
-          <a:solidFill>
-            <a:schemeClr val="tx2"/>
-          </a:solidFill>
-          <a:ln w="12700">
-            <a:solidFill>
-              <a:schemeClr val="tx2"/>
-            </a:solidFill>
-            <a:prstDash val="solid"/>
-          </a:ln>
-        </p:spPr>
-      </p:sp>
-      <p:sp>
-        <p:nvSpPr>
-          <p:cNvPr id="7" name="Text 4"/>
-          <p:cNvSpPr txBox="1"/>
-          <p:nvPr/>
-        </p:nvSpPr>
-        <p:spPr>
-          <a:xfrm>
-            <a:off x="6035040" y="2926080"/>
-            <a:ext cx="2514600" cy="1554480"/>
-          </a:xfrm>
-          <a:prstGeom prst="rect">
-            <a:avLst/>
-          </a:prstGeom>
-          <a:noFill/>
-          <a:ln/>
-        </p:spPr>
-        <p:txBody>
-          <a:bodyPr wrap="square" lIns="0" tIns="0" rIns="0" bIns="0" rtlCol="0" anchor="t"/>
-          <a:lstStyle/>
-          <a:p>
-            <a:pPr indent="0" marL="0">
-              <a:buNone/>
-            </a:pPr>
-            <a:r>
-              <a:rPr lang="en-US" sz="1500" b="1" dirty="0">
-                <a:solidFill>
-                  <a:schemeClr val="bg1"/>
-                </a:solidFill>
-              </a:rPr>
-              <a:t>Your private copy</a:t>
-            </a:r>
-            <a:endParaRPr lang="en-US" sz="1400" dirty="0"/>
-          </a:p>
-          <a:p>
-            <a:pPr indent="0" marL="0">
-              <a:buNone/>
-            </a:pPr>
-            <a:r>
-              <a:rPr lang="en-US" sz="1200" dirty="0">
-                <a:solidFill>
-                  <a:schemeClr val="accent4"/>
-                </a:solidFill>
-                <a:latin typeface="Courier New" pitchFamily="34" charset="0"/>
-                <a:ea typeface="Courier New" pitchFamily="34" charset="-122"/>
-                <a:cs typeface="Courier New" pitchFamily="34" charset="-120"/>
-              </a:rPr>
-              <a:t>localhost:8000</a:t>
-            </a:r>
-            <a:endParaRPr lang="en-US" sz="1400" dirty="0"/>
-          </a:p>
-          <a:p>
-            <a:pPr indent="0" marL="0">
-              <a:buNone/>
-            </a:pPr>
-            <a:r>
-              <a:rPr lang="en-US" sz="1300" dirty="0">
-                <a:solidFill>
-                  <a:schemeClr val="bg1"/>
-                </a:solidFill>
-              </a:rPr>
-              <a:t>Non-production: the prototype on your workbench. Only on your computer, and it shows your changes straight away.</a:t>
+              </a:rPr>
+              <a:t>Tell Claude which one; it reads the issue and its pictures.</a:t>
             </a:r>
             <a:endParaRPr lang="en-US" sz="1400" dirty="0"/>
           </a:p>
@@ -4193,26 +4235,57 @@
                   <a:schemeClr val="tx1"/>
                 </a:solidFill>
               </a:rPr>
-              <a:t>Open it in Chrome, in three moves</a:t>
+              <a:t>Your private copy of the site</a:t>
             </a:r>
             <a:endParaRPr lang="en-US" sz="2400" dirty="0"/>
           </a:p>
         </p:txBody>
       </p:sp>
-      <p:sp>
-        <p:nvSpPr>
-          <p:cNvPr id="3" name="Shape 1"/>
+      <p:pic>
+        <p:nvPicPr>
+          <p:cNvPr id="3" name="Local site open in Chrome" descr="small/sim-browser.jpg">    </p:cNvPr>
+          <p:cNvPicPr>
+            <a:picLocks noChangeAspect="1"/>
+          </p:cNvPicPr>
+          <p:nvPr/>
+        </p:nvPicPr>
+        <p:blipFill>
+          <a:blip r:embed="rId1"/>
+          <a:stretch>
+            <a:fillRect/>
+          </a:stretch>
+        </p:blipFill>
+        <p:spPr>
+          <a:xfrm>
+            <a:off x="457200" y="1051560"/>
+            <a:ext cx="5120640" cy="3386938"/>
+          </a:xfrm>
+          <a:prstGeom prst="rect">
+            <a:avLst/>
+          </a:prstGeom>
+          <a:effectLst>
+            <a:outerShdw sx="100000" sy="100000" kx="0" ky="0" algn="bl" rotWithShape="0" blurRad="76200" dist="25400" dir="5400000">
+              <a:srgbClr val="000000">
+                <a:alpha val="18000"/>
+              </a:srgbClr>
+            </a:outerShdw>
+          </a:effectLst>
+        </p:spPr>
+      </p:pic>
+      <p:sp>
+        <p:nvSpPr>
+          <p:cNvPr id="4" name="Shape 1"/>
           <p:cNvSpPr/>
           <p:nvPr/>
         </p:nvSpPr>
         <p:spPr>
           <a:xfrm>
-            <a:off x="457200" y="1097280"/>
-            <a:ext cx="2606040" cy="2377440"/>
+            <a:off x="5852160" y="1051560"/>
+            <a:ext cx="2834640" cy="1554480"/>
           </a:xfrm>
           <a:prstGeom prst="roundRect">
             <a:avLst>
-              <a:gd name="adj" fmla="val 3077"/>
+              <a:gd name="adj" fmla="val 4706"/>
             </a:avLst>
           </a:prstGeom>
           <a:solidFill>
@@ -4228,52 +4301,14 @@
       </p:sp>
       <p:sp>
         <p:nvSpPr>
-          <p:cNvPr id="4" name="Text 2"/>
+          <p:cNvPr id="5" name="Text 2"/>
           <p:cNvSpPr txBox="1"/>
           <p:nvPr/>
         </p:nvSpPr>
         <p:spPr>
           <a:xfrm>
-            <a:off x="685800" y="1280160"/>
-            <a:ext cx="502920" cy="502920"/>
-          </a:xfrm>
-          <a:prstGeom prst="ellipse">
-            <a:avLst/>
-          </a:prstGeom>
-          <a:solidFill>
-            <a:schemeClr val="accent1"/>
-          </a:solidFill>
-          <a:ln/>
-        </p:spPr>
-        <p:txBody>
-          <a:bodyPr wrap="square" lIns="0" tIns="0" rIns="0" bIns="0" rtlCol="0" anchor="ctr"/>
-          <a:lstStyle/>
-          <a:p>
-            <a:pPr algn="ctr" indent="0" marL="0">
-              <a:buNone/>
-            </a:pPr>
-            <a:r>
-              <a:rPr lang="en-US" sz="1400" b="1" dirty="0">
-                <a:solidFill>
-                  <a:schemeClr val="bg1"/>
-                </a:solidFill>
-              </a:rPr>
-              <a:t>1</a:t>
-            </a:r>
-            <a:endParaRPr lang="en-US" sz="1400" dirty="0"/>
-          </a:p>
-        </p:txBody>
-      </p:sp>
-      <p:sp>
-        <p:nvSpPr>
-          <p:cNvPr id="5" name="Text 3"/>
-          <p:cNvSpPr txBox="1"/>
-          <p:nvPr/>
-        </p:nvSpPr>
-        <p:spPr>
-          <a:xfrm>
-            <a:off x="685800" y="1920240"/>
-            <a:ext cx="2194560" cy="1463040"/>
+            <a:off x="6035040" y="1188720"/>
+            <a:ext cx="2514600" cy="1371600"/>
           </a:xfrm>
           <a:prstGeom prst="rect">
             <a:avLst/>
@@ -4289,12 +4324,12 @@
               <a:buNone/>
             </a:pPr>
             <a:r>
-              <a:rPr lang="en-US" sz="1600" b="1" dirty="0">
+              <a:rPr lang="en-US" sz="1500" b="1" dirty="0">
                 <a:solidFill>
                   <a:schemeClr val="tx1"/>
                 </a:solidFill>
               </a:rPr>
-              <a:t>Claude starts it</a:t>
+              <a:t>The real site</a:t>
             </a:r>
             <a:endParaRPr lang="en-US" sz="1400" dirty="0"/>
           </a:p>
@@ -4303,261 +4338,48 @@
               <a:buNone/>
             </a:pPr>
             <a:r>
+              <a:rPr lang="en-US" sz="1200" dirty="0">
+                <a:solidFill>
+                  <a:schemeClr val="accent2"/>
+                </a:solidFill>
+                <a:latin typeface="Courier New" pitchFamily="34" charset="0"/>
+                <a:ea typeface="Courier New" pitchFamily="34" charset="-122"/>
+                <a:cs typeface="Courier New" pitchFamily="34" charset="-120"/>
+              </a:rPr>
+              <a:t>mfprado.github.io/…</a:t>
+            </a:r>
+            <a:endParaRPr lang="en-US" sz="1400" dirty="0"/>
+          </a:p>
+          <a:p>
+            <a:pPr indent="0" marL="0">
+              <a:buNone/>
+            </a:pPr>
+            <a:r>
               <a:rPr lang="en-US" sz="1300" dirty="0">
                 <a:solidFill>
                   <a:schemeClr val="accent2"/>
                 </a:solidFill>
               </a:rPr>
-              <a:t>At the start of the session. Keep the chat open: closing it switches the copy off.</a:t>
-            </a:r>
-            <a:endParaRPr lang="en-US" sz="1400" dirty="0"/>
-          </a:p>
-        </p:txBody>
-      </p:sp>
-      <p:sp>
-        <p:nvSpPr>
-          <p:cNvPr id="6" name="Shape 4"/>
+              <a:t>Production: the shop window. Everyone sees it. It only changes after the owner approves.</a:t>
+            </a:r>
+            <a:endParaRPr lang="en-US" sz="1400" dirty="0"/>
+          </a:p>
+        </p:txBody>
+      </p:sp>
+      <p:sp>
+        <p:nvSpPr>
+          <p:cNvPr id="6" name="Shape 3"/>
           <p:cNvSpPr/>
           <p:nvPr/>
         </p:nvSpPr>
         <p:spPr>
           <a:xfrm>
-            <a:off x="3264408" y="1097280"/>
-            <a:ext cx="2606040" cy="2377440"/>
+            <a:off x="5852160" y="2788920"/>
+            <a:ext cx="2834640" cy="1737360"/>
           </a:xfrm>
           <a:prstGeom prst="roundRect">
             <a:avLst>
-              <a:gd name="adj" fmla="val 3077"/>
-            </a:avLst>
-          </a:prstGeom>
-          <a:solidFill>
-            <a:schemeClr val="bg2"/>
-          </a:solidFill>
-          <a:ln w="12700">
-            <a:solidFill>
-              <a:schemeClr val="bg2"/>
-            </a:solidFill>
-            <a:prstDash val="solid"/>
-          </a:ln>
-        </p:spPr>
-      </p:sp>
-      <p:sp>
-        <p:nvSpPr>
-          <p:cNvPr id="7" name="Text 5"/>
-          <p:cNvSpPr txBox="1"/>
-          <p:nvPr/>
-        </p:nvSpPr>
-        <p:spPr>
-          <a:xfrm>
-            <a:off x="3493008" y="1280160"/>
-            <a:ext cx="502920" cy="502920"/>
-          </a:xfrm>
-          <a:prstGeom prst="ellipse">
-            <a:avLst/>
-          </a:prstGeom>
-          <a:solidFill>
-            <a:schemeClr val="accent1"/>
-          </a:solidFill>
-          <a:ln/>
-        </p:spPr>
-        <p:txBody>
-          <a:bodyPr wrap="square" lIns="0" tIns="0" rIns="0" bIns="0" rtlCol="0" anchor="ctr"/>
-          <a:lstStyle/>
-          <a:p>
-            <a:pPr algn="ctr" indent="0" marL="0">
-              <a:buNone/>
-            </a:pPr>
-            <a:r>
-              <a:rPr lang="en-US" sz="1400" b="1" dirty="0">
-                <a:solidFill>
-                  <a:schemeClr val="bg1"/>
-                </a:solidFill>
-              </a:rPr>
-              <a:t>2</a:t>
-            </a:r>
-            <a:endParaRPr lang="en-US" sz="1400" dirty="0"/>
-          </a:p>
-        </p:txBody>
-      </p:sp>
-      <p:sp>
-        <p:nvSpPr>
-          <p:cNvPr id="8" name="Text 6"/>
-          <p:cNvSpPr txBox="1"/>
-          <p:nvPr/>
-        </p:nvSpPr>
-        <p:spPr>
-          <a:xfrm>
-            <a:off x="3493008" y="1920240"/>
-            <a:ext cx="2194560" cy="1463040"/>
-          </a:xfrm>
-          <a:prstGeom prst="rect">
-            <a:avLst/>
-          </a:prstGeom>
-          <a:noFill/>
-          <a:ln/>
-        </p:spPr>
-        <p:txBody>
-          <a:bodyPr wrap="square" lIns="0" tIns="0" rIns="0" bIns="0" rtlCol="0" anchor="t"/>
-          <a:lstStyle/>
-          <a:p>
-            <a:pPr indent="0" marL="0">
-              <a:buNone/>
-            </a:pPr>
-            <a:r>
-              <a:rPr lang="en-US" sz="1600" b="1" dirty="0">
-                <a:solidFill>
-                  <a:schemeClr val="tx1"/>
-                </a:solidFill>
-              </a:rPr>
-              <a:t>Type localhost:8000</a:t>
-            </a:r>
-            <a:endParaRPr lang="en-US" sz="1400" dirty="0"/>
-          </a:p>
-          <a:p>
-            <a:pPr indent="0" marL="0">
-              <a:buNone/>
-            </a:pPr>
-            <a:r>
-              <a:rPr lang="en-US" sz="1300" dirty="0">
-                <a:solidFill>
-                  <a:schemeClr val="accent2"/>
-                </a:solidFill>
-              </a:rPr>
-              <a:t>Open Chrome, click the address bar at the top, type localhost:8000 and press Enter.</a:t>
-            </a:r>
-            <a:endParaRPr lang="en-US" sz="1400" dirty="0"/>
-          </a:p>
-        </p:txBody>
-      </p:sp>
-      <p:sp>
-        <p:nvSpPr>
-          <p:cNvPr id="9" name="Shape 7"/>
-          <p:cNvSpPr/>
-          <p:nvPr/>
-        </p:nvSpPr>
-        <p:spPr>
-          <a:xfrm>
-            <a:off x="6071616" y="1097280"/>
-            <a:ext cx="2606040" cy="2377440"/>
-          </a:xfrm>
-          <a:prstGeom prst="roundRect">
-            <a:avLst>
-              <a:gd name="adj" fmla="val 3077"/>
-            </a:avLst>
-          </a:prstGeom>
-          <a:solidFill>
-            <a:schemeClr val="bg2"/>
-          </a:solidFill>
-          <a:ln w="12700">
-            <a:solidFill>
-              <a:schemeClr val="bg2"/>
-            </a:solidFill>
-            <a:prstDash val="solid"/>
-          </a:ln>
-        </p:spPr>
-      </p:sp>
-      <p:sp>
-        <p:nvSpPr>
-          <p:cNvPr id="10" name="Text 8"/>
-          <p:cNvSpPr txBox="1"/>
-          <p:nvPr/>
-        </p:nvSpPr>
-        <p:spPr>
-          <a:xfrm>
-            <a:off x="6300216" y="1280160"/>
-            <a:ext cx="502920" cy="502920"/>
-          </a:xfrm>
-          <a:prstGeom prst="ellipse">
-            <a:avLst/>
-          </a:prstGeom>
-          <a:solidFill>
-            <a:schemeClr val="accent1"/>
-          </a:solidFill>
-          <a:ln/>
-        </p:spPr>
-        <p:txBody>
-          <a:bodyPr wrap="square" lIns="0" tIns="0" rIns="0" bIns="0" rtlCol="0" anchor="ctr"/>
-          <a:lstStyle/>
-          <a:p>
-            <a:pPr algn="ctr" indent="0" marL="0">
-              <a:buNone/>
-            </a:pPr>
-            <a:r>
-              <a:rPr lang="en-US" sz="1400" b="1" dirty="0">
-                <a:solidFill>
-                  <a:schemeClr val="bg1"/>
-                </a:solidFill>
-              </a:rPr>
-              <a:t>3</a:t>
-            </a:r>
-            <a:endParaRPr lang="en-US" sz="1400" dirty="0"/>
-          </a:p>
-        </p:txBody>
-      </p:sp>
-      <p:sp>
-        <p:nvSpPr>
-          <p:cNvPr id="11" name="Text 9"/>
-          <p:cNvSpPr txBox="1"/>
-          <p:nvPr/>
-        </p:nvSpPr>
-        <p:spPr>
-          <a:xfrm>
-            <a:off x="6300216" y="1920240"/>
-            <a:ext cx="2194560" cy="1463040"/>
-          </a:xfrm>
-          <a:prstGeom prst="rect">
-            <a:avLst/>
-          </a:prstGeom>
-          <a:noFill/>
-          <a:ln/>
-        </p:spPr>
-        <p:txBody>
-          <a:bodyPr wrap="square" lIns="0" tIns="0" rIns="0" bIns="0" rtlCol="0" anchor="t"/>
-          <a:lstStyle/>
-          <a:p>
-            <a:pPr indent="0" marL="0">
-              <a:buNone/>
-            </a:pPr>
-            <a:r>
-              <a:rPr lang="en-US" sz="1600" b="1" dirty="0">
-                <a:solidFill>
-                  <a:schemeClr val="tx1"/>
-                </a:solidFill>
-              </a:rPr>
-              <a:t>Refresh after each change</a:t>
-            </a:r>
-            <a:endParaRPr lang="en-US" sz="1400" dirty="0"/>
-          </a:p>
-          <a:p>
-            <a:pPr indent="0" marL="0">
-              <a:buNone/>
-            </a:pPr>
-            <a:r>
-              <a:rPr lang="en-US" sz="1300" dirty="0">
-                <a:solidFill>
-                  <a:schemeClr val="accent2"/>
-                </a:solidFill>
-              </a:rPr>
-              <a:t>Press Cmd+R on a Mac or Ctrl+R on Windows to see what Claude just changed.</a:t>
-            </a:r>
-            <a:endParaRPr lang="en-US" sz="1400" dirty="0"/>
-          </a:p>
-        </p:txBody>
-      </p:sp>
-      <p:sp>
-        <p:nvSpPr>
-          <p:cNvPr id="12" name="Shape 10"/>
-          <p:cNvSpPr/>
-          <p:nvPr/>
-        </p:nvSpPr>
-        <p:spPr>
-          <a:xfrm>
-            <a:off x="457200" y="3703320"/>
-            <a:ext cx="8229600" cy="868680"/>
-          </a:xfrm>
-          <a:prstGeom prst="roundRect">
-            <a:avLst>
-              <a:gd name="adj" fmla="val 8421"/>
+              <a:gd name="adj" fmla="val 4211"/>
             </a:avLst>
           </a:prstGeom>
           <a:solidFill>
@@ -4573,14 +4395,14 @@
       </p:sp>
       <p:sp>
         <p:nvSpPr>
-          <p:cNvPr id="13" name="Text 11"/>
+          <p:cNvPr id="7" name="Text 4"/>
           <p:cNvSpPr txBox="1"/>
           <p:nvPr/>
         </p:nvSpPr>
         <p:spPr>
           <a:xfrm>
-            <a:off x="685800" y="3840480"/>
-            <a:ext cx="7772400" cy="594360"/>
+            <a:off x="6035040" y="2926080"/>
+            <a:ext cx="2514600" cy="1554480"/>
           </a:xfrm>
           <a:prstGeom prst="rect">
             <a:avLst/>
@@ -4589,30 +4411,50 @@
           <a:ln/>
         </p:spPr>
         <p:txBody>
-          <a:bodyPr wrap="square" lIns="0" tIns="0" rIns="0" bIns="0" rtlCol="0" anchor="ctr"/>
+          <a:bodyPr wrap="square" lIns="0" tIns="0" rIns="0" bIns="0" rtlCol="0" anchor="t"/>
           <a:lstStyle/>
           <a:p>
             <a:pPr indent="0" marL="0">
               <a:buNone/>
             </a:pPr>
             <a:r>
-              <a:rPr lang="en-US" sz="1400" b="1" dirty="0">
+              <a:rPr lang="en-US" sz="1500" b="1" dirty="0">
                 <a:solidFill>
                   <a:schemeClr val="bg1"/>
                 </a:solidFill>
               </a:rPr>
-              <a:t>"This site can't be reached"? </a:t>
-            </a:r>
+              <a:t>Your private copy</a:t>
+            </a:r>
+            <a:endParaRPr lang="en-US" sz="1400" dirty="0"/>
+          </a:p>
+          <a:p>
             <a:pPr indent="0" marL="0">
               <a:buNone/>
             </a:pPr>
             <a:r>
-              <a:rPr lang="en-US" sz="1400" dirty="0">
+              <a:rPr lang="en-US" sz="1200" dirty="0">
+                <a:solidFill>
+                  <a:schemeClr val="accent4"/>
+                </a:solidFill>
+                <a:latin typeface="Courier New" pitchFamily="34" charset="0"/>
+                <a:ea typeface="Courier New" pitchFamily="34" charset="-122"/>
+                <a:cs typeface="Courier New" pitchFamily="34" charset="-120"/>
+              </a:rPr>
+              <a:t>localhost:8000</a:t>
+            </a:r>
+            <a:endParaRPr lang="en-US" sz="1400" dirty="0"/>
+          </a:p>
+          <a:p>
+            <a:pPr indent="0" marL="0">
+              <a:buNone/>
+            </a:pPr>
+            <a:r>
+              <a:rPr lang="en-US" sz="1300" dirty="0">
                 <a:solidFill>
                   <a:schemeClr val="bg1"/>
                 </a:solidFill>
               </a:rPr>
-              <a:t>The copy is switched off. Nothing is broken: just ask Claude to start the site again.</a:t>
+              <a:t>Non-production: the prototype on your workbench. Only on your computer, and it shows your changes straight away.</a:t>
             </a:r>
             <a:endParaRPr lang="en-US" sz="1400" dirty="0"/>
           </a:p>
@@ -4720,7 +4562,7 @@
                   <a:schemeClr val="tx1"/>
                 </a:solidFill>
               </a:rPr>
-              <a:t>Work in rounds: chat, look, repeat</a:t>
+              <a:t>Open it in Chrome, in three moves</a:t>
             </a:r>
             <a:endParaRPr lang="en-US" sz="2400" dirty="0"/>
           </a:p>
@@ -4728,221 +4570,18 @@
       </p:sp>
       <p:sp>
         <p:nvSpPr>
-          <p:cNvPr id="3" name="Simulation tag"/>
-          <p:cNvSpPr txBox="1"/>
-          <p:nvPr/>
-        </p:nvSpPr>
-        <p:spPr>
-          <a:xfrm>
-            <a:off x="6949440" y="466344"/>
-            <a:ext cx="1737360" cy="256032"/>
-          </a:xfrm>
-          <a:prstGeom prst="rect">
-            <a:avLst/>
-          </a:prstGeom>
-          <a:solidFill>
-            <a:schemeClr val="accent1"/>
-          </a:solidFill>
-          <a:ln/>
-        </p:spPr>
-        <p:txBody>
-          <a:bodyPr wrap="square" lIns="0" tIns="0" rIns="0" bIns="0" rtlCol="0" anchor="ctr"/>
-          <a:lstStyle/>
-          <a:p>
-            <a:pPr algn="ctr" indent="0" marL="0">
-              <a:buNone/>
-            </a:pPr>
-            <a:r>
-              <a:rPr lang="en-US" sz="1000" b="1" dirty="0">
-                <a:solidFill>
-                  <a:schemeClr val="bg1"/>
-                </a:solidFill>
-              </a:rPr>
-              <a:t>SIMULATED EXAMPLE</a:t>
-            </a:r>
-            <a:endParaRPr lang="en-US" sz="1000" dirty="0"/>
-          </a:p>
-        </p:txBody>
-      </p:sp>
-      <p:pic>
-        <p:nvPicPr>
-          <p:cNvPr id="4" name="Simulated round" descr="small/app-rounds.jpg">    </p:cNvPr>
-          <p:cNvPicPr>
-            <a:picLocks noChangeAspect="1"/>
-          </p:cNvPicPr>
-          <p:nvPr/>
-        </p:nvPicPr>
-        <p:blipFill>
-          <a:blip r:embed="rId1"/>
-          <a:stretch>
-            <a:fillRect/>
-          </a:stretch>
-        </p:blipFill>
-        <p:spPr>
-          <a:xfrm>
-            <a:off x="457200" y="1051560"/>
-            <a:ext cx="5394960" cy="2215787"/>
-          </a:xfrm>
-          <a:prstGeom prst="rect">
-            <a:avLst/>
-          </a:prstGeom>
-          <a:effectLst>
-            <a:outerShdw sx="100000" sy="100000" kx="0" ky="0" algn="bl" rotWithShape="0" blurRad="76200" dist="25400" dir="5400000">
-              <a:srgbClr val="000000">
-                <a:alpha val="18000"/>
-              </a:srgbClr>
-            </a:outerShdw>
-          </a:effectLst>
-        </p:spPr>
-      </p:pic>
-      <p:sp>
-        <p:nvSpPr>
-          <p:cNvPr id="5" name="Text 2"/>
-          <p:cNvSpPr txBox="1"/>
-          <p:nvPr/>
-        </p:nvSpPr>
-        <p:spPr>
-          <a:xfrm>
-            <a:off x="6126480" y="1188720"/>
-            <a:ext cx="2651760" cy="2743200"/>
-          </a:xfrm>
-          <a:prstGeom prst="rect">
-            <a:avLst/>
-          </a:prstGeom>
-          <a:noFill/>
-          <a:ln/>
-        </p:spPr>
-        <p:txBody>
-          <a:bodyPr wrap="square" lIns="0" tIns="0" rIns="0" bIns="0" rtlCol="0" anchor="t"/>
-          <a:lstStyle/>
-          <a:p>
-            <a:pPr indent="0" marL="0">
-              <a:buNone/>
-            </a:pPr>
-            <a:r>
-              <a:rPr lang="en-US" sz="1400" b="1" dirty="0">
-                <a:solidFill>
-                  <a:schemeClr val="tx1"/>
-                </a:solidFill>
-              </a:rPr>
-              <a:t>Claude makes one change</a:t>
-            </a:r>
-            <a:endParaRPr lang="en-US" sz="1400" dirty="0"/>
-          </a:p>
-          <a:p>
-            <a:pPr indent="0" marL="0">
-              <a:buNone/>
-            </a:pPr>
-            <a:r>
-              <a:rPr lang="en-US" sz="1400" dirty="0">
-                <a:solidFill>
-                  <a:schemeClr val="accent2"/>
-                </a:solidFill>
-              </a:rPr>
-              <a:t>And tells you exactly where to look.</a:t>
-            </a:r>
-            <a:endParaRPr lang="en-US" sz="1400" dirty="0"/>
-          </a:p>
-          <a:p>
-            <a:pPr indent="0" marL="0">
-              <a:buNone/>
-            </a:pPr>
-            <a:r>
-              <a:rPr lang="en-US" sz="800" dirty="0">
-                <a:solidFill>
-                  <a:schemeClr val="tx1"/>
-                </a:solidFill>
-              </a:rPr>
-              <a:t> </a:t>
-            </a:r>
-            <a:endParaRPr lang="en-US" sz="1400" dirty="0"/>
-          </a:p>
-          <a:p>
-            <a:pPr indent="0" marL="0">
-              <a:buNone/>
-            </a:pPr>
-            <a:r>
-              <a:rPr lang="en-US" sz="1400" b="1" dirty="0">
-                <a:solidFill>
-                  <a:schemeClr val="tx1"/>
-                </a:solidFill>
-              </a:rPr>
-              <a:t>You switch to Chrome</a:t>
-            </a:r>
-            <a:endParaRPr lang="en-US" sz="1400" dirty="0"/>
-          </a:p>
-          <a:p>
-            <a:pPr indent="0" marL="0">
-              <a:buNone/>
-            </a:pPr>
-            <a:r>
-              <a:rPr lang="en-US" sz="1400" dirty="0">
-                <a:solidFill>
-                  <a:schemeClr val="accent2"/>
-                </a:solidFill>
-              </a:rPr>
-              <a:t>Refresh, try it, come back to the chat.</a:t>
-            </a:r>
-            <a:endParaRPr lang="en-US" sz="1400" dirty="0"/>
-          </a:p>
-          <a:p>
-            <a:pPr indent="0" marL="0">
-              <a:buNone/>
-            </a:pPr>
-            <a:r>
-              <a:rPr lang="en-US" sz="800" dirty="0">
-                <a:solidFill>
-                  <a:schemeClr val="tx1"/>
-                </a:solidFill>
-              </a:rPr>
-              <a:t> </a:t>
-            </a:r>
-            <a:endParaRPr lang="en-US" sz="1400" dirty="0"/>
-          </a:p>
-          <a:p>
-            <a:pPr indent="0" marL="0">
-              <a:buNone/>
-            </a:pPr>
-            <a:r>
-              <a:rPr lang="en-US" sz="1400" b="1" dirty="0">
-                <a:solidFill>
-                  <a:schemeClr val="tx1"/>
-                </a:solidFill>
-              </a:rPr>
-              <a:t>You say what you think</a:t>
-            </a:r>
-            <a:endParaRPr lang="en-US" sz="1400" dirty="0"/>
-          </a:p>
-          <a:p>
-            <a:pPr indent="0" marL="0">
-              <a:buNone/>
-            </a:pPr>
-            <a:r>
-              <a:rPr lang="en-US" sz="1400" dirty="0">
-                <a:solidFill>
-                  <a:schemeClr val="accent2"/>
-                </a:solidFill>
-              </a:rPr>
-              <a:t>In plain words: "rename this", "add a height setting", "perfect".</a:t>
-            </a:r>
-            <a:endParaRPr lang="en-US" sz="1400" dirty="0"/>
-          </a:p>
-        </p:txBody>
-      </p:sp>
-      <p:sp>
-        <p:nvSpPr>
-          <p:cNvPr id="6" name="Shape 3"/>
+          <p:cNvPr id="3" name="Shape 1"/>
           <p:cNvSpPr/>
           <p:nvPr/>
         </p:nvSpPr>
         <p:spPr>
           <a:xfrm>
-            <a:off x="6126480" y="3611880"/>
-            <a:ext cx="2651760" cy="777240"/>
+            <a:off x="457200" y="1097280"/>
+            <a:ext cx="2606040" cy="2377440"/>
           </a:xfrm>
           <a:prstGeom prst="roundRect">
             <a:avLst>
-              <a:gd name="adj" fmla="val 9412"/>
+              <a:gd name="adj" fmla="val 3077"/>
             </a:avLst>
           </a:prstGeom>
           <a:solidFill>
@@ -4958,14 +4597,52 @@
       </p:sp>
       <p:sp>
         <p:nvSpPr>
-          <p:cNvPr id="7" name="Text 4"/>
+          <p:cNvPr id="4" name="Text 2"/>
           <p:cNvSpPr txBox="1"/>
           <p:nvPr/>
         </p:nvSpPr>
         <p:spPr>
           <a:xfrm>
-            <a:off x="6263640" y="3657600"/>
-            <a:ext cx="2377440" cy="685800"/>
+            <a:off x="685800" y="1280160"/>
+            <a:ext cx="502920" cy="502920"/>
+          </a:xfrm>
+          <a:prstGeom prst="ellipse">
+            <a:avLst/>
+          </a:prstGeom>
+          <a:solidFill>
+            <a:schemeClr val="accent1"/>
+          </a:solidFill>
+          <a:ln/>
+        </p:spPr>
+        <p:txBody>
+          <a:bodyPr wrap="square" lIns="0" tIns="0" rIns="0" bIns="0" rtlCol="0" anchor="ctr"/>
+          <a:lstStyle/>
+          <a:p>
+            <a:pPr algn="ctr" indent="0" marL="0">
+              <a:buNone/>
+            </a:pPr>
+            <a:r>
+              <a:rPr lang="en-US" sz="1400" b="1" dirty="0">
+                <a:solidFill>
+                  <a:schemeClr val="bg1"/>
+                </a:solidFill>
+              </a:rPr>
+              <a:t>1</a:t>
+            </a:r>
+            <a:endParaRPr lang="en-US" sz="1400" dirty="0"/>
+          </a:p>
+        </p:txBody>
+      </p:sp>
+      <p:sp>
+        <p:nvSpPr>
+          <p:cNvPr id="5" name="Text 3"/>
+          <p:cNvSpPr txBox="1"/>
+          <p:nvPr/>
+        </p:nvSpPr>
+        <p:spPr>
+          <a:xfrm>
+            <a:off x="685800" y="1920240"/>
+            <a:ext cx="2194560" cy="1463040"/>
           </a:xfrm>
           <a:prstGeom prst="rect">
             <a:avLst/>
@@ -4974,21 +4651,339 @@
           <a:ln/>
         </p:spPr>
         <p:txBody>
+          <a:bodyPr wrap="square" lIns="0" tIns="0" rIns="0" bIns="0" rtlCol="0" anchor="t"/>
+          <a:lstStyle/>
+          <a:p>
+            <a:pPr indent="0" marL="0">
+              <a:buNone/>
+            </a:pPr>
+            <a:r>
+              <a:rPr lang="en-US" sz="1600" b="1" dirty="0">
+                <a:solidFill>
+                  <a:schemeClr val="tx1"/>
+                </a:solidFill>
+              </a:rPr>
+              <a:t>Claude starts it</a:t>
+            </a:r>
+            <a:endParaRPr lang="en-US" sz="1400" dirty="0"/>
+          </a:p>
+          <a:p>
+            <a:pPr indent="0" marL="0">
+              <a:buNone/>
+            </a:pPr>
+            <a:r>
+              <a:rPr lang="en-US" sz="1300" dirty="0">
+                <a:solidFill>
+                  <a:schemeClr val="accent2"/>
+                </a:solidFill>
+              </a:rPr>
+              <a:t>At the start of the session. Keep the chat open: closing it switches the copy off.</a:t>
+            </a:r>
+            <a:endParaRPr lang="en-US" sz="1400" dirty="0"/>
+          </a:p>
+        </p:txBody>
+      </p:sp>
+      <p:sp>
+        <p:nvSpPr>
+          <p:cNvPr id="6" name="Shape 4"/>
+          <p:cNvSpPr/>
+          <p:nvPr/>
+        </p:nvSpPr>
+        <p:spPr>
+          <a:xfrm>
+            <a:off x="3264408" y="1097280"/>
+            <a:ext cx="2606040" cy="2377440"/>
+          </a:xfrm>
+          <a:prstGeom prst="roundRect">
+            <a:avLst>
+              <a:gd name="adj" fmla="val 3077"/>
+            </a:avLst>
+          </a:prstGeom>
+          <a:solidFill>
+            <a:schemeClr val="bg2"/>
+          </a:solidFill>
+          <a:ln w="12700">
+            <a:solidFill>
+              <a:schemeClr val="bg2"/>
+            </a:solidFill>
+            <a:prstDash val="solid"/>
+          </a:ln>
+        </p:spPr>
+      </p:sp>
+      <p:sp>
+        <p:nvSpPr>
+          <p:cNvPr id="7" name="Text 5"/>
+          <p:cNvSpPr txBox="1"/>
+          <p:nvPr/>
+        </p:nvSpPr>
+        <p:spPr>
+          <a:xfrm>
+            <a:off x="3493008" y="1280160"/>
+            <a:ext cx="502920" cy="502920"/>
+          </a:xfrm>
+          <a:prstGeom prst="ellipse">
+            <a:avLst/>
+          </a:prstGeom>
+          <a:solidFill>
+            <a:schemeClr val="accent1"/>
+          </a:solidFill>
+          <a:ln/>
+        </p:spPr>
+        <p:txBody>
           <a:bodyPr wrap="square" lIns="0" tIns="0" rIns="0" bIns="0" rtlCol="0" anchor="ctr"/>
           <a:lstStyle/>
           <a:p>
+            <a:pPr algn="ctr" indent="0" marL="0">
+              <a:buNone/>
+            </a:pPr>
+            <a:r>
+              <a:rPr lang="en-US" sz="1400" b="1" dirty="0">
+                <a:solidFill>
+                  <a:schemeClr val="bg1"/>
+                </a:solidFill>
+              </a:rPr>
+              <a:t>2</a:t>
+            </a:r>
+            <a:endParaRPr lang="en-US" sz="1400" dirty="0"/>
+          </a:p>
+        </p:txBody>
+      </p:sp>
+      <p:sp>
+        <p:nvSpPr>
+          <p:cNvPr id="8" name="Text 6"/>
+          <p:cNvSpPr txBox="1"/>
+          <p:nvPr/>
+        </p:nvSpPr>
+        <p:spPr>
+          <a:xfrm>
+            <a:off x="3493008" y="1920240"/>
+            <a:ext cx="2194560" cy="1463040"/>
+          </a:xfrm>
+          <a:prstGeom prst="rect">
+            <a:avLst/>
+          </a:prstGeom>
+          <a:noFill/>
+          <a:ln/>
+        </p:spPr>
+        <p:txBody>
+          <a:bodyPr wrap="square" lIns="0" tIns="0" rIns="0" bIns="0" rtlCol="0" anchor="t"/>
+          <a:lstStyle/>
+          <a:p>
             <a:pPr indent="0" marL="0">
               <a:buNone/>
             </a:pPr>
             <a:r>
-              <a:rPr lang="en-US" sz="1200" dirty="0">
+              <a:rPr lang="en-US" sz="1600" b="1" dirty="0">
                 <a:solidFill>
                   <a:schemeClr val="tx1"/>
                 </a:solidFill>
               </a:rPr>
-              <a:t>Each round is saved, so nothing is lost if you change your mind.</a:t>
-            </a:r>
-            <a:endParaRPr lang="en-US" sz="1200" dirty="0"/>
+              <a:t>Type localhost:8000</a:t>
+            </a:r>
+            <a:endParaRPr lang="en-US" sz="1400" dirty="0"/>
+          </a:p>
+          <a:p>
+            <a:pPr indent="0" marL="0">
+              <a:buNone/>
+            </a:pPr>
+            <a:r>
+              <a:rPr lang="en-US" sz="1300" dirty="0">
+                <a:solidFill>
+                  <a:schemeClr val="accent2"/>
+                </a:solidFill>
+              </a:rPr>
+              <a:t>Open Chrome, click the address bar at the top, type localhost:8000 and press Enter.</a:t>
+            </a:r>
+            <a:endParaRPr lang="en-US" sz="1400" dirty="0"/>
+          </a:p>
+        </p:txBody>
+      </p:sp>
+      <p:sp>
+        <p:nvSpPr>
+          <p:cNvPr id="9" name="Shape 7"/>
+          <p:cNvSpPr/>
+          <p:nvPr/>
+        </p:nvSpPr>
+        <p:spPr>
+          <a:xfrm>
+            <a:off x="6071616" y="1097280"/>
+            <a:ext cx="2606040" cy="2377440"/>
+          </a:xfrm>
+          <a:prstGeom prst="roundRect">
+            <a:avLst>
+              <a:gd name="adj" fmla="val 3077"/>
+            </a:avLst>
+          </a:prstGeom>
+          <a:solidFill>
+            <a:schemeClr val="bg2"/>
+          </a:solidFill>
+          <a:ln w="12700">
+            <a:solidFill>
+              <a:schemeClr val="bg2"/>
+            </a:solidFill>
+            <a:prstDash val="solid"/>
+          </a:ln>
+        </p:spPr>
+      </p:sp>
+      <p:sp>
+        <p:nvSpPr>
+          <p:cNvPr id="10" name="Text 8"/>
+          <p:cNvSpPr txBox="1"/>
+          <p:nvPr/>
+        </p:nvSpPr>
+        <p:spPr>
+          <a:xfrm>
+            <a:off x="6300216" y="1280160"/>
+            <a:ext cx="502920" cy="502920"/>
+          </a:xfrm>
+          <a:prstGeom prst="ellipse">
+            <a:avLst/>
+          </a:prstGeom>
+          <a:solidFill>
+            <a:schemeClr val="accent1"/>
+          </a:solidFill>
+          <a:ln/>
+        </p:spPr>
+        <p:txBody>
+          <a:bodyPr wrap="square" lIns="0" tIns="0" rIns="0" bIns="0" rtlCol="0" anchor="ctr"/>
+          <a:lstStyle/>
+          <a:p>
+            <a:pPr algn="ctr" indent="0" marL="0">
+              <a:buNone/>
+            </a:pPr>
+            <a:r>
+              <a:rPr lang="en-US" sz="1400" b="1" dirty="0">
+                <a:solidFill>
+                  <a:schemeClr val="bg1"/>
+                </a:solidFill>
+              </a:rPr>
+              <a:t>3</a:t>
+            </a:r>
+            <a:endParaRPr lang="en-US" sz="1400" dirty="0"/>
+          </a:p>
+        </p:txBody>
+      </p:sp>
+      <p:sp>
+        <p:nvSpPr>
+          <p:cNvPr id="11" name="Text 9"/>
+          <p:cNvSpPr txBox="1"/>
+          <p:nvPr/>
+        </p:nvSpPr>
+        <p:spPr>
+          <a:xfrm>
+            <a:off x="6300216" y="1920240"/>
+            <a:ext cx="2194560" cy="1463040"/>
+          </a:xfrm>
+          <a:prstGeom prst="rect">
+            <a:avLst/>
+          </a:prstGeom>
+          <a:noFill/>
+          <a:ln/>
+        </p:spPr>
+        <p:txBody>
+          <a:bodyPr wrap="square" lIns="0" tIns="0" rIns="0" bIns="0" rtlCol="0" anchor="t"/>
+          <a:lstStyle/>
+          <a:p>
+            <a:pPr indent="0" marL="0">
+              <a:buNone/>
+            </a:pPr>
+            <a:r>
+              <a:rPr lang="en-US" sz="1600" b="1" dirty="0">
+                <a:solidFill>
+                  <a:schemeClr val="tx1"/>
+                </a:solidFill>
+              </a:rPr>
+              <a:t>Refresh after each change</a:t>
+            </a:r>
+            <a:endParaRPr lang="en-US" sz="1400" dirty="0"/>
+          </a:p>
+          <a:p>
+            <a:pPr indent="0" marL="0">
+              <a:buNone/>
+            </a:pPr>
+            <a:r>
+              <a:rPr lang="en-US" sz="1300" dirty="0">
+                <a:solidFill>
+                  <a:schemeClr val="accent2"/>
+                </a:solidFill>
+              </a:rPr>
+              <a:t>Press Cmd+R on a Mac or Ctrl+R on Windows to see what Claude just changed.</a:t>
+            </a:r>
+            <a:endParaRPr lang="en-US" sz="1400" dirty="0"/>
+          </a:p>
+        </p:txBody>
+      </p:sp>
+      <p:sp>
+        <p:nvSpPr>
+          <p:cNvPr id="12" name="Shape 10"/>
+          <p:cNvSpPr/>
+          <p:nvPr/>
+        </p:nvSpPr>
+        <p:spPr>
+          <a:xfrm>
+            <a:off x="457200" y="3703320"/>
+            <a:ext cx="8229600" cy="868680"/>
+          </a:xfrm>
+          <a:prstGeom prst="roundRect">
+            <a:avLst>
+              <a:gd name="adj" fmla="val 8421"/>
+            </a:avLst>
+          </a:prstGeom>
+          <a:solidFill>
+            <a:schemeClr val="tx2"/>
+          </a:solidFill>
+          <a:ln w="12700">
+            <a:solidFill>
+              <a:schemeClr val="tx2"/>
+            </a:solidFill>
+            <a:prstDash val="solid"/>
+          </a:ln>
+        </p:spPr>
+      </p:sp>
+      <p:sp>
+        <p:nvSpPr>
+          <p:cNvPr id="13" name="Text 11"/>
+          <p:cNvSpPr txBox="1"/>
+          <p:nvPr/>
+        </p:nvSpPr>
+        <p:spPr>
+          <a:xfrm>
+            <a:off x="685800" y="3840480"/>
+            <a:ext cx="7772400" cy="594360"/>
+          </a:xfrm>
+          <a:prstGeom prst="rect">
+            <a:avLst/>
+          </a:prstGeom>
+          <a:noFill/>
+          <a:ln/>
+        </p:spPr>
+        <p:txBody>
+          <a:bodyPr wrap="square" lIns="0" tIns="0" rIns="0" bIns="0" rtlCol="0" anchor="ctr"/>
+          <a:lstStyle/>
+          <a:p>
+            <a:pPr indent="0" marL="0">
+              <a:buNone/>
+            </a:pPr>
+            <a:r>
+              <a:rPr lang="en-US" sz="1400" b="1" dirty="0">
+                <a:solidFill>
+                  <a:schemeClr val="bg1"/>
+                </a:solidFill>
+              </a:rPr>
+              <a:t>"This site can't be reached"? </a:t>
+            </a:r>
+            <a:pPr indent="0" marL="0">
+              <a:buNone/>
+            </a:pPr>
+            <a:r>
+              <a:rPr lang="en-US" sz="1400" dirty="0">
+                <a:solidFill>
+                  <a:schemeClr val="bg1"/>
+                </a:solidFill>
+              </a:rPr>
+              <a:t>The copy is switched off. Nothing is broken: just ask Claude to start the site again.</a:t>
+            </a:r>
+            <a:endParaRPr lang="en-US" sz="1400" dirty="0"/>
           </a:p>
         </p:txBody>
       </p:sp>
@@ -5094,7 +5089,7 @@
                   <a:schemeClr val="tx1"/>
                 </a:solidFill>
               </a:rPr>
-              <a:t>New piece? It starts with a brief</a:t>
+              <a:t>Work in rounds: chat, look, repeat</a:t>
             </a:r>
             <a:endParaRPr lang="en-US" sz="2400" dirty="0"/>
           </a:p>
@@ -5140,7 +5135,7 @@
       </p:sp>
       <p:pic>
         <p:nvPicPr>
-          <p:cNvPr id="4" name="Simulated design brief" descr="small/sim-brief.jpg">    </p:cNvPr>
+          <p:cNvPr id="4" name="Simulated round" descr="small/app-rounds.jpg">    </p:cNvPr>
           <p:cNvPicPr>
             <a:picLocks noChangeAspect="1"/>
           </p:cNvPicPr>
@@ -5155,7 +5150,7 @@
         <p:spPr>
           <a:xfrm>
             <a:off x="457200" y="1051560"/>
-            <a:ext cx="4397071" cy="3611880"/>
+            <a:ext cx="5394960" cy="2215787"/>
           </a:xfrm>
           <a:prstGeom prst="rect">
             <a:avLst/>
@@ -5177,8 +5172,8 @@
         </p:nvSpPr>
         <p:spPr>
           <a:xfrm>
-            <a:off x="5486400" y="1188720"/>
-            <a:ext cx="3291840" cy="3474720"/>
+            <a:off x="6126480" y="1188720"/>
+            <a:ext cx="2651760" cy="2743200"/>
           </a:xfrm>
           <a:prstGeom prst="rect">
             <a:avLst/>
@@ -5199,7 +5194,7 @@
                   <a:schemeClr val="tx1"/>
                 </a:solidFill>
               </a:rPr>
-              <a:t>An interview first</a:t>
+              <a:t>Claude makes one change</a:t>
             </a:r>
             <a:endParaRPr lang="en-US" sz="1400" dirty="0"/>
           </a:p>
@@ -5213,7 +5208,7 @@
                   <a:schemeClr val="accent2"/>
                 </a:solidFill>
               </a:rPr>
-              <a:t>Claude asks one question at a time: parts, sizes, how it goes together, what people can change.</a:t>
+              <a:t>And tells you exactly where to look.</a:t>
             </a:r>
             <a:endParaRPr lang="en-US" sz="1400" dirty="0"/>
           </a:p>
@@ -5241,7 +5236,7 @@
                   <a:schemeClr val="tx1"/>
                 </a:solidFill>
               </a:rPr>
-              <a:t>Written down as a brief</a:t>
+              <a:t>You switch to Chrome</a:t>
             </a:r>
             <a:endParaRPr lang="en-US" sz="1400" dirty="0"/>
           </a:p>
@@ -5255,7 +5250,7 @@
                   <a:schemeClr val="accent2"/>
                 </a:solidFill>
               </a:rPr>
-              <a:t>You approve it before anything is built.</a:t>
+              <a:t>Refresh, try it, come back to the chat.</a:t>
             </a:r>
             <a:endParaRPr lang="en-US" sz="1400" dirty="0"/>
           </a:p>
@@ -5283,7 +5278,7 @@
                   <a:schemeClr val="tx1"/>
                 </a:solidFill>
               </a:rPr>
-              <a:t>Unknown means unknown</a:t>
+              <a:t>You say what you think</a:t>
             </a:r>
             <a:endParaRPr lang="en-US" sz="1400" dirty="0"/>
           </a:p>
@@ -5297,9 +5292,72 @@
                   <a:schemeClr val="accent2"/>
                 </a:solidFill>
               </a:rPr>
-              <a:t>Any size not on a listing goes on a "to measure" list.</a:t>
-            </a:r>
-            <a:endParaRPr lang="en-US" sz="1400" dirty="0"/>
+              <a:t>In plain words: "rename this", "add a height setting", "perfect".</a:t>
+            </a:r>
+            <a:endParaRPr lang="en-US" sz="1400" dirty="0"/>
+          </a:p>
+        </p:txBody>
+      </p:sp>
+      <p:sp>
+        <p:nvSpPr>
+          <p:cNvPr id="6" name="Shape 3"/>
+          <p:cNvSpPr/>
+          <p:nvPr/>
+        </p:nvSpPr>
+        <p:spPr>
+          <a:xfrm>
+            <a:off x="6126480" y="3611880"/>
+            <a:ext cx="2651760" cy="777240"/>
+          </a:xfrm>
+          <a:prstGeom prst="roundRect">
+            <a:avLst>
+              <a:gd name="adj" fmla="val 9412"/>
+            </a:avLst>
+          </a:prstGeom>
+          <a:solidFill>
+            <a:schemeClr val="bg2"/>
+          </a:solidFill>
+          <a:ln w="12700">
+            <a:solidFill>
+              <a:schemeClr val="bg2"/>
+            </a:solidFill>
+            <a:prstDash val="solid"/>
+          </a:ln>
+        </p:spPr>
+      </p:sp>
+      <p:sp>
+        <p:nvSpPr>
+          <p:cNvPr id="7" name="Text 4"/>
+          <p:cNvSpPr txBox="1"/>
+          <p:nvPr/>
+        </p:nvSpPr>
+        <p:spPr>
+          <a:xfrm>
+            <a:off x="6263640" y="3657600"/>
+            <a:ext cx="2377440" cy="685800"/>
+          </a:xfrm>
+          <a:prstGeom prst="rect">
+            <a:avLst/>
+          </a:prstGeom>
+          <a:noFill/>
+          <a:ln/>
+        </p:spPr>
+        <p:txBody>
+          <a:bodyPr wrap="square" lIns="0" tIns="0" rIns="0" bIns="0" rtlCol="0" anchor="ctr"/>
+          <a:lstStyle/>
+          <a:p>
+            <a:pPr indent="0" marL="0">
+              <a:buNone/>
+            </a:pPr>
+            <a:r>
+              <a:rPr lang="en-US" sz="1200" dirty="0">
+                <a:solidFill>
+                  <a:schemeClr val="tx1"/>
+                </a:solidFill>
+              </a:rPr>
+              <a:t>Each round is saved, so nothing is lost if you change your mind.</a:t>
+            </a:r>
+            <a:endParaRPr lang="en-US" sz="1200" dirty="0"/>
           </a:p>
         </p:txBody>
       </p:sp>
@@ -5405,7 +5463,7 @@
                   <a:schemeClr val="tx1"/>
                 </a:solidFill>
               </a:rPr>
-              <a:t>Before sending: try it all</a:t>
+              <a:t>New piece? It starts with a brief</a:t>
             </a:r>
             <a:endParaRPr lang="en-US" sz="2400" dirty="0"/>
           </a:p>
@@ -5413,671 +5471,45 @@
       </p:sp>
       <p:sp>
         <p:nvSpPr>
-          <p:cNvPr id="3" name="Text 1"/>
+          <p:cNvPr id="3" name="Simulation tag"/>
           <p:cNvSpPr txBox="1"/>
           <p:nvPr/>
         </p:nvSpPr>
         <p:spPr>
           <a:xfrm>
-            <a:off x="457200" y="1097280"/>
-            <a:ext cx="274320" cy="365760"/>
-          </a:xfrm>
-          <a:prstGeom prst="rect">
-            <a:avLst/>
-          </a:prstGeom>
-          <a:noFill/>
-          <a:ln/>
-        </p:spPr>
-        <p:txBody>
-          <a:bodyPr wrap="square" lIns="0" tIns="0" rIns="0" bIns="0" rtlCol="0" anchor="t"/>
-          <a:lstStyle/>
-          <a:p>
-            <a:pPr indent="0" marL="0">
-              <a:buNone/>
-            </a:pPr>
-            <a:r>
-              <a:rPr lang="en-US" sz="1600" b="1" dirty="0">
-                <a:solidFill>
-                  <a:schemeClr val="accent1"/>
-                </a:solidFill>
-              </a:rPr>
-              <a:t>✓</a:t>
-            </a:r>
-            <a:endParaRPr lang="en-US" sz="1600" dirty="0"/>
-          </a:p>
-        </p:txBody>
-      </p:sp>
-      <p:sp>
-        <p:nvSpPr>
-          <p:cNvPr id="4" name="Text 2"/>
-          <p:cNvSpPr txBox="1"/>
-          <p:nvPr/>
-        </p:nvSpPr>
-        <p:spPr>
-          <a:xfrm>
-            <a:off x="777240" y="1115568"/>
-            <a:ext cx="2194560" cy="411480"/>
-          </a:xfrm>
-          <a:prstGeom prst="rect">
-            <a:avLst/>
-          </a:prstGeom>
-          <a:noFill/>
-          <a:ln/>
-        </p:spPr>
-        <p:txBody>
-          <a:bodyPr wrap="square" lIns="0" tIns="0" rIns="0" bIns="0" rtlCol="0" anchor="t"/>
-          <a:lstStyle/>
-          <a:p>
-            <a:pPr indent="0" marL="0">
-              <a:buNone/>
-            </a:pPr>
-            <a:r>
-              <a:rPr lang="en-US" sz="1400" dirty="0">
-                <a:solidFill>
-                  <a:schemeClr val="tx1"/>
-                </a:solidFill>
-              </a:rPr>
-              <a:t>Smallest and largest sizes</a:t>
-            </a:r>
-            <a:endParaRPr lang="en-US" sz="1400" dirty="0"/>
-          </a:p>
-        </p:txBody>
-      </p:sp>
-      <p:sp>
-        <p:nvSpPr>
-          <p:cNvPr id="5" name="Text 3"/>
-          <p:cNvSpPr txBox="1"/>
-          <p:nvPr/>
-        </p:nvSpPr>
-        <p:spPr>
-          <a:xfrm>
-            <a:off x="3017520" y="1097280"/>
-            <a:ext cx="274320" cy="365760"/>
-          </a:xfrm>
-          <a:prstGeom prst="rect">
-            <a:avLst/>
-          </a:prstGeom>
-          <a:noFill/>
-          <a:ln/>
-        </p:spPr>
-        <p:txBody>
-          <a:bodyPr wrap="square" lIns="0" tIns="0" rIns="0" bIns="0" rtlCol="0" anchor="t"/>
-          <a:lstStyle/>
-          <a:p>
-            <a:pPr indent="0" marL="0">
-              <a:buNone/>
-            </a:pPr>
-            <a:r>
-              <a:rPr lang="en-US" sz="1600" b="1" dirty="0">
-                <a:solidFill>
-                  <a:schemeClr val="accent1"/>
-                </a:solidFill>
-              </a:rPr>
-              <a:t>✓</a:t>
-            </a:r>
-            <a:endParaRPr lang="en-US" sz="1600" dirty="0"/>
-          </a:p>
-        </p:txBody>
-      </p:sp>
-      <p:sp>
-        <p:nvSpPr>
-          <p:cNvPr id="6" name="Text 4"/>
-          <p:cNvSpPr txBox="1"/>
-          <p:nvPr/>
-        </p:nvSpPr>
-        <p:spPr>
-          <a:xfrm>
-            <a:off x="3337560" y="1115568"/>
-            <a:ext cx="2194560" cy="411480"/>
-          </a:xfrm>
-          <a:prstGeom prst="rect">
-            <a:avLst/>
-          </a:prstGeom>
-          <a:noFill/>
-          <a:ln/>
-        </p:spPr>
-        <p:txBody>
-          <a:bodyPr wrap="square" lIns="0" tIns="0" rIns="0" bIns="0" rtlCol="0" anchor="t"/>
-          <a:lstStyle/>
-          <a:p>
-            <a:pPr indent="0" marL="0">
-              <a:buNone/>
-            </a:pPr>
-            <a:r>
-              <a:rPr lang="en-US" sz="1400" dirty="0">
-                <a:solidFill>
-                  <a:schemeClr val="tx1"/>
-                </a:solidFill>
-              </a:rPr>
-              <a:t>Each option on and off</a:t>
-            </a:r>
-            <a:endParaRPr lang="en-US" sz="1400" dirty="0"/>
-          </a:p>
-        </p:txBody>
-      </p:sp>
-      <p:sp>
-        <p:nvSpPr>
-          <p:cNvPr id="7" name="Text 5"/>
-          <p:cNvSpPr txBox="1"/>
-          <p:nvPr/>
-        </p:nvSpPr>
-        <p:spPr>
-          <a:xfrm>
-            <a:off x="457200" y="1645920"/>
-            <a:ext cx="274320" cy="365760"/>
-          </a:xfrm>
-          <a:prstGeom prst="rect">
-            <a:avLst/>
-          </a:prstGeom>
-          <a:noFill/>
-          <a:ln/>
-        </p:spPr>
-        <p:txBody>
-          <a:bodyPr wrap="square" lIns="0" tIns="0" rIns="0" bIns="0" rtlCol="0" anchor="t"/>
-          <a:lstStyle/>
-          <a:p>
-            <a:pPr indent="0" marL="0">
-              <a:buNone/>
-            </a:pPr>
-            <a:r>
-              <a:rPr lang="en-US" sz="1600" b="1" dirty="0">
-                <a:solidFill>
-                  <a:schemeClr val="accent1"/>
-                </a:solidFill>
-              </a:rPr>
-              <a:t>✓</a:t>
-            </a:r>
-            <a:endParaRPr lang="en-US" sz="1600" dirty="0"/>
-          </a:p>
-        </p:txBody>
-      </p:sp>
-      <p:sp>
-        <p:nvSpPr>
-          <p:cNvPr id="8" name="Text 6"/>
-          <p:cNvSpPr txBox="1"/>
-          <p:nvPr/>
-        </p:nvSpPr>
-        <p:spPr>
-          <a:xfrm>
-            <a:off x="777240" y="1664208"/>
-            <a:ext cx="2194560" cy="411480"/>
-          </a:xfrm>
-          <a:prstGeom prst="rect">
-            <a:avLst/>
-          </a:prstGeom>
-          <a:noFill/>
-          <a:ln/>
-        </p:spPr>
-        <p:txBody>
-          <a:bodyPr wrap="square" lIns="0" tIns="0" rIns="0" bIns="0" rtlCol="0" anchor="t"/>
-          <a:lstStyle/>
-          <a:p>
-            <a:pPr indent="0" marL="0">
-              <a:buNone/>
-            </a:pPr>
-            <a:r>
-              <a:rPr lang="en-US" sz="1400" dirty="0">
-                <a:solidFill>
-                  <a:schemeClr val="tx1"/>
-                </a:solidFill>
-              </a:rPr>
-              <a:t>Make each warning appear</a:t>
-            </a:r>
-            <a:endParaRPr lang="en-US" sz="1400" dirty="0"/>
-          </a:p>
-        </p:txBody>
-      </p:sp>
-      <p:sp>
-        <p:nvSpPr>
-          <p:cNvPr id="9" name="Text 7"/>
-          <p:cNvSpPr txBox="1"/>
-          <p:nvPr/>
-        </p:nvSpPr>
-        <p:spPr>
-          <a:xfrm>
-            <a:off x="3017520" y="1645920"/>
-            <a:ext cx="274320" cy="365760"/>
-          </a:xfrm>
-          <a:prstGeom prst="rect">
-            <a:avLst/>
-          </a:prstGeom>
-          <a:noFill/>
-          <a:ln/>
-        </p:spPr>
-        <p:txBody>
-          <a:bodyPr wrap="square" lIns="0" tIns="0" rIns="0" bIns="0" rtlCol="0" anchor="t"/>
-          <a:lstStyle/>
-          <a:p>
-            <a:pPr indent="0" marL="0">
-              <a:buNone/>
-            </a:pPr>
-            <a:r>
-              <a:rPr lang="en-US" sz="1600" b="1" dirty="0">
-                <a:solidFill>
-                  <a:schemeClr val="accent1"/>
-                </a:solidFill>
-              </a:rPr>
-              <a:t>✓</a:t>
-            </a:r>
-            <a:endParaRPr lang="en-US" sz="1600" dirty="0"/>
-          </a:p>
-        </p:txBody>
-      </p:sp>
-      <p:sp>
-        <p:nvSpPr>
-          <p:cNvPr id="10" name="Text 8"/>
-          <p:cNvSpPr txBox="1"/>
-          <p:nvPr/>
-        </p:nvSpPr>
-        <p:spPr>
-          <a:xfrm>
-            <a:off x="3337560" y="1664208"/>
-            <a:ext cx="2194560" cy="411480"/>
-          </a:xfrm>
-          <a:prstGeom prst="rect">
-            <a:avLst/>
-          </a:prstGeom>
-          <a:noFill/>
-          <a:ln/>
-        </p:spPr>
-        <p:txBody>
-          <a:bodyPr wrap="square" lIns="0" tIns="0" rIns="0" bIns="0" rtlCol="0" anchor="t"/>
-          <a:lstStyle/>
-          <a:p>
-            <a:pPr indent="0" marL="0">
-              <a:buNone/>
-            </a:pPr>
-            <a:r>
-              <a:rPr lang="en-US" sz="1400" dirty="0">
-                <a:solidFill>
-                  <a:schemeClr val="tx1"/>
-                </a:solidFill>
-              </a:rPr>
-              <a:t>Click parts in the 3D view</a:t>
-            </a:r>
-            <a:endParaRPr lang="en-US" sz="1400" dirty="0"/>
-          </a:p>
-        </p:txBody>
-      </p:sp>
-      <p:sp>
-        <p:nvSpPr>
-          <p:cNvPr id="11" name="Text 9"/>
-          <p:cNvSpPr txBox="1"/>
-          <p:nvPr/>
-        </p:nvSpPr>
-        <p:spPr>
-          <a:xfrm>
-            <a:off x="457200" y="2194560"/>
-            <a:ext cx="274320" cy="365760"/>
-          </a:xfrm>
-          <a:prstGeom prst="rect">
-            <a:avLst/>
-          </a:prstGeom>
-          <a:noFill/>
-          <a:ln/>
-        </p:spPr>
-        <p:txBody>
-          <a:bodyPr wrap="square" lIns="0" tIns="0" rIns="0" bIns="0" rtlCol="0" anchor="t"/>
-          <a:lstStyle/>
-          <a:p>
-            <a:pPr indent="0" marL="0">
-              <a:buNone/>
-            </a:pPr>
-            <a:r>
-              <a:rPr lang="en-US" sz="1600" b="1" dirty="0">
-                <a:solidFill>
-                  <a:schemeClr val="accent1"/>
-                </a:solidFill>
-              </a:rPr>
-              <a:t>✓</a:t>
-            </a:r>
-            <a:endParaRPr lang="en-US" sz="1600" dirty="0"/>
-          </a:p>
-        </p:txBody>
-      </p:sp>
-      <p:sp>
-        <p:nvSpPr>
-          <p:cNvPr id="12" name="Text 10"/>
-          <p:cNvSpPr txBox="1"/>
-          <p:nvPr/>
-        </p:nvSpPr>
-        <p:spPr>
-          <a:xfrm>
-            <a:off x="777240" y="2212848"/>
-            <a:ext cx="2194560" cy="411480"/>
-          </a:xfrm>
-          <a:prstGeom prst="rect">
-            <a:avLst/>
-          </a:prstGeom>
-          <a:noFill/>
-          <a:ln/>
-        </p:spPr>
-        <p:txBody>
-          <a:bodyPr wrap="square" lIns="0" tIns="0" rIns="0" bIns="0" rtlCol="0" anchor="t"/>
-          <a:lstStyle/>
-          <a:p>
-            <a:pPr indent="0" marL="0">
-              <a:buNone/>
-            </a:pPr>
-            <a:r>
-              <a:rPr lang="en-US" sz="1400" dirty="0">
-                <a:solidFill>
-                  <a:schemeClr val="tx1"/>
-                </a:solidFill>
-              </a:rPr>
-              <a:t>Find it in the top menu</a:t>
-            </a:r>
-            <a:endParaRPr lang="en-US" sz="1400" dirty="0"/>
-          </a:p>
-        </p:txBody>
-      </p:sp>
-      <p:sp>
-        <p:nvSpPr>
-          <p:cNvPr id="13" name="Text 11"/>
-          <p:cNvSpPr txBox="1"/>
-          <p:nvPr/>
-        </p:nvSpPr>
-        <p:spPr>
-          <a:xfrm>
-            <a:off x="3017520" y="2194560"/>
-            <a:ext cx="274320" cy="365760"/>
-          </a:xfrm>
-          <a:prstGeom prst="rect">
-            <a:avLst/>
-          </a:prstGeom>
-          <a:noFill/>
-          <a:ln/>
-        </p:spPr>
-        <p:txBody>
-          <a:bodyPr wrap="square" lIns="0" tIns="0" rIns="0" bIns="0" rtlCol="0" anchor="t"/>
-          <a:lstStyle/>
-          <a:p>
-            <a:pPr indent="0" marL="0">
-              <a:buNone/>
-            </a:pPr>
-            <a:r>
-              <a:rPr lang="en-US" sz="1600" b="1" dirty="0">
-                <a:solidFill>
-                  <a:schemeClr val="accent1"/>
-                </a:solidFill>
-              </a:rPr>
-              <a:t>✓</a:t>
-            </a:r>
-            <a:endParaRPr lang="en-US" sz="1600" dirty="0"/>
-          </a:p>
-        </p:txBody>
-      </p:sp>
-      <p:sp>
-        <p:nvSpPr>
-          <p:cNvPr id="14" name="Text 12"/>
-          <p:cNvSpPr txBox="1"/>
-          <p:nvPr/>
-        </p:nvSpPr>
-        <p:spPr>
-          <a:xfrm>
-            <a:off x="3337560" y="2212848"/>
-            <a:ext cx="2194560" cy="411480"/>
-          </a:xfrm>
-          <a:prstGeom prst="rect">
-            <a:avLst/>
-          </a:prstGeom>
-          <a:noFill/>
-          <a:ln/>
-        </p:spPr>
-        <p:txBody>
-          <a:bodyPr wrap="square" lIns="0" tIns="0" rIns="0" bIns="0" rtlCol="0" anchor="t"/>
-          <a:lstStyle/>
-          <a:p>
-            <a:pPr indent="0" marL="0">
-              <a:buNone/>
-            </a:pPr>
-            <a:r>
-              <a:rPr lang="en-US" sz="1400" dirty="0">
-                <a:solidFill>
-                  <a:schemeClr val="tx1"/>
-                </a:solidFill>
-              </a:rPr>
-              <a:t>Download and read the PDF</a:t>
-            </a:r>
-            <a:endParaRPr lang="en-US" sz="1400" dirty="0"/>
-          </a:p>
-        </p:txBody>
-      </p:sp>
-      <p:sp>
-        <p:nvSpPr>
-          <p:cNvPr id="15" name="Text 13"/>
-          <p:cNvSpPr txBox="1"/>
-          <p:nvPr/>
-        </p:nvSpPr>
-        <p:spPr>
-          <a:xfrm>
-            <a:off x="457200" y="2743200"/>
-            <a:ext cx="274320" cy="365760"/>
-          </a:xfrm>
-          <a:prstGeom prst="rect">
-            <a:avLst/>
-          </a:prstGeom>
-          <a:noFill/>
-          <a:ln/>
-        </p:spPr>
-        <p:txBody>
-          <a:bodyPr wrap="square" lIns="0" tIns="0" rIns="0" bIns="0" rtlCol="0" anchor="t"/>
-          <a:lstStyle/>
-          <a:p>
-            <a:pPr indent="0" marL="0">
-              <a:buNone/>
-            </a:pPr>
-            <a:r>
-              <a:rPr lang="en-US" sz="1600" b="1" dirty="0">
-                <a:solidFill>
-                  <a:schemeClr val="accent1"/>
-                </a:solidFill>
-              </a:rPr>
-              <a:t>✓</a:t>
-            </a:r>
-            <a:endParaRPr lang="en-US" sz="1600" dirty="0"/>
-          </a:p>
-        </p:txBody>
-      </p:sp>
-      <p:sp>
-        <p:nvSpPr>
-          <p:cNvPr id="16" name="Text 14"/>
-          <p:cNvSpPr txBox="1"/>
-          <p:nvPr/>
-        </p:nvSpPr>
-        <p:spPr>
-          <a:xfrm>
-            <a:off x="777240" y="2761488"/>
-            <a:ext cx="2194560" cy="411480"/>
-          </a:xfrm>
-          <a:prstGeom prst="rect">
-            <a:avLst/>
-          </a:prstGeom>
-          <a:noFill/>
-          <a:ln/>
-        </p:spPr>
-        <p:txBody>
-          <a:bodyPr wrap="square" lIns="0" tIns="0" rIns="0" bIns="0" rtlCol="0" anchor="t"/>
-          <a:lstStyle/>
-          <a:p>
-            <a:pPr indent="0" marL="0">
-              <a:buNone/>
-            </a:pPr>
-            <a:r>
-              <a:rPr lang="en-US" sz="1400" dirty="0">
-                <a:solidFill>
-                  <a:schemeClr val="tx1"/>
-                </a:solidFill>
-              </a:rPr>
-              <a:t>Shelf and desk still work</a:t>
-            </a:r>
-            <a:endParaRPr lang="en-US" sz="1400" dirty="0"/>
-          </a:p>
-        </p:txBody>
-      </p:sp>
-      <p:sp>
-        <p:nvSpPr>
-          <p:cNvPr id="17" name="Text 15"/>
-          <p:cNvSpPr txBox="1"/>
-          <p:nvPr/>
-        </p:nvSpPr>
-        <p:spPr>
-          <a:xfrm>
-            <a:off x="3017520" y="2743200"/>
-            <a:ext cx="274320" cy="365760"/>
-          </a:xfrm>
-          <a:prstGeom prst="rect">
-            <a:avLst/>
-          </a:prstGeom>
-          <a:noFill/>
-          <a:ln/>
-        </p:spPr>
-        <p:txBody>
-          <a:bodyPr wrap="square" lIns="0" tIns="0" rIns="0" bIns="0" rtlCol="0" anchor="t"/>
-          <a:lstStyle/>
-          <a:p>
-            <a:pPr indent="0" marL="0">
-              <a:buNone/>
-            </a:pPr>
-            <a:r>
-              <a:rPr lang="en-US" sz="1600" b="1" dirty="0">
-                <a:solidFill>
-                  <a:schemeClr val="accent1"/>
-                </a:solidFill>
-              </a:rPr>
-              <a:t>✓</a:t>
-            </a:r>
-            <a:endParaRPr lang="en-US" sz="1600" dirty="0"/>
-          </a:p>
-        </p:txBody>
-      </p:sp>
-      <p:sp>
-        <p:nvSpPr>
-          <p:cNvPr id="18" name="Text 16"/>
-          <p:cNvSpPr txBox="1"/>
-          <p:nvPr/>
-        </p:nvSpPr>
-        <p:spPr>
-          <a:xfrm>
-            <a:off x="3337560" y="2761488"/>
-            <a:ext cx="2194560" cy="411480"/>
-          </a:xfrm>
-          <a:prstGeom prst="rect">
-            <a:avLst/>
-          </a:prstGeom>
-          <a:noFill/>
-          <a:ln/>
-        </p:spPr>
-        <p:txBody>
-          <a:bodyPr wrap="square" lIns="0" tIns="0" rIns="0" bIns="0" rtlCol="0" anchor="t"/>
-          <a:lstStyle/>
-          <a:p>
-            <a:pPr indent="0" marL="0">
-              <a:buNone/>
-            </a:pPr>
-            <a:r>
-              <a:rPr lang="en-US" sz="1400" dirty="0">
-                <a:solidFill>
-                  <a:schemeClr val="tx1"/>
-                </a:solidFill>
-              </a:rPr>
-              <a:t>Narrow window, like a phone</a:t>
-            </a:r>
-            <a:endParaRPr lang="en-US" sz="1400" dirty="0"/>
-          </a:p>
-        </p:txBody>
-      </p:sp>
-      <p:sp>
-        <p:nvSpPr>
-          <p:cNvPr id="19" name="Shape 17"/>
-          <p:cNvSpPr/>
-          <p:nvPr/>
-        </p:nvSpPr>
-        <p:spPr>
-          <a:xfrm>
-            <a:off x="457200" y="3383280"/>
-            <a:ext cx="5029200" cy="1188720"/>
-          </a:xfrm>
-          <a:prstGeom prst="roundRect">
-            <a:avLst>
-              <a:gd name="adj" fmla="val 6154"/>
-            </a:avLst>
+            <a:off x="6949440" y="466344"/>
+            <a:ext cx="1737360" cy="256032"/>
+          </a:xfrm>
+          <a:prstGeom prst="rect">
+            <a:avLst/>
           </a:prstGeom>
           <a:solidFill>
-            <a:schemeClr val="bg2"/>
+            <a:schemeClr val="accent1"/>
           </a:solidFill>
-          <a:ln w="12700">
-            <a:solidFill>
-              <a:schemeClr val="bg2"/>
-            </a:solidFill>
-            <a:prstDash val="solid"/>
-          </a:ln>
-        </p:spPr>
-      </p:sp>
-      <p:sp>
-        <p:nvSpPr>
-          <p:cNvPr id="20" name="Text 18"/>
-          <p:cNvSpPr txBox="1"/>
-          <p:nvPr/>
-        </p:nvSpPr>
-        <p:spPr>
-          <a:xfrm>
-            <a:off x="640080" y="3493008"/>
-            <a:ext cx="4663440" cy="1005840"/>
-          </a:xfrm>
-          <a:prstGeom prst="rect">
-            <a:avLst/>
-          </a:prstGeom>
-          <a:noFill/>
-          <a:ln/>
-        </p:spPr>
-        <p:txBody>
-          <a:bodyPr wrap="square" lIns="0" tIns="0" rIns="0" bIns="0" rtlCol="0" anchor="t"/>
-          <a:lstStyle/>
-          <a:p>
-            <a:pPr indent="0" marL="0">
-              <a:buNone/>
-            </a:pPr>
-            <a:r>
-              <a:rPr lang="en-US" sz="1300" b="1" dirty="0">
-                <a:solidFill>
-                  <a:schemeClr val="tx1"/>
-                </a:solidFill>
-              </a:rPr>
-              <a:t>Found something odd? </a:t>
-            </a:r>
-            <a:pPr indent="0" marL="0">
-              <a:buNone/>
-            </a:pPr>
-            <a:r>
-              <a:rPr lang="en-US" sz="1300" dirty="0">
-                <a:solidFill>
-                  <a:schemeClr val="tx1"/>
-                </a:solidFill>
-              </a:rPr>
-              <a:t>Tell Claude, refresh, check again.</a:t>
-            </a:r>
-            <a:endParaRPr lang="en-US" sz="1300" dirty="0"/>
-          </a:p>
-          <a:p>
-            <a:pPr indent="0" marL="0">
-              <a:buNone/>
-            </a:pPr>
-            <a:r>
-              <a:rPr lang="en-US" sz="1300" dirty="0">
-                <a:solidFill>
-                  <a:schemeClr val="accent2"/>
-                </a:solidFill>
-              </a:rPr>
-              <a:t>Then Claude runs its own checks and takes the screenshots for the pull request.</a:t>
-            </a:r>
-            <a:endParaRPr lang="en-US" sz="1300" dirty="0"/>
+          <a:ln/>
+        </p:spPr>
+        <p:txBody>
+          <a:bodyPr wrap="square" lIns="0" tIns="0" rIns="0" bIns="0" rtlCol="0" anchor="ctr"/>
+          <a:lstStyle/>
+          <a:p>
+            <a:pPr algn="ctr" indent="0" marL="0">
+              <a:buNone/>
+            </a:pPr>
+            <a:r>
+              <a:rPr lang="en-US" sz="1000" b="1" dirty="0">
+                <a:solidFill>
+                  <a:schemeClr val="bg1"/>
+                </a:solidFill>
+              </a:rPr>
+              <a:t>SIMULATED EXAMPLE</a:t>
+            </a:r>
+            <a:endParaRPr lang="en-US" sz="1000" dirty="0"/>
           </a:p>
         </p:txBody>
       </p:sp>
       <p:pic>
         <p:nvPicPr>
-          <p:cNvPr id="21" name="Warning scenario screenshot" descr="small/shelf-wide.jpg">    </p:cNvPr>
+          <p:cNvPr id="4" name="Simulated design brief" descr="small/sim-brief.jpg">    </p:cNvPr>
           <p:cNvPicPr>
             <a:picLocks noChangeAspect="1"/>
           </p:cNvPicPr>
@@ -6091,8 +5523,8 @@
         </p:blipFill>
         <p:spPr>
           <a:xfrm>
-            <a:off x="5760720" y="1097280"/>
-            <a:ext cx="2926080" cy="1670526"/>
+            <a:off x="457200" y="1051560"/>
+            <a:ext cx="4397071" cy="3611880"/>
           </a:xfrm>
           <a:prstGeom prst="rect">
             <a:avLst/>
@@ -6108,14 +5540,14 @@
       </p:pic>
       <p:sp>
         <p:nvSpPr>
-          <p:cNvPr id="22" name="Text 19"/>
+          <p:cNvPr id="5" name="Text 2"/>
           <p:cNvSpPr txBox="1"/>
           <p:nvPr/>
         </p:nvSpPr>
         <p:spPr>
           <a:xfrm>
-            <a:off x="5760720" y="2880360"/>
-            <a:ext cx="2926080" cy="457200"/>
+            <a:off x="5486400" y="1188720"/>
+            <a:ext cx="3291840" cy="3474720"/>
           </a:xfrm>
           <a:prstGeom prst="rect">
             <a:avLst/>
@@ -6127,18 +5559,116 @@
           <a:bodyPr wrap="square" lIns="0" tIns="0" rIns="0" bIns="0" rtlCol="0" anchor="t"/>
           <a:lstStyle/>
           <a:p>
-            <a:pPr algn="ctr" indent="0" marL="0">
-              <a:buNone/>
-            </a:pPr>
-            <a:r>
-              <a:rPr lang="en-US" sz="1100" dirty="0">
+            <a:pPr indent="0" marL="0">
+              <a:buNone/>
+            </a:pPr>
+            <a:r>
+              <a:rPr lang="en-US" sz="1400" b="1" dirty="0">
+                <a:solidFill>
+                  <a:schemeClr val="tx1"/>
+                </a:solidFill>
+              </a:rPr>
+              <a:t>An interview first</a:t>
+            </a:r>
+            <a:endParaRPr lang="en-US" sz="1400" dirty="0"/>
+          </a:p>
+          <a:p>
+            <a:pPr indent="0" marL="0">
+              <a:buNone/>
+            </a:pPr>
+            <a:r>
+              <a:rPr lang="en-US" sz="1400" dirty="0">
                 <a:solidFill>
                   <a:schemeClr val="accent2"/>
                 </a:solidFill>
               </a:rPr>
-              <a:t>Real example: making a warning appear (2000 mm wide, 40 kg)</a:t>
-            </a:r>
-            <a:endParaRPr lang="en-US" sz="1100" dirty="0"/>
+              <a:t>Claude asks one question at a time: parts, sizes, how it goes together, what people can change.</a:t>
+            </a:r>
+            <a:endParaRPr lang="en-US" sz="1400" dirty="0"/>
+          </a:p>
+          <a:p>
+            <a:pPr indent="0" marL="0">
+              <a:buNone/>
+            </a:pPr>
+            <a:r>
+              <a:rPr lang="en-US" sz="800" dirty="0">
+                <a:solidFill>
+                  <a:schemeClr val="tx1"/>
+                </a:solidFill>
+              </a:rPr>
+              <a:t> </a:t>
+            </a:r>
+            <a:endParaRPr lang="en-US" sz="1400" dirty="0"/>
+          </a:p>
+          <a:p>
+            <a:pPr indent="0" marL="0">
+              <a:buNone/>
+            </a:pPr>
+            <a:r>
+              <a:rPr lang="en-US" sz="1400" b="1" dirty="0">
+                <a:solidFill>
+                  <a:schemeClr val="tx1"/>
+                </a:solidFill>
+              </a:rPr>
+              <a:t>Written down as a brief</a:t>
+            </a:r>
+            <a:endParaRPr lang="en-US" sz="1400" dirty="0"/>
+          </a:p>
+          <a:p>
+            <a:pPr indent="0" marL="0">
+              <a:buNone/>
+            </a:pPr>
+            <a:r>
+              <a:rPr lang="en-US" sz="1400" dirty="0">
+                <a:solidFill>
+                  <a:schemeClr val="accent2"/>
+                </a:solidFill>
+              </a:rPr>
+              <a:t>You approve it before anything is built.</a:t>
+            </a:r>
+            <a:endParaRPr lang="en-US" sz="1400" dirty="0"/>
+          </a:p>
+          <a:p>
+            <a:pPr indent="0" marL="0">
+              <a:buNone/>
+            </a:pPr>
+            <a:r>
+              <a:rPr lang="en-US" sz="800" dirty="0">
+                <a:solidFill>
+                  <a:schemeClr val="tx1"/>
+                </a:solidFill>
+              </a:rPr>
+              <a:t> </a:t>
+            </a:r>
+            <a:endParaRPr lang="en-US" sz="1400" dirty="0"/>
+          </a:p>
+          <a:p>
+            <a:pPr indent="0" marL="0">
+              <a:buNone/>
+            </a:pPr>
+            <a:r>
+              <a:rPr lang="en-US" sz="1400" b="1" dirty="0">
+                <a:solidFill>
+                  <a:schemeClr val="tx1"/>
+                </a:solidFill>
+              </a:rPr>
+              <a:t>Unknown means unknown</a:t>
+            </a:r>
+            <a:endParaRPr lang="en-US" sz="1400" dirty="0"/>
+          </a:p>
+          <a:p>
+            <a:pPr indent="0" marL="0">
+              <a:buNone/>
+            </a:pPr>
+            <a:r>
+              <a:rPr lang="en-US" sz="1400" dirty="0">
+                <a:solidFill>
+                  <a:schemeClr val="accent2"/>
+                </a:solidFill>
+              </a:rPr>
+              <a:t>Any size not on a listing goes on a "to measure" list.</a:t>
+            </a:r>
+            <a:endParaRPr lang="en-US" sz="1400" dirty="0"/>
           </a:p>
         </p:txBody>
       </p:sp>
@@ -6244,7 +5774,7 @@
                   <a:schemeClr val="tx1"/>
                 </a:solidFill>
               </a:rPr>
-              <a:t>Last step: Claude creates the PR</a:t>
+              <a:t>Before sending: try it all</a:t>
             </a:r>
             <a:endParaRPr lang="en-US" sz="2400" dirty="0"/>
           </a:p>
@@ -6252,83 +5782,50 @@
       </p:sp>
       <p:sp>
         <p:nvSpPr>
-          <p:cNvPr id="3" name="Simulation tag"/>
+          <p:cNvPr id="3" name="Text 1"/>
           <p:cNvSpPr txBox="1"/>
           <p:nvPr/>
         </p:nvSpPr>
         <p:spPr>
           <a:xfrm>
-            <a:off x="6949440" y="466344"/>
-            <a:ext cx="1737360" cy="256032"/>
-          </a:xfrm>
-          <a:prstGeom prst="rect">
-            <a:avLst/>
-          </a:prstGeom>
-          <a:solidFill>
-            <a:schemeClr val="accent1"/>
-          </a:solidFill>
-          <a:ln/>
-        </p:spPr>
-        <p:txBody>
-          <a:bodyPr wrap="square" lIns="0" tIns="0" rIns="0" bIns="0" rtlCol="0" anchor="ctr"/>
-          <a:lstStyle/>
-          <a:p>
-            <a:pPr algn="ctr" indent="0" marL="0">
-              <a:buNone/>
-            </a:pPr>
-            <a:r>
-              <a:rPr lang="en-US" sz="1000" b="1" dirty="0">
-                <a:solidFill>
-                  <a:schemeClr val="bg1"/>
-                </a:solidFill>
-              </a:rPr>
-              <a:t>SIMULATED EXAMPLE</a:t>
-            </a:r>
-            <a:endParaRPr lang="en-US" sz="1000" dirty="0"/>
-          </a:p>
-        </p:txBody>
-      </p:sp>
-      <p:pic>
-        <p:nvPicPr>
-          <p:cNvPr id="4" name="Simulated pull request" descr="small/sim-pr.jpg">    </p:cNvPr>
-          <p:cNvPicPr>
-            <a:picLocks noChangeAspect="1"/>
-          </p:cNvPicPr>
-          <p:nvPr/>
-        </p:nvPicPr>
-        <p:blipFill>
-          <a:blip r:embed="rId1"/>
-          <a:stretch>
-            <a:fillRect/>
-          </a:stretch>
-        </p:blipFill>
-        <p:spPr>
-          <a:xfrm>
-            <a:off x="457200" y="1005840"/>
-            <a:ext cx="3307282" cy="3749040"/>
-          </a:xfrm>
-          <a:prstGeom prst="rect">
-            <a:avLst/>
-          </a:prstGeom>
-          <a:effectLst>
-            <a:outerShdw sx="100000" sy="100000" kx="0" ky="0" algn="bl" rotWithShape="0" blurRad="76200" dist="25400" dir="5400000">
-              <a:srgbClr val="000000">
-                <a:alpha val="18000"/>
-              </a:srgbClr>
-            </a:outerShdw>
-          </a:effectLst>
-        </p:spPr>
-      </p:pic>
-      <p:sp>
-        <p:nvSpPr>
-          <p:cNvPr id="5" name="Text 2"/>
+            <a:off x="457200" y="1097280"/>
+            <a:ext cx="274320" cy="365760"/>
+          </a:xfrm>
+          <a:prstGeom prst="rect">
+            <a:avLst/>
+          </a:prstGeom>
+          <a:noFill/>
+          <a:ln/>
+        </p:spPr>
+        <p:txBody>
+          <a:bodyPr wrap="square" lIns="0" tIns="0" rIns="0" bIns="0" rtlCol="0" anchor="t"/>
+          <a:lstStyle/>
+          <a:p>
+            <a:pPr indent="0" marL="0">
+              <a:buNone/>
+            </a:pPr>
+            <a:r>
+              <a:rPr lang="en-US" sz="1600" b="1" dirty="0">
+                <a:solidFill>
+                  <a:schemeClr val="accent1"/>
+                </a:solidFill>
+              </a:rPr>
+              <a:t>✓</a:t>
+            </a:r>
+            <a:endParaRPr lang="en-US" sz="1600" dirty="0"/>
+          </a:p>
+        </p:txBody>
+      </p:sp>
+      <p:sp>
+        <p:nvSpPr>
+          <p:cNvPr id="4" name="Text 2"/>
           <p:cNvSpPr txBox="1"/>
           <p:nvPr/>
         </p:nvSpPr>
         <p:spPr>
           <a:xfrm>
-            <a:off x="4937760" y="1051560"/>
-            <a:ext cx="3840480" cy="640080"/>
+            <a:off x="777240" y="1115568"/>
+            <a:ext cx="2194560" cy="411480"/>
           </a:xfrm>
           <a:prstGeom prst="rect">
             <a:avLst/>
@@ -6344,27 +5841,27 @@
               <a:buNone/>
             </a:pPr>
             <a:r>
-              <a:rPr lang="en-US" sz="1400" b="1" dirty="0">
+              <a:rPr lang="en-US" sz="1400" dirty="0">
                 <a:solidFill>
                   <a:schemeClr val="tx1"/>
                 </a:solidFill>
               </a:rPr>
-              <a:t>When you say "I'm happy, let's send it", Claude writes the pull request in a standard shape:</a:t>
-            </a:r>
-            <a:endParaRPr lang="en-US" sz="1400" dirty="0"/>
-          </a:p>
-        </p:txBody>
-      </p:sp>
-      <p:sp>
-        <p:nvSpPr>
-          <p:cNvPr id="6" name="Text 3"/>
+              <a:t>Smallest and largest sizes</a:t>
+            </a:r>
+            <a:endParaRPr lang="en-US" sz="1400" dirty="0"/>
+          </a:p>
+        </p:txBody>
+      </p:sp>
+      <p:sp>
+        <p:nvSpPr>
+          <p:cNvPr id="5" name="Text 3"/>
           <p:cNvSpPr txBox="1"/>
           <p:nvPr/>
         </p:nvSpPr>
         <p:spPr>
           <a:xfrm>
-            <a:off x="4937760" y="1783080"/>
-            <a:ext cx="3840480" cy="2194560"/>
+            <a:off x="3017520" y="1097280"/>
+            <a:ext cx="274320" cy="365760"/>
           </a:xfrm>
           <a:prstGeom prst="rect">
             <a:avLst/>
@@ -6376,13 +5873,44 @@
           <a:bodyPr wrap="square" lIns="0" tIns="0" rIns="0" bIns="0" rtlCol="0" anchor="t"/>
           <a:lstStyle/>
           <a:p>
-            <a:pPr marL="342900" indent="-342900">
-              <a:spcAft>
-                <a:spcPts val="200"/>
-              </a:spcAft>
-              <a:buSzPct val="100000"/>
-              <a:buFont typeface="+mj-lt"/>
-              <a:buAutoNum type="arabicPeriod" startAt="1"/>
+            <a:pPr indent="0" marL="0">
+              <a:buNone/>
+            </a:pPr>
+            <a:r>
+              <a:rPr lang="en-US" sz="1600" b="1" dirty="0">
+                <a:solidFill>
+                  <a:schemeClr val="accent1"/>
+                </a:solidFill>
+              </a:rPr>
+              <a:t>✓</a:t>
+            </a:r>
+            <a:endParaRPr lang="en-US" sz="1600" dirty="0"/>
+          </a:p>
+        </p:txBody>
+      </p:sp>
+      <p:sp>
+        <p:nvSpPr>
+          <p:cNvPr id="6" name="Text 4"/>
+          <p:cNvSpPr txBox="1"/>
+          <p:nvPr/>
+        </p:nvSpPr>
+        <p:spPr>
+          <a:xfrm>
+            <a:off x="3337560" y="1115568"/>
+            <a:ext cx="2194560" cy="411480"/>
+          </a:xfrm>
+          <a:prstGeom prst="rect">
+            <a:avLst/>
+          </a:prstGeom>
+          <a:noFill/>
+          <a:ln/>
+        </p:spPr>
+        <p:txBody>
+          <a:bodyPr wrap="square" lIns="0" tIns="0" rIns="0" bIns="0" rtlCol="0" anchor="t"/>
+          <a:lstStyle/>
+          <a:p>
+            <a:pPr indent="0" marL="0">
+              <a:buNone/>
             </a:pPr>
             <a:r>
               <a:rPr lang="en-US" sz="1400" dirty="0">
@@ -6390,18 +5918,71 @@
                   <a:schemeClr val="tx1"/>
                 </a:solidFill>
               </a:rPr>
-              <a:t>What this adds</a:t>
-            </a:r>
-            <a:endParaRPr lang="en-US" sz="1400" dirty="0"/>
-          </a:p>
-          <a:p>
-            <a:pPr marL="342900" indent="-342900">
-              <a:spcAft>
-                <a:spcPts val="200"/>
-              </a:spcAft>
-              <a:buSzPct val="100000"/>
-              <a:buFont typeface="+mj-lt"/>
-              <a:buAutoNum type="arabicPeriod" startAt="1"/>
+              <a:t>Each option on and off</a:t>
+            </a:r>
+            <a:endParaRPr lang="en-US" sz="1400" dirty="0"/>
+          </a:p>
+        </p:txBody>
+      </p:sp>
+      <p:sp>
+        <p:nvSpPr>
+          <p:cNvPr id="7" name="Text 5"/>
+          <p:cNvSpPr txBox="1"/>
+          <p:nvPr/>
+        </p:nvSpPr>
+        <p:spPr>
+          <a:xfrm>
+            <a:off x="457200" y="1645920"/>
+            <a:ext cx="274320" cy="365760"/>
+          </a:xfrm>
+          <a:prstGeom prst="rect">
+            <a:avLst/>
+          </a:prstGeom>
+          <a:noFill/>
+          <a:ln/>
+        </p:spPr>
+        <p:txBody>
+          <a:bodyPr wrap="square" lIns="0" tIns="0" rIns="0" bIns="0" rtlCol="0" anchor="t"/>
+          <a:lstStyle/>
+          <a:p>
+            <a:pPr indent="0" marL="0">
+              <a:buNone/>
+            </a:pPr>
+            <a:r>
+              <a:rPr lang="en-US" sz="1600" b="1" dirty="0">
+                <a:solidFill>
+                  <a:schemeClr val="accent1"/>
+                </a:solidFill>
+              </a:rPr>
+              <a:t>✓</a:t>
+            </a:r>
+            <a:endParaRPr lang="en-US" sz="1600" dirty="0"/>
+          </a:p>
+        </p:txBody>
+      </p:sp>
+      <p:sp>
+        <p:nvSpPr>
+          <p:cNvPr id="8" name="Text 6"/>
+          <p:cNvSpPr txBox="1"/>
+          <p:nvPr/>
+        </p:nvSpPr>
+        <p:spPr>
+          <a:xfrm>
+            <a:off x="777240" y="1664208"/>
+            <a:ext cx="2194560" cy="411480"/>
+          </a:xfrm>
+          <a:prstGeom prst="rect">
+            <a:avLst/>
+          </a:prstGeom>
+          <a:noFill/>
+          <a:ln/>
+        </p:spPr>
+        <p:txBody>
+          <a:bodyPr wrap="square" lIns="0" tIns="0" rIns="0" bIns="0" rtlCol="0" anchor="t"/>
+          <a:lstStyle/>
+          <a:p>
+            <a:pPr indent="0" marL="0">
+              <a:buNone/>
             </a:pPr>
             <a:r>
               <a:rPr lang="en-US" sz="1400" dirty="0">
@@ -6409,18 +5990,71 @@
                   <a:schemeClr val="tx1"/>
                 </a:solidFill>
               </a:rPr>
-              <a:t>Idea / issue</a:t>
-            </a:r>
-            <a:endParaRPr lang="en-US" sz="1400" dirty="0"/>
-          </a:p>
-          <a:p>
-            <a:pPr marL="342900" indent="-342900">
-              <a:spcAft>
-                <a:spcPts val="200"/>
-              </a:spcAft>
-              <a:buSzPct val="100000"/>
-              <a:buFont typeface="+mj-lt"/>
-              <a:buAutoNum type="arabicPeriod" startAt="1"/>
+              <a:t>Make each warning appear</a:t>
+            </a:r>
+            <a:endParaRPr lang="en-US" sz="1400" dirty="0"/>
+          </a:p>
+        </p:txBody>
+      </p:sp>
+      <p:sp>
+        <p:nvSpPr>
+          <p:cNvPr id="9" name="Text 7"/>
+          <p:cNvSpPr txBox="1"/>
+          <p:nvPr/>
+        </p:nvSpPr>
+        <p:spPr>
+          <a:xfrm>
+            <a:off x="3017520" y="1645920"/>
+            <a:ext cx="274320" cy="365760"/>
+          </a:xfrm>
+          <a:prstGeom prst="rect">
+            <a:avLst/>
+          </a:prstGeom>
+          <a:noFill/>
+          <a:ln/>
+        </p:spPr>
+        <p:txBody>
+          <a:bodyPr wrap="square" lIns="0" tIns="0" rIns="0" bIns="0" rtlCol="0" anchor="t"/>
+          <a:lstStyle/>
+          <a:p>
+            <a:pPr indent="0" marL="0">
+              <a:buNone/>
+            </a:pPr>
+            <a:r>
+              <a:rPr lang="en-US" sz="1600" b="1" dirty="0">
+                <a:solidFill>
+                  <a:schemeClr val="accent1"/>
+                </a:solidFill>
+              </a:rPr>
+              <a:t>✓</a:t>
+            </a:r>
+            <a:endParaRPr lang="en-US" sz="1600" dirty="0"/>
+          </a:p>
+        </p:txBody>
+      </p:sp>
+      <p:sp>
+        <p:nvSpPr>
+          <p:cNvPr id="10" name="Text 8"/>
+          <p:cNvSpPr txBox="1"/>
+          <p:nvPr/>
+        </p:nvSpPr>
+        <p:spPr>
+          <a:xfrm>
+            <a:off x="3337560" y="1664208"/>
+            <a:ext cx="2194560" cy="411480"/>
+          </a:xfrm>
+          <a:prstGeom prst="rect">
+            <a:avLst/>
+          </a:prstGeom>
+          <a:noFill/>
+          <a:ln/>
+        </p:spPr>
+        <p:txBody>
+          <a:bodyPr wrap="square" lIns="0" tIns="0" rIns="0" bIns="0" rtlCol="0" anchor="t"/>
+          <a:lstStyle/>
+          <a:p>
+            <a:pPr indent="0" marL="0">
+              <a:buNone/>
             </a:pPr>
             <a:r>
               <a:rPr lang="en-US" sz="1400" dirty="0">
@@ -6428,18 +6062,71 @@
                   <a:schemeClr val="tx1"/>
                 </a:solidFill>
               </a:rPr>
-              <a:t>Design brief</a:t>
-            </a:r>
-            <a:endParaRPr lang="en-US" sz="1400" dirty="0"/>
-          </a:p>
-          <a:p>
-            <a:pPr marL="342900" indent="-342900">
-              <a:spcAft>
-                <a:spcPts val="200"/>
-              </a:spcAft>
-              <a:buSzPct val="100000"/>
-              <a:buFont typeface="+mj-lt"/>
-              <a:buAutoNum type="arabicPeriod" startAt="1"/>
+              <a:t>Click parts in the 3D view</a:t>
+            </a:r>
+            <a:endParaRPr lang="en-US" sz="1400" dirty="0"/>
+          </a:p>
+        </p:txBody>
+      </p:sp>
+      <p:sp>
+        <p:nvSpPr>
+          <p:cNvPr id="11" name="Text 9"/>
+          <p:cNvSpPr txBox="1"/>
+          <p:nvPr/>
+        </p:nvSpPr>
+        <p:spPr>
+          <a:xfrm>
+            <a:off x="457200" y="2194560"/>
+            <a:ext cx="274320" cy="365760"/>
+          </a:xfrm>
+          <a:prstGeom prst="rect">
+            <a:avLst/>
+          </a:prstGeom>
+          <a:noFill/>
+          <a:ln/>
+        </p:spPr>
+        <p:txBody>
+          <a:bodyPr wrap="square" lIns="0" tIns="0" rIns="0" bIns="0" rtlCol="0" anchor="t"/>
+          <a:lstStyle/>
+          <a:p>
+            <a:pPr indent="0" marL="0">
+              <a:buNone/>
+            </a:pPr>
+            <a:r>
+              <a:rPr lang="en-US" sz="1600" b="1" dirty="0">
+                <a:solidFill>
+                  <a:schemeClr val="accent1"/>
+                </a:solidFill>
+              </a:rPr>
+              <a:t>✓</a:t>
+            </a:r>
+            <a:endParaRPr lang="en-US" sz="1600" dirty="0"/>
+          </a:p>
+        </p:txBody>
+      </p:sp>
+      <p:sp>
+        <p:nvSpPr>
+          <p:cNvPr id="12" name="Text 10"/>
+          <p:cNvSpPr txBox="1"/>
+          <p:nvPr/>
+        </p:nvSpPr>
+        <p:spPr>
+          <a:xfrm>
+            <a:off x="777240" y="2212848"/>
+            <a:ext cx="2194560" cy="411480"/>
+          </a:xfrm>
+          <a:prstGeom prst="rect">
+            <a:avLst/>
+          </a:prstGeom>
+          <a:noFill/>
+          <a:ln/>
+        </p:spPr>
+        <p:txBody>
+          <a:bodyPr wrap="square" lIns="0" tIns="0" rIns="0" bIns="0" rtlCol="0" anchor="t"/>
+          <a:lstStyle/>
+          <a:p>
+            <a:pPr indent="0" marL="0">
+              <a:buNone/>
             </a:pPr>
             <a:r>
               <a:rPr lang="en-US" sz="1400" dirty="0">
@@ -6447,18 +6134,71 @@
                   <a:schemeClr val="tx1"/>
                 </a:solidFill>
               </a:rPr>
-              <a:t>Parts and sources</a:t>
-            </a:r>
-            <a:endParaRPr lang="en-US" sz="1400" dirty="0"/>
-          </a:p>
-          <a:p>
-            <a:pPr marL="342900" indent="-342900">
-              <a:spcAft>
-                <a:spcPts val="200"/>
-              </a:spcAft>
-              <a:buSzPct val="100000"/>
-              <a:buFont typeface="+mj-lt"/>
-              <a:buAutoNum type="arabicPeriod" startAt="1"/>
+              <a:t>Find it in the top menu</a:t>
+            </a:r>
+            <a:endParaRPr lang="en-US" sz="1400" dirty="0"/>
+          </a:p>
+        </p:txBody>
+      </p:sp>
+      <p:sp>
+        <p:nvSpPr>
+          <p:cNvPr id="13" name="Text 11"/>
+          <p:cNvSpPr txBox="1"/>
+          <p:nvPr/>
+        </p:nvSpPr>
+        <p:spPr>
+          <a:xfrm>
+            <a:off x="3017520" y="2194560"/>
+            <a:ext cx="274320" cy="365760"/>
+          </a:xfrm>
+          <a:prstGeom prst="rect">
+            <a:avLst/>
+          </a:prstGeom>
+          <a:noFill/>
+          <a:ln/>
+        </p:spPr>
+        <p:txBody>
+          <a:bodyPr wrap="square" lIns="0" tIns="0" rIns="0" bIns="0" rtlCol="0" anchor="t"/>
+          <a:lstStyle/>
+          <a:p>
+            <a:pPr indent="0" marL="0">
+              <a:buNone/>
+            </a:pPr>
+            <a:r>
+              <a:rPr lang="en-US" sz="1600" b="1" dirty="0">
+                <a:solidFill>
+                  <a:schemeClr val="accent1"/>
+                </a:solidFill>
+              </a:rPr>
+              <a:t>✓</a:t>
+            </a:r>
+            <a:endParaRPr lang="en-US" sz="1600" dirty="0"/>
+          </a:p>
+        </p:txBody>
+      </p:sp>
+      <p:sp>
+        <p:nvSpPr>
+          <p:cNvPr id="14" name="Text 12"/>
+          <p:cNvSpPr txBox="1"/>
+          <p:nvPr/>
+        </p:nvSpPr>
+        <p:spPr>
+          <a:xfrm>
+            <a:off x="3337560" y="2212848"/>
+            <a:ext cx="2194560" cy="411480"/>
+          </a:xfrm>
+          <a:prstGeom prst="rect">
+            <a:avLst/>
+          </a:prstGeom>
+          <a:noFill/>
+          <a:ln/>
+        </p:spPr>
+        <p:txBody>
+          <a:bodyPr wrap="square" lIns="0" tIns="0" rIns="0" bIns="0" rtlCol="0" anchor="t"/>
+          <a:lstStyle/>
+          <a:p>
+            <a:pPr indent="0" marL="0">
+              <a:buNone/>
             </a:pPr>
             <a:r>
               <a:rPr lang="en-US" sz="1400" dirty="0">
@@ -6466,18 +6206,71 @@
                   <a:schemeClr val="tx1"/>
                 </a:solidFill>
               </a:rPr>
-              <a:t>How it was checked</a:t>
-            </a:r>
-            <a:endParaRPr lang="en-US" sz="1400" dirty="0"/>
-          </a:p>
-          <a:p>
-            <a:pPr marL="342900" indent="-342900">
-              <a:spcAft>
-                <a:spcPts val="200"/>
-              </a:spcAft>
-              <a:buSzPct val="100000"/>
-              <a:buFont typeface="+mj-lt"/>
-              <a:buAutoNum type="arabicPeriod" startAt="1"/>
+              <a:t>Download and read the PDF</a:t>
+            </a:r>
+            <a:endParaRPr lang="en-US" sz="1400" dirty="0"/>
+          </a:p>
+        </p:txBody>
+      </p:sp>
+      <p:sp>
+        <p:nvSpPr>
+          <p:cNvPr id="15" name="Text 13"/>
+          <p:cNvSpPr txBox="1"/>
+          <p:nvPr/>
+        </p:nvSpPr>
+        <p:spPr>
+          <a:xfrm>
+            <a:off x="457200" y="2743200"/>
+            <a:ext cx="274320" cy="365760"/>
+          </a:xfrm>
+          <a:prstGeom prst="rect">
+            <a:avLst/>
+          </a:prstGeom>
+          <a:noFill/>
+          <a:ln/>
+        </p:spPr>
+        <p:txBody>
+          <a:bodyPr wrap="square" lIns="0" tIns="0" rIns="0" bIns="0" rtlCol="0" anchor="t"/>
+          <a:lstStyle/>
+          <a:p>
+            <a:pPr indent="0" marL="0">
+              <a:buNone/>
+            </a:pPr>
+            <a:r>
+              <a:rPr lang="en-US" sz="1600" b="1" dirty="0">
+                <a:solidFill>
+                  <a:schemeClr val="accent1"/>
+                </a:solidFill>
+              </a:rPr>
+              <a:t>✓</a:t>
+            </a:r>
+            <a:endParaRPr lang="en-US" sz="1600" dirty="0"/>
+          </a:p>
+        </p:txBody>
+      </p:sp>
+      <p:sp>
+        <p:nvSpPr>
+          <p:cNvPr id="16" name="Text 14"/>
+          <p:cNvSpPr txBox="1"/>
+          <p:nvPr/>
+        </p:nvSpPr>
+        <p:spPr>
+          <a:xfrm>
+            <a:off x="777240" y="2761488"/>
+            <a:ext cx="2194560" cy="411480"/>
+          </a:xfrm>
+          <a:prstGeom prst="rect">
+            <a:avLst/>
+          </a:prstGeom>
+          <a:noFill/>
+          <a:ln/>
+        </p:spPr>
+        <p:txBody>
+          <a:bodyPr wrap="square" lIns="0" tIns="0" rIns="0" bIns="0" rtlCol="0" anchor="t"/>
+          <a:lstStyle/>
+          <a:p>
+            <a:pPr indent="0" marL="0">
+              <a:buNone/>
             </a:pPr>
             <a:r>
               <a:rPr lang="en-US" sz="1400" dirty="0">
@@ -6485,18 +6278,71 @@
                   <a:schemeClr val="tx1"/>
                 </a:solidFill>
               </a:rPr>
-              <a:t>Screenshots</a:t>
-            </a:r>
-            <a:endParaRPr lang="en-US" sz="1400" dirty="0"/>
-          </a:p>
-          <a:p>
-            <a:pPr marL="342900" indent="-342900">
-              <a:spcAft>
-                <a:spcPts val="200"/>
-              </a:spcAft>
-              <a:buSzPct val="100000"/>
-              <a:buFont typeface="+mj-lt"/>
-              <a:buAutoNum type="arabicPeriod" startAt="1"/>
+              <a:t>Shelf and desk still work</a:t>
+            </a:r>
+            <a:endParaRPr lang="en-US" sz="1400" dirty="0"/>
+          </a:p>
+        </p:txBody>
+      </p:sp>
+      <p:sp>
+        <p:nvSpPr>
+          <p:cNvPr id="17" name="Text 15"/>
+          <p:cNvSpPr txBox="1"/>
+          <p:nvPr/>
+        </p:nvSpPr>
+        <p:spPr>
+          <a:xfrm>
+            <a:off x="3017520" y="2743200"/>
+            <a:ext cx="274320" cy="365760"/>
+          </a:xfrm>
+          <a:prstGeom prst="rect">
+            <a:avLst/>
+          </a:prstGeom>
+          <a:noFill/>
+          <a:ln/>
+        </p:spPr>
+        <p:txBody>
+          <a:bodyPr wrap="square" lIns="0" tIns="0" rIns="0" bIns="0" rtlCol="0" anchor="t"/>
+          <a:lstStyle/>
+          <a:p>
+            <a:pPr indent="0" marL="0">
+              <a:buNone/>
+            </a:pPr>
+            <a:r>
+              <a:rPr lang="en-US" sz="1600" b="1" dirty="0">
+                <a:solidFill>
+                  <a:schemeClr val="accent1"/>
+                </a:solidFill>
+              </a:rPr>
+              <a:t>✓</a:t>
+            </a:r>
+            <a:endParaRPr lang="en-US" sz="1600" dirty="0"/>
+          </a:p>
+        </p:txBody>
+      </p:sp>
+      <p:sp>
+        <p:nvSpPr>
+          <p:cNvPr id="18" name="Text 16"/>
+          <p:cNvSpPr txBox="1"/>
+          <p:nvPr/>
+        </p:nvSpPr>
+        <p:spPr>
+          <a:xfrm>
+            <a:off x="3337560" y="2761488"/>
+            <a:ext cx="2194560" cy="411480"/>
+          </a:xfrm>
+          <a:prstGeom prst="rect">
+            <a:avLst/>
+          </a:prstGeom>
+          <a:noFill/>
+          <a:ln/>
+        </p:spPr>
+        <p:txBody>
+          <a:bodyPr wrap="square" lIns="0" tIns="0" rIns="0" bIns="0" rtlCol="0" anchor="t"/>
+          <a:lstStyle/>
+          <a:p>
+            <a:pPr indent="0" marL="0">
+              <a:buNone/>
             </a:pPr>
             <a:r>
               <a:rPr lang="en-US" sz="1400" dirty="0">
@@ -6504,45 +6350,26 @@
                   <a:schemeClr val="tx1"/>
                 </a:solidFill>
               </a:rPr>
-              <a:t>Assumptions to verify</a:t>
-            </a:r>
-            <a:endParaRPr lang="en-US" sz="1400" dirty="0"/>
-          </a:p>
-          <a:p>
-            <a:pPr marL="342900" indent="-342900">
-              <a:spcAft>
-                <a:spcPts val="200"/>
-              </a:spcAft>
-              <a:buSzPct val="100000"/>
-              <a:buFont typeface="+mj-lt"/>
-              <a:buAutoNum type="arabicPeriod" startAt="1"/>
-            </a:pPr>
-            <a:r>
-              <a:rPr lang="en-US" sz="1400" dirty="0">
-                <a:solidFill>
-                  <a:schemeClr val="tx1"/>
-                </a:solidFill>
-              </a:rPr>
-              <a:t>Next steps</a:t>
-            </a:r>
-            <a:endParaRPr lang="en-US" sz="1400" dirty="0"/>
-          </a:p>
-        </p:txBody>
-      </p:sp>
-      <p:sp>
-        <p:nvSpPr>
-          <p:cNvPr id="7" name="Shape 4"/>
+              <a:t>Narrow window, like a phone</a:t>
+            </a:r>
+            <a:endParaRPr lang="en-US" sz="1400" dirty="0"/>
+          </a:p>
+        </p:txBody>
+      </p:sp>
+      <p:sp>
+        <p:nvSpPr>
+          <p:cNvPr id="19" name="Shape 17"/>
           <p:cNvSpPr/>
           <p:nvPr/>
         </p:nvSpPr>
         <p:spPr>
           <a:xfrm>
-            <a:off x="4937760" y="3977640"/>
-            <a:ext cx="3840480" cy="731520"/>
+            <a:off x="457200" y="3383280"/>
+            <a:ext cx="5029200" cy="1188720"/>
           </a:xfrm>
           <a:prstGeom prst="roundRect">
             <a:avLst>
-              <a:gd name="adj" fmla="val 10000"/>
+              <a:gd name="adj" fmla="val 6154"/>
             </a:avLst>
           </a:prstGeom>
           <a:solidFill>
@@ -6558,14 +6385,14 @@
       </p:sp>
       <p:sp>
         <p:nvSpPr>
-          <p:cNvPr id="8" name="Text 5"/>
+          <p:cNvPr id="20" name="Text 18"/>
           <p:cNvSpPr txBox="1"/>
           <p:nvPr/>
         </p:nvSpPr>
         <p:spPr>
           <a:xfrm>
-            <a:off x="5120640" y="4069080"/>
-            <a:ext cx="3474720" cy="548640"/>
+            <a:off x="640080" y="3493008"/>
+            <a:ext cx="4663440" cy="1005840"/>
           </a:xfrm>
           <a:prstGeom prst="rect">
             <a:avLst/>
@@ -6581,14 +6408,106 @@
               <a:buNone/>
             </a:pPr>
             <a:r>
+              <a:rPr lang="en-US" sz="1300" b="1" dirty="0">
+                <a:solidFill>
+                  <a:schemeClr val="tx1"/>
+                </a:solidFill>
+              </a:rPr>
+              <a:t>Found something odd? </a:t>
+            </a:r>
+            <a:pPr indent="0" marL="0">
+              <a:buNone/>
+            </a:pPr>
+            <a:r>
               <a:rPr lang="en-US" sz="1300" dirty="0">
                 <a:solidFill>
                   <a:schemeClr val="tx1"/>
                 </a:solidFill>
               </a:rPr>
-              <a:t>Your one job: drag the screenshots into it on GitHub.</a:t>
+              <a:t>Tell Claude, refresh, check again.</a:t>
             </a:r>
             <a:endParaRPr lang="en-US" sz="1300" dirty="0"/>
+          </a:p>
+          <a:p>
+            <a:pPr indent="0" marL="0">
+              <a:buNone/>
+            </a:pPr>
+            <a:r>
+              <a:rPr lang="en-US" sz="1300" dirty="0">
+                <a:solidFill>
+                  <a:schemeClr val="accent2"/>
+                </a:solidFill>
+              </a:rPr>
+              <a:t>Then Claude runs its own checks and takes the screenshots for the pull request.</a:t>
+            </a:r>
+            <a:endParaRPr lang="en-US" sz="1300" dirty="0"/>
+          </a:p>
+        </p:txBody>
+      </p:sp>
+      <p:pic>
+        <p:nvPicPr>
+          <p:cNvPr id="21" name="Warning scenario screenshot" descr="small/shelf-wide.jpg">    </p:cNvPr>
+          <p:cNvPicPr>
+            <a:picLocks noChangeAspect="1"/>
+          </p:cNvPicPr>
+          <p:nvPr/>
+        </p:nvPicPr>
+        <p:blipFill>
+          <a:blip r:embed="rId1"/>
+          <a:stretch>
+            <a:fillRect/>
+          </a:stretch>
+        </p:blipFill>
+        <p:spPr>
+          <a:xfrm>
+            <a:off x="5760720" y="1097280"/>
+            <a:ext cx="2926080" cy="1670526"/>
+          </a:xfrm>
+          <a:prstGeom prst="rect">
+            <a:avLst/>
+          </a:prstGeom>
+          <a:effectLst>
+            <a:outerShdw sx="100000" sy="100000" kx="0" ky="0" algn="bl" rotWithShape="0" blurRad="76200" dist="25400" dir="5400000">
+              <a:srgbClr val="000000">
+                <a:alpha val="18000"/>
+              </a:srgbClr>
+            </a:outerShdw>
+          </a:effectLst>
+        </p:spPr>
+      </p:pic>
+      <p:sp>
+        <p:nvSpPr>
+          <p:cNvPr id="22" name="Text 19"/>
+          <p:cNvSpPr txBox="1"/>
+          <p:nvPr/>
+        </p:nvSpPr>
+        <p:spPr>
+          <a:xfrm>
+            <a:off x="5760720" y="2880360"/>
+            <a:ext cx="2926080" cy="457200"/>
+          </a:xfrm>
+          <a:prstGeom prst="rect">
+            <a:avLst/>
+          </a:prstGeom>
+          <a:noFill/>
+          <a:ln/>
+        </p:spPr>
+        <p:txBody>
+          <a:bodyPr wrap="square" lIns="0" tIns="0" rIns="0" bIns="0" rtlCol="0" anchor="t"/>
+          <a:lstStyle/>
+          <a:p>
+            <a:pPr algn="ctr" indent="0" marL="0">
+              <a:buNone/>
+            </a:pPr>
+            <a:r>
+              <a:rPr lang="en-US" sz="1100" dirty="0">
+                <a:solidFill>
+                  <a:schemeClr val="accent2"/>
+                </a:solidFill>
+              </a:rPr>
+              <a:t>Real example: making a warning appear (2000 mm wide, 40 kg)</a:t>
+            </a:r>
+            <a:endParaRPr lang="en-US" sz="1100" dirty="0"/>
           </a:p>
         </p:txBody>
       </p:sp>
@@ -6694,7 +6613,7 @@
                   <a:schemeClr val="tx1"/>
                 </a:solidFill>
               </a:rPr>
-              <a:t>After you send it</a:t>
+              <a:t>Last step: Claude creates the PR</a:t>
             </a:r>
             <a:endParaRPr lang="en-US" sz="2400" dirty="0"/>
           </a:p>
@@ -6702,18 +6621,297 @@
       </p:sp>
       <p:sp>
         <p:nvSpPr>
-          <p:cNvPr id="3" name="Shape 1"/>
+          <p:cNvPr id="3" name="Simulation tag"/>
+          <p:cNvSpPr txBox="1"/>
+          <p:nvPr/>
+        </p:nvSpPr>
+        <p:spPr>
+          <a:xfrm>
+            <a:off x="6949440" y="466344"/>
+            <a:ext cx="1737360" cy="256032"/>
+          </a:xfrm>
+          <a:prstGeom prst="rect">
+            <a:avLst/>
+          </a:prstGeom>
+          <a:solidFill>
+            <a:schemeClr val="accent1"/>
+          </a:solidFill>
+          <a:ln/>
+        </p:spPr>
+        <p:txBody>
+          <a:bodyPr wrap="square" lIns="0" tIns="0" rIns="0" bIns="0" rtlCol="0" anchor="ctr"/>
+          <a:lstStyle/>
+          <a:p>
+            <a:pPr algn="ctr" indent="0" marL="0">
+              <a:buNone/>
+            </a:pPr>
+            <a:r>
+              <a:rPr lang="en-US" sz="1000" b="1" dirty="0">
+                <a:solidFill>
+                  <a:schemeClr val="bg1"/>
+                </a:solidFill>
+              </a:rPr>
+              <a:t>SIMULATED EXAMPLE</a:t>
+            </a:r>
+            <a:endParaRPr lang="en-US" sz="1000" dirty="0"/>
+          </a:p>
+        </p:txBody>
+      </p:sp>
+      <p:pic>
+        <p:nvPicPr>
+          <p:cNvPr id="4" name="Simulated pull request" descr="small/sim-pr.jpg">    </p:cNvPr>
+          <p:cNvPicPr>
+            <a:picLocks noChangeAspect="1"/>
+          </p:cNvPicPr>
+          <p:nvPr/>
+        </p:nvPicPr>
+        <p:blipFill>
+          <a:blip r:embed="rId1"/>
+          <a:stretch>
+            <a:fillRect/>
+          </a:stretch>
+        </p:blipFill>
+        <p:spPr>
+          <a:xfrm>
+            <a:off x="457200" y="1005840"/>
+            <a:ext cx="3307282" cy="3749040"/>
+          </a:xfrm>
+          <a:prstGeom prst="rect">
+            <a:avLst/>
+          </a:prstGeom>
+          <a:effectLst>
+            <a:outerShdw sx="100000" sy="100000" kx="0" ky="0" algn="bl" rotWithShape="0" blurRad="76200" dist="25400" dir="5400000">
+              <a:srgbClr val="000000">
+                <a:alpha val="18000"/>
+              </a:srgbClr>
+            </a:outerShdw>
+          </a:effectLst>
+        </p:spPr>
+      </p:pic>
+      <p:sp>
+        <p:nvSpPr>
+          <p:cNvPr id="5" name="Text 2"/>
+          <p:cNvSpPr txBox="1"/>
+          <p:nvPr/>
+        </p:nvSpPr>
+        <p:spPr>
+          <a:xfrm>
+            <a:off x="4937760" y="1051560"/>
+            <a:ext cx="3840480" cy="640080"/>
+          </a:xfrm>
+          <a:prstGeom prst="rect">
+            <a:avLst/>
+          </a:prstGeom>
+          <a:noFill/>
+          <a:ln/>
+        </p:spPr>
+        <p:txBody>
+          <a:bodyPr wrap="square" lIns="0" tIns="0" rIns="0" bIns="0" rtlCol="0" anchor="t"/>
+          <a:lstStyle/>
+          <a:p>
+            <a:pPr indent="0" marL="0">
+              <a:buNone/>
+            </a:pPr>
+            <a:r>
+              <a:rPr lang="en-US" sz="1400" b="1" dirty="0">
+                <a:solidFill>
+                  <a:schemeClr val="tx1"/>
+                </a:solidFill>
+              </a:rPr>
+              <a:t>When you say "I'm happy, let's send it", Claude writes the pull request in a standard shape:</a:t>
+            </a:r>
+            <a:endParaRPr lang="en-US" sz="1400" dirty="0"/>
+          </a:p>
+        </p:txBody>
+      </p:sp>
+      <p:sp>
+        <p:nvSpPr>
+          <p:cNvPr id="6" name="Text 3"/>
+          <p:cNvSpPr txBox="1"/>
+          <p:nvPr/>
+        </p:nvSpPr>
+        <p:spPr>
+          <a:xfrm>
+            <a:off x="4937760" y="1783080"/>
+            <a:ext cx="3840480" cy="2194560"/>
+          </a:xfrm>
+          <a:prstGeom prst="rect">
+            <a:avLst/>
+          </a:prstGeom>
+          <a:noFill/>
+          <a:ln/>
+        </p:spPr>
+        <p:txBody>
+          <a:bodyPr wrap="square" lIns="0" tIns="0" rIns="0" bIns="0" rtlCol="0" anchor="t"/>
+          <a:lstStyle/>
+          <a:p>
+            <a:pPr marL="342900" indent="-342900">
+              <a:spcAft>
+                <a:spcPts val="200"/>
+              </a:spcAft>
+              <a:buSzPct val="100000"/>
+              <a:buFont typeface="+mj-lt"/>
+              <a:buAutoNum type="arabicPeriod" startAt="1"/>
+            </a:pPr>
+            <a:r>
+              <a:rPr lang="en-US" sz="1400" dirty="0">
+                <a:solidFill>
+                  <a:schemeClr val="tx1"/>
+                </a:solidFill>
+              </a:rPr>
+              <a:t>What this adds</a:t>
+            </a:r>
+            <a:endParaRPr lang="en-US" sz="1400" dirty="0"/>
+          </a:p>
+          <a:p>
+            <a:pPr marL="342900" indent="-342900">
+              <a:spcAft>
+                <a:spcPts val="200"/>
+              </a:spcAft>
+              <a:buSzPct val="100000"/>
+              <a:buFont typeface="+mj-lt"/>
+              <a:buAutoNum type="arabicPeriod" startAt="1"/>
+            </a:pPr>
+            <a:r>
+              <a:rPr lang="en-US" sz="1400" dirty="0">
+                <a:solidFill>
+                  <a:schemeClr val="tx1"/>
+                </a:solidFill>
+              </a:rPr>
+              <a:t>Idea / issue</a:t>
+            </a:r>
+            <a:endParaRPr lang="en-US" sz="1400" dirty="0"/>
+          </a:p>
+          <a:p>
+            <a:pPr marL="342900" indent="-342900">
+              <a:spcAft>
+                <a:spcPts val="200"/>
+              </a:spcAft>
+              <a:buSzPct val="100000"/>
+              <a:buFont typeface="+mj-lt"/>
+              <a:buAutoNum type="arabicPeriod" startAt="1"/>
+            </a:pPr>
+            <a:r>
+              <a:rPr lang="en-US" sz="1400" dirty="0">
+                <a:solidFill>
+                  <a:schemeClr val="tx1"/>
+                </a:solidFill>
+              </a:rPr>
+              <a:t>Design brief</a:t>
+            </a:r>
+            <a:endParaRPr lang="en-US" sz="1400" dirty="0"/>
+          </a:p>
+          <a:p>
+            <a:pPr marL="342900" indent="-342900">
+              <a:spcAft>
+                <a:spcPts val="200"/>
+              </a:spcAft>
+              <a:buSzPct val="100000"/>
+              <a:buFont typeface="+mj-lt"/>
+              <a:buAutoNum type="arabicPeriod" startAt="1"/>
+            </a:pPr>
+            <a:r>
+              <a:rPr lang="en-US" sz="1400" dirty="0">
+                <a:solidFill>
+                  <a:schemeClr val="tx1"/>
+                </a:solidFill>
+              </a:rPr>
+              <a:t>Parts and sources</a:t>
+            </a:r>
+            <a:endParaRPr lang="en-US" sz="1400" dirty="0"/>
+          </a:p>
+          <a:p>
+            <a:pPr marL="342900" indent="-342900">
+              <a:spcAft>
+                <a:spcPts val="200"/>
+              </a:spcAft>
+              <a:buSzPct val="100000"/>
+              <a:buFont typeface="+mj-lt"/>
+              <a:buAutoNum type="arabicPeriod" startAt="1"/>
+            </a:pPr>
+            <a:r>
+              <a:rPr lang="en-US" sz="1400" dirty="0">
+                <a:solidFill>
+                  <a:schemeClr val="tx1"/>
+                </a:solidFill>
+              </a:rPr>
+              <a:t>How it was checked</a:t>
+            </a:r>
+            <a:endParaRPr lang="en-US" sz="1400" dirty="0"/>
+          </a:p>
+          <a:p>
+            <a:pPr marL="342900" indent="-342900">
+              <a:spcAft>
+                <a:spcPts val="200"/>
+              </a:spcAft>
+              <a:buSzPct val="100000"/>
+              <a:buFont typeface="+mj-lt"/>
+              <a:buAutoNum type="arabicPeriod" startAt="1"/>
+            </a:pPr>
+            <a:r>
+              <a:rPr lang="en-US" sz="1400" dirty="0">
+                <a:solidFill>
+                  <a:schemeClr val="tx1"/>
+                </a:solidFill>
+              </a:rPr>
+              <a:t>Screenshots</a:t>
+            </a:r>
+            <a:endParaRPr lang="en-US" sz="1400" dirty="0"/>
+          </a:p>
+          <a:p>
+            <a:pPr marL="342900" indent="-342900">
+              <a:spcAft>
+                <a:spcPts val="200"/>
+              </a:spcAft>
+              <a:buSzPct val="100000"/>
+              <a:buFont typeface="+mj-lt"/>
+              <a:buAutoNum type="arabicPeriod" startAt="1"/>
+            </a:pPr>
+            <a:r>
+              <a:rPr lang="en-US" sz="1400" dirty="0">
+                <a:solidFill>
+                  <a:schemeClr val="tx1"/>
+                </a:solidFill>
+              </a:rPr>
+              <a:t>Assumptions to verify</a:t>
+            </a:r>
+            <a:endParaRPr lang="en-US" sz="1400" dirty="0"/>
+          </a:p>
+          <a:p>
+            <a:pPr marL="342900" indent="-342900">
+              <a:spcAft>
+                <a:spcPts val="200"/>
+              </a:spcAft>
+              <a:buSzPct val="100000"/>
+              <a:buFont typeface="+mj-lt"/>
+              <a:buAutoNum type="arabicPeriod" startAt="1"/>
+            </a:pPr>
+            <a:r>
+              <a:rPr lang="en-US" sz="1400" dirty="0">
+                <a:solidFill>
+                  <a:schemeClr val="tx1"/>
+                </a:solidFill>
+              </a:rPr>
+              <a:t>Next steps</a:t>
+            </a:r>
+            <a:endParaRPr lang="en-US" sz="1400" dirty="0"/>
+          </a:p>
+        </p:txBody>
+      </p:sp>
+      <p:sp>
+        <p:nvSpPr>
+          <p:cNvPr id="7" name="Shape 4"/>
           <p:cNvSpPr/>
           <p:nvPr/>
         </p:nvSpPr>
         <p:spPr>
           <a:xfrm>
-            <a:off x="457200" y="1280160"/>
-            <a:ext cx="1874520" cy="2286000"/>
+            <a:off x="4937760" y="3977640"/>
+            <a:ext cx="3840480" cy="731520"/>
           </a:xfrm>
           <a:prstGeom prst="roundRect">
             <a:avLst>
-              <a:gd name="adj" fmla="val 3902"/>
+              <a:gd name="adj" fmla="val 10000"/>
             </a:avLst>
           </a:prstGeom>
           <a:solidFill>
@@ -6729,52 +6927,14 @@
       </p:sp>
       <p:sp>
         <p:nvSpPr>
-          <p:cNvPr id="4" name="Text 2"/>
+          <p:cNvPr id="8" name="Text 5"/>
           <p:cNvSpPr txBox="1"/>
           <p:nvPr/>
         </p:nvSpPr>
         <p:spPr>
           <a:xfrm>
-            <a:off x="1170432" y="1600200"/>
-            <a:ext cx="457200" cy="457200"/>
-          </a:xfrm>
-          <a:prstGeom prst="ellipse">
-            <a:avLst/>
-          </a:prstGeom>
-          <a:solidFill>
-            <a:schemeClr val="tx2"/>
-          </a:solidFill>
-          <a:ln/>
-        </p:spPr>
-        <p:txBody>
-          <a:bodyPr wrap="square" lIns="0" tIns="0" rIns="0" bIns="0" rtlCol="0" anchor="ctr"/>
-          <a:lstStyle/>
-          <a:p>
-            <a:pPr algn="ctr" indent="0" marL="0">
-              <a:buNone/>
-            </a:pPr>
-            <a:r>
-              <a:rPr lang="en-US" sz="1400" b="1" dirty="0">
-                <a:solidFill>
-                  <a:schemeClr val="bg1"/>
-                </a:solidFill>
-              </a:rPr>
-              <a:t>1</a:t>
-            </a:r>
-            <a:endParaRPr lang="en-US" sz="1400" dirty="0"/>
-          </a:p>
-        </p:txBody>
-      </p:sp>
-      <p:sp>
-        <p:nvSpPr>
-          <p:cNvPr id="5" name="Text 3"/>
-          <p:cNvSpPr txBox="1"/>
-          <p:nvPr/>
-        </p:nvSpPr>
-        <p:spPr>
-          <a:xfrm>
-            <a:off x="548640" y="2286000"/>
-            <a:ext cx="1691640" cy="1097280"/>
+            <a:off x="5120640" y="4069080"/>
+            <a:ext cx="3474720" cy="548640"/>
           </a:xfrm>
           <a:prstGeom prst="rect">
             <a:avLst/>
@@ -6786,485 +6946,18 @@
           <a:bodyPr wrap="square" lIns="0" tIns="0" rIns="0" bIns="0" rtlCol="0" anchor="t"/>
           <a:lstStyle/>
           <a:p>
-            <a:pPr algn="ctr" indent="0" marL="0">
-              <a:buNone/>
-            </a:pPr>
-            <a:r>
-              <a:rPr lang="en-US" sz="1500" b="1" dirty="0">
+            <a:pPr indent="0" marL="0">
+              <a:buNone/>
+            </a:pPr>
+            <a:r>
+              <a:rPr lang="en-US" sz="1300" dirty="0">
                 <a:solidFill>
                   <a:schemeClr val="tx1"/>
                 </a:solidFill>
               </a:rPr>
-              <a:t>Owner reviews</a:t>
-            </a:r>
-            <a:endParaRPr lang="en-US" sz="1400" dirty="0"/>
-          </a:p>
-          <a:p>
-            <a:pPr algn="ctr" indent="0" marL="0">
-              <a:buNone/>
-            </a:pPr>
-            <a:r>
-              <a:rPr lang="en-US" sz="1200" dirty="0">
-                <a:solidFill>
-                  <a:schemeClr val="accent2"/>
-                </a:solidFill>
-              </a:rPr>
-              <a:t>Starting with the brief</a:t>
-            </a:r>
-            <a:endParaRPr lang="en-US" sz="1400" dirty="0"/>
-          </a:p>
-        </p:txBody>
-      </p:sp>
-      <p:sp>
-        <p:nvSpPr>
-          <p:cNvPr id="6" name="Shape 4"/>
-          <p:cNvSpPr/>
-          <p:nvPr/>
-        </p:nvSpPr>
-        <p:spPr>
-          <a:xfrm>
-            <a:off x="2350008" y="2423160"/>
-            <a:ext cx="219456" cy="0"/>
-          </a:xfrm>
-          <a:prstGeom prst="line">
-            <a:avLst/>
-          </a:prstGeom>
-          <a:noFill/>
-          <a:ln w="19050">
-            <a:solidFill>
-              <a:schemeClr val="accent3"/>
-            </a:solidFill>
-            <a:prstDash val="solid"/>
-            <a:tailEnd type="triangle"/>
-          </a:ln>
-        </p:spPr>
-      </p:sp>
-      <p:sp>
-        <p:nvSpPr>
-          <p:cNvPr id="7" name="Shape 5"/>
-          <p:cNvSpPr/>
-          <p:nvPr/>
-        </p:nvSpPr>
-        <p:spPr>
-          <a:xfrm>
-            <a:off x="2587752" y="1280160"/>
-            <a:ext cx="1874520" cy="2286000"/>
-          </a:xfrm>
-          <a:prstGeom prst="roundRect">
-            <a:avLst>
-              <a:gd name="adj" fmla="val 3902"/>
-            </a:avLst>
-          </a:prstGeom>
-          <a:solidFill>
-            <a:schemeClr val="bg2"/>
-          </a:solidFill>
-          <a:ln w="12700">
-            <a:solidFill>
-              <a:schemeClr val="bg2"/>
-            </a:solidFill>
-            <a:prstDash val="solid"/>
-          </a:ln>
-        </p:spPr>
-      </p:sp>
-      <p:sp>
-        <p:nvSpPr>
-          <p:cNvPr id="8" name="Text 6"/>
-          <p:cNvSpPr txBox="1"/>
-          <p:nvPr/>
-        </p:nvSpPr>
-        <p:spPr>
-          <a:xfrm>
-            <a:off x="3300984" y="1600200"/>
-            <a:ext cx="457200" cy="457200"/>
-          </a:xfrm>
-          <a:prstGeom prst="ellipse">
-            <a:avLst/>
-          </a:prstGeom>
-          <a:solidFill>
-            <a:schemeClr val="tx2"/>
-          </a:solidFill>
-          <a:ln/>
-        </p:spPr>
-        <p:txBody>
-          <a:bodyPr wrap="square" lIns="0" tIns="0" rIns="0" bIns="0" rtlCol="0" anchor="ctr"/>
-          <a:lstStyle/>
-          <a:p>
-            <a:pPr algn="ctr" indent="0" marL="0">
-              <a:buNone/>
-            </a:pPr>
-            <a:r>
-              <a:rPr lang="en-US" sz="1400" b="1" dirty="0">
-                <a:solidFill>
-                  <a:schemeClr val="bg1"/>
-                </a:solidFill>
-              </a:rPr>
-              <a:t>2</a:t>
-            </a:r>
-            <a:endParaRPr lang="en-US" sz="1400" dirty="0"/>
-          </a:p>
-        </p:txBody>
-      </p:sp>
-      <p:sp>
-        <p:nvSpPr>
-          <p:cNvPr id="9" name="Text 7"/>
-          <p:cNvSpPr txBox="1"/>
-          <p:nvPr/>
-        </p:nvSpPr>
-        <p:spPr>
-          <a:xfrm>
-            <a:off x="2679192" y="2286000"/>
-            <a:ext cx="1691640" cy="1097280"/>
-          </a:xfrm>
-          <a:prstGeom prst="rect">
-            <a:avLst/>
-          </a:prstGeom>
-          <a:noFill/>
-          <a:ln/>
-        </p:spPr>
-        <p:txBody>
-          <a:bodyPr wrap="square" lIns="0" tIns="0" rIns="0" bIns="0" rtlCol="0" anchor="t"/>
-          <a:lstStyle/>
-          <a:p>
-            <a:pPr algn="ctr" indent="0" marL="0">
-              <a:buNone/>
-            </a:pPr>
-            <a:r>
-              <a:rPr lang="en-US" sz="1500" b="1" dirty="0">
-                <a:solidFill>
-                  <a:schemeClr val="tx1"/>
-                </a:solidFill>
-              </a:rPr>
-              <a:t>Comments</a:t>
-            </a:r>
-            <a:endParaRPr lang="en-US" sz="1400" dirty="0"/>
-          </a:p>
-          <a:p>
-            <a:pPr algn="ctr" indent="0" marL="0">
-              <a:buNone/>
-            </a:pPr>
-            <a:r>
-              <a:rPr lang="en-US" sz="1200" dirty="0">
-                <a:solidFill>
-                  <a:schemeClr val="accent2"/>
-                </a:solidFill>
-              </a:rPr>
-              <a:t>Questions or changes</a:t>
-            </a:r>
-            <a:endParaRPr lang="en-US" sz="1400" dirty="0"/>
-          </a:p>
-        </p:txBody>
-      </p:sp>
-      <p:sp>
-        <p:nvSpPr>
-          <p:cNvPr id="10" name="Shape 8"/>
-          <p:cNvSpPr/>
-          <p:nvPr/>
-        </p:nvSpPr>
-        <p:spPr>
-          <a:xfrm>
-            <a:off x="4480560" y="2423160"/>
-            <a:ext cx="219456" cy="0"/>
-          </a:xfrm>
-          <a:prstGeom prst="line">
-            <a:avLst/>
-          </a:prstGeom>
-          <a:noFill/>
-          <a:ln w="19050">
-            <a:solidFill>
-              <a:schemeClr val="accent3"/>
-            </a:solidFill>
-            <a:prstDash val="solid"/>
-            <a:tailEnd type="triangle"/>
-          </a:ln>
-        </p:spPr>
-      </p:sp>
-      <p:sp>
-        <p:nvSpPr>
-          <p:cNvPr id="11" name="Shape 9"/>
-          <p:cNvSpPr/>
-          <p:nvPr/>
-        </p:nvSpPr>
-        <p:spPr>
-          <a:xfrm>
-            <a:off x="4718304" y="1280160"/>
-            <a:ext cx="1874520" cy="2286000"/>
-          </a:xfrm>
-          <a:prstGeom prst="roundRect">
-            <a:avLst>
-              <a:gd name="adj" fmla="val 3902"/>
-            </a:avLst>
-          </a:prstGeom>
-          <a:solidFill>
-            <a:schemeClr val="bg2"/>
-          </a:solidFill>
-          <a:ln w="12700">
-            <a:solidFill>
-              <a:schemeClr val="bg2"/>
-            </a:solidFill>
-            <a:prstDash val="solid"/>
-          </a:ln>
-        </p:spPr>
-      </p:sp>
-      <p:sp>
-        <p:nvSpPr>
-          <p:cNvPr id="12" name="Text 10"/>
-          <p:cNvSpPr txBox="1"/>
-          <p:nvPr/>
-        </p:nvSpPr>
-        <p:spPr>
-          <a:xfrm>
-            <a:off x="5431536" y="1600200"/>
-            <a:ext cx="457200" cy="457200"/>
-          </a:xfrm>
-          <a:prstGeom prst="ellipse">
-            <a:avLst/>
-          </a:prstGeom>
-          <a:solidFill>
-            <a:schemeClr val="tx2"/>
-          </a:solidFill>
-          <a:ln/>
-        </p:spPr>
-        <p:txBody>
-          <a:bodyPr wrap="square" lIns="0" tIns="0" rIns="0" bIns="0" rtlCol="0" anchor="ctr"/>
-          <a:lstStyle/>
-          <a:p>
-            <a:pPr algn="ctr" indent="0" marL="0">
-              <a:buNone/>
-            </a:pPr>
-            <a:r>
-              <a:rPr lang="en-US" sz="1400" b="1" dirty="0">
-                <a:solidFill>
-                  <a:schemeClr val="bg1"/>
-                </a:solidFill>
-              </a:rPr>
-              <a:t>3</a:t>
-            </a:r>
-            <a:endParaRPr lang="en-US" sz="1400" dirty="0"/>
-          </a:p>
-        </p:txBody>
-      </p:sp>
-      <p:sp>
-        <p:nvSpPr>
-          <p:cNvPr id="13" name="Text 11"/>
-          <p:cNvSpPr txBox="1"/>
-          <p:nvPr/>
-        </p:nvSpPr>
-        <p:spPr>
-          <a:xfrm>
-            <a:off x="4809744" y="2286000"/>
-            <a:ext cx="1691640" cy="1097280"/>
-          </a:xfrm>
-          <a:prstGeom prst="rect">
-            <a:avLst/>
-          </a:prstGeom>
-          <a:noFill/>
-          <a:ln/>
-        </p:spPr>
-        <p:txBody>
-          <a:bodyPr wrap="square" lIns="0" tIns="0" rIns="0" bIns="0" rtlCol="0" anchor="t"/>
-          <a:lstStyle/>
-          <a:p>
-            <a:pPr algn="ctr" indent="0" marL="0">
-              <a:buNone/>
-            </a:pPr>
-            <a:r>
-              <a:rPr lang="en-US" sz="1500" b="1" dirty="0">
-                <a:solidFill>
-                  <a:schemeClr val="tx1"/>
-                </a:solidFill>
-              </a:rPr>
-              <a:t>Ask Claude</a:t>
-            </a:r>
-            <a:endParaRPr lang="en-US" sz="1400" dirty="0"/>
-          </a:p>
-          <a:p>
-            <a:pPr algn="ctr" indent="0" marL="0">
-              <a:buNone/>
-            </a:pPr>
-            <a:r>
-              <a:rPr lang="en-US" sz="1200" dirty="0">
-                <a:solidFill>
-                  <a:schemeClr val="accent2"/>
-                </a:solidFill>
-              </a:rPr>
-              <a:t>"let's work on the review comments"</a:t>
-            </a:r>
-            <a:endParaRPr lang="en-US" sz="1400" dirty="0"/>
-          </a:p>
-        </p:txBody>
-      </p:sp>
-      <p:sp>
-        <p:nvSpPr>
-          <p:cNvPr id="14" name="Shape 12"/>
-          <p:cNvSpPr/>
-          <p:nvPr/>
-        </p:nvSpPr>
-        <p:spPr>
-          <a:xfrm>
-            <a:off x="6611112" y="2423160"/>
-            <a:ext cx="219456" cy="0"/>
-          </a:xfrm>
-          <a:prstGeom prst="line">
-            <a:avLst/>
-          </a:prstGeom>
-          <a:noFill/>
-          <a:ln w="19050">
-            <a:solidFill>
-              <a:schemeClr val="accent3"/>
-            </a:solidFill>
-            <a:prstDash val="solid"/>
-            <a:tailEnd type="triangle"/>
-          </a:ln>
-        </p:spPr>
-      </p:sp>
-      <p:sp>
-        <p:nvSpPr>
-          <p:cNvPr id="15" name="Shape 13"/>
-          <p:cNvSpPr/>
-          <p:nvPr/>
-        </p:nvSpPr>
-        <p:spPr>
-          <a:xfrm>
-            <a:off x="6848856" y="1280160"/>
-            <a:ext cx="1874520" cy="2286000"/>
-          </a:xfrm>
-          <a:prstGeom prst="roundRect">
-            <a:avLst>
-              <a:gd name="adj" fmla="val 3902"/>
-            </a:avLst>
-          </a:prstGeom>
-          <a:solidFill>
-            <a:schemeClr val="tx2"/>
-          </a:solidFill>
-          <a:ln w="12700">
-            <a:solidFill>
-              <a:schemeClr val="tx2"/>
-            </a:solidFill>
-            <a:prstDash val="solid"/>
-          </a:ln>
-        </p:spPr>
-      </p:sp>
-      <p:sp>
-        <p:nvSpPr>
-          <p:cNvPr id="16" name="Text 14"/>
-          <p:cNvSpPr txBox="1"/>
-          <p:nvPr/>
-        </p:nvSpPr>
-        <p:spPr>
-          <a:xfrm>
-            <a:off x="7562088" y="1600200"/>
-            <a:ext cx="457200" cy="457200"/>
-          </a:xfrm>
-          <a:prstGeom prst="ellipse">
-            <a:avLst/>
-          </a:prstGeom>
-          <a:solidFill>
-            <a:schemeClr val="accent1"/>
-          </a:solidFill>
-          <a:ln/>
-        </p:spPr>
-        <p:txBody>
-          <a:bodyPr wrap="square" lIns="0" tIns="0" rIns="0" bIns="0" rtlCol="0" anchor="ctr"/>
-          <a:lstStyle/>
-          <a:p>
-            <a:pPr algn="ctr" indent="0" marL="0">
-              <a:buNone/>
-            </a:pPr>
-            <a:r>
-              <a:rPr lang="en-US" sz="1400" b="1" dirty="0">
-                <a:solidFill>
-                  <a:schemeClr val="bg1"/>
-                </a:solidFill>
-              </a:rPr>
-              <a:t>4</a:t>
-            </a:r>
-            <a:endParaRPr lang="en-US" sz="1400" dirty="0"/>
-          </a:p>
-        </p:txBody>
-      </p:sp>
-      <p:sp>
-        <p:nvSpPr>
-          <p:cNvPr id="17" name="Text 15"/>
-          <p:cNvSpPr txBox="1"/>
-          <p:nvPr/>
-        </p:nvSpPr>
-        <p:spPr>
-          <a:xfrm>
-            <a:off x="6940296" y="2286000"/>
-            <a:ext cx="1691640" cy="1097280"/>
-          </a:xfrm>
-          <a:prstGeom prst="rect">
-            <a:avLst/>
-          </a:prstGeom>
-          <a:noFill/>
-          <a:ln/>
-        </p:spPr>
-        <p:txBody>
-          <a:bodyPr wrap="square" lIns="0" tIns="0" rIns="0" bIns="0" rtlCol="0" anchor="t"/>
-          <a:lstStyle/>
-          <a:p>
-            <a:pPr algn="ctr" indent="0" marL="0">
-              <a:buNone/>
-            </a:pPr>
-            <a:r>
-              <a:rPr lang="en-US" sz="1500" b="1" dirty="0">
-                <a:solidFill>
-                  <a:schemeClr val="bg1"/>
-                </a:solidFill>
-              </a:rPr>
-              <a:t>Merged</a:t>
-            </a:r>
-            <a:endParaRPr lang="en-US" sz="1400" dirty="0"/>
-          </a:p>
-          <a:p>
-            <a:pPr algn="ctr" indent="0" marL="0">
-              <a:buNone/>
-            </a:pPr>
-            <a:r>
-              <a:rPr lang="en-US" sz="1200" dirty="0">
-                <a:solidFill>
-                  <a:schemeClr val="accent4"/>
-                </a:solidFill>
-              </a:rPr>
-              <a:t>Your piece is live</a:t>
-            </a:r>
-            <a:endParaRPr lang="en-US" sz="1400" dirty="0"/>
-          </a:p>
-        </p:txBody>
-      </p:sp>
-      <p:sp>
-        <p:nvSpPr>
-          <p:cNvPr id="18" name="Text 16"/>
-          <p:cNvSpPr txBox="1"/>
-          <p:nvPr/>
-        </p:nvSpPr>
-        <p:spPr>
-          <a:xfrm>
-            <a:off x="457200" y="3931920"/>
-            <a:ext cx="8229600" cy="548640"/>
-          </a:xfrm>
-          <a:prstGeom prst="rect">
-            <a:avLst/>
-          </a:prstGeom>
-          <a:noFill/>
-          <a:ln/>
-        </p:spPr>
-        <p:txBody>
-          <a:bodyPr wrap="square" lIns="0" tIns="0" rIns="0" bIns="0" rtlCol="0" anchor="t"/>
-          <a:lstStyle/>
-          <a:p>
-            <a:pPr indent="0" marL="0">
-              <a:buNone/>
-            </a:pPr>
-            <a:r>
-              <a:rPr lang="en-US" sz="1500" dirty="0">
-                <a:solidFill>
-                  <a:schemeClr val="accent2"/>
-                </a:solidFill>
-              </a:rPr>
-              <a:t>Changes go on the same pull request: open Code again, select the repository, and Claude picks up the comments.</a:t>
-            </a:r>
-            <a:endParaRPr lang="en-US" sz="1500" dirty="0"/>
+              <a:t>Your one job: drag the screenshots into it on GitHub.</a:t>
+            </a:r>
+            <a:endParaRPr lang="en-US" sz="1300" dirty="0"/>
           </a:p>
         </p:txBody>
       </p:sp>
@@ -7626,6 +7319,682 @@
         </p:nvSpPr>
         <p:spPr>
           <a:xfrm>
+            <a:off x="457200" y="274320"/>
+            <a:ext cx="6400800" cy="640080"/>
+          </a:xfrm>
+          <a:prstGeom prst="rect">
+            <a:avLst/>
+          </a:prstGeom>
+          <a:noFill/>
+          <a:ln/>
+        </p:spPr>
+        <p:txBody>
+          <a:bodyPr wrap="square" lIns="0" tIns="0" rIns="0" bIns="0" rtlCol="0" anchor="ctr"/>
+          <a:lstStyle/>
+          <a:p>
+            <a:pPr algn="l" indent="0" marL="0">
+              <a:buNone/>
+            </a:pPr>
+            <a:r>
+              <a:rPr lang="en-US" sz="2400" b="1" dirty="0">
+                <a:solidFill>
+                  <a:schemeClr val="tx1"/>
+                </a:solidFill>
+              </a:rPr>
+              <a:t>After you send it</a:t>
+            </a:r>
+            <a:endParaRPr lang="en-US" sz="2400" dirty="0"/>
+          </a:p>
+        </p:txBody>
+      </p:sp>
+      <p:sp>
+        <p:nvSpPr>
+          <p:cNvPr id="3" name="Shape 1"/>
+          <p:cNvSpPr/>
+          <p:nvPr/>
+        </p:nvSpPr>
+        <p:spPr>
+          <a:xfrm>
+            <a:off x="457200" y="1280160"/>
+            <a:ext cx="1874520" cy="2286000"/>
+          </a:xfrm>
+          <a:prstGeom prst="roundRect">
+            <a:avLst>
+              <a:gd name="adj" fmla="val 3902"/>
+            </a:avLst>
+          </a:prstGeom>
+          <a:solidFill>
+            <a:schemeClr val="bg2"/>
+          </a:solidFill>
+          <a:ln w="12700">
+            <a:solidFill>
+              <a:schemeClr val="bg2"/>
+            </a:solidFill>
+            <a:prstDash val="solid"/>
+          </a:ln>
+        </p:spPr>
+      </p:sp>
+      <p:sp>
+        <p:nvSpPr>
+          <p:cNvPr id="4" name="Text 2"/>
+          <p:cNvSpPr txBox="1"/>
+          <p:nvPr/>
+        </p:nvSpPr>
+        <p:spPr>
+          <a:xfrm>
+            <a:off x="1170432" y="1600200"/>
+            <a:ext cx="457200" cy="457200"/>
+          </a:xfrm>
+          <a:prstGeom prst="ellipse">
+            <a:avLst/>
+          </a:prstGeom>
+          <a:solidFill>
+            <a:schemeClr val="tx2"/>
+          </a:solidFill>
+          <a:ln/>
+        </p:spPr>
+        <p:txBody>
+          <a:bodyPr wrap="square" lIns="0" tIns="0" rIns="0" bIns="0" rtlCol="0" anchor="ctr"/>
+          <a:lstStyle/>
+          <a:p>
+            <a:pPr algn="ctr" indent="0" marL="0">
+              <a:buNone/>
+            </a:pPr>
+            <a:r>
+              <a:rPr lang="en-US" sz="1400" b="1" dirty="0">
+                <a:solidFill>
+                  <a:schemeClr val="bg1"/>
+                </a:solidFill>
+              </a:rPr>
+              <a:t>1</a:t>
+            </a:r>
+            <a:endParaRPr lang="en-US" sz="1400" dirty="0"/>
+          </a:p>
+        </p:txBody>
+      </p:sp>
+      <p:sp>
+        <p:nvSpPr>
+          <p:cNvPr id="5" name="Text 3"/>
+          <p:cNvSpPr txBox="1"/>
+          <p:nvPr/>
+        </p:nvSpPr>
+        <p:spPr>
+          <a:xfrm>
+            <a:off x="548640" y="2286000"/>
+            <a:ext cx="1691640" cy="1097280"/>
+          </a:xfrm>
+          <a:prstGeom prst="rect">
+            <a:avLst/>
+          </a:prstGeom>
+          <a:noFill/>
+          <a:ln/>
+        </p:spPr>
+        <p:txBody>
+          <a:bodyPr wrap="square" lIns="0" tIns="0" rIns="0" bIns="0" rtlCol="0" anchor="t"/>
+          <a:lstStyle/>
+          <a:p>
+            <a:pPr algn="ctr" indent="0" marL="0">
+              <a:buNone/>
+            </a:pPr>
+            <a:r>
+              <a:rPr lang="en-US" sz="1500" b="1" dirty="0">
+                <a:solidFill>
+                  <a:schemeClr val="tx1"/>
+                </a:solidFill>
+              </a:rPr>
+              <a:t>Owner reviews</a:t>
+            </a:r>
+            <a:endParaRPr lang="en-US" sz="1400" dirty="0"/>
+          </a:p>
+          <a:p>
+            <a:pPr algn="ctr" indent="0" marL="0">
+              <a:buNone/>
+            </a:pPr>
+            <a:r>
+              <a:rPr lang="en-US" sz="1200" dirty="0">
+                <a:solidFill>
+                  <a:schemeClr val="accent2"/>
+                </a:solidFill>
+              </a:rPr>
+              <a:t>Starting with the brief</a:t>
+            </a:r>
+            <a:endParaRPr lang="en-US" sz="1400" dirty="0"/>
+          </a:p>
+        </p:txBody>
+      </p:sp>
+      <p:sp>
+        <p:nvSpPr>
+          <p:cNvPr id="6" name="Shape 4"/>
+          <p:cNvSpPr/>
+          <p:nvPr/>
+        </p:nvSpPr>
+        <p:spPr>
+          <a:xfrm>
+            <a:off x="2350008" y="2423160"/>
+            <a:ext cx="219456" cy="0"/>
+          </a:xfrm>
+          <a:prstGeom prst="line">
+            <a:avLst/>
+          </a:prstGeom>
+          <a:noFill/>
+          <a:ln w="19050">
+            <a:solidFill>
+              <a:schemeClr val="accent3"/>
+            </a:solidFill>
+            <a:prstDash val="solid"/>
+            <a:tailEnd type="triangle"/>
+          </a:ln>
+        </p:spPr>
+      </p:sp>
+      <p:sp>
+        <p:nvSpPr>
+          <p:cNvPr id="7" name="Shape 5"/>
+          <p:cNvSpPr/>
+          <p:nvPr/>
+        </p:nvSpPr>
+        <p:spPr>
+          <a:xfrm>
+            <a:off x="2587752" y="1280160"/>
+            <a:ext cx="1874520" cy="2286000"/>
+          </a:xfrm>
+          <a:prstGeom prst="roundRect">
+            <a:avLst>
+              <a:gd name="adj" fmla="val 3902"/>
+            </a:avLst>
+          </a:prstGeom>
+          <a:solidFill>
+            <a:schemeClr val="bg2"/>
+          </a:solidFill>
+          <a:ln w="12700">
+            <a:solidFill>
+              <a:schemeClr val="bg2"/>
+            </a:solidFill>
+            <a:prstDash val="solid"/>
+          </a:ln>
+        </p:spPr>
+      </p:sp>
+      <p:sp>
+        <p:nvSpPr>
+          <p:cNvPr id="8" name="Text 6"/>
+          <p:cNvSpPr txBox="1"/>
+          <p:nvPr/>
+        </p:nvSpPr>
+        <p:spPr>
+          <a:xfrm>
+            <a:off x="3300984" y="1600200"/>
+            <a:ext cx="457200" cy="457200"/>
+          </a:xfrm>
+          <a:prstGeom prst="ellipse">
+            <a:avLst/>
+          </a:prstGeom>
+          <a:solidFill>
+            <a:schemeClr val="tx2"/>
+          </a:solidFill>
+          <a:ln/>
+        </p:spPr>
+        <p:txBody>
+          <a:bodyPr wrap="square" lIns="0" tIns="0" rIns="0" bIns="0" rtlCol="0" anchor="ctr"/>
+          <a:lstStyle/>
+          <a:p>
+            <a:pPr algn="ctr" indent="0" marL="0">
+              <a:buNone/>
+            </a:pPr>
+            <a:r>
+              <a:rPr lang="en-US" sz="1400" b="1" dirty="0">
+                <a:solidFill>
+                  <a:schemeClr val="bg1"/>
+                </a:solidFill>
+              </a:rPr>
+              <a:t>2</a:t>
+            </a:r>
+            <a:endParaRPr lang="en-US" sz="1400" dirty="0"/>
+          </a:p>
+        </p:txBody>
+      </p:sp>
+      <p:sp>
+        <p:nvSpPr>
+          <p:cNvPr id="9" name="Text 7"/>
+          <p:cNvSpPr txBox="1"/>
+          <p:nvPr/>
+        </p:nvSpPr>
+        <p:spPr>
+          <a:xfrm>
+            <a:off x="2679192" y="2286000"/>
+            <a:ext cx="1691640" cy="1097280"/>
+          </a:xfrm>
+          <a:prstGeom prst="rect">
+            <a:avLst/>
+          </a:prstGeom>
+          <a:noFill/>
+          <a:ln/>
+        </p:spPr>
+        <p:txBody>
+          <a:bodyPr wrap="square" lIns="0" tIns="0" rIns="0" bIns="0" rtlCol="0" anchor="t"/>
+          <a:lstStyle/>
+          <a:p>
+            <a:pPr algn="ctr" indent="0" marL="0">
+              <a:buNone/>
+            </a:pPr>
+            <a:r>
+              <a:rPr lang="en-US" sz="1500" b="1" dirty="0">
+                <a:solidFill>
+                  <a:schemeClr val="tx1"/>
+                </a:solidFill>
+              </a:rPr>
+              <a:t>Comments</a:t>
+            </a:r>
+            <a:endParaRPr lang="en-US" sz="1400" dirty="0"/>
+          </a:p>
+          <a:p>
+            <a:pPr algn="ctr" indent="0" marL="0">
+              <a:buNone/>
+            </a:pPr>
+            <a:r>
+              <a:rPr lang="en-US" sz="1200" dirty="0">
+                <a:solidFill>
+                  <a:schemeClr val="accent2"/>
+                </a:solidFill>
+              </a:rPr>
+              <a:t>Questions or changes</a:t>
+            </a:r>
+            <a:endParaRPr lang="en-US" sz="1400" dirty="0"/>
+          </a:p>
+        </p:txBody>
+      </p:sp>
+      <p:sp>
+        <p:nvSpPr>
+          <p:cNvPr id="10" name="Shape 8"/>
+          <p:cNvSpPr/>
+          <p:nvPr/>
+        </p:nvSpPr>
+        <p:spPr>
+          <a:xfrm>
+            <a:off x="4480560" y="2423160"/>
+            <a:ext cx="219456" cy="0"/>
+          </a:xfrm>
+          <a:prstGeom prst="line">
+            <a:avLst/>
+          </a:prstGeom>
+          <a:noFill/>
+          <a:ln w="19050">
+            <a:solidFill>
+              <a:schemeClr val="accent3"/>
+            </a:solidFill>
+            <a:prstDash val="solid"/>
+            <a:tailEnd type="triangle"/>
+          </a:ln>
+        </p:spPr>
+      </p:sp>
+      <p:sp>
+        <p:nvSpPr>
+          <p:cNvPr id="11" name="Shape 9"/>
+          <p:cNvSpPr/>
+          <p:nvPr/>
+        </p:nvSpPr>
+        <p:spPr>
+          <a:xfrm>
+            <a:off x="4718304" y="1280160"/>
+            <a:ext cx="1874520" cy="2286000"/>
+          </a:xfrm>
+          <a:prstGeom prst="roundRect">
+            <a:avLst>
+              <a:gd name="adj" fmla="val 3902"/>
+            </a:avLst>
+          </a:prstGeom>
+          <a:solidFill>
+            <a:schemeClr val="bg2"/>
+          </a:solidFill>
+          <a:ln w="12700">
+            <a:solidFill>
+              <a:schemeClr val="bg2"/>
+            </a:solidFill>
+            <a:prstDash val="solid"/>
+          </a:ln>
+        </p:spPr>
+      </p:sp>
+      <p:sp>
+        <p:nvSpPr>
+          <p:cNvPr id="12" name="Text 10"/>
+          <p:cNvSpPr txBox="1"/>
+          <p:nvPr/>
+        </p:nvSpPr>
+        <p:spPr>
+          <a:xfrm>
+            <a:off x="5431536" y="1600200"/>
+            <a:ext cx="457200" cy="457200"/>
+          </a:xfrm>
+          <a:prstGeom prst="ellipse">
+            <a:avLst/>
+          </a:prstGeom>
+          <a:solidFill>
+            <a:schemeClr val="tx2"/>
+          </a:solidFill>
+          <a:ln/>
+        </p:spPr>
+        <p:txBody>
+          <a:bodyPr wrap="square" lIns="0" tIns="0" rIns="0" bIns="0" rtlCol="0" anchor="ctr"/>
+          <a:lstStyle/>
+          <a:p>
+            <a:pPr algn="ctr" indent="0" marL="0">
+              <a:buNone/>
+            </a:pPr>
+            <a:r>
+              <a:rPr lang="en-US" sz="1400" b="1" dirty="0">
+                <a:solidFill>
+                  <a:schemeClr val="bg1"/>
+                </a:solidFill>
+              </a:rPr>
+              <a:t>3</a:t>
+            </a:r>
+            <a:endParaRPr lang="en-US" sz="1400" dirty="0"/>
+          </a:p>
+        </p:txBody>
+      </p:sp>
+      <p:sp>
+        <p:nvSpPr>
+          <p:cNvPr id="13" name="Text 11"/>
+          <p:cNvSpPr txBox="1"/>
+          <p:nvPr/>
+        </p:nvSpPr>
+        <p:spPr>
+          <a:xfrm>
+            <a:off x="4809744" y="2286000"/>
+            <a:ext cx="1691640" cy="1097280"/>
+          </a:xfrm>
+          <a:prstGeom prst="rect">
+            <a:avLst/>
+          </a:prstGeom>
+          <a:noFill/>
+          <a:ln/>
+        </p:spPr>
+        <p:txBody>
+          <a:bodyPr wrap="square" lIns="0" tIns="0" rIns="0" bIns="0" rtlCol="0" anchor="t"/>
+          <a:lstStyle/>
+          <a:p>
+            <a:pPr algn="ctr" indent="0" marL="0">
+              <a:buNone/>
+            </a:pPr>
+            <a:r>
+              <a:rPr lang="en-US" sz="1500" b="1" dirty="0">
+                <a:solidFill>
+                  <a:schemeClr val="tx1"/>
+                </a:solidFill>
+              </a:rPr>
+              <a:t>Ask Claude</a:t>
+            </a:r>
+            <a:endParaRPr lang="en-US" sz="1400" dirty="0"/>
+          </a:p>
+          <a:p>
+            <a:pPr algn="ctr" indent="0" marL="0">
+              <a:buNone/>
+            </a:pPr>
+            <a:r>
+              <a:rPr lang="en-US" sz="1200" dirty="0">
+                <a:solidFill>
+                  <a:schemeClr val="accent2"/>
+                </a:solidFill>
+              </a:rPr>
+              <a:t>"let's work on the review comments"</a:t>
+            </a:r>
+            <a:endParaRPr lang="en-US" sz="1400" dirty="0"/>
+          </a:p>
+        </p:txBody>
+      </p:sp>
+      <p:sp>
+        <p:nvSpPr>
+          <p:cNvPr id="14" name="Shape 12"/>
+          <p:cNvSpPr/>
+          <p:nvPr/>
+        </p:nvSpPr>
+        <p:spPr>
+          <a:xfrm>
+            <a:off x="6611112" y="2423160"/>
+            <a:ext cx="219456" cy="0"/>
+          </a:xfrm>
+          <a:prstGeom prst="line">
+            <a:avLst/>
+          </a:prstGeom>
+          <a:noFill/>
+          <a:ln w="19050">
+            <a:solidFill>
+              <a:schemeClr val="accent3"/>
+            </a:solidFill>
+            <a:prstDash val="solid"/>
+            <a:tailEnd type="triangle"/>
+          </a:ln>
+        </p:spPr>
+      </p:sp>
+      <p:sp>
+        <p:nvSpPr>
+          <p:cNvPr id="15" name="Shape 13"/>
+          <p:cNvSpPr/>
+          <p:nvPr/>
+        </p:nvSpPr>
+        <p:spPr>
+          <a:xfrm>
+            <a:off x="6848856" y="1280160"/>
+            <a:ext cx="1874520" cy="2286000"/>
+          </a:xfrm>
+          <a:prstGeom prst="roundRect">
+            <a:avLst>
+              <a:gd name="adj" fmla="val 3902"/>
+            </a:avLst>
+          </a:prstGeom>
+          <a:solidFill>
+            <a:schemeClr val="tx2"/>
+          </a:solidFill>
+          <a:ln w="12700">
+            <a:solidFill>
+              <a:schemeClr val="tx2"/>
+            </a:solidFill>
+            <a:prstDash val="solid"/>
+          </a:ln>
+        </p:spPr>
+      </p:sp>
+      <p:sp>
+        <p:nvSpPr>
+          <p:cNvPr id="16" name="Text 14"/>
+          <p:cNvSpPr txBox="1"/>
+          <p:nvPr/>
+        </p:nvSpPr>
+        <p:spPr>
+          <a:xfrm>
+            <a:off x="7562088" y="1600200"/>
+            <a:ext cx="457200" cy="457200"/>
+          </a:xfrm>
+          <a:prstGeom prst="ellipse">
+            <a:avLst/>
+          </a:prstGeom>
+          <a:solidFill>
+            <a:schemeClr val="accent1"/>
+          </a:solidFill>
+          <a:ln/>
+        </p:spPr>
+        <p:txBody>
+          <a:bodyPr wrap="square" lIns="0" tIns="0" rIns="0" bIns="0" rtlCol="0" anchor="ctr"/>
+          <a:lstStyle/>
+          <a:p>
+            <a:pPr algn="ctr" indent="0" marL="0">
+              <a:buNone/>
+            </a:pPr>
+            <a:r>
+              <a:rPr lang="en-US" sz="1400" b="1" dirty="0">
+                <a:solidFill>
+                  <a:schemeClr val="bg1"/>
+                </a:solidFill>
+              </a:rPr>
+              <a:t>4</a:t>
+            </a:r>
+            <a:endParaRPr lang="en-US" sz="1400" dirty="0"/>
+          </a:p>
+        </p:txBody>
+      </p:sp>
+      <p:sp>
+        <p:nvSpPr>
+          <p:cNvPr id="17" name="Text 15"/>
+          <p:cNvSpPr txBox="1"/>
+          <p:nvPr/>
+        </p:nvSpPr>
+        <p:spPr>
+          <a:xfrm>
+            <a:off x="6940296" y="2286000"/>
+            <a:ext cx="1691640" cy="1097280"/>
+          </a:xfrm>
+          <a:prstGeom prst="rect">
+            <a:avLst/>
+          </a:prstGeom>
+          <a:noFill/>
+          <a:ln/>
+        </p:spPr>
+        <p:txBody>
+          <a:bodyPr wrap="square" lIns="0" tIns="0" rIns="0" bIns="0" rtlCol="0" anchor="t"/>
+          <a:lstStyle/>
+          <a:p>
+            <a:pPr algn="ctr" indent="0" marL="0">
+              <a:buNone/>
+            </a:pPr>
+            <a:r>
+              <a:rPr lang="en-US" sz="1500" b="1" dirty="0">
+                <a:solidFill>
+                  <a:schemeClr val="bg1"/>
+                </a:solidFill>
+              </a:rPr>
+              <a:t>Merged</a:t>
+            </a:r>
+            <a:endParaRPr lang="en-US" sz="1400" dirty="0"/>
+          </a:p>
+          <a:p>
+            <a:pPr algn="ctr" indent="0" marL="0">
+              <a:buNone/>
+            </a:pPr>
+            <a:r>
+              <a:rPr lang="en-US" sz="1200" dirty="0">
+                <a:solidFill>
+                  <a:schemeClr val="accent4"/>
+                </a:solidFill>
+              </a:rPr>
+              <a:t>Your piece is live</a:t>
+            </a:r>
+            <a:endParaRPr lang="en-US" sz="1400" dirty="0"/>
+          </a:p>
+        </p:txBody>
+      </p:sp>
+      <p:sp>
+        <p:nvSpPr>
+          <p:cNvPr id="18" name="Text 16"/>
+          <p:cNvSpPr txBox="1"/>
+          <p:nvPr/>
+        </p:nvSpPr>
+        <p:spPr>
+          <a:xfrm>
+            <a:off x="457200" y="3931920"/>
+            <a:ext cx="8229600" cy="548640"/>
+          </a:xfrm>
+          <a:prstGeom prst="rect">
+            <a:avLst/>
+          </a:prstGeom>
+          <a:noFill/>
+          <a:ln/>
+        </p:spPr>
+        <p:txBody>
+          <a:bodyPr wrap="square" lIns="0" tIns="0" rIns="0" bIns="0" rtlCol="0" anchor="t"/>
+          <a:lstStyle/>
+          <a:p>
+            <a:pPr indent="0" marL="0">
+              <a:buNone/>
+            </a:pPr>
+            <a:r>
+              <a:rPr lang="en-US" sz="1500" dirty="0">
+                <a:solidFill>
+                  <a:schemeClr val="accent2"/>
+                </a:solidFill>
+              </a:rPr>
+              <a:t>Changes go on the same pull request: open Code again (Local, the project folder), and Claude picks up the comments.</a:t>
+            </a:r>
+            <a:endParaRPr lang="en-US" sz="1500" dirty="0"/>
+          </a:p>
+        </p:txBody>
+      </p:sp>
+      <p:sp>
+        <p:nvSpPr>
+          <p:cNvPr id="25" name="Slide Number Placeholder 0"/>
+          <p:cNvSpPr>
+            <a:spLocks noGrp="1"/>
+          </p:cNvSpPr>
+          <p:nvPr>
+            <p:ph type="sldNum" sz="quarter" idx="4294967295"/>
+          </p:nvPr>
+        </p:nvSpPr>
+        <p:spPr>
+          <a:xfrm>
+            <a:off x="8503920" y="4754880"/>
+            <a:ext cx="365760" cy="274320"/>
+          </a:xfrm>
+          <a:prstGeom prst="rect">
+            <a:avLst/>
+          </a:prstGeom>
+          <a:extLst>
+            <a:ext uri="{C572A759-6A51-4108-AA02-DFA0A04FC94B}">
+              <ma14:wrappingTextBoxFlag xmlns:ma14="http://schemas.microsoft.com/office/mac/drawingml/2011/main" val="0"/>
+            </a:ext>
+          </a:extLst>
+        </p:spPr>
+        <p:txBody>
+          <a:bodyPr/>
+          <a:lstStyle>
+            <a:lvl1pPr>
+              <a:defRPr sz="1000">
+                <a:solidFill>
+                  <a:schemeClr val="accent3"/>
+                </a:solidFill>
+              </a:defRPr>
+            </a:lvl1pPr>
+          </a:lstStyle>
+          <a:p>
+            <a:pPr algn="l"/>
+            <a:fld id="{F7021451-1387-4CA6-816F-3879F97B5CBC}" type="slidenum">
+              <a:rPr b="0" lang="en-US"/>
+              <a:t>20</a:t>
+            </a:fld>
+            <a:endParaRPr lang="en-US"/>
+          </a:p>
+        </p:txBody>
+      </p:sp>
+    </p:spTree>
+  </p:cSld>
+  <p:clrMapOvr>
+    <a:masterClrMapping/>
+  </p:clrMapOvr>
+</p:sld>
+</file>
+
+<file path=ppt/slides/slide21.xml><?xml version="1.0" encoding="utf-8"?>
+<p:sld xmlns:a="http://schemas.openxmlformats.org/drawingml/2006/main" xmlns:r="http://schemas.openxmlformats.org/officeDocument/2006/relationships" xmlns:p="http://schemas.openxmlformats.org/presentationml/2006/main">
+  <p:cSld name="Slide 21">
+    <p:spTree>
+      <p:nvGrpSpPr>
+        <p:cNvPr id="1" name=""/>
+        <p:cNvGrpSpPr/>
+        <p:nvPr/>
+      </p:nvGrpSpPr>
+      <p:grpSpPr>
+        <a:xfrm>
+          <a:off x="0" y="0"/>
+          <a:ext cx="0" cy="0"/>
+          <a:chOff x="0" y="0"/>
+          <a:chExt cx="0" cy="0"/>
+        </a:xfrm>
+      </p:grpSpPr>
+      <p:sp>
+        <p:nvSpPr>
+          <p:cNvPr id="2" name="Text 0"/>
+          <p:cNvSpPr/>
+          <p:nvPr>
+            <p:ph idx="100" type="title" hasCustomPrompt="1"/>
+          </p:nvPr>
+        </p:nvSpPr>
+        <p:spPr>
+          <a:xfrm>
             <a:off x="548640" y="1371600"/>
             <a:ext cx="4754880" cy="1463040"/>
           </a:xfrm>
@@ -7686,7 +8055,7 @@
                   <a:schemeClr val="accent4"/>
                 </a:solidFill>
               </a:rPr>
-              <a:t>Claude app → Code → select open-source-modular-furniture, then:</a:t>
+              <a:t>Claude app → Code → Local → folder open-source-modular-furniture, then:</a:t>
             </a:r>
             <a:endParaRPr lang="en-US" sz="1600" dirty="0"/>
           </a:p>
@@ -10662,7 +11031,7 @@
                   <a:schemeClr val="bg1"/>
                 </a:solidFill>
               </a:rPr>
-              <a:t>Everything else (downloading the project, running the site, your own copy on GitHub) is prepared in the project, and Claude does it for you.</a:t>
+              <a:t>Everything else (downloading the project, running the site, your own copy on GitHub) is prepared, and Claude does it for you.</a:t>
             </a:r>
             <a:endParaRPr lang="en-US" sz="1500" dirty="0"/>
           </a:p>
@@ -11049,7 +11418,7 @@
                   <a:schemeClr val="tx1"/>
                 </a:solidFill>
               </a:rPr>
-              <a:t>Step 1: go to Code</a:t>
+              <a:t>Step 1: Code, then Local</a:t>
             </a:r>
             <a:endParaRPr lang="en-US" sz="2400" dirty="0"/>
           </a:p>
@@ -11095,7 +11464,7 @@
       </p:sp>
       <p:pic>
         <p:nvPicPr>
-          <p:cNvPr id="4" name="Step 1: go to Code" descr="small/app-code.jpg">    </p:cNvPr>
+          <p:cNvPr id="4" name="Step 1: Code, then Local" descr="small/app-code.jpg">    </p:cNvPr>
           <p:cNvPicPr>
             <a:picLocks noChangeAspect="1"/>
           </p:cNvPicPr>
@@ -11192,7 +11561,7 @@
                   <a:schemeClr val="tx1"/>
                 </a:solidFill>
               </a:rPr>
-              <a:t>Click Code</a:t>
+              <a:t>Click Code, pick Local</a:t>
             </a:r>
             <a:endParaRPr lang="en-US" sz="1400" dirty="0"/>
           </a:p>
@@ -11220,7 +11589,7 @@
                   <a:schemeClr val="accent2"/>
                 </a:solidFill>
               </a:rPr>
-              <a:t>In the left sidebar, click Code. This is the part of the app that works on projects, not just chats.</a:t>
+              <a:t>In the sidebar, click Code. Under the message box, set the environment to Local: Claude then works on your computer, so the site opens in your own browser.</a:t>
             </a:r>
             <a:endParaRPr lang="en-US" sz="1400" dirty="0"/>
           </a:p>

--- a/docs/contributing-guide.pptx
+++ b/docs/contributing-guide.pptx
@@ -26,9 +26,10 @@
     <p:sldId id="274" r:id="rId20"/>
     <p:sldId id="275" r:id="rId21"/>
     <p:sldId id="276" r:id="rId22"/>
+    <p:sldId id="277" r:id="rId23"/>
   </p:sldIdLst>
   <p:notesMasterIdLst>
-    <p:notesMasterId r:id="rId23"/>
+    <p:notesMasterId r:id="rId24"/>
   </p:notesMasterIdLst>
   <p:sldSz cx="9144000" cy="5143500"/>
   <p:notesSz cx="5143500" cy="9144000"/>
@@ -127,7 +128,7 @@
   <p:extLst>
     <p:ext uri="{521415D9-36F7-43E2-AB2F-B90AF26B5E84}">
       <p14:sectionLst xmlns:p14="http://schemas.microsoft.com/office/powerpoint/2010/main">
-        <p14:section name="Why" id="{b585ef0c-63b0-dcbc-da5a-b4295a5a6df8}">
+        <p14:section name="Why" id="{ea2ac870-da6c-b019-8c9a-a0223f988ffb}">
           <p14:sldIdLst>
             <p14:sldId id="256"/>
             <p14:sldId id="257"/>
@@ -137,7 +138,7 @@
             <p14:sldId id="261"/>
           </p14:sldIdLst>
         </p14:section>
-        <p14:section name="Get started" id="{8860b6eb-1a8a-3393-354e-c4d0300ba3da}">
+        <p14:section name="Get started" id="{4676ebc3-c221-ef88-e999-6a8a6d89adf2}">
           <p14:sldIdLst>
             <p14:sldId id="262"/>
             <p14:sldId id="263"/>
@@ -146,26 +147,27 @@
             <p14:sldId id="266"/>
             <p14:sldId id="267"/>
             <p14:sldId id="268"/>
+            <p14:sldId id="269"/>
           </p14:sldIdLst>
         </p14:section>
-        <p14:section name="Work in rounds" id="{b1fab110-30ea-2f1c-cf75-8cc3e3e223fd}">
+        <p14:section name="Work in rounds" id="{b3d14d97-93b1-a246-17aa-81f6910fb8b9}">
           <p14:sldIdLst>
-            <p14:sldId id="269"/>
             <p14:sldId id="270"/>
             <p14:sldId id="271"/>
             <p14:sldId id="272"/>
             <p14:sldId id="273"/>
+            <p14:sldId id="274"/>
           </p14:sldIdLst>
         </p14:section>
-        <p14:section name="Send it" id="{1687a5d4-e924-0e6c-3374-05af743ea20a}">
+        <p14:section name="Send it" id="{29880790-9b18-aec9-6e2e-2742c0388a8a}">
           <p14:sldIdLst>
-            <p14:sldId id="274"/>
             <p14:sldId id="275"/>
+            <p14:sldId id="276"/>
           </p14:sldIdLst>
         </p14:section>
-        <p14:section name="Summary" id="{a4ef734b-6af7-5277-6996-954ccebc9628}">
+        <p14:section name="Summary" id="{d398fd29-67d1-e880-ac1c-6589e0ceb1dc}">
           <p14:sldIdLst>
-            <p14:sldId id="276"/>
+            <p14:sldId id="277"/>
           </p14:sldIdLst>
         </p14:section>
       </p14:sectionLst>
@@ -660,7 +662,7 @@
           <a:p>
             <a:r>
               <a:rPr lang="en-US" dirty="0"/>
-              <a:t>Illustration. Claude needs Git for this; if it is missing, Claude gives you the one link to install it.</a:t>
+              <a:t>Real screenshot of the environment menu in the Claude desktop app. This computer stays selected for next time; the star pins it to the top.</a:t>
             </a:r>
             <a:endParaRPr lang="en-US" dirty="0"/>
           </a:p>
@@ -748,7 +750,7 @@
           <a:p>
             <a:r>
               <a:rPr lang="en-US" dirty="0"/>
-              <a:t>Illustration of the folder picker. Everything Claude needs (instructions, how to start the site) is inside this folder.</a:t>
+              <a:t>Illustration. Claude needs Git for this; if it is missing, Claude gives you the one link to install it.</a:t>
             </a:r>
             <a:endParaRPr lang="en-US" dirty="0"/>
           </a:p>
@@ -836,7 +838,7 @@
           <a:p>
             <a:r>
               <a:rPr lang="en-US" dirty="0"/>
-              <a:t>Simulated conversation; exact wording will vary. The instructions Claude follows live in the project itself (the contribute skill), so every session works the same way.</a:t>
+              <a:t>Illustration of the folder picker. Everything Claude needs (instructions, how to start the site) is inside this folder.</a:t>
             </a:r>
             <a:endParaRPr lang="en-US" dirty="0"/>
           </a:p>
@@ -924,7 +926,7 @@
           <a:p>
             <a:r>
               <a:rPr lang="en-US" dirty="0"/>
-              <a:t>The clamp lamp (issue 2) is the idea used in the simulated examples.</a:t>
+              <a:t>Simulated conversation; exact wording will vary. The instructions Claude follows live in the project itself (the contribute skill), so every session works the same way.</a:t>
             </a:r>
             <a:endParaRPr lang="en-US" dirty="0"/>
           </a:p>
@@ -1012,7 +1014,7 @@
           <a:p>
             <a:r>
               <a:rPr lang="en-US" dirty="0"/>
-              <a:t>Real screenshot of the site in a browser at localhost:8000. "localhost" just means "this computer"; 8000 is the door number Claude opened it on. Breaking something here cannot break the real site.</a:t>
+              <a:t>The clamp lamp (issue 2) is the idea used in the simulated examples.</a:t>
             </a:r>
             <a:endParaRPr lang="en-US" dirty="0"/>
           </a:p>
@@ -1100,7 +1102,7 @@
           <a:p>
             <a:r>
               <a:rPr lang="en-US" dirty="0"/>
-              <a:t>If Chrome says the site cannot be reached, the private copy is not running, usually because the session was closed. Ask Claude to start it again. The same site can also show inside the Claude app: press Cmd+Shift+B (Mac) or Ctrl+Shift+B (Windows) for its Browser pane.</a:t>
+              <a:t>Real screenshot of the site in a browser at localhost:8000. "localhost" just means "this computer"; 8000 is the door number Claude opened it on. Breaking something here cannot break the real site.</a:t>
             </a:r>
             <a:endParaRPr lang="en-US" dirty="0"/>
           </a:p>
@@ -1188,7 +1190,7 @@
           <a:p>
             <a:r>
               <a:rPr lang="en-US" dirty="0"/>
-              <a:t>Simulated round for the clamp lamp. A new piece usually takes five rounds: parts list, page and settings, 3D model, part info, PDF guide.</a:t>
+              <a:t>If Chrome says the site cannot be reached, the private copy is not running, usually because the session was closed. Ask Claude to start it again. The same site can also show inside the Claude app: press Cmd+Shift+B (Mac) or Ctrl+Shift+B (Windows) for its Browser pane.</a:t>
             </a:r>
             <a:endParaRPr lang="en-US" dirty="0"/>
           </a:p>
@@ -1276,7 +1278,7 @@
           <a:p>
             <a:r>
               <a:rPr lang="en-US" dirty="0"/>
-              <a:t>Simulated brief for the clamp lamp; the rule values are examples. The brief is also the first thing the owner reviews.</a:t>
+              <a:t>Simulated round for the clamp lamp. A new piece usually takes five rounds: parts list, page and settings, 3D model, part info, PDF guide.</a:t>
             </a:r>
             <a:endParaRPr lang="en-US" dirty="0"/>
           </a:p>
@@ -1364,7 +1366,7 @@
           <a:p>
             <a:r>
               <a:rPr lang="en-US" dirty="0"/>
-              <a:t>Claude reads this list out one item at a time and waits for your answer.</a:t>
+              <a:t>Simulated brief for the clamp lamp; the rule values are examples. The brief is also the first thing the owner reviews.</a:t>
             </a:r>
             <a:endParaRPr lang="en-US" dirty="0"/>
           </a:p>
@@ -1452,7 +1454,7 @@
           <a:p>
             <a:r>
               <a:rPr lang="en-US" dirty="0"/>
-              <a:t>GitHub only accepts images uploaded through the page, which is why the screenshots are the one manual step.</a:t>
+              <a:t>Claude reads this list out one item at a time and waits for your answer.</a:t>
             </a:r>
             <a:endParaRPr lang="en-US" dirty="0"/>
           </a:p>
@@ -1628,7 +1630,7 @@
           <a:p>
             <a:r>
               <a:rPr lang="en-US" dirty="0"/>
-              <a:t>If the piece came from an idea, the pull request closes that idea issue when merged, and the card leaves the Ideas board because the piece now has its own page.</a:t>
+              <a:t>GitHub only accepts images uploaded through the page, which is why the screenshots are the one manual step.</a:t>
             </a:r>
             <a:endParaRPr lang="en-US" dirty="0"/>
           </a:p>
@@ -1716,7 +1718,7 @@
           <a:p>
             <a:r>
               <a:rPr lang="en-US" dirty="0"/>
-              <a:t>That is all you need to remember. Start each one in a new session in the Code section, with the project selected.</a:t>
+              <a:t>If the piece came from an idea, the pull request closes that idea issue when merged, and the card leaves the Ideas board because the piece now has its own page.</a:t>
             </a:r>
             <a:endParaRPr lang="en-US" dirty="0"/>
           </a:p>
@@ -1740,6 +1742,94 @@
             <a:fld id="{F7021451-1387-4CA6-816F-3879F97B5CBC}" type="slidenum">
               <a:rPr lang="en-US"/>
               <a:t>21</a:t>
+            </a:fld>
+            <a:endParaRPr lang="en-US"/>
+          </a:p>
+        </p:txBody>
+      </p:sp>
+    </p:spTree>
+    <p:extLst>
+      <p:ext uri="{BB962C8B-B14F-4D97-AF65-F5344CB8AC3E}">
+        <p14:creationId xmlns:p14="http://schemas.microsoft.com/office/powerpoint/2010/main" val="1024086991"/>
+      </p:ext>
+    </p:extLst>
+  </p:cSld>
+  <p:clrMapOvr>
+    <a:masterClrMapping/>
+  </p:clrMapOvr>
+</p:notes>
+</file>
+
+<file path=ppt/notesSlides/notesSlide22.xml><?xml version="1.0" encoding="utf-8"?>
+<p:notes xmlns:a="http://schemas.openxmlformats.org/drawingml/2006/main" xmlns:r="http://schemas.openxmlformats.org/officeDocument/2006/relationships" xmlns:p="http://schemas.openxmlformats.org/presentationml/2006/main">
+  <p:cSld>
+    <p:spTree>
+      <p:nvGrpSpPr>
+        <p:cNvPr id="1" name=""/>
+        <p:cNvGrpSpPr/>
+        <p:nvPr/>
+      </p:nvGrpSpPr>
+      <p:grpSpPr>
+        <a:xfrm>
+          <a:off x="0" y="0"/>
+          <a:ext cx="0" cy="0"/>
+          <a:chOff x="0" y="0"/>
+          <a:chExt cx="0" cy="0"/>
+        </a:xfrm>
+      </p:grpSpPr>
+      <p:sp>
+        <p:nvSpPr>
+          <p:cNvPr id="2" name="Slide Image Placeholder 1"/>
+          <p:cNvSpPr>
+            <a:spLocks noGrp="1" noRot="1" noChangeAspect="1"/>
+          </p:cNvSpPr>
+          <p:nvPr>
+            <p:ph type="sldImg"/>
+          </p:nvPr>
+        </p:nvSpPr>
+        <p:spPr/>
+      </p:sp>
+      <p:sp>
+        <p:nvSpPr>
+          <p:cNvPr id="3" name="Notes Placeholder 2"/>
+          <p:cNvSpPr>
+            <a:spLocks noGrp="1"/>
+          </p:cNvSpPr>
+          <p:nvPr>
+            <p:ph type="body" idx="1"/>
+          </p:nvPr>
+        </p:nvSpPr>
+        <p:spPr/>
+        <p:txBody>
+          <a:bodyPr/>
+          <a:lstStyle/>
+          <a:p>
+            <a:r>
+              <a:rPr lang="en-US" dirty="0"/>
+              <a:t>That is all you need to remember. Start each one in a new session in the Code section, with the project selected.</a:t>
+            </a:r>
+            <a:endParaRPr lang="en-US" dirty="0"/>
+          </a:p>
+        </p:txBody>
+      </p:sp>
+      <p:sp>
+        <p:nvSpPr>
+          <p:cNvPr id="4" name="Slide Number Placeholder 3"/>
+          <p:cNvSpPr>
+            <a:spLocks noGrp="1"/>
+          </p:cNvSpPr>
+          <p:nvPr>
+            <p:ph type="sldNum" sz="quarter" idx="10"/>
+          </p:nvPr>
+        </p:nvSpPr>
+        <p:spPr/>
+        <p:txBody>
+          <a:bodyPr/>
+          <a:lstStyle/>
+          <a:p>
+            <a:fld id="{F7021451-1387-4CA6-816F-3879F97B5CBC}" type="slidenum">
+              <a:rPr lang="en-US"/>
+              <a:t>22</a:t>
             </a:fld>
             <a:endParaRPr lang="en-US"/>
           </a:p>
@@ -2332,7 +2422,7 @@
           <a:p>
             <a:r>
               <a:rPr lang="en-US" dirty="0"/>
-              <a:t>Illustration. Local matters: a Cloud session runs on Anthropic's computers, and then the private copy of the site would not open in your browser.</a:t>
+              <a:t>Illustration of the Code section; your app may look slightly different.</a:t>
             </a:r>
             <a:endParaRPr lang="en-US" dirty="0"/>
           </a:p>
@@ -3135,53 +3225,15 @@
                   <a:schemeClr val="tx1"/>
                 </a:solidFill>
               </a:rPr>
-              <a:t>First time only: get the project</a:t>
+              <a:t>Then pick "This computer"</a:t>
             </a:r>
             <a:endParaRPr lang="en-US" sz="2400" dirty="0"/>
-          </a:p>
-        </p:txBody>
-      </p:sp>
-      <p:sp>
-        <p:nvSpPr>
-          <p:cNvPr id="3" name="Illustration tag"/>
-          <p:cNvSpPr txBox="1"/>
-          <p:nvPr/>
-        </p:nvSpPr>
-        <p:spPr>
-          <a:xfrm>
-            <a:off x="7315200" y="466344"/>
-            <a:ext cx="1371600" cy="256032"/>
-          </a:xfrm>
-          <a:prstGeom prst="rect">
-            <a:avLst/>
-          </a:prstGeom>
-          <a:solidFill>
-            <a:schemeClr val="accent2"/>
-          </a:solidFill>
-          <a:ln/>
-        </p:spPr>
-        <p:txBody>
-          <a:bodyPr wrap="square" lIns="0" tIns="0" rIns="0" bIns="0" rtlCol="0" anchor="ctr"/>
-          <a:lstStyle/>
-          <a:p>
-            <a:pPr algn="ctr" indent="0" marL="0">
-              <a:buNone/>
-            </a:pPr>
-            <a:r>
-              <a:rPr lang="en-US" sz="1000" b="1" dirty="0">
-                <a:solidFill>
-                  <a:schemeClr val="bg1"/>
-                </a:solidFill>
-              </a:rPr>
-              <a:t>ILLUSTRATION</a:t>
-            </a:r>
-            <a:endParaRPr lang="en-US" sz="1000" dirty="0"/>
           </a:p>
         </p:txBody>
       </p:sp>
       <p:pic>
         <p:nvPicPr>
-          <p:cNvPr id="4" name="First time only: get the project" descr="small/app-first.jpg">    </p:cNvPr>
+          <p:cNvPr id="3" name="Environment menu with This computer selected" descr="small/real-env.jpg">    </p:cNvPr>
           <p:cNvPicPr>
             <a:picLocks noChangeAspect="1"/>
           </p:cNvPicPr>
@@ -3196,7 +3248,7 @@
         <p:spPr>
           <a:xfrm>
             <a:off x="457200" y="1051560"/>
-            <a:ext cx="5852160" cy="3331551"/>
+            <a:ext cx="4172853" cy="3611880"/>
           </a:xfrm>
           <a:prstGeom prst="rect">
             <a:avLst/>
@@ -3212,13 +3264,13 @@
       </p:pic>
       <p:sp>
         <p:nvSpPr>
-          <p:cNvPr id="5" name="Text 2"/>
+          <p:cNvPr id="4" name="Text 1"/>
           <p:cNvSpPr txBox="1"/>
           <p:nvPr/>
         </p:nvSpPr>
         <p:spPr>
           <a:xfrm>
-            <a:off x="6583680" y="1188720"/>
+            <a:off x="5029200" y="1188720"/>
             <a:ext cx="548640" cy="548640"/>
           </a:xfrm>
           <a:prstGeom prst="ellipse">
@@ -3242,22 +3294,22 @@
                   <a:schemeClr val="bg1"/>
                 </a:solidFill>
               </a:rPr>
-              <a:t>1×</a:t>
-            </a:r>
-            <a:endParaRPr lang="en-US" sz="1400" dirty="0"/>
-          </a:p>
-        </p:txBody>
-      </p:sp>
-      <p:sp>
-        <p:nvSpPr>
-          <p:cNvPr id="6" name="Text 3"/>
+              <a:t>1</a:t>
+            </a:r>
+            <a:endParaRPr lang="en-US" sz="1400" dirty="0"/>
+          </a:p>
+        </p:txBody>
+      </p:sp>
+      <p:sp>
+        <p:nvSpPr>
+          <p:cNvPr id="5" name="Text 2"/>
           <p:cNvSpPr txBox="1"/>
           <p:nvPr/>
         </p:nvSpPr>
         <p:spPr>
           <a:xfrm>
-            <a:off x="6583680" y="1920240"/>
-            <a:ext cx="2194560" cy="2651760"/>
+            <a:off x="5029200" y="1920240"/>
+            <a:ext cx="3749040" cy="2743200"/>
           </a:xfrm>
           <a:prstGeom prst="rect">
             <a:avLst/>
@@ -3273,12 +3325,12 @@
               <a:buNone/>
             </a:pPr>
             <a:r>
-              <a:rPr lang="en-US" sz="1700" b="1" dirty="0">
+              <a:rPr lang="en-US" sz="1400" b="1" dirty="0">
                 <a:solidFill>
                   <a:schemeClr val="tx1"/>
                 </a:solidFill>
               </a:rPr>
-              <a:t>Claude downloads it</a:t>
+              <a:t>Click the first button under the message box</a:t>
             </a:r>
             <a:endParaRPr lang="en-US" sz="1400" dirty="0"/>
           </a:p>
@@ -3287,6 +3339,20 @@
               <a:buNone/>
             </a:pPr>
             <a:r>
+              <a:rPr lang="en-US" sz="1400" dirty="0">
+                <a:solidFill>
+                  <a:schemeClr val="accent2"/>
+                </a:solidFill>
+              </a:rPr>
+              <a:t>It opens the menu on the left.</a:t>
+            </a:r>
+            <a:endParaRPr lang="en-US" sz="1400" dirty="0"/>
+          </a:p>
+          <a:p>
+            <a:pPr indent="0" marL="0">
+              <a:buNone/>
+            </a:pPr>
+            <a:r>
               <a:rPr lang="en-US" sz="800" dirty="0">
                 <a:solidFill>
                   <a:schemeClr val="tx1"/>
@@ -3301,12 +3367,68 @@
               <a:buNone/>
             </a:pPr>
             <a:r>
+              <a:rPr lang="en-US" sz="1400" b="1" dirty="0">
+                <a:solidFill>
+                  <a:schemeClr val="tx1"/>
+                </a:solidFill>
+              </a:rPr>
+              <a:t>Choose "This computer", under Local</a:t>
+            </a:r>
+            <a:endParaRPr lang="en-US" sz="1400" dirty="0"/>
+          </a:p>
+          <a:p>
+            <a:pPr indent="0" marL="0">
+              <a:buNone/>
+            </a:pPr>
+            <a:r>
               <a:rPr lang="en-US" sz="1400" dirty="0">
                 <a:solidFill>
                   <a:schemeClr val="accent2"/>
                 </a:solidFill>
               </a:rPr>
-              <a:t>Choose your Documents folder and ask Claude to download the project. Do this once; afterwards the project lives in Documents.</a:t>
+              <a:t>Claude then works on your computer, so the site opens in your own browser.</a:t>
+            </a:r>
+            <a:endParaRPr lang="en-US" sz="1400" dirty="0"/>
+          </a:p>
+          <a:p>
+            <a:pPr indent="0" marL="0">
+              <a:buNone/>
+            </a:pPr>
+            <a:r>
+              <a:rPr lang="en-US" sz="800" dirty="0">
+                <a:solidFill>
+                  <a:schemeClr val="tx1"/>
+                </a:solidFill>
+              </a:rPr>
+              <a:t> </a:t>
+            </a:r>
+            <a:endParaRPr lang="en-US" sz="1400" dirty="0"/>
+          </a:p>
+          <a:p>
+            <a:pPr indent="0" marL="0">
+              <a:buNone/>
+            </a:pPr>
+            <a:r>
+              <a:rPr lang="en-US" sz="1400" b="1" dirty="0">
+                <a:solidFill>
+                  <a:schemeClr val="tx1"/>
+                </a:solidFill>
+              </a:rPr>
+              <a:t>Not "Default", under Cloud</a:t>
+            </a:r>
+            <a:endParaRPr lang="en-US" sz="1400" dirty="0"/>
+          </a:p>
+          <a:p>
+            <a:pPr indent="0" marL="0">
+              <a:buNone/>
+            </a:pPr>
+            <a:r>
+              <a:rPr lang="en-US" sz="1400" dirty="0">
+                <a:solidFill>
+                  <a:schemeClr val="accent2"/>
+                </a:solidFill>
+              </a:rPr>
+              <a:t>That runs on Anthropic's computers, and the site would not open in your browser.</a:t>
             </a:r>
             <a:endParaRPr lang="en-US" sz="1400" dirty="0"/>
           </a:p>
@@ -3414,7 +3536,7 @@
                   <a:schemeClr val="tx1"/>
                 </a:solidFill>
               </a:rPr>
-              <a:t>Step 2: choose the project folder</a:t>
+              <a:t>First time only: get the project</a:t>
             </a:r>
             <a:endParaRPr lang="en-US" sz="2400" dirty="0"/>
           </a:p>
@@ -3460,7 +3582,7 @@
       </p:sp>
       <p:pic>
         <p:nvPicPr>
-          <p:cNvPr id="4" name="Step 2: choose the project folder" descr="small/app-folder.jpg">    </p:cNvPr>
+          <p:cNvPr id="4" name="First time only: get the project" descr="small/app-first.jpg">    </p:cNvPr>
           <p:cNvPicPr>
             <a:picLocks noChangeAspect="1"/>
           </p:cNvPicPr>
@@ -3521,7 +3643,7 @@
                   <a:schemeClr val="bg1"/>
                 </a:solidFill>
               </a:rPr>
-              <a:t>2</a:t>
+              <a:t>1×</a:t>
             </a:r>
             <a:endParaRPr lang="en-US" sz="1400" dirty="0"/>
           </a:p>
@@ -3557,7 +3679,7 @@
                   <a:schemeClr val="tx1"/>
                 </a:solidFill>
               </a:rPr>
-              <a:t>Pick the folder</a:t>
+              <a:t>Claude downloads it</a:t>
             </a:r>
             <a:endParaRPr lang="en-US" sz="1400" dirty="0"/>
           </a:p>
@@ -3585,7 +3707,7 @@
                   <a:schemeClr val="accent2"/>
                 </a:solidFill>
               </a:rPr>
-              <a:t>Click Choose folder and pick open-source-modular-furniture in your Documents. Do this at the start of every session.</a:t>
+              <a:t>Click Choose…, pick your Documents folder and ask Claude to download the project. Do this once; afterwards the project lives in Documents.</a:t>
             </a:r>
             <a:endParaRPr lang="en-US" sz="1400" dirty="0"/>
           </a:p>
@@ -3693,7 +3815,7 @@
                   <a:schemeClr val="tx1"/>
                 </a:solidFill>
               </a:rPr>
-              <a:t>Step 3: say "let's work on this"</a:t>
+              <a:t>Step 2: choose the project folder</a:t>
             </a:r>
             <a:endParaRPr lang="en-US" sz="2400" dirty="0"/>
           </a:p>
@@ -3701,20 +3823,20 @@
       </p:sp>
       <p:sp>
         <p:nvSpPr>
-          <p:cNvPr id="3" name="Simulation tag"/>
+          <p:cNvPr id="3" name="Illustration tag"/>
           <p:cNvSpPr txBox="1"/>
           <p:nvPr/>
         </p:nvSpPr>
         <p:spPr>
           <a:xfrm>
-            <a:off x="6949440" y="466344"/>
-            <a:ext cx="1737360" cy="256032"/>
+            <a:off x="7315200" y="466344"/>
+            <a:ext cx="1371600" cy="256032"/>
           </a:xfrm>
           <a:prstGeom prst="rect">
             <a:avLst/>
           </a:prstGeom>
           <a:solidFill>
-            <a:schemeClr val="accent1"/>
+            <a:schemeClr val="accent2"/>
           </a:solidFill>
           <a:ln/>
         </p:spPr>
@@ -3731,7 +3853,7 @@
                   <a:schemeClr val="bg1"/>
                 </a:solidFill>
               </a:rPr>
-              <a:t>SIMULATED EXAMPLE</a:t>
+              <a:t>ILLUSTRATION</a:t>
             </a:r>
             <a:endParaRPr lang="en-US" sz="1000" dirty="0"/>
           </a:p>
@@ -3739,7 +3861,7 @@
       </p:sp>
       <p:pic>
         <p:nvPicPr>
-          <p:cNvPr id="4" name="Simulated first conversation" descr="small/sim-start.jpg">    </p:cNvPr>
+          <p:cNvPr id="4" name="Step 2: choose the project folder" descr="small/app-folder.jpg">    </p:cNvPr>
           <p:cNvPicPr>
             <a:picLocks noChangeAspect="1"/>
           </p:cNvPicPr>
@@ -3754,7 +3876,7 @@
         <p:spPr>
           <a:xfrm>
             <a:off x="457200" y="1051560"/>
-            <a:ext cx="5394960" cy="3117516"/>
+            <a:ext cx="5852160" cy="3331551"/>
           </a:xfrm>
           <a:prstGeom prst="rect">
             <a:avLst/>
@@ -3776,8 +3898,46 @@
         </p:nvSpPr>
         <p:spPr>
           <a:xfrm>
-            <a:off x="6126480" y="1188720"/>
-            <a:ext cx="2651760" cy="3474720"/>
+            <a:off x="6583680" y="1188720"/>
+            <a:ext cx="548640" cy="548640"/>
+          </a:xfrm>
+          <a:prstGeom prst="ellipse">
+            <a:avLst/>
+          </a:prstGeom>
+          <a:solidFill>
+            <a:schemeClr val="accent1"/>
+          </a:solidFill>
+          <a:ln/>
+        </p:spPr>
+        <p:txBody>
+          <a:bodyPr wrap="square" lIns="0" tIns="0" rIns="0" bIns="0" rtlCol="0" anchor="ctr"/>
+          <a:lstStyle/>
+          <a:p>
+            <a:pPr algn="ctr" indent="0" marL="0">
+              <a:buNone/>
+            </a:pPr>
+            <a:r>
+              <a:rPr lang="en-US" sz="1400" b="1" dirty="0">
+                <a:solidFill>
+                  <a:schemeClr val="bg1"/>
+                </a:solidFill>
+              </a:rPr>
+              <a:t>2</a:t>
+            </a:r>
+            <a:endParaRPr lang="en-US" sz="1400" dirty="0"/>
+          </a:p>
+        </p:txBody>
+      </p:sp>
+      <p:sp>
+        <p:nvSpPr>
+          <p:cNvPr id="6" name="Text 3"/>
+          <p:cNvSpPr txBox="1"/>
+          <p:nvPr/>
+        </p:nvSpPr>
+        <p:spPr>
+          <a:xfrm>
+            <a:off x="6583680" y="1920240"/>
+            <a:ext cx="2194560" cy="2651760"/>
           </a:xfrm>
           <a:prstGeom prst="rect">
             <a:avLst/>
@@ -3793,12 +3953,12 @@
               <a:buNone/>
             </a:pPr>
             <a:r>
-              <a:rPr lang="en-US" sz="1400" b="1" dirty="0">
+              <a:rPr lang="en-US" sz="1700" b="1" dirty="0">
                 <a:solidFill>
                   <a:schemeClr val="tx1"/>
                 </a:solidFill>
               </a:rPr>
-              <a:t>Everything is prepared</a:t>
+              <a:t>Pick the folder</a:t>
             </a:r>
             <a:endParaRPr lang="en-US" sz="1400" dirty="0"/>
           </a:p>
@@ -3807,96 +3967,26 @@
               <a:buNone/>
             </a:pPr>
             <a:r>
+              <a:rPr lang="en-US" sz="800" dirty="0">
+                <a:solidFill>
+                  <a:schemeClr val="tx1"/>
+                </a:solidFill>
+              </a:rPr>
+              <a:t> </a:t>
+            </a:r>
+            <a:endParaRPr lang="en-US" sz="1400" dirty="0"/>
+          </a:p>
+          <a:p>
+            <a:pPr indent="0" marL="0">
+              <a:buNone/>
+            </a:pPr>
+            <a:r>
               <a:rPr lang="en-US" sz="1400" dirty="0">
                 <a:solidFill>
                   <a:schemeClr val="accent2"/>
                 </a:solidFill>
               </a:rPr>
-              <a:t>The project carries step-by-step instructions for Claude, so it knows how to guide you.</a:t>
-            </a:r>
-            <a:endParaRPr lang="en-US" sz="1400" dirty="0"/>
-          </a:p>
-          <a:p>
-            <a:pPr indent="0" marL="0">
-              <a:buNone/>
-            </a:pPr>
-            <a:r>
-              <a:rPr lang="en-US" sz="800" dirty="0">
-                <a:solidFill>
-                  <a:schemeClr val="tx1"/>
-                </a:solidFill>
-              </a:rPr>
-              <a:t> </a:t>
-            </a:r>
-            <a:endParaRPr lang="en-US" sz="1400" dirty="0"/>
-          </a:p>
-          <a:p>
-            <a:pPr indent="0" marL="0">
-              <a:buNone/>
-            </a:pPr>
-            <a:r>
-              <a:rPr lang="en-US" sz="1400" b="1" dirty="0">
-                <a:solidFill>
-                  <a:schemeClr val="tx1"/>
-                </a:solidFill>
-              </a:rPr>
-              <a:t>It asks what you want</a:t>
-            </a:r>
-            <a:endParaRPr lang="en-US" sz="1400" dirty="0"/>
-          </a:p>
-          <a:p>
-            <a:pPr indent="0" marL="0">
-              <a:buNone/>
-            </a:pPr>
-            <a:r>
-              <a:rPr lang="en-US" sz="1400" dirty="0">
-                <a:solidFill>
-                  <a:schemeClr val="accent2"/>
-                </a:solidFill>
-              </a:rPr>
-              <a:t>Design a new piece, improve one, add an idea, or something else.</a:t>
-            </a:r>
-            <a:endParaRPr lang="en-US" sz="1400" dirty="0"/>
-          </a:p>
-          <a:p>
-            <a:pPr indent="0" marL="0">
-              <a:buNone/>
-            </a:pPr>
-            <a:r>
-              <a:rPr lang="en-US" sz="800" dirty="0">
-                <a:solidFill>
-                  <a:schemeClr val="tx1"/>
-                </a:solidFill>
-              </a:rPr>
-              <a:t> </a:t>
-            </a:r>
-            <a:endParaRPr lang="en-US" sz="1400" dirty="0"/>
-          </a:p>
-          <a:p>
-            <a:pPr indent="0" marL="0">
-              <a:buNone/>
-            </a:pPr>
-            <a:r>
-              <a:rPr lang="en-US" sz="1400" b="1" dirty="0">
-                <a:solidFill>
-                  <a:schemeClr val="tx1"/>
-                </a:solidFill>
-              </a:rPr>
-              <a:t>It starts your private copy</a:t>
-            </a:r>
-            <a:endParaRPr lang="en-US" sz="1400" dirty="0"/>
-          </a:p>
-          <a:p>
-            <a:pPr indent="0" marL="0">
-              <a:buNone/>
-            </a:pPr>
-            <a:r>
-              <a:rPr lang="en-US" sz="1400" dirty="0">
-                <a:solidFill>
-                  <a:schemeClr val="accent2"/>
-                </a:solidFill>
-              </a:rPr>
-              <a:t>And tells you where to open it.</a:t>
+              <a:t>Click Choose… (next to This computer) and pick open-source-modular-furniture in your Documents. Do this at the start of every session.</a:t>
             </a:r>
             <a:endParaRPr lang="en-US" sz="1400" dirty="0"/>
           </a:p>
@@ -4004,15 +4094,53 @@
                   <a:schemeClr val="tx1"/>
                 </a:solidFill>
               </a:rPr>
-              <a:t>Not sure what to make?</a:t>
+              <a:t>Step 3: say "let's work on this"</a:t>
             </a:r>
             <a:endParaRPr lang="en-US" sz="2400" dirty="0"/>
+          </a:p>
+        </p:txBody>
+      </p:sp>
+      <p:sp>
+        <p:nvSpPr>
+          <p:cNvPr id="3" name="Simulation tag"/>
+          <p:cNvSpPr txBox="1"/>
+          <p:nvPr/>
+        </p:nvSpPr>
+        <p:spPr>
+          <a:xfrm>
+            <a:off x="6949440" y="466344"/>
+            <a:ext cx="1737360" cy="256032"/>
+          </a:xfrm>
+          <a:prstGeom prst="rect">
+            <a:avLst/>
+          </a:prstGeom>
+          <a:solidFill>
+            <a:schemeClr val="accent1"/>
+          </a:solidFill>
+          <a:ln/>
+        </p:spPr>
+        <p:txBody>
+          <a:bodyPr wrap="square" lIns="0" tIns="0" rIns="0" bIns="0" rtlCol="0" anchor="ctr"/>
+          <a:lstStyle/>
+          <a:p>
+            <a:pPr algn="ctr" indent="0" marL="0">
+              <a:buNone/>
+            </a:pPr>
+            <a:r>
+              <a:rPr lang="en-US" sz="1000" b="1" dirty="0">
+                <a:solidFill>
+                  <a:schemeClr val="bg1"/>
+                </a:solidFill>
+              </a:rPr>
+              <a:t>SIMULATED EXAMPLE</a:t>
+            </a:r>
+            <a:endParaRPr lang="en-US" sz="1000" dirty="0"/>
           </a:p>
         </p:txBody>
       </p:sp>
       <p:pic>
         <p:nvPicPr>
-          <p:cNvPr id="3" name="Ideas board" descr="small/ideas.jpg">    </p:cNvPr>
+          <p:cNvPr id="4" name="Simulated first conversation" descr="small/sim-start.jpg">    </p:cNvPr>
           <p:cNvPicPr>
             <a:picLocks noChangeAspect="1"/>
           </p:cNvPicPr>
@@ -4027,7 +4155,7 @@
         <p:spPr>
           <a:xfrm>
             <a:off x="457200" y="1051560"/>
-            <a:ext cx="5120640" cy="2923420"/>
+            <a:ext cx="5394960" cy="3117516"/>
           </a:xfrm>
           <a:prstGeom prst="rect">
             <a:avLst/>
@@ -4043,14 +4171,14 @@
       </p:pic>
       <p:sp>
         <p:nvSpPr>
-          <p:cNvPr id="4" name="Text 1"/>
+          <p:cNvPr id="5" name="Text 2"/>
           <p:cNvSpPr txBox="1"/>
           <p:nvPr/>
         </p:nvSpPr>
         <p:spPr>
           <a:xfrm>
-            <a:off x="5852160" y="1188720"/>
-            <a:ext cx="2926080" cy="3383280"/>
+            <a:off x="6126480" y="1188720"/>
+            <a:ext cx="2651760" cy="3474720"/>
           </a:xfrm>
           <a:prstGeom prst="rect">
             <a:avLst/>
@@ -4066,12 +4194,40 @@
               <a:buNone/>
             </a:pPr>
             <a:r>
+              <a:rPr lang="en-US" sz="1400" b="1" dirty="0">
+                <a:solidFill>
+                  <a:schemeClr val="tx1"/>
+                </a:solidFill>
+              </a:rPr>
+              <a:t>Everything is prepared</a:t>
+            </a:r>
+            <a:endParaRPr lang="en-US" sz="1400" dirty="0"/>
+          </a:p>
+          <a:p>
+            <a:pPr indent="0" marL="0">
+              <a:buNone/>
+            </a:pPr>
+            <a:r>
               <a:rPr lang="en-US" sz="1400" dirty="0">
                 <a:solidFill>
+                  <a:schemeClr val="accent2"/>
+                </a:solidFill>
+              </a:rPr>
+              <a:t>The project carries step-by-step instructions for Claude, so it knows how to guide you.</a:t>
+            </a:r>
+            <a:endParaRPr lang="en-US" sz="1400" dirty="0"/>
+          </a:p>
+          <a:p>
+            <a:pPr indent="0" marL="0">
+              <a:buNone/>
+            </a:pPr>
+            <a:r>
+              <a:rPr lang="en-US" sz="800" dirty="0">
+                <a:solidFill>
                   <a:schemeClr val="tx1"/>
                 </a:solidFill>
               </a:rPr>
-              <a:t>The Ideas page (top bar, right) lists pieces nobody has designed yet, each with an open GitHub issue.</a:t>
+              <a:t> </a:t>
             </a:r>
             <a:endParaRPr lang="en-US" sz="1400" dirty="0"/>
           </a:p>
@@ -4080,8 +4236,36 @@
               <a:buNone/>
             </a:pPr>
             <a:r>
+              <a:rPr lang="en-US" sz="1400" b="1" dirty="0">
+                <a:solidFill>
+                  <a:schemeClr val="tx1"/>
+                </a:solidFill>
+              </a:rPr>
+              <a:t>It asks what you want</a:t>
+            </a:r>
+            <a:endParaRPr lang="en-US" sz="1400" dirty="0"/>
+          </a:p>
+          <a:p>
+            <a:pPr indent="0" marL="0">
+              <a:buNone/>
+            </a:pPr>
+            <a:r>
               <a:rPr lang="en-US" sz="1400" dirty="0">
                 <a:solidFill>
+                  <a:schemeClr val="accent2"/>
+                </a:solidFill>
+              </a:rPr>
+              <a:t>Design a new piece, improve one, add an idea, or something else.</a:t>
+            </a:r>
+            <a:endParaRPr lang="en-US" sz="1400" dirty="0"/>
+          </a:p>
+          <a:p>
+            <a:pPr indent="0" marL="0">
+              <a:buNone/>
+            </a:pPr>
+            <a:r>
+              <a:rPr lang="en-US" sz="800" dirty="0">
+                <a:solidFill>
                   <a:schemeClr val="tx1"/>
                 </a:solidFill>
               </a:rPr>
@@ -4099,7 +4283,7 @@
                   <a:schemeClr val="tx1"/>
                 </a:solidFill>
               </a:rPr>
-              <a:t>Pick one, or bring your own.</a:t>
+              <a:t>It starts your private copy</a:t>
             </a:r>
             <a:endParaRPr lang="en-US" sz="1400" dirty="0"/>
           </a:p>
@@ -4110,24 +4294,10 @@
             <a:r>
               <a:rPr lang="en-US" sz="1400" dirty="0">
                 <a:solidFill>
-                  <a:schemeClr val="tx1"/>
-                </a:solidFill>
-              </a:rPr>
-              <a:t> </a:t>
-            </a:r>
-            <a:endParaRPr lang="en-US" sz="1400" dirty="0"/>
-          </a:p>
-          <a:p>
-            <a:pPr indent="0" marL="0">
-              <a:buNone/>
-            </a:pPr>
-            <a:r>
-              <a:rPr lang="en-US" sz="1400" dirty="0">
-                <a:solidFill>
                   <a:schemeClr val="accent2"/>
                 </a:solidFill>
               </a:rPr>
-              <a:t>Tell Claude which one; it reads the issue and its pictures.</a:t>
+              <a:t>And tells you where to open it.</a:t>
             </a:r>
             <a:endParaRPr lang="en-US" sz="1400" dirty="0"/>
           </a:p>
@@ -4235,7 +4405,7 @@
                   <a:schemeClr val="tx1"/>
                 </a:solidFill>
               </a:rPr>
-              <a:t>Your private copy of the site</a:t>
+              <a:t>Not sure what to make?</a:t>
             </a:r>
             <a:endParaRPr lang="en-US" sz="2400" dirty="0"/>
           </a:p>
@@ -4243,7 +4413,7 @@
       </p:sp>
       <p:pic>
         <p:nvPicPr>
-          <p:cNvPr id="3" name="Local site open in Chrome" descr="small/sim-browser.jpg">    </p:cNvPr>
+          <p:cNvPr id="3" name="Ideas board" descr="small/ideas.jpg">    </p:cNvPr>
           <p:cNvPicPr>
             <a:picLocks noChangeAspect="1"/>
           </p:cNvPicPr>
@@ -4258,7 +4428,7 @@
         <p:spPr>
           <a:xfrm>
             <a:off x="457200" y="1051560"/>
-            <a:ext cx="5120640" cy="3386938"/>
+            <a:ext cx="5120640" cy="2923420"/>
           </a:xfrm>
           <a:prstGeom prst="rect">
             <a:avLst/>
@@ -4274,41 +4444,14 @@
       </p:pic>
       <p:sp>
         <p:nvSpPr>
-          <p:cNvPr id="4" name="Shape 1"/>
-          <p:cNvSpPr/>
-          <p:nvPr/>
-        </p:nvSpPr>
-        <p:spPr>
-          <a:xfrm>
-            <a:off x="5852160" y="1051560"/>
-            <a:ext cx="2834640" cy="1554480"/>
-          </a:xfrm>
-          <a:prstGeom prst="roundRect">
-            <a:avLst>
-              <a:gd name="adj" fmla="val 4706"/>
-            </a:avLst>
-          </a:prstGeom>
-          <a:solidFill>
-            <a:schemeClr val="bg2"/>
-          </a:solidFill>
-          <a:ln w="12700">
-            <a:solidFill>
-              <a:schemeClr val="bg2"/>
-            </a:solidFill>
-            <a:prstDash val="solid"/>
-          </a:ln>
-        </p:spPr>
-      </p:sp>
-      <p:sp>
-        <p:nvSpPr>
-          <p:cNvPr id="5" name="Text 2"/>
+          <p:cNvPr id="4" name="Text 1"/>
           <p:cNvSpPr txBox="1"/>
           <p:nvPr/>
         </p:nvSpPr>
         <p:spPr>
           <a:xfrm>
-            <a:off x="6035040" y="1188720"/>
-            <a:ext cx="2514600" cy="1371600"/>
+            <a:off x="5852160" y="1188720"/>
+            <a:ext cx="2926080" cy="3383280"/>
           </a:xfrm>
           <a:prstGeom prst="rect">
             <a:avLst/>
@@ -4324,12 +4467,12 @@
               <a:buNone/>
             </a:pPr>
             <a:r>
-              <a:rPr lang="en-US" sz="1500" b="1" dirty="0">
+              <a:rPr lang="en-US" sz="1400" dirty="0">
                 <a:solidFill>
                   <a:schemeClr val="tx1"/>
                 </a:solidFill>
               </a:rPr>
-              <a:t>The real site</a:t>
+              <a:t>The Ideas page (top bar, right) lists pieces nobody has designed yet, each with an open GitHub issue.</a:t>
             </a:r>
             <a:endParaRPr lang="en-US" sz="1400" dirty="0"/>
           </a:p>
@@ -4338,123 +4481,54 @@
               <a:buNone/>
             </a:pPr>
             <a:r>
-              <a:rPr lang="en-US" sz="1200" dirty="0">
+              <a:rPr lang="en-US" sz="1400" dirty="0">
+                <a:solidFill>
+                  <a:schemeClr val="tx1"/>
+                </a:solidFill>
+              </a:rPr>
+              <a:t> </a:t>
+            </a:r>
+            <a:endParaRPr lang="en-US" sz="1400" dirty="0"/>
+          </a:p>
+          <a:p>
+            <a:pPr indent="0" marL="0">
+              <a:buNone/>
+            </a:pPr>
+            <a:r>
+              <a:rPr lang="en-US" sz="1400" b="1" dirty="0">
+                <a:solidFill>
+                  <a:schemeClr val="tx1"/>
+                </a:solidFill>
+              </a:rPr>
+              <a:t>Pick one, or bring your own.</a:t>
+            </a:r>
+            <a:endParaRPr lang="en-US" sz="1400" dirty="0"/>
+          </a:p>
+          <a:p>
+            <a:pPr indent="0" marL="0">
+              <a:buNone/>
+            </a:pPr>
+            <a:r>
+              <a:rPr lang="en-US" sz="1400" dirty="0">
+                <a:solidFill>
+                  <a:schemeClr val="tx1"/>
+                </a:solidFill>
+              </a:rPr>
+              <a:t> </a:t>
+            </a:r>
+            <a:endParaRPr lang="en-US" sz="1400" dirty="0"/>
+          </a:p>
+          <a:p>
+            <a:pPr indent="0" marL="0">
+              <a:buNone/>
+            </a:pPr>
+            <a:r>
+              <a:rPr lang="en-US" sz="1400" dirty="0">
                 <a:solidFill>
                   <a:schemeClr val="accent2"/>
                 </a:solidFill>
-                <a:latin typeface="Courier New" pitchFamily="34" charset="0"/>
-                <a:ea typeface="Courier New" pitchFamily="34" charset="-122"/>
-                <a:cs typeface="Courier New" pitchFamily="34" charset="-120"/>
-              </a:rPr>
-              <a:t>mfprado.github.io/…</a:t>
-            </a:r>
-            <a:endParaRPr lang="en-US" sz="1400" dirty="0"/>
-          </a:p>
-          <a:p>
-            <a:pPr indent="0" marL="0">
-              <a:buNone/>
-            </a:pPr>
-            <a:r>
-              <a:rPr lang="en-US" sz="1300" dirty="0">
-                <a:solidFill>
-                  <a:schemeClr val="accent2"/>
-                </a:solidFill>
-              </a:rPr>
-              <a:t>Production: the shop window. Everyone sees it. It only changes after the owner approves.</a:t>
-            </a:r>
-            <a:endParaRPr lang="en-US" sz="1400" dirty="0"/>
-          </a:p>
-        </p:txBody>
-      </p:sp>
-      <p:sp>
-        <p:nvSpPr>
-          <p:cNvPr id="6" name="Shape 3"/>
-          <p:cNvSpPr/>
-          <p:nvPr/>
-        </p:nvSpPr>
-        <p:spPr>
-          <a:xfrm>
-            <a:off x="5852160" y="2788920"/>
-            <a:ext cx="2834640" cy="1737360"/>
-          </a:xfrm>
-          <a:prstGeom prst="roundRect">
-            <a:avLst>
-              <a:gd name="adj" fmla="val 4211"/>
-            </a:avLst>
-          </a:prstGeom>
-          <a:solidFill>
-            <a:schemeClr val="tx2"/>
-          </a:solidFill>
-          <a:ln w="12700">
-            <a:solidFill>
-              <a:schemeClr val="tx2"/>
-            </a:solidFill>
-            <a:prstDash val="solid"/>
-          </a:ln>
-        </p:spPr>
-      </p:sp>
-      <p:sp>
-        <p:nvSpPr>
-          <p:cNvPr id="7" name="Text 4"/>
-          <p:cNvSpPr txBox="1"/>
-          <p:nvPr/>
-        </p:nvSpPr>
-        <p:spPr>
-          <a:xfrm>
-            <a:off x="6035040" y="2926080"/>
-            <a:ext cx="2514600" cy="1554480"/>
-          </a:xfrm>
-          <a:prstGeom prst="rect">
-            <a:avLst/>
-          </a:prstGeom>
-          <a:noFill/>
-          <a:ln/>
-        </p:spPr>
-        <p:txBody>
-          <a:bodyPr wrap="square" lIns="0" tIns="0" rIns="0" bIns="0" rtlCol="0" anchor="t"/>
-          <a:lstStyle/>
-          <a:p>
-            <a:pPr indent="0" marL="0">
-              <a:buNone/>
-            </a:pPr>
-            <a:r>
-              <a:rPr lang="en-US" sz="1500" b="1" dirty="0">
-                <a:solidFill>
-                  <a:schemeClr val="bg1"/>
-                </a:solidFill>
-              </a:rPr>
-              <a:t>Your private copy</a:t>
-            </a:r>
-            <a:endParaRPr lang="en-US" sz="1400" dirty="0"/>
-          </a:p>
-          <a:p>
-            <a:pPr indent="0" marL="0">
-              <a:buNone/>
-            </a:pPr>
-            <a:r>
-              <a:rPr lang="en-US" sz="1200" dirty="0">
-                <a:solidFill>
-                  <a:schemeClr val="accent4"/>
-                </a:solidFill>
-                <a:latin typeface="Courier New" pitchFamily="34" charset="0"/>
-                <a:ea typeface="Courier New" pitchFamily="34" charset="-122"/>
-                <a:cs typeface="Courier New" pitchFamily="34" charset="-120"/>
-              </a:rPr>
-              <a:t>localhost:8000</a:t>
-            </a:r>
-            <a:endParaRPr lang="en-US" sz="1400" dirty="0"/>
-          </a:p>
-          <a:p>
-            <a:pPr indent="0" marL="0">
-              <a:buNone/>
-            </a:pPr>
-            <a:r>
-              <a:rPr lang="en-US" sz="1300" dirty="0">
-                <a:solidFill>
-                  <a:schemeClr val="bg1"/>
-                </a:solidFill>
-              </a:rPr>
-              <a:t>Non-production: the prototype on your workbench. Only on your computer, and it shows your changes straight away.</a:t>
+              </a:rPr>
+              <a:t>Tell Claude which one; it reads the issue and its pictures.</a:t>
             </a:r>
             <a:endParaRPr lang="en-US" sz="1400" dirty="0"/>
           </a:p>
@@ -4562,26 +4636,57 @@
                   <a:schemeClr val="tx1"/>
                 </a:solidFill>
               </a:rPr>
-              <a:t>Open it in Chrome, in three moves</a:t>
+              <a:t>Your private copy of the site</a:t>
             </a:r>
             <a:endParaRPr lang="en-US" sz="2400" dirty="0"/>
           </a:p>
         </p:txBody>
       </p:sp>
-      <p:sp>
-        <p:nvSpPr>
-          <p:cNvPr id="3" name="Shape 1"/>
+      <p:pic>
+        <p:nvPicPr>
+          <p:cNvPr id="3" name="Local site open in Chrome" descr="small/sim-browser.jpg">    </p:cNvPr>
+          <p:cNvPicPr>
+            <a:picLocks noChangeAspect="1"/>
+          </p:cNvPicPr>
+          <p:nvPr/>
+        </p:nvPicPr>
+        <p:blipFill>
+          <a:blip r:embed="rId1"/>
+          <a:stretch>
+            <a:fillRect/>
+          </a:stretch>
+        </p:blipFill>
+        <p:spPr>
+          <a:xfrm>
+            <a:off x="457200" y="1051560"/>
+            <a:ext cx="5120640" cy="3386938"/>
+          </a:xfrm>
+          <a:prstGeom prst="rect">
+            <a:avLst/>
+          </a:prstGeom>
+          <a:effectLst>
+            <a:outerShdw sx="100000" sy="100000" kx="0" ky="0" algn="bl" rotWithShape="0" blurRad="76200" dist="25400" dir="5400000">
+              <a:srgbClr val="000000">
+                <a:alpha val="18000"/>
+              </a:srgbClr>
+            </a:outerShdw>
+          </a:effectLst>
+        </p:spPr>
+      </p:pic>
+      <p:sp>
+        <p:nvSpPr>
+          <p:cNvPr id="4" name="Shape 1"/>
           <p:cNvSpPr/>
           <p:nvPr/>
         </p:nvSpPr>
         <p:spPr>
           <a:xfrm>
-            <a:off x="457200" y="1097280"/>
-            <a:ext cx="2606040" cy="2377440"/>
+            <a:off x="5852160" y="1051560"/>
+            <a:ext cx="2834640" cy="1554480"/>
           </a:xfrm>
           <a:prstGeom prst="roundRect">
             <a:avLst>
-              <a:gd name="adj" fmla="val 3077"/>
+              <a:gd name="adj" fmla="val 4706"/>
             </a:avLst>
           </a:prstGeom>
           <a:solidFill>
@@ -4597,52 +4702,14 @@
       </p:sp>
       <p:sp>
         <p:nvSpPr>
-          <p:cNvPr id="4" name="Text 2"/>
+          <p:cNvPr id="5" name="Text 2"/>
           <p:cNvSpPr txBox="1"/>
           <p:nvPr/>
         </p:nvSpPr>
         <p:spPr>
           <a:xfrm>
-            <a:off x="685800" y="1280160"/>
-            <a:ext cx="502920" cy="502920"/>
-          </a:xfrm>
-          <a:prstGeom prst="ellipse">
-            <a:avLst/>
-          </a:prstGeom>
-          <a:solidFill>
-            <a:schemeClr val="accent1"/>
-          </a:solidFill>
-          <a:ln/>
-        </p:spPr>
-        <p:txBody>
-          <a:bodyPr wrap="square" lIns="0" tIns="0" rIns="0" bIns="0" rtlCol="0" anchor="ctr"/>
-          <a:lstStyle/>
-          <a:p>
-            <a:pPr algn="ctr" indent="0" marL="0">
-              <a:buNone/>
-            </a:pPr>
-            <a:r>
-              <a:rPr lang="en-US" sz="1400" b="1" dirty="0">
-                <a:solidFill>
-                  <a:schemeClr val="bg1"/>
-                </a:solidFill>
-              </a:rPr>
-              <a:t>1</a:t>
-            </a:r>
-            <a:endParaRPr lang="en-US" sz="1400" dirty="0"/>
-          </a:p>
-        </p:txBody>
-      </p:sp>
-      <p:sp>
-        <p:nvSpPr>
-          <p:cNvPr id="5" name="Text 3"/>
-          <p:cNvSpPr txBox="1"/>
-          <p:nvPr/>
-        </p:nvSpPr>
-        <p:spPr>
-          <a:xfrm>
-            <a:off x="685800" y="1920240"/>
-            <a:ext cx="2194560" cy="1463040"/>
+            <a:off x="6035040" y="1188720"/>
+            <a:ext cx="2514600" cy="1371600"/>
           </a:xfrm>
           <a:prstGeom prst="rect">
             <a:avLst/>
@@ -4658,12 +4725,12 @@
               <a:buNone/>
             </a:pPr>
             <a:r>
-              <a:rPr lang="en-US" sz="1600" b="1" dirty="0">
+              <a:rPr lang="en-US" sz="1500" b="1" dirty="0">
                 <a:solidFill>
                   <a:schemeClr val="tx1"/>
                 </a:solidFill>
               </a:rPr>
-              <a:t>Claude starts it</a:t>
+              <a:t>The real site</a:t>
             </a:r>
             <a:endParaRPr lang="en-US" sz="1400" dirty="0"/>
           </a:p>
@@ -4672,261 +4739,48 @@
               <a:buNone/>
             </a:pPr>
             <a:r>
+              <a:rPr lang="en-US" sz="1200" dirty="0">
+                <a:solidFill>
+                  <a:schemeClr val="accent2"/>
+                </a:solidFill>
+                <a:latin typeface="Courier New" pitchFamily="34" charset="0"/>
+                <a:ea typeface="Courier New" pitchFamily="34" charset="-122"/>
+                <a:cs typeface="Courier New" pitchFamily="34" charset="-120"/>
+              </a:rPr>
+              <a:t>mfprado.github.io/…</a:t>
+            </a:r>
+            <a:endParaRPr lang="en-US" sz="1400" dirty="0"/>
+          </a:p>
+          <a:p>
+            <a:pPr indent="0" marL="0">
+              <a:buNone/>
+            </a:pPr>
+            <a:r>
               <a:rPr lang="en-US" sz="1300" dirty="0">
                 <a:solidFill>
                   <a:schemeClr val="accent2"/>
                 </a:solidFill>
               </a:rPr>
-              <a:t>At the start of the session. Keep the chat open: closing it switches the copy off.</a:t>
-            </a:r>
-            <a:endParaRPr lang="en-US" sz="1400" dirty="0"/>
-          </a:p>
-        </p:txBody>
-      </p:sp>
-      <p:sp>
-        <p:nvSpPr>
-          <p:cNvPr id="6" name="Shape 4"/>
+              <a:t>Production: the shop window. Everyone sees it. It only changes after the owner approves.</a:t>
+            </a:r>
+            <a:endParaRPr lang="en-US" sz="1400" dirty="0"/>
+          </a:p>
+        </p:txBody>
+      </p:sp>
+      <p:sp>
+        <p:nvSpPr>
+          <p:cNvPr id="6" name="Shape 3"/>
           <p:cNvSpPr/>
           <p:nvPr/>
         </p:nvSpPr>
         <p:spPr>
           <a:xfrm>
-            <a:off x="3264408" y="1097280"/>
-            <a:ext cx="2606040" cy="2377440"/>
+            <a:off x="5852160" y="2788920"/>
+            <a:ext cx="2834640" cy="1737360"/>
           </a:xfrm>
           <a:prstGeom prst="roundRect">
             <a:avLst>
-              <a:gd name="adj" fmla="val 3077"/>
-            </a:avLst>
-          </a:prstGeom>
-          <a:solidFill>
-            <a:schemeClr val="bg2"/>
-          </a:solidFill>
-          <a:ln w="12700">
-            <a:solidFill>
-              <a:schemeClr val="bg2"/>
-            </a:solidFill>
-            <a:prstDash val="solid"/>
-          </a:ln>
-        </p:spPr>
-      </p:sp>
-      <p:sp>
-        <p:nvSpPr>
-          <p:cNvPr id="7" name="Text 5"/>
-          <p:cNvSpPr txBox="1"/>
-          <p:nvPr/>
-        </p:nvSpPr>
-        <p:spPr>
-          <a:xfrm>
-            <a:off x="3493008" y="1280160"/>
-            <a:ext cx="502920" cy="502920"/>
-          </a:xfrm>
-          <a:prstGeom prst="ellipse">
-            <a:avLst/>
-          </a:prstGeom>
-          <a:solidFill>
-            <a:schemeClr val="accent1"/>
-          </a:solidFill>
-          <a:ln/>
-        </p:spPr>
-        <p:txBody>
-          <a:bodyPr wrap="square" lIns="0" tIns="0" rIns="0" bIns="0" rtlCol="0" anchor="ctr"/>
-          <a:lstStyle/>
-          <a:p>
-            <a:pPr algn="ctr" indent="0" marL="0">
-              <a:buNone/>
-            </a:pPr>
-            <a:r>
-              <a:rPr lang="en-US" sz="1400" b="1" dirty="0">
-                <a:solidFill>
-                  <a:schemeClr val="bg1"/>
-                </a:solidFill>
-              </a:rPr>
-              <a:t>2</a:t>
-            </a:r>
-            <a:endParaRPr lang="en-US" sz="1400" dirty="0"/>
-          </a:p>
-        </p:txBody>
-      </p:sp>
-      <p:sp>
-        <p:nvSpPr>
-          <p:cNvPr id="8" name="Text 6"/>
-          <p:cNvSpPr txBox="1"/>
-          <p:nvPr/>
-        </p:nvSpPr>
-        <p:spPr>
-          <a:xfrm>
-            <a:off x="3493008" y="1920240"/>
-            <a:ext cx="2194560" cy="1463040"/>
-          </a:xfrm>
-          <a:prstGeom prst="rect">
-            <a:avLst/>
-          </a:prstGeom>
-          <a:noFill/>
-          <a:ln/>
-        </p:spPr>
-        <p:txBody>
-          <a:bodyPr wrap="square" lIns="0" tIns="0" rIns="0" bIns="0" rtlCol="0" anchor="t"/>
-          <a:lstStyle/>
-          <a:p>
-            <a:pPr indent="0" marL="0">
-              <a:buNone/>
-            </a:pPr>
-            <a:r>
-              <a:rPr lang="en-US" sz="1600" b="1" dirty="0">
-                <a:solidFill>
-                  <a:schemeClr val="tx1"/>
-                </a:solidFill>
-              </a:rPr>
-              <a:t>Type localhost:8000</a:t>
-            </a:r>
-            <a:endParaRPr lang="en-US" sz="1400" dirty="0"/>
-          </a:p>
-          <a:p>
-            <a:pPr indent="0" marL="0">
-              <a:buNone/>
-            </a:pPr>
-            <a:r>
-              <a:rPr lang="en-US" sz="1300" dirty="0">
-                <a:solidFill>
-                  <a:schemeClr val="accent2"/>
-                </a:solidFill>
-              </a:rPr>
-              <a:t>Open Chrome, click the address bar at the top, type localhost:8000 and press Enter.</a:t>
-            </a:r>
-            <a:endParaRPr lang="en-US" sz="1400" dirty="0"/>
-          </a:p>
-        </p:txBody>
-      </p:sp>
-      <p:sp>
-        <p:nvSpPr>
-          <p:cNvPr id="9" name="Shape 7"/>
-          <p:cNvSpPr/>
-          <p:nvPr/>
-        </p:nvSpPr>
-        <p:spPr>
-          <a:xfrm>
-            <a:off x="6071616" y="1097280"/>
-            <a:ext cx="2606040" cy="2377440"/>
-          </a:xfrm>
-          <a:prstGeom prst="roundRect">
-            <a:avLst>
-              <a:gd name="adj" fmla="val 3077"/>
-            </a:avLst>
-          </a:prstGeom>
-          <a:solidFill>
-            <a:schemeClr val="bg2"/>
-          </a:solidFill>
-          <a:ln w="12700">
-            <a:solidFill>
-              <a:schemeClr val="bg2"/>
-            </a:solidFill>
-            <a:prstDash val="solid"/>
-          </a:ln>
-        </p:spPr>
-      </p:sp>
-      <p:sp>
-        <p:nvSpPr>
-          <p:cNvPr id="10" name="Text 8"/>
-          <p:cNvSpPr txBox="1"/>
-          <p:nvPr/>
-        </p:nvSpPr>
-        <p:spPr>
-          <a:xfrm>
-            <a:off x="6300216" y="1280160"/>
-            <a:ext cx="502920" cy="502920"/>
-          </a:xfrm>
-          <a:prstGeom prst="ellipse">
-            <a:avLst/>
-          </a:prstGeom>
-          <a:solidFill>
-            <a:schemeClr val="accent1"/>
-          </a:solidFill>
-          <a:ln/>
-        </p:spPr>
-        <p:txBody>
-          <a:bodyPr wrap="square" lIns="0" tIns="0" rIns="0" bIns="0" rtlCol="0" anchor="ctr"/>
-          <a:lstStyle/>
-          <a:p>
-            <a:pPr algn="ctr" indent="0" marL="0">
-              <a:buNone/>
-            </a:pPr>
-            <a:r>
-              <a:rPr lang="en-US" sz="1400" b="1" dirty="0">
-                <a:solidFill>
-                  <a:schemeClr val="bg1"/>
-                </a:solidFill>
-              </a:rPr>
-              <a:t>3</a:t>
-            </a:r>
-            <a:endParaRPr lang="en-US" sz="1400" dirty="0"/>
-          </a:p>
-        </p:txBody>
-      </p:sp>
-      <p:sp>
-        <p:nvSpPr>
-          <p:cNvPr id="11" name="Text 9"/>
-          <p:cNvSpPr txBox="1"/>
-          <p:nvPr/>
-        </p:nvSpPr>
-        <p:spPr>
-          <a:xfrm>
-            <a:off x="6300216" y="1920240"/>
-            <a:ext cx="2194560" cy="1463040"/>
-          </a:xfrm>
-          <a:prstGeom prst="rect">
-            <a:avLst/>
-          </a:prstGeom>
-          <a:noFill/>
-          <a:ln/>
-        </p:spPr>
-        <p:txBody>
-          <a:bodyPr wrap="square" lIns="0" tIns="0" rIns="0" bIns="0" rtlCol="0" anchor="t"/>
-          <a:lstStyle/>
-          <a:p>
-            <a:pPr indent="0" marL="0">
-              <a:buNone/>
-            </a:pPr>
-            <a:r>
-              <a:rPr lang="en-US" sz="1600" b="1" dirty="0">
-                <a:solidFill>
-                  <a:schemeClr val="tx1"/>
-                </a:solidFill>
-              </a:rPr>
-              <a:t>Refresh after each change</a:t>
-            </a:r>
-            <a:endParaRPr lang="en-US" sz="1400" dirty="0"/>
-          </a:p>
-          <a:p>
-            <a:pPr indent="0" marL="0">
-              <a:buNone/>
-            </a:pPr>
-            <a:r>
-              <a:rPr lang="en-US" sz="1300" dirty="0">
-                <a:solidFill>
-                  <a:schemeClr val="accent2"/>
-                </a:solidFill>
-              </a:rPr>
-              <a:t>Press Cmd+R on a Mac or Ctrl+R on Windows to see what Claude just changed.</a:t>
-            </a:r>
-            <a:endParaRPr lang="en-US" sz="1400" dirty="0"/>
-          </a:p>
-        </p:txBody>
-      </p:sp>
-      <p:sp>
-        <p:nvSpPr>
-          <p:cNvPr id="12" name="Shape 10"/>
-          <p:cNvSpPr/>
-          <p:nvPr/>
-        </p:nvSpPr>
-        <p:spPr>
-          <a:xfrm>
-            <a:off x="457200" y="3703320"/>
-            <a:ext cx="8229600" cy="868680"/>
-          </a:xfrm>
-          <a:prstGeom prst="roundRect">
-            <a:avLst>
-              <a:gd name="adj" fmla="val 8421"/>
+              <a:gd name="adj" fmla="val 4211"/>
             </a:avLst>
           </a:prstGeom>
           <a:solidFill>
@@ -4942,14 +4796,14 @@
       </p:sp>
       <p:sp>
         <p:nvSpPr>
-          <p:cNvPr id="13" name="Text 11"/>
+          <p:cNvPr id="7" name="Text 4"/>
           <p:cNvSpPr txBox="1"/>
           <p:nvPr/>
         </p:nvSpPr>
         <p:spPr>
           <a:xfrm>
-            <a:off x="685800" y="3840480"/>
-            <a:ext cx="7772400" cy="594360"/>
+            <a:off x="6035040" y="2926080"/>
+            <a:ext cx="2514600" cy="1554480"/>
           </a:xfrm>
           <a:prstGeom prst="rect">
             <a:avLst/>
@@ -4958,30 +4812,50 @@
           <a:ln/>
         </p:spPr>
         <p:txBody>
-          <a:bodyPr wrap="square" lIns="0" tIns="0" rIns="0" bIns="0" rtlCol="0" anchor="ctr"/>
+          <a:bodyPr wrap="square" lIns="0" tIns="0" rIns="0" bIns="0" rtlCol="0" anchor="t"/>
           <a:lstStyle/>
           <a:p>
             <a:pPr indent="0" marL="0">
               <a:buNone/>
             </a:pPr>
             <a:r>
-              <a:rPr lang="en-US" sz="1400" b="1" dirty="0">
+              <a:rPr lang="en-US" sz="1500" b="1" dirty="0">
                 <a:solidFill>
                   <a:schemeClr val="bg1"/>
                 </a:solidFill>
               </a:rPr>
-              <a:t>"This site can't be reached"? </a:t>
-            </a:r>
+              <a:t>Your private copy</a:t>
+            </a:r>
+            <a:endParaRPr lang="en-US" sz="1400" dirty="0"/>
+          </a:p>
+          <a:p>
             <a:pPr indent="0" marL="0">
               <a:buNone/>
             </a:pPr>
             <a:r>
-              <a:rPr lang="en-US" sz="1400" dirty="0">
+              <a:rPr lang="en-US" sz="1200" dirty="0">
+                <a:solidFill>
+                  <a:schemeClr val="accent4"/>
+                </a:solidFill>
+                <a:latin typeface="Courier New" pitchFamily="34" charset="0"/>
+                <a:ea typeface="Courier New" pitchFamily="34" charset="-122"/>
+                <a:cs typeface="Courier New" pitchFamily="34" charset="-120"/>
+              </a:rPr>
+              <a:t>localhost:8000</a:t>
+            </a:r>
+            <a:endParaRPr lang="en-US" sz="1400" dirty="0"/>
+          </a:p>
+          <a:p>
+            <a:pPr indent="0" marL="0">
+              <a:buNone/>
+            </a:pPr>
+            <a:r>
+              <a:rPr lang="en-US" sz="1300" dirty="0">
                 <a:solidFill>
                   <a:schemeClr val="bg1"/>
                 </a:solidFill>
               </a:rPr>
-              <a:t>The copy is switched off. Nothing is broken: just ask Claude to start the site again.</a:t>
+              <a:t>Non-production: the prototype on your workbench. Only on your computer, and it shows your changes straight away.</a:t>
             </a:r>
             <a:endParaRPr lang="en-US" sz="1400" dirty="0"/>
           </a:p>
@@ -5089,7 +4963,7 @@
                   <a:schemeClr val="tx1"/>
                 </a:solidFill>
               </a:rPr>
-              <a:t>Work in rounds: chat, look, repeat</a:t>
+              <a:t>Open it in Chrome, in three moves</a:t>
             </a:r>
             <a:endParaRPr lang="en-US" sz="2400" dirty="0"/>
           </a:p>
@@ -5097,221 +4971,18 @@
       </p:sp>
       <p:sp>
         <p:nvSpPr>
-          <p:cNvPr id="3" name="Simulation tag"/>
-          <p:cNvSpPr txBox="1"/>
-          <p:nvPr/>
-        </p:nvSpPr>
-        <p:spPr>
-          <a:xfrm>
-            <a:off x="6949440" y="466344"/>
-            <a:ext cx="1737360" cy="256032"/>
-          </a:xfrm>
-          <a:prstGeom prst="rect">
-            <a:avLst/>
-          </a:prstGeom>
-          <a:solidFill>
-            <a:schemeClr val="accent1"/>
-          </a:solidFill>
-          <a:ln/>
-        </p:spPr>
-        <p:txBody>
-          <a:bodyPr wrap="square" lIns="0" tIns="0" rIns="0" bIns="0" rtlCol="0" anchor="ctr"/>
-          <a:lstStyle/>
-          <a:p>
-            <a:pPr algn="ctr" indent="0" marL="0">
-              <a:buNone/>
-            </a:pPr>
-            <a:r>
-              <a:rPr lang="en-US" sz="1000" b="1" dirty="0">
-                <a:solidFill>
-                  <a:schemeClr val="bg1"/>
-                </a:solidFill>
-              </a:rPr>
-              <a:t>SIMULATED EXAMPLE</a:t>
-            </a:r>
-            <a:endParaRPr lang="en-US" sz="1000" dirty="0"/>
-          </a:p>
-        </p:txBody>
-      </p:sp>
-      <p:pic>
-        <p:nvPicPr>
-          <p:cNvPr id="4" name="Simulated round" descr="small/app-rounds.jpg">    </p:cNvPr>
-          <p:cNvPicPr>
-            <a:picLocks noChangeAspect="1"/>
-          </p:cNvPicPr>
-          <p:nvPr/>
-        </p:nvPicPr>
-        <p:blipFill>
-          <a:blip r:embed="rId1"/>
-          <a:stretch>
-            <a:fillRect/>
-          </a:stretch>
-        </p:blipFill>
-        <p:spPr>
-          <a:xfrm>
-            <a:off x="457200" y="1051560"/>
-            <a:ext cx="5394960" cy="2215787"/>
-          </a:xfrm>
-          <a:prstGeom prst="rect">
-            <a:avLst/>
-          </a:prstGeom>
-          <a:effectLst>
-            <a:outerShdw sx="100000" sy="100000" kx="0" ky="0" algn="bl" rotWithShape="0" blurRad="76200" dist="25400" dir="5400000">
-              <a:srgbClr val="000000">
-                <a:alpha val="18000"/>
-              </a:srgbClr>
-            </a:outerShdw>
-          </a:effectLst>
-        </p:spPr>
-      </p:pic>
-      <p:sp>
-        <p:nvSpPr>
-          <p:cNvPr id="5" name="Text 2"/>
-          <p:cNvSpPr txBox="1"/>
-          <p:nvPr/>
-        </p:nvSpPr>
-        <p:spPr>
-          <a:xfrm>
-            <a:off x="6126480" y="1188720"/>
-            <a:ext cx="2651760" cy="2743200"/>
-          </a:xfrm>
-          <a:prstGeom prst="rect">
-            <a:avLst/>
-          </a:prstGeom>
-          <a:noFill/>
-          <a:ln/>
-        </p:spPr>
-        <p:txBody>
-          <a:bodyPr wrap="square" lIns="0" tIns="0" rIns="0" bIns="0" rtlCol="0" anchor="t"/>
-          <a:lstStyle/>
-          <a:p>
-            <a:pPr indent="0" marL="0">
-              <a:buNone/>
-            </a:pPr>
-            <a:r>
-              <a:rPr lang="en-US" sz="1400" b="1" dirty="0">
-                <a:solidFill>
-                  <a:schemeClr val="tx1"/>
-                </a:solidFill>
-              </a:rPr>
-              <a:t>Claude makes one change</a:t>
-            </a:r>
-            <a:endParaRPr lang="en-US" sz="1400" dirty="0"/>
-          </a:p>
-          <a:p>
-            <a:pPr indent="0" marL="0">
-              <a:buNone/>
-            </a:pPr>
-            <a:r>
-              <a:rPr lang="en-US" sz="1400" dirty="0">
-                <a:solidFill>
-                  <a:schemeClr val="accent2"/>
-                </a:solidFill>
-              </a:rPr>
-              <a:t>And tells you exactly where to look.</a:t>
-            </a:r>
-            <a:endParaRPr lang="en-US" sz="1400" dirty="0"/>
-          </a:p>
-          <a:p>
-            <a:pPr indent="0" marL="0">
-              <a:buNone/>
-            </a:pPr>
-            <a:r>
-              <a:rPr lang="en-US" sz="800" dirty="0">
-                <a:solidFill>
-                  <a:schemeClr val="tx1"/>
-                </a:solidFill>
-              </a:rPr>
-              <a:t> </a:t>
-            </a:r>
-            <a:endParaRPr lang="en-US" sz="1400" dirty="0"/>
-          </a:p>
-          <a:p>
-            <a:pPr indent="0" marL="0">
-              <a:buNone/>
-            </a:pPr>
-            <a:r>
-              <a:rPr lang="en-US" sz="1400" b="1" dirty="0">
-                <a:solidFill>
-                  <a:schemeClr val="tx1"/>
-                </a:solidFill>
-              </a:rPr>
-              <a:t>You switch to Chrome</a:t>
-            </a:r>
-            <a:endParaRPr lang="en-US" sz="1400" dirty="0"/>
-          </a:p>
-          <a:p>
-            <a:pPr indent="0" marL="0">
-              <a:buNone/>
-            </a:pPr>
-            <a:r>
-              <a:rPr lang="en-US" sz="1400" dirty="0">
-                <a:solidFill>
-                  <a:schemeClr val="accent2"/>
-                </a:solidFill>
-              </a:rPr>
-              <a:t>Refresh, try it, come back to the chat.</a:t>
-            </a:r>
-            <a:endParaRPr lang="en-US" sz="1400" dirty="0"/>
-          </a:p>
-          <a:p>
-            <a:pPr indent="0" marL="0">
-              <a:buNone/>
-            </a:pPr>
-            <a:r>
-              <a:rPr lang="en-US" sz="800" dirty="0">
-                <a:solidFill>
-                  <a:schemeClr val="tx1"/>
-                </a:solidFill>
-              </a:rPr>
-              <a:t> </a:t>
-            </a:r>
-            <a:endParaRPr lang="en-US" sz="1400" dirty="0"/>
-          </a:p>
-          <a:p>
-            <a:pPr indent="0" marL="0">
-              <a:buNone/>
-            </a:pPr>
-            <a:r>
-              <a:rPr lang="en-US" sz="1400" b="1" dirty="0">
-                <a:solidFill>
-                  <a:schemeClr val="tx1"/>
-                </a:solidFill>
-              </a:rPr>
-              <a:t>You say what you think</a:t>
-            </a:r>
-            <a:endParaRPr lang="en-US" sz="1400" dirty="0"/>
-          </a:p>
-          <a:p>
-            <a:pPr indent="0" marL="0">
-              <a:buNone/>
-            </a:pPr>
-            <a:r>
-              <a:rPr lang="en-US" sz="1400" dirty="0">
-                <a:solidFill>
-                  <a:schemeClr val="accent2"/>
-                </a:solidFill>
-              </a:rPr>
-              <a:t>In plain words: "rename this", "add a height setting", "perfect".</a:t>
-            </a:r>
-            <a:endParaRPr lang="en-US" sz="1400" dirty="0"/>
-          </a:p>
-        </p:txBody>
-      </p:sp>
-      <p:sp>
-        <p:nvSpPr>
-          <p:cNvPr id="6" name="Shape 3"/>
+          <p:cNvPr id="3" name="Shape 1"/>
           <p:cNvSpPr/>
           <p:nvPr/>
         </p:nvSpPr>
         <p:spPr>
           <a:xfrm>
-            <a:off x="6126480" y="3611880"/>
-            <a:ext cx="2651760" cy="777240"/>
+            <a:off x="457200" y="1097280"/>
+            <a:ext cx="2606040" cy="2377440"/>
           </a:xfrm>
           <a:prstGeom prst="roundRect">
             <a:avLst>
-              <a:gd name="adj" fmla="val 9412"/>
+              <a:gd name="adj" fmla="val 3077"/>
             </a:avLst>
           </a:prstGeom>
           <a:solidFill>
@@ -5327,14 +4998,52 @@
       </p:sp>
       <p:sp>
         <p:nvSpPr>
-          <p:cNvPr id="7" name="Text 4"/>
+          <p:cNvPr id="4" name="Text 2"/>
           <p:cNvSpPr txBox="1"/>
           <p:nvPr/>
         </p:nvSpPr>
         <p:spPr>
           <a:xfrm>
-            <a:off x="6263640" y="3657600"/>
-            <a:ext cx="2377440" cy="685800"/>
+            <a:off x="685800" y="1280160"/>
+            <a:ext cx="502920" cy="502920"/>
+          </a:xfrm>
+          <a:prstGeom prst="ellipse">
+            <a:avLst/>
+          </a:prstGeom>
+          <a:solidFill>
+            <a:schemeClr val="accent1"/>
+          </a:solidFill>
+          <a:ln/>
+        </p:spPr>
+        <p:txBody>
+          <a:bodyPr wrap="square" lIns="0" tIns="0" rIns="0" bIns="0" rtlCol="0" anchor="ctr"/>
+          <a:lstStyle/>
+          <a:p>
+            <a:pPr algn="ctr" indent="0" marL="0">
+              <a:buNone/>
+            </a:pPr>
+            <a:r>
+              <a:rPr lang="en-US" sz="1400" b="1" dirty="0">
+                <a:solidFill>
+                  <a:schemeClr val="bg1"/>
+                </a:solidFill>
+              </a:rPr>
+              <a:t>1</a:t>
+            </a:r>
+            <a:endParaRPr lang="en-US" sz="1400" dirty="0"/>
+          </a:p>
+        </p:txBody>
+      </p:sp>
+      <p:sp>
+        <p:nvSpPr>
+          <p:cNvPr id="5" name="Text 3"/>
+          <p:cNvSpPr txBox="1"/>
+          <p:nvPr/>
+        </p:nvSpPr>
+        <p:spPr>
+          <a:xfrm>
+            <a:off x="685800" y="1920240"/>
+            <a:ext cx="2194560" cy="1463040"/>
           </a:xfrm>
           <a:prstGeom prst="rect">
             <a:avLst/>
@@ -5343,21 +5052,339 @@
           <a:ln/>
         </p:spPr>
         <p:txBody>
+          <a:bodyPr wrap="square" lIns="0" tIns="0" rIns="0" bIns="0" rtlCol="0" anchor="t"/>
+          <a:lstStyle/>
+          <a:p>
+            <a:pPr indent="0" marL="0">
+              <a:buNone/>
+            </a:pPr>
+            <a:r>
+              <a:rPr lang="en-US" sz="1600" b="1" dirty="0">
+                <a:solidFill>
+                  <a:schemeClr val="tx1"/>
+                </a:solidFill>
+              </a:rPr>
+              <a:t>Claude starts it</a:t>
+            </a:r>
+            <a:endParaRPr lang="en-US" sz="1400" dirty="0"/>
+          </a:p>
+          <a:p>
+            <a:pPr indent="0" marL="0">
+              <a:buNone/>
+            </a:pPr>
+            <a:r>
+              <a:rPr lang="en-US" sz="1300" dirty="0">
+                <a:solidFill>
+                  <a:schemeClr val="accent2"/>
+                </a:solidFill>
+              </a:rPr>
+              <a:t>At the start of the session. Keep the chat open: closing it switches the copy off.</a:t>
+            </a:r>
+            <a:endParaRPr lang="en-US" sz="1400" dirty="0"/>
+          </a:p>
+        </p:txBody>
+      </p:sp>
+      <p:sp>
+        <p:nvSpPr>
+          <p:cNvPr id="6" name="Shape 4"/>
+          <p:cNvSpPr/>
+          <p:nvPr/>
+        </p:nvSpPr>
+        <p:spPr>
+          <a:xfrm>
+            <a:off x="3264408" y="1097280"/>
+            <a:ext cx="2606040" cy="2377440"/>
+          </a:xfrm>
+          <a:prstGeom prst="roundRect">
+            <a:avLst>
+              <a:gd name="adj" fmla="val 3077"/>
+            </a:avLst>
+          </a:prstGeom>
+          <a:solidFill>
+            <a:schemeClr val="bg2"/>
+          </a:solidFill>
+          <a:ln w="12700">
+            <a:solidFill>
+              <a:schemeClr val="bg2"/>
+            </a:solidFill>
+            <a:prstDash val="solid"/>
+          </a:ln>
+        </p:spPr>
+      </p:sp>
+      <p:sp>
+        <p:nvSpPr>
+          <p:cNvPr id="7" name="Text 5"/>
+          <p:cNvSpPr txBox="1"/>
+          <p:nvPr/>
+        </p:nvSpPr>
+        <p:spPr>
+          <a:xfrm>
+            <a:off x="3493008" y="1280160"/>
+            <a:ext cx="502920" cy="502920"/>
+          </a:xfrm>
+          <a:prstGeom prst="ellipse">
+            <a:avLst/>
+          </a:prstGeom>
+          <a:solidFill>
+            <a:schemeClr val="accent1"/>
+          </a:solidFill>
+          <a:ln/>
+        </p:spPr>
+        <p:txBody>
           <a:bodyPr wrap="square" lIns="0" tIns="0" rIns="0" bIns="0" rtlCol="0" anchor="ctr"/>
           <a:lstStyle/>
           <a:p>
+            <a:pPr algn="ctr" indent="0" marL="0">
+              <a:buNone/>
+            </a:pPr>
+            <a:r>
+              <a:rPr lang="en-US" sz="1400" b="1" dirty="0">
+                <a:solidFill>
+                  <a:schemeClr val="bg1"/>
+                </a:solidFill>
+              </a:rPr>
+              <a:t>2</a:t>
+            </a:r>
+            <a:endParaRPr lang="en-US" sz="1400" dirty="0"/>
+          </a:p>
+        </p:txBody>
+      </p:sp>
+      <p:sp>
+        <p:nvSpPr>
+          <p:cNvPr id="8" name="Text 6"/>
+          <p:cNvSpPr txBox="1"/>
+          <p:nvPr/>
+        </p:nvSpPr>
+        <p:spPr>
+          <a:xfrm>
+            <a:off x="3493008" y="1920240"/>
+            <a:ext cx="2194560" cy="1463040"/>
+          </a:xfrm>
+          <a:prstGeom prst="rect">
+            <a:avLst/>
+          </a:prstGeom>
+          <a:noFill/>
+          <a:ln/>
+        </p:spPr>
+        <p:txBody>
+          <a:bodyPr wrap="square" lIns="0" tIns="0" rIns="0" bIns="0" rtlCol="0" anchor="t"/>
+          <a:lstStyle/>
+          <a:p>
             <a:pPr indent="0" marL="0">
               <a:buNone/>
             </a:pPr>
             <a:r>
-              <a:rPr lang="en-US" sz="1200" dirty="0">
+              <a:rPr lang="en-US" sz="1600" b="1" dirty="0">
                 <a:solidFill>
                   <a:schemeClr val="tx1"/>
                 </a:solidFill>
               </a:rPr>
-              <a:t>Each round is saved, so nothing is lost if you change your mind.</a:t>
-            </a:r>
-            <a:endParaRPr lang="en-US" sz="1200" dirty="0"/>
+              <a:t>Type localhost:8000</a:t>
+            </a:r>
+            <a:endParaRPr lang="en-US" sz="1400" dirty="0"/>
+          </a:p>
+          <a:p>
+            <a:pPr indent="0" marL="0">
+              <a:buNone/>
+            </a:pPr>
+            <a:r>
+              <a:rPr lang="en-US" sz="1300" dirty="0">
+                <a:solidFill>
+                  <a:schemeClr val="accent2"/>
+                </a:solidFill>
+              </a:rPr>
+              <a:t>Open Chrome, click the address bar at the top, type localhost:8000 and press Enter.</a:t>
+            </a:r>
+            <a:endParaRPr lang="en-US" sz="1400" dirty="0"/>
+          </a:p>
+        </p:txBody>
+      </p:sp>
+      <p:sp>
+        <p:nvSpPr>
+          <p:cNvPr id="9" name="Shape 7"/>
+          <p:cNvSpPr/>
+          <p:nvPr/>
+        </p:nvSpPr>
+        <p:spPr>
+          <a:xfrm>
+            <a:off x="6071616" y="1097280"/>
+            <a:ext cx="2606040" cy="2377440"/>
+          </a:xfrm>
+          <a:prstGeom prst="roundRect">
+            <a:avLst>
+              <a:gd name="adj" fmla="val 3077"/>
+            </a:avLst>
+          </a:prstGeom>
+          <a:solidFill>
+            <a:schemeClr val="bg2"/>
+          </a:solidFill>
+          <a:ln w="12700">
+            <a:solidFill>
+              <a:schemeClr val="bg2"/>
+            </a:solidFill>
+            <a:prstDash val="solid"/>
+          </a:ln>
+        </p:spPr>
+      </p:sp>
+      <p:sp>
+        <p:nvSpPr>
+          <p:cNvPr id="10" name="Text 8"/>
+          <p:cNvSpPr txBox="1"/>
+          <p:nvPr/>
+        </p:nvSpPr>
+        <p:spPr>
+          <a:xfrm>
+            <a:off x="6300216" y="1280160"/>
+            <a:ext cx="502920" cy="502920"/>
+          </a:xfrm>
+          <a:prstGeom prst="ellipse">
+            <a:avLst/>
+          </a:prstGeom>
+          <a:solidFill>
+            <a:schemeClr val="accent1"/>
+          </a:solidFill>
+          <a:ln/>
+        </p:spPr>
+        <p:txBody>
+          <a:bodyPr wrap="square" lIns="0" tIns="0" rIns="0" bIns="0" rtlCol="0" anchor="ctr"/>
+          <a:lstStyle/>
+          <a:p>
+            <a:pPr algn="ctr" indent="0" marL="0">
+              <a:buNone/>
+            </a:pPr>
+            <a:r>
+              <a:rPr lang="en-US" sz="1400" b="1" dirty="0">
+                <a:solidFill>
+                  <a:schemeClr val="bg1"/>
+                </a:solidFill>
+              </a:rPr>
+              <a:t>3</a:t>
+            </a:r>
+            <a:endParaRPr lang="en-US" sz="1400" dirty="0"/>
+          </a:p>
+        </p:txBody>
+      </p:sp>
+      <p:sp>
+        <p:nvSpPr>
+          <p:cNvPr id="11" name="Text 9"/>
+          <p:cNvSpPr txBox="1"/>
+          <p:nvPr/>
+        </p:nvSpPr>
+        <p:spPr>
+          <a:xfrm>
+            <a:off x="6300216" y="1920240"/>
+            <a:ext cx="2194560" cy="1463040"/>
+          </a:xfrm>
+          <a:prstGeom prst="rect">
+            <a:avLst/>
+          </a:prstGeom>
+          <a:noFill/>
+          <a:ln/>
+        </p:spPr>
+        <p:txBody>
+          <a:bodyPr wrap="square" lIns="0" tIns="0" rIns="0" bIns="0" rtlCol="0" anchor="t"/>
+          <a:lstStyle/>
+          <a:p>
+            <a:pPr indent="0" marL="0">
+              <a:buNone/>
+            </a:pPr>
+            <a:r>
+              <a:rPr lang="en-US" sz="1600" b="1" dirty="0">
+                <a:solidFill>
+                  <a:schemeClr val="tx1"/>
+                </a:solidFill>
+              </a:rPr>
+              <a:t>Refresh after each change</a:t>
+            </a:r>
+            <a:endParaRPr lang="en-US" sz="1400" dirty="0"/>
+          </a:p>
+          <a:p>
+            <a:pPr indent="0" marL="0">
+              <a:buNone/>
+            </a:pPr>
+            <a:r>
+              <a:rPr lang="en-US" sz="1300" dirty="0">
+                <a:solidFill>
+                  <a:schemeClr val="accent2"/>
+                </a:solidFill>
+              </a:rPr>
+              <a:t>Press Cmd+R on a Mac or Ctrl+R on Windows to see what Claude just changed.</a:t>
+            </a:r>
+            <a:endParaRPr lang="en-US" sz="1400" dirty="0"/>
+          </a:p>
+        </p:txBody>
+      </p:sp>
+      <p:sp>
+        <p:nvSpPr>
+          <p:cNvPr id="12" name="Shape 10"/>
+          <p:cNvSpPr/>
+          <p:nvPr/>
+        </p:nvSpPr>
+        <p:spPr>
+          <a:xfrm>
+            <a:off x="457200" y="3703320"/>
+            <a:ext cx="8229600" cy="868680"/>
+          </a:xfrm>
+          <a:prstGeom prst="roundRect">
+            <a:avLst>
+              <a:gd name="adj" fmla="val 8421"/>
+            </a:avLst>
+          </a:prstGeom>
+          <a:solidFill>
+            <a:schemeClr val="tx2"/>
+          </a:solidFill>
+          <a:ln w="12700">
+            <a:solidFill>
+              <a:schemeClr val="tx2"/>
+            </a:solidFill>
+            <a:prstDash val="solid"/>
+          </a:ln>
+        </p:spPr>
+      </p:sp>
+      <p:sp>
+        <p:nvSpPr>
+          <p:cNvPr id="13" name="Text 11"/>
+          <p:cNvSpPr txBox="1"/>
+          <p:nvPr/>
+        </p:nvSpPr>
+        <p:spPr>
+          <a:xfrm>
+            <a:off x="685800" y="3840480"/>
+            <a:ext cx="7772400" cy="594360"/>
+          </a:xfrm>
+          <a:prstGeom prst="rect">
+            <a:avLst/>
+          </a:prstGeom>
+          <a:noFill/>
+          <a:ln/>
+        </p:spPr>
+        <p:txBody>
+          <a:bodyPr wrap="square" lIns="0" tIns="0" rIns="0" bIns="0" rtlCol="0" anchor="ctr"/>
+          <a:lstStyle/>
+          <a:p>
+            <a:pPr indent="0" marL="0">
+              <a:buNone/>
+            </a:pPr>
+            <a:r>
+              <a:rPr lang="en-US" sz="1400" b="1" dirty="0">
+                <a:solidFill>
+                  <a:schemeClr val="bg1"/>
+                </a:solidFill>
+              </a:rPr>
+              <a:t>"This site can't be reached"? </a:t>
+            </a:r>
+            <a:pPr indent="0" marL="0">
+              <a:buNone/>
+            </a:pPr>
+            <a:r>
+              <a:rPr lang="en-US" sz="1400" dirty="0">
+                <a:solidFill>
+                  <a:schemeClr val="bg1"/>
+                </a:solidFill>
+              </a:rPr>
+              <a:t>The copy is switched off. Nothing is broken: just ask Claude to start the site again.</a:t>
+            </a:r>
+            <a:endParaRPr lang="en-US" sz="1400" dirty="0"/>
           </a:p>
         </p:txBody>
       </p:sp>
@@ -5463,7 +5490,7 @@
                   <a:schemeClr val="tx1"/>
                 </a:solidFill>
               </a:rPr>
-              <a:t>New piece? It starts with a brief</a:t>
+              <a:t>Work in rounds: chat, look, repeat</a:t>
             </a:r>
             <a:endParaRPr lang="en-US" sz="2400" dirty="0"/>
           </a:p>
@@ -5509,7 +5536,7 @@
       </p:sp>
       <p:pic>
         <p:nvPicPr>
-          <p:cNvPr id="4" name="Simulated design brief" descr="small/sim-brief.jpg">    </p:cNvPr>
+          <p:cNvPr id="4" name="Simulated round" descr="small/app-rounds.jpg">    </p:cNvPr>
           <p:cNvPicPr>
             <a:picLocks noChangeAspect="1"/>
           </p:cNvPicPr>
@@ -5524,7 +5551,7 @@
         <p:spPr>
           <a:xfrm>
             <a:off x="457200" y="1051560"/>
-            <a:ext cx="4397071" cy="3611880"/>
+            <a:ext cx="5394960" cy="2215787"/>
           </a:xfrm>
           <a:prstGeom prst="rect">
             <a:avLst/>
@@ -5546,8 +5573,8 @@
         </p:nvSpPr>
         <p:spPr>
           <a:xfrm>
-            <a:off x="5486400" y="1188720"/>
-            <a:ext cx="3291840" cy="3474720"/>
+            <a:off x="6126480" y="1188720"/>
+            <a:ext cx="2651760" cy="2743200"/>
           </a:xfrm>
           <a:prstGeom prst="rect">
             <a:avLst/>
@@ -5568,7 +5595,7 @@
                   <a:schemeClr val="tx1"/>
                 </a:solidFill>
               </a:rPr>
-              <a:t>An interview first</a:t>
+              <a:t>Claude makes one change</a:t>
             </a:r>
             <a:endParaRPr lang="en-US" sz="1400" dirty="0"/>
           </a:p>
@@ -5582,7 +5609,7 @@
                   <a:schemeClr val="accent2"/>
                 </a:solidFill>
               </a:rPr>
-              <a:t>Claude asks one question at a time: parts, sizes, how it goes together, what people can change.</a:t>
+              <a:t>And tells you exactly where to look.</a:t>
             </a:r>
             <a:endParaRPr lang="en-US" sz="1400" dirty="0"/>
           </a:p>
@@ -5610,7 +5637,7 @@
                   <a:schemeClr val="tx1"/>
                 </a:solidFill>
               </a:rPr>
-              <a:t>Written down as a brief</a:t>
+              <a:t>You switch to Chrome</a:t>
             </a:r>
             <a:endParaRPr lang="en-US" sz="1400" dirty="0"/>
           </a:p>
@@ -5624,7 +5651,7 @@
                   <a:schemeClr val="accent2"/>
                 </a:solidFill>
               </a:rPr>
-              <a:t>You approve it before anything is built.</a:t>
+              <a:t>Refresh, try it, come back to the chat.</a:t>
             </a:r>
             <a:endParaRPr lang="en-US" sz="1400" dirty="0"/>
           </a:p>
@@ -5652,7 +5679,7 @@
                   <a:schemeClr val="tx1"/>
                 </a:solidFill>
               </a:rPr>
-              <a:t>Unknown means unknown</a:t>
+              <a:t>You say what you think</a:t>
             </a:r>
             <a:endParaRPr lang="en-US" sz="1400" dirty="0"/>
           </a:p>
@@ -5666,9 +5693,72 @@
                   <a:schemeClr val="accent2"/>
                 </a:solidFill>
               </a:rPr>
-              <a:t>Any size not on a listing goes on a "to measure" list.</a:t>
-            </a:r>
-            <a:endParaRPr lang="en-US" sz="1400" dirty="0"/>
+              <a:t>In plain words: "rename this", "add a height setting", "perfect".</a:t>
+            </a:r>
+            <a:endParaRPr lang="en-US" sz="1400" dirty="0"/>
+          </a:p>
+        </p:txBody>
+      </p:sp>
+      <p:sp>
+        <p:nvSpPr>
+          <p:cNvPr id="6" name="Shape 3"/>
+          <p:cNvSpPr/>
+          <p:nvPr/>
+        </p:nvSpPr>
+        <p:spPr>
+          <a:xfrm>
+            <a:off x="6126480" y="3611880"/>
+            <a:ext cx="2651760" cy="777240"/>
+          </a:xfrm>
+          <a:prstGeom prst="roundRect">
+            <a:avLst>
+              <a:gd name="adj" fmla="val 9412"/>
+            </a:avLst>
+          </a:prstGeom>
+          <a:solidFill>
+            <a:schemeClr val="bg2"/>
+          </a:solidFill>
+          <a:ln w="12700">
+            <a:solidFill>
+              <a:schemeClr val="bg2"/>
+            </a:solidFill>
+            <a:prstDash val="solid"/>
+          </a:ln>
+        </p:spPr>
+      </p:sp>
+      <p:sp>
+        <p:nvSpPr>
+          <p:cNvPr id="7" name="Text 4"/>
+          <p:cNvSpPr txBox="1"/>
+          <p:nvPr/>
+        </p:nvSpPr>
+        <p:spPr>
+          <a:xfrm>
+            <a:off x="6263640" y="3657600"/>
+            <a:ext cx="2377440" cy="685800"/>
+          </a:xfrm>
+          <a:prstGeom prst="rect">
+            <a:avLst/>
+          </a:prstGeom>
+          <a:noFill/>
+          <a:ln/>
+        </p:spPr>
+        <p:txBody>
+          <a:bodyPr wrap="square" lIns="0" tIns="0" rIns="0" bIns="0" rtlCol="0" anchor="ctr"/>
+          <a:lstStyle/>
+          <a:p>
+            <a:pPr indent="0" marL="0">
+              <a:buNone/>
+            </a:pPr>
+            <a:r>
+              <a:rPr lang="en-US" sz="1200" dirty="0">
+                <a:solidFill>
+                  <a:schemeClr val="tx1"/>
+                </a:solidFill>
+              </a:rPr>
+              <a:t>Each round is saved, so nothing is lost if you change your mind.</a:t>
+            </a:r>
+            <a:endParaRPr lang="en-US" sz="1200" dirty="0"/>
           </a:p>
         </p:txBody>
       </p:sp>
@@ -5774,7 +5864,7 @@
                   <a:schemeClr val="tx1"/>
                 </a:solidFill>
               </a:rPr>
-              <a:t>Before sending: try it all</a:t>
+              <a:t>New piece? It starts with a brief</a:t>
             </a:r>
             <a:endParaRPr lang="en-US" sz="2400" dirty="0"/>
           </a:p>
@@ -5782,671 +5872,45 @@
       </p:sp>
       <p:sp>
         <p:nvSpPr>
-          <p:cNvPr id="3" name="Text 1"/>
+          <p:cNvPr id="3" name="Simulation tag"/>
           <p:cNvSpPr txBox="1"/>
           <p:nvPr/>
         </p:nvSpPr>
         <p:spPr>
           <a:xfrm>
-            <a:off x="457200" y="1097280"/>
-            <a:ext cx="274320" cy="365760"/>
-          </a:xfrm>
-          <a:prstGeom prst="rect">
-            <a:avLst/>
-          </a:prstGeom>
-          <a:noFill/>
-          <a:ln/>
-        </p:spPr>
-        <p:txBody>
-          <a:bodyPr wrap="square" lIns="0" tIns="0" rIns="0" bIns="0" rtlCol="0" anchor="t"/>
-          <a:lstStyle/>
-          <a:p>
-            <a:pPr indent="0" marL="0">
-              <a:buNone/>
-            </a:pPr>
-            <a:r>
-              <a:rPr lang="en-US" sz="1600" b="1" dirty="0">
-                <a:solidFill>
-                  <a:schemeClr val="accent1"/>
-                </a:solidFill>
-              </a:rPr>
-              <a:t>✓</a:t>
-            </a:r>
-            <a:endParaRPr lang="en-US" sz="1600" dirty="0"/>
-          </a:p>
-        </p:txBody>
-      </p:sp>
-      <p:sp>
-        <p:nvSpPr>
-          <p:cNvPr id="4" name="Text 2"/>
-          <p:cNvSpPr txBox="1"/>
-          <p:nvPr/>
-        </p:nvSpPr>
-        <p:spPr>
-          <a:xfrm>
-            <a:off x="777240" y="1115568"/>
-            <a:ext cx="2194560" cy="411480"/>
-          </a:xfrm>
-          <a:prstGeom prst="rect">
-            <a:avLst/>
-          </a:prstGeom>
-          <a:noFill/>
-          <a:ln/>
-        </p:spPr>
-        <p:txBody>
-          <a:bodyPr wrap="square" lIns="0" tIns="0" rIns="0" bIns="0" rtlCol="0" anchor="t"/>
-          <a:lstStyle/>
-          <a:p>
-            <a:pPr indent="0" marL="0">
-              <a:buNone/>
-            </a:pPr>
-            <a:r>
-              <a:rPr lang="en-US" sz="1400" dirty="0">
-                <a:solidFill>
-                  <a:schemeClr val="tx1"/>
-                </a:solidFill>
-              </a:rPr>
-              <a:t>Smallest and largest sizes</a:t>
-            </a:r>
-            <a:endParaRPr lang="en-US" sz="1400" dirty="0"/>
-          </a:p>
-        </p:txBody>
-      </p:sp>
-      <p:sp>
-        <p:nvSpPr>
-          <p:cNvPr id="5" name="Text 3"/>
-          <p:cNvSpPr txBox="1"/>
-          <p:nvPr/>
-        </p:nvSpPr>
-        <p:spPr>
-          <a:xfrm>
-            <a:off x="3017520" y="1097280"/>
-            <a:ext cx="274320" cy="365760"/>
-          </a:xfrm>
-          <a:prstGeom prst="rect">
-            <a:avLst/>
-          </a:prstGeom>
-          <a:noFill/>
-          <a:ln/>
-        </p:spPr>
-        <p:txBody>
-          <a:bodyPr wrap="square" lIns="0" tIns="0" rIns="0" bIns="0" rtlCol="0" anchor="t"/>
-          <a:lstStyle/>
-          <a:p>
-            <a:pPr indent="0" marL="0">
-              <a:buNone/>
-            </a:pPr>
-            <a:r>
-              <a:rPr lang="en-US" sz="1600" b="1" dirty="0">
-                <a:solidFill>
-                  <a:schemeClr val="accent1"/>
-                </a:solidFill>
-              </a:rPr>
-              <a:t>✓</a:t>
-            </a:r>
-            <a:endParaRPr lang="en-US" sz="1600" dirty="0"/>
-          </a:p>
-        </p:txBody>
-      </p:sp>
-      <p:sp>
-        <p:nvSpPr>
-          <p:cNvPr id="6" name="Text 4"/>
-          <p:cNvSpPr txBox="1"/>
-          <p:nvPr/>
-        </p:nvSpPr>
-        <p:spPr>
-          <a:xfrm>
-            <a:off x="3337560" y="1115568"/>
-            <a:ext cx="2194560" cy="411480"/>
-          </a:xfrm>
-          <a:prstGeom prst="rect">
-            <a:avLst/>
-          </a:prstGeom>
-          <a:noFill/>
-          <a:ln/>
-        </p:spPr>
-        <p:txBody>
-          <a:bodyPr wrap="square" lIns="0" tIns="0" rIns="0" bIns="0" rtlCol="0" anchor="t"/>
-          <a:lstStyle/>
-          <a:p>
-            <a:pPr indent="0" marL="0">
-              <a:buNone/>
-            </a:pPr>
-            <a:r>
-              <a:rPr lang="en-US" sz="1400" dirty="0">
-                <a:solidFill>
-                  <a:schemeClr val="tx1"/>
-                </a:solidFill>
-              </a:rPr>
-              <a:t>Each option on and off</a:t>
-            </a:r>
-            <a:endParaRPr lang="en-US" sz="1400" dirty="0"/>
-          </a:p>
-        </p:txBody>
-      </p:sp>
-      <p:sp>
-        <p:nvSpPr>
-          <p:cNvPr id="7" name="Text 5"/>
-          <p:cNvSpPr txBox="1"/>
-          <p:nvPr/>
-        </p:nvSpPr>
-        <p:spPr>
-          <a:xfrm>
-            <a:off x="457200" y="1645920"/>
-            <a:ext cx="274320" cy="365760"/>
-          </a:xfrm>
-          <a:prstGeom prst="rect">
-            <a:avLst/>
-          </a:prstGeom>
-          <a:noFill/>
-          <a:ln/>
-        </p:spPr>
-        <p:txBody>
-          <a:bodyPr wrap="square" lIns="0" tIns="0" rIns="0" bIns="0" rtlCol="0" anchor="t"/>
-          <a:lstStyle/>
-          <a:p>
-            <a:pPr indent="0" marL="0">
-              <a:buNone/>
-            </a:pPr>
-            <a:r>
-              <a:rPr lang="en-US" sz="1600" b="1" dirty="0">
-                <a:solidFill>
-                  <a:schemeClr val="accent1"/>
-                </a:solidFill>
-              </a:rPr>
-              <a:t>✓</a:t>
-            </a:r>
-            <a:endParaRPr lang="en-US" sz="1600" dirty="0"/>
-          </a:p>
-        </p:txBody>
-      </p:sp>
-      <p:sp>
-        <p:nvSpPr>
-          <p:cNvPr id="8" name="Text 6"/>
-          <p:cNvSpPr txBox="1"/>
-          <p:nvPr/>
-        </p:nvSpPr>
-        <p:spPr>
-          <a:xfrm>
-            <a:off x="777240" y="1664208"/>
-            <a:ext cx="2194560" cy="411480"/>
-          </a:xfrm>
-          <a:prstGeom prst="rect">
-            <a:avLst/>
-          </a:prstGeom>
-          <a:noFill/>
-          <a:ln/>
-        </p:spPr>
-        <p:txBody>
-          <a:bodyPr wrap="square" lIns="0" tIns="0" rIns="0" bIns="0" rtlCol="0" anchor="t"/>
-          <a:lstStyle/>
-          <a:p>
-            <a:pPr indent="0" marL="0">
-              <a:buNone/>
-            </a:pPr>
-            <a:r>
-              <a:rPr lang="en-US" sz="1400" dirty="0">
-                <a:solidFill>
-                  <a:schemeClr val="tx1"/>
-                </a:solidFill>
-              </a:rPr>
-              <a:t>Make each warning appear</a:t>
-            </a:r>
-            <a:endParaRPr lang="en-US" sz="1400" dirty="0"/>
-          </a:p>
-        </p:txBody>
-      </p:sp>
-      <p:sp>
-        <p:nvSpPr>
-          <p:cNvPr id="9" name="Text 7"/>
-          <p:cNvSpPr txBox="1"/>
-          <p:nvPr/>
-        </p:nvSpPr>
-        <p:spPr>
-          <a:xfrm>
-            <a:off x="3017520" y="1645920"/>
-            <a:ext cx="274320" cy="365760"/>
-          </a:xfrm>
-          <a:prstGeom prst="rect">
-            <a:avLst/>
-          </a:prstGeom>
-          <a:noFill/>
-          <a:ln/>
-        </p:spPr>
-        <p:txBody>
-          <a:bodyPr wrap="square" lIns="0" tIns="0" rIns="0" bIns="0" rtlCol="0" anchor="t"/>
-          <a:lstStyle/>
-          <a:p>
-            <a:pPr indent="0" marL="0">
-              <a:buNone/>
-            </a:pPr>
-            <a:r>
-              <a:rPr lang="en-US" sz="1600" b="1" dirty="0">
-                <a:solidFill>
-                  <a:schemeClr val="accent1"/>
-                </a:solidFill>
-              </a:rPr>
-              <a:t>✓</a:t>
-            </a:r>
-            <a:endParaRPr lang="en-US" sz="1600" dirty="0"/>
-          </a:p>
-        </p:txBody>
-      </p:sp>
-      <p:sp>
-        <p:nvSpPr>
-          <p:cNvPr id="10" name="Text 8"/>
-          <p:cNvSpPr txBox="1"/>
-          <p:nvPr/>
-        </p:nvSpPr>
-        <p:spPr>
-          <a:xfrm>
-            <a:off x="3337560" y="1664208"/>
-            <a:ext cx="2194560" cy="411480"/>
-          </a:xfrm>
-          <a:prstGeom prst="rect">
-            <a:avLst/>
-          </a:prstGeom>
-          <a:noFill/>
-          <a:ln/>
-        </p:spPr>
-        <p:txBody>
-          <a:bodyPr wrap="square" lIns="0" tIns="0" rIns="0" bIns="0" rtlCol="0" anchor="t"/>
-          <a:lstStyle/>
-          <a:p>
-            <a:pPr indent="0" marL="0">
-              <a:buNone/>
-            </a:pPr>
-            <a:r>
-              <a:rPr lang="en-US" sz="1400" dirty="0">
-                <a:solidFill>
-                  <a:schemeClr val="tx1"/>
-                </a:solidFill>
-              </a:rPr>
-              <a:t>Click parts in the 3D view</a:t>
-            </a:r>
-            <a:endParaRPr lang="en-US" sz="1400" dirty="0"/>
-          </a:p>
-        </p:txBody>
-      </p:sp>
-      <p:sp>
-        <p:nvSpPr>
-          <p:cNvPr id="11" name="Text 9"/>
-          <p:cNvSpPr txBox="1"/>
-          <p:nvPr/>
-        </p:nvSpPr>
-        <p:spPr>
-          <a:xfrm>
-            <a:off x="457200" y="2194560"/>
-            <a:ext cx="274320" cy="365760"/>
-          </a:xfrm>
-          <a:prstGeom prst="rect">
-            <a:avLst/>
-          </a:prstGeom>
-          <a:noFill/>
-          <a:ln/>
-        </p:spPr>
-        <p:txBody>
-          <a:bodyPr wrap="square" lIns="0" tIns="0" rIns="0" bIns="0" rtlCol="0" anchor="t"/>
-          <a:lstStyle/>
-          <a:p>
-            <a:pPr indent="0" marL="0">
-              <a:buNone/>
-            </a:pPr>
-            <a:r>
-              <a:rPr lang="en-US" sz="1600" b="1" dirty="0">
-                <a:solidFill>
-                  <a:schemeClr val="accent1"/>
-                </a:solidFill>
-              </a:rPr>
-              <a:t>✓</a:t>
-            </a:r>
-            <a:endParaRPr lang="en-US" sz="1600" dirty="0"/>
-          </a:p>
-        </p:txBody>
-      </p:sp>
-      <p:sp>
-        <p:nvSpPr>
-          <p:cNvPr id="12" name="Text 10"/>
-          <p:cNvSpPr txBox="1"/>
-          <p:nvPr/>
-        </p:nvSpPr>
-        <p:spPr>
-          <a:xfrm>
-            <a:off x="777240" y="2212848"/>
-            <a:ext cx="2194560" cy="411480"/>
-          </a:xfrm>
-          <a:prstGeom prst="rect">
-            <a:avLst/>
-          </a:prstGeom>
-          <a:noFill/>
-          <a:ln/>
-        </p:spPr>
-        <p:txBody>
-          <a:bodyPr wrap="square" lIns="0" tIns="0" rIns="0" bIns="0" rtlCol="0" anchor="t"/>
-          <a:lstStyle/>
-          <a:p>
-            <a:pPr indent="0" marL="0">
-              <a:buNone/>
-            </a:pPr>
-            <a:r>
-              <a:rPr lang="en-US" sz="1400" dirty="0">
-                <a:solidFill>
-                  <a:schemeClr val="tx1"/>
-                </a:solidFill>
-              </a:rPr>
-              <a:t>Find it in the top menu</a:t>
-            </a:r>
-            <a:endParaRPr lang="en-US" sz="1400" dirty="0"/>
-          </a:p>
-        </p:txBody>
-      </p:sp>
-      <p:sp>
-        <p:nvSpPr>
-          <p:cNvPr id="13" name="Text 11"/>
-          <p:cNvSpPr txBox="1"/>
-          <p:nvPr/>
-        </p:nvSpPr>
-        <p:spPr>
-          <a:xfrm>
-            <a:off x="3017520" y="2194560"/>
-            <a:ext cx="274320" cy="365760"/>
-          </a:xfrm>
-          <a:prstGeom prst="rect">
-            <a:avLst/>
-          </a:prstGeom>
-          <a:noFill/>
-          <a:ln/>
-        </p:spPr>
-        <p:txBody>
-          <a:bodyPr wrap="square" lIns="0" tIns="0" rIns="0" bIns="0" rtlCol="0" anchor="t"/>
-          <a:lstStyle/>
-          <a:p>
-            <a:pPr indent="0" marL="0">
-              <a:buNone/>
-            </a:pPr>
-            <a:r>
-              <a:rPr lang="en-US" sz="1600" b="1" dirty="0">
-                <a:solidFill>
-                  <a:schemeClr val="accent1"/>
-                </a:solidFill>
-              </a:rPr>
-              <a:t>✓</a:t>
-            </a:r>
-            <a:endParaRPr lang="en-US" sz="1600" dirty="0"/>
-          </a:p>
-        </p:txBody>
-      </p:sp>
-      <p:sp>
-        <p:nvSpPr>
-          <p:cNvPr id="14" name="Text 12"/>
-          <p:cNvSpPr txBox="1"/>
-          <p:nvPr/>
-        </p:nvSpPr>
-        <p:spPr>
-          <a:xfrm>
-            <a:off x="3337560" y="2212848"/>
-            <a:ext cx="2194560" cy="411480"/>
-          </a:xfrm>
-          <a:prstGeom prst="rect">
-            <a:avLst/>
-          </a:prstGeom>
-          <a:noFill/>
-          <a:ln/>
-        </p:spPr>
-        <p:txBody>
-          <a:bodyPr wrap="square" lIns="0" tIns="0" rIns="0" bIns="0" rtlCol="0" anchor="t"/>
-          <a:lstStyle/>
-          <a:p>
-            <a:pPr indent="0" marL="0">
-              <a:buNone/>
-            </a:pPr>
-            <a:r>
-              <a:rPr lang="en-US" sz="1400" dirty="0">
-                <a:solidFill>
-                  <a:schemeClr val="tx1"/>
-                </a:solidFill>
-              </a:rPr>
-              <a:t>Download and read the PDF</a:t>
-            </a:r>
-            <a:endParaRPr lang="en-US" sz="1400" dirty="0"/>
-          </a:p>
-        </p:txBody>
-      </p:sp>
-      <p:sp>
-        <p:nvSpPr>
-          <p:cNvPr id="15" name="Text 13"/>
-          <p:cNvSpPr txBox="1"/>
-          <p:nvPr/>
-        </p:nvSpPr>
-        <p:spPr>
-          <a:xfrm>
-            <a:off x="457200" y="2743200"/>
-            <a:ext cx="274320" cy="365760"/>
-          </a:xfrm>
-          <a:prstGeom prst="rect">
-            <a:avLst/>
-          </a:prstGeom>
-          <a:noFill/>
-          <a:ln/>
-        </p:spPr>
-        <p:txBody>
-          <a:bodyPr wrap="square" lIns="0" tIns="0" rIns="0" bIns="0" rtlCol="0" anchor="t"/>
-          <a:lstStyle/>
-          <a:p>
-            <a:pPr indent="0" marL="0">
-              <a:buNone/>
-            </a:pPr>
-            <a:r>
-              <a:rPr lang="en-US" sz="1600" b="1" dirty="0">
-                <a:solidFill>
-                  <a:schemeClr val="accent1"/>
-                </a:solidFill>
-              </a:rPr>
-              <a:t>✓</a:t>
-            </a:r>
-            <a:endParaRPr lang="en-US" sz="1600" dirty="0"/>
-          </a:p>
-        </p:txBody>
-      </p:sp>
-      <p:sp>
-        <p:nvSpPr>
-          <p:cNvPr id="16" name="Text 14"/>
-          <p:cNvSpPr txBox="1"/>
-          <p:nvPr/>
-        </p:nvSpPr>
-        <p:spPr>
-          <a:xfrm>
-            <a:off x="777240" y="2761488"/>
-            <a:ext cx="2194560" cy="411480"/>
-          </a:xfrm>
-          <a:prstGeom prst="rect">
-            <a:avLst/>
-          </a:prstGeom>
-          <a:noFill/>
-          <a:ln/>
-        </p:spPr>
-        <p:txBody>
-          <a:bodyPr wrap="square" lIns="0" tIns="0" rIns="0" bIns="0" rtlCol="0" anchor="t"/>
-          <a:lstStyle/>
-          <a:p>
-            <a:pPr indent="0" marL="0">
-              <a:buNone/>
-            </a:pPr>
-            <a:r>
-              <a:rPr lang="en-US" sz="1400" dirty="0">
-                <a:solidFill>
-                  <a:schemeClr val="tx1"/>
-                </a:solidFill>
-              </a:rPr>
-              <a:t>Shelf and desk still work</a:t>
-            </a:r>
-            <a:endParaRPr lang="en-US" sz="1400" dirty="0"/>
-          </a:p>
-        </p:txBody>
-      </p:sp>
-      <p:sp>
-        <p:nvSpPr>
-          <p:cNvPr id="17" name="Text 15"/>
-          <p:cNvSpPr txBox="1"/>
-          <p:nvPr/>
-        </p:nvSpPr>
-        <p:spPr>
-          <a:xfrm>
-            <a:off x="3017520" y="2743200"/>
-            <a:ext cx="274320" cy="365760"/>
-          </a:xfrm>
-          <a:prstGeom prst="rect">
-            <a:avLst/>
-          </a:prstGeom>
-          <a:noFill/>
-          <a:ln/>
-        </p:spPr>
-        <p:txBody>
-          <a:bodyPr wrap="square" lIns="0" tIns="0" rIns="0" bIns="0" rtlCol="0" anchor="t"/>
-          <a:lstStyle/>
-          <a:p>
-            <a:pPr indent="0" marL="0">
-              <a:buNone/>
-            </a:pPr>
-            <a:r>
-              <a:rPr lang="en-US" sz="1600" b="1" dirty="0">
-                <a:solidFill>
-                  <a:schemeClr val="accent1"/>
-                </a:solidFill>
-              </a:rPr>
-              <a:t>✓</a:t>
-            </a:r>
-            <a:endParaRPr lang="en-US" sz="1600" dirty="0"/>
-          </a:p>
-        </p:txBody>
-      </p:sp>
-      <p:sp>
-        <p:nvSpPr>
-          <p:cNvPr id="18" name="Text 16"/>
-          <p:cNvSpPr txBox="1"/>
-          <p:nvPr/>
-        </p:nvSpPr>
-        <p:spPr>
-          <a:xfrm>
-            <a:off x="3337560" y="2761488"/>
-            <a:ext cx="2194560" cy="411480"/>
-          </a:xfrm>
-          <a:prstGeom prst="rect">
-            <a:avLst/>
-          </a:prstGeom>
-          <a:noFill/>
-          <a:ln/>
-        </p:spPr>
-        <p:txBody>
-          <a:bodyPr wrap="square" lIns="0" tIns="0" rIns="0" bIns="0" rtlCol="0" anchor="t"/>
-          <a:lstStyle/>
-          <a:p>
-            <a:pPr indent="0" marL="0">
-              <a:buNone/>
-            </a:pPr>
-            <a:r>
-              <a:rPr lang="en-US" sz="1400" dirty="0">
-                <a:solidFill>
-                  <a:schemeClr val="tx1"/>
-                </a:solidFill>
-              </a:rPr>
-              <a:t>Narrow window, like a phone</a:t>
-            </a:r>
-            <a:endParaRPr lang="en-US" sz="1400" dirty="0"/>
-          </a:p>
-        </p:txBody>
-      </p:sp>
-      <p:sp>
-        <p:nvSpPr>
-          <p:cNvPr id="19" name="Shape 17"/>
-          <p:cNvSpPr/>
-          <p:nvPr/>
-        </p:nvSpPr>
-        <p:spPr>
-          <a:xfrm>
-            <a:off x="457200" y="3383280"/>
-            <a:ext cx="5029200" cy="1188720"/>
-          </a:xfrm>
-          <a:prstGeom prst="roundRect">
-            <a:avLst>
-              <a:gd name="adj" fmla="val 6154"/>
-            </a:avLst>
+            <a:off x="6949440" y="466344"/>
+            <a:ext cx="1737360" cy="256032"/>
+          </a:xfrm>
+          <a:prstGeom prst="rect">
+            <a:avLst/>
           </a:prstGeom>
           <a:solidFill>
-            <a:schemeClr val="bg2"/>
+            <a:schemeClr val="accent1"/>
           </a:solidFill>
-          <a:ln w="12700">
-            <a:solidFill>
-              <a:schemeClr val="bg2"/>
-            </a:solidFill>
-            <a:prstDash val="solid"/>
-          </a:ln>
-        </p:spPr>
-      </p:sp>
-      <p:sp>
-        <p:nvSpPr>
-          <p:cNvPr id="20" name="Text 18"/>
-          <p:cNvSpPr txBox="1"/>
-          <p:nvPr/>
-        </p:nvSpPr>
-        <p:spPr>
-          <a:xfrm>
-            <a:off x="640080" y="3493008"/>
-            <a:ext cx="4663440" cy="1005840"/>
-          </a:xfrm>
-          <a:prstGeom prst="rect">
-            <a:avLst/>
-          </a:prstGeom>
-          <a:noFill/>
-          <a:ln/>
-        </p:spPr>
-        <p:txBody>
-          <a:bodyPr wrap="square" lIns="0" tIns="0" rIns="0" bIns="0" rtlCol="0" anchor="t"/>
-          <a:lstStyle/>
-          <a:p>
-            <a:pPr indent="0" marL="0">
-              <a:buNone/>
-            </a:pPr>
-            <a:r>
-              <a:rPr lang="en-US" sz="1300" b="1" dirty="0">
-                <a:solidFill>
-                  <a:schemeClr val="tx1"/>
-                </a:solidFill>
-              </a:rPr>
-              <a:t>Found something odd? </a:t>
-            </a:r>
-            <a:pPr indent="0" marL="0">
-              <a:buNone/>
-            </a:pPr>
-            <a:r>
-              <a:rPr lang="en-US" sz="1300" dirty="0">
-                <a:solidFill>
-                  <a:schemeClr val="tx1"/>
-                </a:solidFill>
-              </a:rPr>
-              <a:t>Tell Claude, refresh, check again.</a:t>
-            </a:r>
-            <a:endParaRPr lang="en-US" sz="1300" dirty="0"/>
-          </a:p>
-          <a:p>
-            <a:pPr indent="0" marL="0">
-              <a:buNone/>
-            </a:pPr>
-            <a:r>
-              <a:rPr lang="en-US" sz="1300" dirty="0">
-                <a:solidFill>
-                  <a:schemeClr val="accent2"/>
-                </a:solidFill>
-              </a:rPr>
-              <a:t>Then Claude runs its own checks and takes the screenshots for the pull request.</a:t>
-            </a:r>
-            <a:endParaRPr lang="en-US" sz="1300" dirty="0"/>
+          <a:ln/>
+        </p:spPr>
+        <p:txBody>
+          <a:bodyPr wrap="square" lIns="0" tIns="0" rIns="0" bIns="0" rtlCol="0" anchor="ctr"/>
+          <a:lstStyle/>
+          <a:p>
+            <a:pPr algn="ctr" indent="0" marL="0">
+              <a:buNone/>
+            </a:pPr>
+            <a:r>
+              <a:rPr lang="en-US" sz="1000" b="1" dirty="0">
+                <a:solidFill>
+                  <a:schemeClr val="bg1"/>
+                </a:solidFill>
+              </a:rPr>
+              <a:t>SIMULATED EXAMPLE</a:t>
+            </a:r>
+            <a:endParaRPr lang="en-US" sz="1000" dirty="0"/>
           </a:p>
         </p:txBody>
       </p:sp>
       <p:pic>
         <p:nvPicPr>
-          <p:cNvPr id="21" name="Warning scenario screenshot" descr="small/shelf-wide.jpg">    </p:cNvPr>
+          <p:cNvPr id="4" name="Simulated design brief" descr="small/sim-brief.jpg">    </p:cNvPr>
           <p:cNvPicPr>
             <a:picLocks noChangeAspect="1"/>
           </p:cNvPicPr>
@@ -6460,8 +5924,8 @@
         </p:blipFill>
         <p:spPr>
           <a:xfrm>
-            <a:off x="5760720" y="1097280"/>
-            <a:ext cx="2926080" cy="1670526"/>
+            <a:off x="457200" y="1051560"/>
+            <a:ext cx="4397071" cy="3611880"/>
           </a:xfrm>
           <a:prstGeom prst="rect">
             <a:avLst/>
@@ -6477,14 +5941,14 @@
       </p:pic>
       <p:sp>
         <p:nvSpPr>
-          <p:cNvPr id="22" name="Text 19"/>
+          <p:cNvPr id="5" name="Text 2"/>
           <p:cNvSpPr txBox="1"/>
           <p:nvPr/>
         </p:nvSpPr>
         <p:spPr>
           <a:xfrm>
-            <a:off x="5760720" y="2880360"/>
-            <a:ext cx="2926080" cy="457200"/>
+            <a:off x="5486400" y="1188720"/>
+            <a:ext cx="3291840" cy="3474720"/>
           </a:xfrm>
           <a:prstGeom prst="rect">
             <a:avLst/>
@@ -6496,18 +5960,116 @@
           <a:bodyPr wrap="square" lIns="0" tIns="0" rIns="0" bIns="0" rtlCol="0" anchor="t"/>
           <a:lstStyle/>
           <a:p>
-            <a:pPr algn="ctr" indent="0" marL="0">
-              <a:buNone/>
-            </a:pPr>
-            <a:r>
-              <a:rPr lang="en-US" sz="1100" dirty="0">
+            <a:pPr indent="0" marL="0">
+              <a:buNone/>
+            </a:pPr>
+            <a:r>
+              <a:rPr lang="en-US" sz="1400" b="1" dirty="0">
+                <a:solidFill>
+                  <a:schemeClr val="tx1"/>
+                </a:solidFill>
+              </a:rPr>
+              <a:t>An interview first</a:t>
+            </a:r>
+            <a:endParaRPr lang="en-US" sz="1400" dirty="0"/>
+          </a:p>
+          <a:p>
+            <a:pPr indent="0" marL="0">
+              <a:buNone/>
+            </a:pPr>
+            <a:r>
+              <a:rPr lang="en-US" sz="1400" dirty="0">
                 <a:solidFill>
                   <a:schemeClr val="accent2"/>
                 </a:solidFill>
               </a:rPr>
-              <a:t>Real example: making a warning appear (2000 mm wide, 40 kg)</a:t>
-            </a:r>
-            <a:endParaRPr lang="en-US" sz="1100" dirty="0"/>
+              <a:t>Claude asks one question at a time: parts, sizes, how it goes together, what people can change.</a:t>
+            </a:r>
+            <a:endParaRPr lang="en-US" sz="1400" dirty="0"/>
+          </a:p>
+          <a:p>
+            <a:pPr indent="0" marL="0">
+              <a:buNone/>
+            </a:pPr>
+            <a:r>
+              <a:rPr lang="en-US" sz="800" dirty="0">
+                <a:solidFill>
+                  <a:schemeClr val="tx1"/>
+                </a:solidFill>
+              </a:rPr>
+              <a:t> </a:t>
+            </a:r>
+            <a:endParaRPr lang="en-US" sz="1400" dirty="0"/>
+          </a:p>
+          <a:p>
+            <a:pPr indent="0" marL="0">
+              <a:buNone/>
+            </a:pPr>
+            <a:r>
+              <a:rPr lang="en-US" sz="1400" b="1" dirty="0">
+                <a:solidFill>
+                  <a:schemeClr val="tx1"/>
+                </a:solidFill>
+              </a:rPr>
+              <a:t>Written down as a brief</a:t>
+            </a:r>
+            <a:endParaRPr lang="en-US" sz="1400" dirty="0"/>
+          </a:p>
+          <a:p>
+            <a:pPr indent="0" marL="0">
+              <a:buNone/>
+            </a:pPr>
+            <a:r>
+              <a:rPr lang="en-US" sz="1400" dirty="0">
+                <a:solidFill>
+                  <a:schemeClr val="accent2"/>
+                </a:solidFill>
+              </a:rPr>
+              <a:t>You approve it before anything is built.</a:t>
+            </a:r>
+            <a:endParaRPr lang="en-US" sz="1400" dirty="0"/>
+          </a:p>
+          <a:p>
+            <a:pPr indent="0" marL="0">
+              <a:buNone/>
+            </a:pPr>
+            <a:r>
+              <a:rPr lang="en-US" sz="800" dirty="0">
+                <a:solidFill>
+                  <a:schemeClr val="tx1"/>
+                </a:solidFill>
+              </a:rPr>
+              <a:t> </a:t>
+            </a:r>
+            <a:endParaRPr lang="en-US" sz="1400" dirty="0"/>
+          </a:p>
+          <a:p>
+            <a:pPr indent="0" marL="0">
+              <a:buNone/>
+            </a:pPr>
+            <a:r>
+              <a:rPr lang="en-US" sz="1400" b="1" dirty="0">
+                <a:solidFill>
+                  <a:schemeClr val="tx1"/>
+                </a:solidFill>
+              </a:rPr>
+              <a:t>Unknown means unknown</a:t>
+            </a:r>
+            <a:endParaRPr lang="en-US" sz="1400" dirty="0"/>
+          </a:p>
+          <a:p>
+            <a:pPr indent="0" marL="0">
+              <a:buNone/>
+            </a:pPr>
+            <a:r>
+              <a:rPr lang="en-US" sz="1400" dirty="0">
+                <a:solidFill>
+                  <a:schemeClr val="accent2"/>
+                </a:solidFill>
+              </a:rPr>
+              <a:t>Any size not on a listing goes on a "to measure" list.</a:t>
+            </a:r>
+            <a:endParaRPr lang="en-US" sz="1400" dirty="0"/>
           </a:p>
         </p:txBody>
       </p:sp>
@@ -6613,7 +6175,7 @@
                   <a:schemeClr val="tx1"/>
                 </a:solidFill>
               </a:rPr>
-              <a:t>Last step: Claude creates the PR</a:t>
+              <a:t>Before sending: try it all</a:t>
             </a:r>
             <a:endParaRPr lang="en-US" sz="2400" dirty="0"/>
           </a:p>
@@ -6621,83 +6183,50 @@
       </p:sp>
       <p:sp>
         <p:nvSpPr>
-          <p:cNvPr id="3" name="Simulation tag"/>
+          <p:cNvPr id="3" name="Text 1"/>
           <p:cNvSpPr txBox="1"/>
           <p:nvPr/>
         </p:nvSpPr>
         <p:spPr>
           <a:xfrm>
-            <a:off x="6949440" y="466344"/>
-            <a:ext cx="1737360" cy="256032"/>
-          </a:xfrm>
-          <a:prstGeom prst="rect">
-            <a:avLst/>
-          </a:prstGeom>
-          <a:solidFill>
-            <a:schemeClr val="accent1"/>
-          </a:solidFill>
-          <a:ln/>
-        </p:spPr>
-        <p:txBody>
-          <a:bodyPr wrap="square" lIns="0" tIns="0" rIns="0" bIns="0" rtlCol="0" anchor="ctr"/>
-          <a:lstStyle/>
-          <a:p>
-            <a:pPr algn="ctr" indent="0" marL="0">
-              <a:buNone/>
-            </a:pPr>
-            <a:r>
-              <a:rPr lang="en-US" sz="1000" b="1" dirty="0">
-                <a:solidFill>
-                  <a:schemeClr val="bg1"/>
-                </a:solidFill>
-              </a:rPr>
-              <a:t>SIMULATED EXAMPLE</a:t>
-            </a:r>
-            <a:endParaRPr lang="en-US" sz="1000" dirty="0"/>
-          </a:p>
-        </p:txBody>
-      </p:sp>
-      <p:pic>
-        <p:nvPicPr>
-          <p:cNvPr id="4" name="Simulated pull request" descr="small/sim-pr.jpg">    </p:cNvPr>
-          <p:cNvPicPr>
-            <a:picLocks noChangeAspect="1"/>
-          </p:cNvPicPr>
-          <p:nvPr/>
-        </p:nvPicPr>
-        <p:blipFill>
-          <a:blip r:embed="rId1"/>
-          <a:stretch>
-            <a:fillRect/>
-          </a:stretch>
-        </p:blipFill>
-        <p:spPr>
-          <a:xfrm>
-            <a:off x="457200" y="1005840"/>
-            <a:ext cx="3307282" cy="3749040"/>
-          </a:xfrm>
-          <a:prstGeom prst="rect">
-            <a:avLst/>
-          </a:prstGeom>
-          <a:effectLst>
-            <a:outerShdw sx="100000" sy="100000" kx="0" ky="0" algn="bl" rotWithShape="0" blurRad="76200" dist="25400" dir="5400000">
-              <a:srgbClr val="000000">
-                <a:alpha val="18000"/>
-              </a:srgbClr>
-            </a:outerShdw>
-          </a:effectLst>
-        </p:spPr>
-      </p:pic>
-      <p:sp>
-        <p:nvSpPr>
-          <p:cNvPr id="5" name="Text 2"/>
+            <a:off x="457200" y="1097280"/>
+            <a:ext cx="274320" cy="365760"/>
+          </a:xfrm>
+          <a:prstGeom prst="rect">
+            <a:avLst/>
+          </a:prstGeom>
+          <a:noFill/>
+          <a:ln/>
+        </p:spPr>
+        <p:txBody>
+          <a:bodyPr wrap="square" lIns="0" tIns="0" rIns="0" bIns="0" rtlCol="0" anchor="t"/>
+          <a:lstStyle/>
+          <a:p>
+            <a:pPr indent="0" marL="0">
+              <a:buNone/>
+            </a:pPr>
+            <a:r>
+              <a:rPr lang="en-US" sz="1600" b="1" dirty="0">
+                <a:solidFill>
+                  <a:schemeClr val="accent1"/>
+                </a:solidFill>
+              </a:rPr>
+              <a:t>✓</a:t>
+            </a:r>
+            <a:endParaRPr lang="en-US" sz="1600" dirty="0"/>
+          </a:p>
+        </p:txBody>
+      </p:sp>
+      <p:sp>
+        <p:nvSpPr>
+          <p:cNvPr id="4" name="Text 2"/>
           <p:cNvSpPr txBox="1"/>
           <p:nvPr/>
         </p:nvSpPr>
         <p:spPr>
           <a:xfrm>
-            <a:off x="4937760" y="1051560"/>
-            <a:ext cx="3840480" cy="640080"/>
+            <a:off x="777240" y="1115568"/>
+            <a:ext cx="2194560" cy="411480"/>
           </a:xfrm>
           <a:prstGeom prst="rect">
             <a:avLst/>
@@ -6713,27 +6242,27 @@
               <a:buNone/>
             </a:pPr>
             <a:r>
-              <a:rPr lang="en-US" sz="1400" b="1" dirty="0">
+              <a:rPr lang="en-US" sz="1400" dirty="0">
                 <a:solidFill>
                   <a:schemeClr val="tx1"/>
                 </a:solidFill>
               </a:rPr>
-              <a:t>When you say "I'm happy, let's send it", Claude writes the pull request in a standard shape:</a:t>
-            </a:r>
-            <a:endParaRPr lang="en-US" sz="1400" dirty="0"/>
-          </a:p>
-        </p:txBody>
-      </p:sp>
-      <p:sp>
-        <p:nvSpPr>
-          <p:cNvPr id="6" name="Text 3"/>
+              <a:t>Smallest and largest sizes</a:t>
+            </a:r>
+            <a:endParaRPr lang="en-US" sz="1400" dirty="0"/>
+          </a:p>
+        </p:txBody>
+      </p:sp>
+      <p:sp>
+        <p:nvSpPr>
+          <p:cNvPr id="5" name="Text 3"/>
           <p:cNvSpPr txBox="1"/>
           <p:nvPr/>
         </p:nvSpPr>
         <p:spPr>
           <a:xfrm>
-            <a:off x="4937760" y="1783080"/>
-            <a:ext cx="3840480" cy="2194560"/>
+            <a:off x="3017520" y="1097280"/>
+            <a:ext cx="274320" cy="365760"/>
           </a:xfrm>
           <a:prstGeom prst="rect">
             <a:avLst/>
@@ -6745,13 +6274,44 @@
           <a:bodyPr wrap="square" lIns="0" tIns="0" rIns="0" bIns="0" rtlCol="0" anchor="t"/>
           <a:lstStyle/>
           <a:p>
-            <a:pPr marL="342900" indent="-342900">
-              <a:spcAft>
-                <a:spcPts val="200"/>
-              </a:spcAft>
-              <a:buSzPct val="100000"/>
-              <a:buFont typeface="+mj-lt"/>
-              <a:buAutoNum type="arabicPeriod" startAt="1"/>
+            <a:pPr indent="0" marL="0">
+              <a:buNone/>
+            </a:pPr>
+            <a:r>
+              <a:rPr lang="en-US" sz="1600" b="1" dirty="0">
+                <a:solidFill>
+                  <a:schemeClr val="accent1"/>
+                </a:solidFill>
+              </a:rPr>
+              <a:t>✓</a:t>
+            </a:r>
+            <a:endParaRPr lang="en-US" sz="1600" dirty="0"/>
+          </a:p>
+        </p:txBody>
+      </p:sp>
+      <p:sp>
+        <p:nvSpPr>
+          <p:cNvPr id="6" name="Text 4"/>
+          <p:cNvSpPr txBox="1"/>
+          <p:nvPr/>
+        </p:nvSpPr>
+        <p:spPr>
+          <a:xfrm>
+            <a:off x="3337560" y="1115568"/>
+            <a:ext cx="2194560" cy="411480"/>
+          </a:xfrm>
+          <a:prstGeom prst="rect">
+            <a:avLst/>
+          </a:prstGeom>
+          <a:noFill/>
+          <a:ln/>
+        </p:spPr>
+        <p:txBody>
+          <a:bodyPr wrap="square" lIns="0" tIns="0" rIns="0" bIns="0" rtlCol="0" anchor="t"/>
+          <a:lstStyle/>
+          <a:p>
+            <a:pPr indent="0" marL="0">
+              <a:buNone/>
             </a:pPr>
             <a:r>
               <a:rPr lang="en-US" sz="1400" dirty="0">
@@ -6759,18 +6319,71 @@
                   <a:schemeClr val="tx1"/>
                 </a:solidFill>
               </a:rPr>
-              <a:t>What this adds</a:t>
-            </a:r>
-            <a:endParaRPr lang="en-US" sz="1400" dirty="0"/>
-          </a:p>
-          <a:p>
-            <a:pPr marL="342900" indent="-342900">
-              <a:spcAft>
-                <a:spcPts val="200"/>
-              </a:spcAft>
-              <a:buSzPct val="100000"/>
-              <a:buFont typeface="+mj-lt"/>
-              <a:buAutoNum type="arabicPeriod" startAt="1"/>
+              <a:t>Each option on and off</a:t>
+            </a:r>
+            <a:endParaRPr lang="en-US" sz="1400" dirty="0"/>
+          </a:p>
+        </p:txBody>
+      </p:sp>
+      <p:sp>
+        <p:nvSpPr>
+          <p:cNvPr id="7" name="Text 5"/>
+          <p:cNvSpPr txBox="1"/>
+          <p:nvPr/>
+        </p:nvSpPr>
+        <p:spPr>
+          <a:xfrm>
+            <a:off x="457200" y="1645920"/>
+            <a:ext cx="274320" cy="365760"/>
+          </a:xfrm>
+          <a:prstGeom prst="rect">
+            <a:avLst/>
+          </a:prstGeom>
+          <a:noFill/>
+          <a:ln/>
+        </p:spPr>
+        <p:txBody>
+          <a:bodyPr wrap="square" lIns="0" tIns="0" rIns="0" bIns="0" rtlCol="0" anchor="t"/>
+          <a:lstStyle/>
+          <a:p>
+            <a:pPr indent="0" marL="0">
+              <a:buNone/>
+            </a:pPr>
+            <a:r>
+              <a:rPr lang="en-US" sz="1600" b="1" dirty="0">
+                <a:solidFill>
+                  <a:schemeClr val="accent1"/>
+                </a:solidFill>
+              </a:rPr>
+              <a:t>✓</a:t>
+            </a:r>
+            <a:endParaRPr lang="en-US" sz="1600" dirty="0"/>
+          </a:p>
+        </p:txBody>
+      </p:sp>
+      <p:sp>
+        <p:nvSpPr>
+          <p:cNvPr id="8" name="Text 6"/>
+          <p:cNvSpPr txBox="1"/>
+          <p:nvPr/>
+        </p:nvSpPr>
+        <p:spPr>
+          <a:xfrm>
+            <a:off x="777240" y="1664208"/>
+            <a:ext cx="2194560" cy="411480"/>
+          </a:xfrm>
+          <a:prstGeom prst="rect">
+            <a:avLst/>
+          </a:prstGeom>
+          <a:noFill/>
+          <a:ln/>
+        </p:spPr>
+        <p:txBody>
+          <a:bodyPr wrap="square" lIns="0" tIns="0" rIns="0" bIns="0" rtlCol="0" anchor="t"/>
+          <a:lstStyle/>
+          <a:p>
+            <a:pPr indent="0" marL="0">
+              <a:buNone/>
             </a:pPr>
             <a:r>
               <a:rPr lang="en-US" sz="1400" dirty="0">
@@ -6778,18 +6391,71 @@
                   <a:schemeClr val="tx1"/>
                 </a:solidFill>
               </a:rPr>
-              <a:t>Idea / issue</a:t>
-            </a:r>
-            <a:endParaRPr lang="en-US" sz="1400" dirty="0"/>
-          </a:p>
-          <a:p>
-            <a:pPr marL="342900" indent="-342900">
-              <a:spcAft>
-                <a:spcPts val="200"/>
-              </a:spcAft>
-              <a:buSzPct val="100000"/>
-              <a:buFont typeface="+mj-lt"/>
-              <a:buAutoNum type="arabicPeriod" startAt="1"/>
+              <a:t>Make each warning appear</a:t>
+            </a:r>
+            <a:endParaRPr lang="en-US" sz="1400" dirty="0"/>
+          </a:p>
+        </p:txBody>
+      </p:sp>
+      <p:sp>
+        <p:nvSpPr>
+          <p:cNvPr id="9" name="Text 7"/>
+          <p:cNvSpPr txBox="1"/>
+          <p:nvPr/>
+        </p:nvSpPr>
+        <p:spPr>
+          <a:xfrm>
+            <a:off x="3017520" y="1645920"/>
+            <a:ext cx="274320" cy="365760"/>
+          </a:xfrm>
+          <a:prstGeom prst="rect">
+            <a:avLst/>
+          </a:prstGeom>
+          <a:noFill/>
+          <a:ln/>
+        </p:spPr>
+        <p:txBody>
+          <a:bodyPr wrap="square" lIns="0" tIns="0" rIns="0" bIns="0" rtlCol="0" anchor="t"/>
+          <a:lstStyle/>
+          <a:p>
+            <a:pPr indent="0" marL="0">
+              <a:buNone/>
+            </a:pPr>
+            <a:r>
+              <a:rPr lang="en-US" sz="1600" b="1" dirty="0">
+                <a:solidFill>
+                  <a:schemeClr val="accent1"/>
+                </a:solidFill>
+              </a:rPr>
+              <a:t>✓</a:t>
+            </a:r>
+            <a:endParaRPr lang="en-US" sz="1600" dirty="0"/>
+          </a:p>
+        </p:txBody>
+      </p:sp>
+      <p:sp>
+        <p:nvSpPr>
+          <p:cNvPr id="10" name="Text 8"/>
+          <p:cNvSpPr txBox="1"/>
+          <p:nvPr/>
+        </p:nvSpPr>
+        <p:spPr>
+          <a:xfrm>
+            <a:off x="3337560" y="1664208"/>
+            <a:ext cx="2194560" cy="411480"/>
+          </a:xfrm>
+          <a:prstGeom prst="rect">
+            <a:avLst/>
+          </a:prstGeom>
+          <a:noFill/>
+          <a:ln/>
+        </p:spPr>
+        <p:txBody>
+          <a:bodyPr wrap="square" lIns="0" tIns="0" rIns="0" bIns="0" rtlCol="0" anchor="t"/>
+          <a:lstStyle/>
+          <a:p>
+            <a:pPr indent="0" marL="0">
+              <a:buNone/>
             </a:pPr>
             <a:r>
               <a:rPr lang="en-US" sz="1400" dirty="0">
@@ -6797,18 +6463,71 @@
                   <a:schemeClr val="tx1"/>
                 </a:solidFill>
               </a:rPr>
-              <a:t>Design brief</a:t>
-            </a:r>
-            <a:endParaRPr lang="en-US" sz="1400" dirty="0"/>
-          </a:p>
-          <a:p>
-            <a:pPr marL="342900" indent="-342900">
-              <a:spcAft>
-                <a:spcPts val="200"/>
-              </a:spcAft>
-              <a:buSzPct val="100000"/>
-              <a:buFont typeface="+mj-lt"/>
-              <a:buAutoNum type="arabicPeriod" startAt="1"/>
+              <a:t>Click parts in the 3D view</a:t>
+            </a:r>
+            <a:endParaRPr lang="en-US" sz="1400" dirty="0"/>
+          </a:p>
+        </p:txBody>
+      </p:sp>
+      <p:sp>
+        <p:nvSpPr>
+          <p:cNvPr id="11" name="Text 9"/>
+          <p:cNvSpPr txBox="1"/>
+          <p:nvPr/>
+        </p:nvSpPr>
+        <p:spPr>
+          <a:xfrm>
+            <a:off x="457200" y="2194560"/>
+            <a:ext cx="274320" cy="365760"/>
+          </a:xfrm>
+          <a:prstGeom prst="rect">
+            <a:avLst/>
+          </a:prstGeom>
+          <a:noFill/>
+          <a:ln/>
+        </p:spPr>
+        <p:txBody>
+          <a:bodyPr wrap="square" lIns="0" tIns="0" rIns="0" bIns="0" rtlCol="0" anchor="t"/>
+          <a:lstStyle/>
+          <a:p>
+            <a:pPr indent="0" marL="0">
+              <a:buNone/>
+            </a:pPr>
+            <a:r>
+              <a:rPr lang="en-US" sz="1600" b="1" dirty="0">
+                <a:solidFill>
+                  <a:schemeClr val="accent1"/>
+                </a:solidFill>
+              </a:rPr>
+              <a:t>✓</a:t>
+            </a:r>
+            <a:endParaRPr lang="en-US" sz="1600" dirty="0"/>
+          </a:p>
+        </p:txBody>
+      </p:sp>
+      <p:sp>
+        <p:nvSpPr>
+          <p:cNvPr id="12" name="Text 10"/>
+          <p:cNvSpPr txBox="1"/>
+          <p:nvPr/>
+        </p:nvSpPr>
+        <p:spPr>
+          <a:xfrm>
+            <a:off x="777240" y="2212848"/>
+            <a:ext cx="2194560" cy="411480"/>
+          </a:xfrm>
+          <a:prstGeom prst="rect">
+            <a:avLst/>
+          </a:prstGeom>
+          <a:noFill/>
+          <a:ln/>
+        </p:spPr>
+        <p:txBody>
+          <a:bodyPr wrap="square" lIns="0" tIns="0" rIns="0" bIns="0" rtlCol="0" anchor="t"/>
+          <a:lstStyle/>
+          <a:p>
+            <a:pPr indent="0" marL="0">
+              <a:buNone/>
             </a:pPr>
             <a:r>
               <a:rPr lang="en-US" sz="1400" dirty="0">
@@ -6816,18 +6535,71 @@
                   <a:schemeClr val="tx1"/>
                 </a:solidFill>
               </a:rPr>
-              <a:t>Parts and sources</a:t>
-            </a:r>
-            <a:endParaRPr lang="en-US" sz="1400" dirty="0"/>
-          </a:p>
-          <a:p>
-            <a:pPr marL="342900" indent="-342900">
-              <a:spcAft>
-                <a:spcPts val="200"/>
-              </a:spcAft>
-              <a:buSzPct val="100000"/>
-              <a:buFont typeface="+mj-lt"/>
-              <a:buAutoNum type="arabicPeriod" startAt="1"/>
+              <a:t>Find it in the top menu</a:t>
+            </a:r>
+            <a:endParaRPr lang="en-US" sz="1400" dirty="0"/>
+          </a:p>
+        </p:txBody>
+      </p:sp>
+      <p:sp>
+        <p:nvSpPr>
+          <p:cNvPr id="13" name="Text 11"/>
+          <p:cNvSpPr txBox="1"/>
+          <p:nvPr/>
+        </p:nvSpPr>
+        <p:spPr>
+          <a:xfrm>
+            <a:off x="3017520" y="2194560"/>
+            <a:ext cx="274320" cy="365760"/>
+          </a:xfrm>
+          <a:prstGeom prst="rect">
+            <a:avLst/>
+          </a:prstGeom>
+          <a:noFill/>
+          <a:ln/>
+        </p:spPr>
+        <p:txBody>
+          <a:bodyPr wrap="square" lIns="0" tIns="0" rIns="0" bIns="0" rtlCol="0" anchor="t"/>
+          <a:lstStyle/>
+          <a:p>
+            <a:pPr indent="0" marL="0">
+              <a:buNone/>
+            </a:pPr>
+            <a:r>
+              <a:rPr lang="en-US" sz="1600" b="1" dirty="0">
+                <a:solidFill>
+                  <a:schemeClr val="accent1"/>
+                </a:solidFill>
+              </a:rPr>
+              <a:t>✓</a:t>
+            </a:r>
+            <a:endParaRPr lang="en-US" sz="1600" dirty="0"/>
+          </a:p>
+        </p:txBody>
+      </p:sp>
+      <p:sp>
+        <p:nvSpPr>
+          <p:cNvPr id="14" name="Text 12"/>
+          <p:cNvSpPr txBox="1"/>
+          <p:nvPr/>
+        </p:nvSpPr>
+        <p:spPr>
+          <a:xfrm>
+            <a:off x="3337560" y="2212848"/>
+            <a:ext cx="2194560" cy="411480"/>
+          </a:xfrm>
+          <a:prstGeom prst="rect">
+            <a:avLst/>
+          </a:prstGeom>
+          <a:noFill/>
+          <a:ln/>
+        </p:spPr>
+        <p:txBody>
+          <a:bodyPr wrap="square" lIns="0" tIns="0" rIns="0" bIns="0" rtlCol="0" anchor="t"/>
+          <a:lstStyle/>
+          <a:p>
+            <a:pPr indent="0" marL="0">
+              <a:buNone/>
             </a:pPr>
             <a:r>
               <a:rPr lang="en-US" sz="1400" dirty="0">
@@ -6835,18 +6607,71 @@
                   <a:schemeClr val="tx1"/>
                 </a:solidFill>
               </a:rPr>
-              <a:t>How it was checked</a:t>
-            </a:r>
-            <a:endParaRPr lang="en-US" sz="1400" dirty="0"/>
-          </a:p>
-          <a:p>
-            <a:pPr marL="342900" indent="-342900">
-              <a:spcAft>
-                <a:spcPts val="200"/>
-              </a:spcAft>
-              <a:buSzPct val="100000"/>
-              <a:buFont typeface="+mj-lt"/>
-              <a:buAutoNum type="arabicPeriod" startAt="1"/>
+              <a:t>Download and read the PDF</a:t>
+            </a:r>
+            <a:endParaRPr lang="en-US" sz="1400" dirty="0"/>
+          </a:p>
+        </p:txBody>
+      </p:sp>
+      <p:sp>
+        <p:nvSpPr>
+          <p:cNvPr id="15" name="Text 13"/>
+          <p:cNvSpPr txBox="1"/>
+          <p:nvPr/>
+        </p:nvSpPr>
+        <p:spPr>
+          <a:xfrm>
+            <a:off x="457200" y="2743200"/>
+            <a:ext cx="274320" cy="365760"/>
+          </a:xfrm>
+          <a:prstGeom prst="rect">
+            <a:avLst/>
+          </a:prstGeom>
+          <a:noFill/>
+          <a:ln/>
+        </p:spPr>
+        <p:txBody>
+          <a:bodyPr wrap="square" lIns="0" tIns="0" rIns="0" bIns="0" rtlCol="0" anchor="t"/>
+          <a:lstStyle/>
+          <a:p>
+            <a:pPr indent="0" marL="0">
+              <a:buNone/>
+            </a:pPr>
+            <a:r>
+              <a:rPr lang="en-US" sz="1600" b="1" dirty="0">
+                <a:solidFill>
+                  <a:schemeClr val="accent1"/>
+                </a:solidFill>
+              </a:rPr>
+              <a:t>✓</a:t>
+            </a:r>
+            <a:endParaRPr lang="en-US" sz="1600" dirty="0"/>
+          </a:p>
+        </p:txBody>
+      </p:sp>
+      <p:sp>
+        <p:nvSpPr>
+          <p:cNvPr id="16" name="Text 14"/>
+          <p:cNvSpPr txBox="1"/>
+          <p:nvPr/>
+        </p:nvSpPr>
+        <p:spPr>
+          <a:xfrm>
+            <a:off x="777240" y="2761488"/>
+            <a:ext cx="2194560" cy="411480"/>
+          </a:xfrm>
+          <a:prstGeom prst="rect">
+            <a:avLst/>
+          </a:prstGeom>
+          <a:noFill/>
+          <a:ln/>
+        </p:spPr>
+        <p:txBody>
+          <a:bodyPr wrap="square" lIns="0" tIns="0" rIns="0" bIns="0" rtlCol="0" anchor="t"/>
+          <a:lstStyle/>
+          <a:p>
+            <a:pPr indent="0" marL="0">
+              <a:buNone/>
             </a:pPr>
             <a:r>
               <a:rPr lang="en-US" sz="1400" dirty="0">
@@ -6854,18 +6679,71 @@
                   <a:schemeClr val="tx1"/>
                 </a:solidFill>
               </a:rPr>
-              <a:t>Screenshots</a:t>
-            </a:r>
-            <a:endParaRPr lang="en-US" sz="1400" dirty="0"/>
-          </a:p>
-          <a:p>
-            <a:pPr marL="342900" indent="-342900">
-              <a:spcAft>
-                <a:spcPts val="200"/>
-              </a:spcAft>
-              <a:buSzPct val="100000"/>
-              <a:buFont typeface="+mj-lt"/>
-              <a:buAutoNum type="arabicPeriod" startAt="1"/>
+              <a:t>Shelf and desk still work</a:t>
+            </a:r>
+            <a:endParaRPr lang="en-US" sz="1400" dirty="0"/>
+          </a:p>
+        </p:txBody>
+      </p:sp>
+      <p:sp>
+        <p:nvSpPr>
+          <p:cNvPr id="17" name="Text 15"/>
+          <p:cNvSpPr txBox="1"/>
+          <p:nvPr/>
+        </p:nvSpPr>
+        <p:spPr>
+          <a:xfrm>
+            <a:off x="3017520" y="2743200"/>
+            <a:ext cx="274320" cy="365760"/>
+          </a:xfrm>
+          <a:prstGeom prst="rect">
+            <a:avLst/>
+          </a:prstGeom>
+          <a:noFill/>
+          <a:ln/>
+        </p:spPr>
+        <p:txBody>
+          <a:bodyPr wrap="square" lIns="0" tIns="0" rIns="0" bIns="0" rtlCol="0" anchor="t"/>
+          <a:lstStyle/>
+          <a:p>
+            <a:pPr indent="0" marL="0">
+              <a:buNone/>
+            </a:pPr>
+            <a:r>
+              <a:rPr lang="en-US" sz="1600" b="1" dirty="0">
+                <a:solidFill>
+                  <a:schemeClr val="accent1"/>
+                </a:solidFill>
+              </a:rPr>
+              <a:t>✓</a:t>
+            </a:r>
+            <a:endParaRPr lang="en-US" sz="1600" dirty="0"/>
+          </a:p>
+        </p:txBody>
+      </p:sp>
+      <p:sp>
+        <p:nvSpPr>
+          <p:cNvPr id="18" name="Text 16"/>
+          <p:cNvSpPr txBox="1"/>
+          <p:nvPr/>
+        </p:nvSpPr>
+        <p:spPr>
+          <a:xfrm>
+            <a:off x="3337560" y="2761488"/>
+            <a:ext cx="2194560" cy="411480"/>
+          </a:xfrm>
+          <a:prstGeom prst="rect">
+            <a:avLst/>
+          </a:prstGeom>
+          <a:noFill/>
+          <a:ln/>
+        </p:spPr>
+        <p:txBody>
+          <a:bodyPr wrap="square" lIns="0" tIns="0" rIns="0" bIns="0" rtlCol="0" anchor="t"/>
+          <a:lstStyle/>
+          <a:p>
+            <a:pPr indent="0" marL="0">
+              <a:buNone/>
             </a:pPr>
             <a:r>
               <a:rPr lang="en-US" sz="1400" dirty="0">
@@ -6873,45 +6751,26 @@
                   <a:schemeClr val="tx1"/>
                 </a:solidFill>
               </a:rPr>
-              <a:t>Assumptions to verify</a:t>
-            </a:r>
-            <a:endParaRPr lang="en-US" sz="1400" dirty="0"/>
-          </a:p>
-          <a:p>
-            <a:pPr marL="342900" indent="-342900">
-              <a:spcAft>
-                <a:spcPts val="200"/>
-              </a:spcAft>
-              <a:buSzPct val="100000"/>
-              <a:buFont typeface="+mj-lt"/>
-              <a:buAutoNum type="arabicPeriod" startAt="1"/>
-            </a:pPr>
-            <a:r>
-              <a:rPr lang="en-US" sz="1400" dirty="0">
-                <a:solidFill>
-                  <a:schemeClr val="tx1"/>
-                </a:solidFill>
-              </a:rPr>
-              <a:t>Next steps</a:t>
-            </a:r>
-            <a:endParaRPr lang="en-US" sz="1400" dirty="0"/>
-          </a:p>
-        </p:txBody>
-      </p:sp>
-      <p:sp>
-        <p:nvSpPr>
-          <p:cNvPr id="7" name="Shape 4"/>
+              <a:t>Narrow window, like a phone</a:t>
+            </a:r>
+            <a:endParaRPr lang="en-US" sz="1400" dirty="0"/>
+          </a:p>
+        </p:txBody>
+      </p:sp>
+      <p:sp>
+        <p:nvSpPr>
+          <p:cNvPr id="19" name="Shape 17"/>
           <p:cNvSpPr/>
           <p:nvPr/>
         </p:nvSpPr>
         <p:spPr>
           <a:xfrm>
-            <a:off x="4937760" y="3977640"/>
-            <a:ext cx="3840480" cy="731520"/>
+            <a:off x="457200" y="3383280"/>
+            <a:ext cx="5029200" cy="1188720"/>
           </a:xfrm>
           <a:prstGeom prst="roundRect">
             <a:avLst>
-              <a:gd name="adj" fmla="val 10000"/>
+              <a:gd name="adj" fmla="val 6154"/>
             </a:avLst>
           </a:prstGeom>
           <a:solidFill>
@@ -6927,14 +6786,14 @@
       </p:sp>
       <p:sp>
         <p:nvSpPr>
-          <p:cNvPr id="8" name="Text 5"/>
+          <p:cNvPr id="20" name="Text 18"/>
           <p:cNvSpPr txBox="1"/>
           <p:nvPr/>
         </p:nvSpPr>
         <p:spPr>
           <a:xfrm>
-            <a:off x="5120640" y="4069080"/>
-            <a:ext cx="3474720" cy="548640"/>
+            <a:off x="640080" y="3493008"/>
+            <a:ext cx="4663440" cy="1005840"/>
           </a:xfrm>
           <a:prstGeom prst="rect">
             <a:avLst/>
@@ -6950,14 +6809,106 @@
               <a:buNone/>
             </a:pPr>
             <a:r>
+              <a:rPr lang="en-US" sz="1300" b="1" dirty="0">
+                <a:solidFill>
+                  <a:schemeClr val="tx1"/>
+                </a:solidFill>
+              </a:rPr>
+              <a:t>Found something odd? </a:t>
+            </a:r>
+            <a:pPr indent="0" marL="0">
+              <a:buNone/>
+            </a:pPr>
+            <a:r>
               <a:rPr lang="en-US" sz="1300" dirty="0">
                 <a:solidFill>
                   <a:schemeClr val="tx1"/>
                 </a:solidFill>
               </a:rPr>
-              <a:t>Your one job: drag the screenshots into it on GitHub.</a:t>
+              <a:t>Tell Claude, refresh, check again.</a:t>
             </a:r>
             <a:endParaRPr lang="en-US" sz="1300" dirty="0"/>
+          </a:p>
+          <a:p>
+            <a:pPr indent="0" marL="0">
+              <a:buNone/>
+            </a:pPr>
+            <a:r>
+              <a:rPr lang="en-US" sz="1300" dirty="0">
+                <a:solidFill>
+                  <a:schemeClr val="accent2"/>
+                </a:solidFill>
+              </a:rPr>
+              <a:t>Then Claude runs its own checks and takes the screenshots for the pull request.</a:t>
+            </a:r>
+            <a:endParaRPr lang="en-US" sz="1300" dirty="0"/>
+          </a:p>
+        </p:txBody>
+      </p:sp>
+      <p:pic>
+        <p:nvPicPr>
+          <p:cNvPr id="21" name="Warning scenario screenshot" descr="small/shelf-wide.jpg">    </p:cNvPr>
+          <p:cNvPicPr>
+            <a:picLocks noChangeAspect="1"/>
+          </p:cNvPicPr>
+          <p:nvPr/>
+        </p:nvPicPr>
+        <p:blipFill>
+          <a:blip r:embed="rId1"/>
+          <a:stretch>
+            <a:fillRect/>
+          </a:stretch>
+        </p:blipFill>
+        <p:spPr>
+          <a:xfrm>
+            <a:off x="5760720" y="1097280"/>
+            <a:ext cx="2926080" cy="1670526"/>
+          </a:xfrm>
+          <a:prstGeom prst="rect">
+            <a:avLst/>
+          </a:prstGeom>
+          <a:effectLst>
+            <a:outerShdw sx="100000" sy="100000" kx="0" ky="0" algn="bl" rotWithShape="0" blurRad="76200" dist="25400" dir="5400000">
+              <a:srgbClr val="000000">
+                <a:alpha val="18000"/>
+              </a:srgbClr>
+            </a:outerShdw>
+          </a:effectLst>
+        </p:spPr>
+      </p:pic>
+      <p:sp>
+        <p:nvSpPr>
+          <p:cNvPr id="22" name="Text 19"/>
+          <p:cNvSpPr txBox="1"/>
+          <p:nvPr/>
+        </p:nvSpPr>
+        <p:spPr>
+          <a:xfrm>
+            <a:off x="5760720" y="2880360"/>
+            <a:ext cx="2926080" cy="457200"/>
+          </a:xfrm>
+          <a:prstGeom prst="rect">
+            <a:avLst/>
+          </a:prstGeom>
+          <a:noFill/>
+          <a:ln/>
+        </p:spPr>
+        <p:txBody>
+          <a:bodyPr wrap="square" lIns="0" tIns="0" rIns="0" bIns="0" rtlCol="0" anchor="t"/>
+          <a:lstStyle/>
+          <a:p>
+            <a:pPr algn="ctr" indent="0" marL="0">
+              <a:buNone/>
+            </a:pPr>
+            <a:r>
+              <a:rPr lang="en-US" sz="1100" dirty="0">
+                <a:solidFill>
+                  <a:schemeClr val="accent2"/>
+                </a:solidFill>
+              </a:rPr>
+              <a:t>Real example: making a warning appear (2000 mm wide, 40 kg)</a:t>
+            </a:r>
+            <a:endParaRPr lang="en-US" sz="1100" dirty="0"/>
           </a:p>
         </p:txBody>
       </p:sp>
@@ -7341,7 +7292,7 @@
                   <a:schemeClr val="tx1"/>
                 </a:solidFill>
               </a:rPr>
-              <a:t>After you send it</a:t>
+              <a:t>Last step: Claude creates the PR</a:t>
             </a:r>
             <a:endParaRPr lang="en-US" sz="2400" dirty="0"/>
           </a:p>
@@ -7349,18 +7300,297 @@
       </p:sp>
       <p:sp>
         <p:nvSpPr>
-          <p:cNvPr id="3" name="Shape 1"/>
+          <p:cNvPr id="3" name="Simulation tag"/>
+          <p:cNvSpPr txBox="1"/>
+          <p:nvPr/>
+        </p:nvSpPr>
+        <p:spPr>
+          <a:xfrm>
+            <a:off x="6949440" y="466344"/>
+            <a:ext cx="1737360" cy="256032"/>
+          </a:xfrm>
+          <a:prstGeom prst="rect">
+            <a:avLst/>
+          </a:prstGeom>
+          <a:solidFill>
+            <a:schemeClr val="accent1"/>
+          </a:solidFill>
+          <a:ln/>
+        </p:spPr>
+        <p:txBody>
+          <a:bodyPr wrap="square" lIns="0" tIns="0" rIns="0" bIns="0" rtlCol="0" anchor="ctr"/>
+          <a:lstStyle/>
+          <a:p>
+            <a:pPr algn="ctr" indent="0" marL="0">
+              <a:buNone/>
+            </a:pPr>
+            <a:r>
+              <a:rPr lang="en-US" sz="1000" b="1" dirty="0">
+                <a:solidFill>
+                  <a:schemeClr val="bg1"/>
+                </a:solidFill>
+              </a:rPr>
+              <a:t>SIMULATED EXAMPLE</a:t>
+            </a:r>
+            <a:endParaRPr lang="en-US" sz="1000" dirty="0"/>
+          </a:p>
+        </p:txBody>
+      </p:sp>
+      <p:pic>
+        <p:nvPicPr>
+          <p:cNvPr id="4" name="Simulated pull request" descr="small/sim-pr.jpg">    </p:cNvPr>
+          <p:cNvPicPr>
+            <a:picLocks noChangeAspect="1"/>
+          </p:cNvPicPr>
+          <p:nvPr/>
+        </p:nvPicPr>
+        <p:blipFill>
+          <a:blip r:embed="rId1"/>
+          <a:stretch>
+            <a:fillRect/>
+          </a:stretch>
+        </p:blipFill>
+        <p:spPr>
+          <a:xfrm>
+            <a:off x="457200" y="1005840"/>
+            <a:ext cx="3307282" cy="3749040"/>
+          </a:xfrm>
+          <a:prstGeom prst="rect">
+            <a:avLst/>
+          </a:prstGeom>
+          <a:effectLst>
+            <a:outerShdw sx="100000" sy="100000" kx="0" ky="0" algn="bl" rotWithShape="0" blurRad="76200" dist="25400" dir="5400000">
+              <a:srgbClr val="000000">
+                <a:alpha val="18000"/>
+              </a:srgbClr>
+            </a:outerShdw>
+          </a:effectLst>
+        </p:spPr>
+      </p:pic>
+      <p:sp>
+        <p:nvSpPr>
+          <p:cNvPr id="5" name="Text 2"/>
+          <p:cNvSpPr txBox="1"/>
+          <p:nvPr/>
+        </p:nvSpPr>
+        <p:spPr>
+          <a:xfrm>
+            <a:off x="4937760" y="1051560"/>
+            <a:ext cx="3840480" cy="640080"/>
+          </a:xfrm>
+          <a:prstGeom prst="rect">
+            <a:avLst/>
+          </a:prstGeom>
+          <a:noFill/>
+          <a:ln/>
+        </p:spPr>
+        <p:txBody>
+          <a:bodyPr wrap="square" lIns="0" tIns="0" rIns="0" bIns="0" rtlCol="0" anchor="t"/>
+          <a:lstStyle/>
+          <a:p>
+            <a:pPr indent="0" marL="0">
+              <a:buNone/>
+            </a:pPr>
+            <a:r>
+              <a:rPr lang="en-US" sz="1400" b="1" dirty="0">
+                <a:solidFill>
+                  <a:schemeClr val="tx1"/>
+                </a:solidFill>
+              </a:rPr>
+              <a:t>When you say "I'm happy, let's send it", Claude writes the pull request in a standard shape:</a:t>
+            </a:r>
+            <a:endParaRPr lang="en-US" sz="1400" dirty="0"/>
+          </a:p>
+        </p:txBody>
+      </p:sp>
+      <p:sp>
+        <p:nvSpPr>
+          <p:cNvPr id="6" name="Text 3"/>
+          <p:cNvSpPr txBox="1"/>
+          <p:nvPr/>
+        </p:nvSpPr>
+        <p:spPr>
+          <a:xfrm>
+            <a:off x="4937760" y="1783080"/>
+            <a:ext cx="3840480" cy="2194560"/>
+          </a:xfrm>
+          <a:prstGeom prst="rect">
+            <a:avLst/>
+          </a:prstGeom>
+          <a:noFill/>
+          <a:ln/>
+        </p:spPr>
+        <p:txBody>
+          <a:bodyPr wrap="square" lIns="0" tIns="0" rIns="0" bIns="0" rtlCol="0" anchor="t"/>
+          <a:lstStyle/>
+          <a:p>
+            <a:pPr marL="342900" indent="-342900">
+              <a:spcAft>
+                <a:spcPts val="200"/>
+              </a:spcAft>
+              <a:buSzPct val="100000"/>
+              <a:buFont typeface="+mj-lt"/>
+              <a:buAutoNum type="arabicPeriod" startAt="1"/>
+            </a:pPr>
+            <a:r>
+              <a:rPr lang="en-US" sz="1400" dirty="0">
+                <a:solidFill>
+                  <a:schemeClr val="tx1"/>
+                </a:solidFill>
+              </a:rPr>
+              <a:t>What this adds</a:t>
+            </a:r>
+            <a:endParaRPr lang="en-US" sz="1400" dirty="0"/>
+          </a:p>
+          <a:p>
+            <a:pPr marL="342900" indent="-342900">
+              <a:spcAft>
+                <a:spcPts val="200"/>
+              </a:spcAft>
+              <a:buSzPct val="100000"/>
+              <a:buFont typeface="+mj-lt"/>
+              <a:buAutoNum type="arabicPeriod" startAt="1"/>
+            </a:pPr>
+            <a:r>
+              <a:rPr lang="en-US" sz="1400" dirty="0">
+                <a:solidFill>
+                  <a:schemeClr val="tx1"/>
+                </a:solidFill>
+              </a:rPr>
+              <a:t>Idea / issue</a:t>
+            </a:r>
+            <a:endParaRPr lang="en-US" sz="1400" dirty="0"/>
+          </a:p>
+          <a:p>
+            <a:pPr marL="342900" indent="-342900">
+              <a:spcAft>
+                <a:spcPts val="200"/>
+              </a:spcAft>
+              <a:buSzPct val="100000"/>
+              <a:buFont typeface="+mj-lt"/>
+              <a:buAutoNum type="arabicPeriod" startAt="1"/>
+            </a:pPr>
+            <a:r>
+              <a:rPr lang="en-US" sz="1400" dirty="0">
+                <a:solidFill>
+                  <a:schemeClr val="tx1"/>
+                </a:solidFill>
+              </a:rPr>
+              <a:t>Design brief</a:t>
+            </a:r>
+            <a:endParaRPr lang="en-US" sz="1400" dirty="0"/>
+          </a:p>
+          <a:p>
+            <a:pPr marL="342900" indent="-342900">
+              <a:spcAft>
+                <a:spcPts val="200"/>
+              </a:spcAft>
+              <a:buSzPct val="100000"/>
+              <a:buFont typeface="+mj-lt"/>
+              <a:buAutoNum type="arabicPeriod" startAt="1"/>
+            </a:pPr>
+            <a:r>
+              <a:rPr lang="en-US" sz="1400" dirty="0">
+                <a:solidFill>
+                  <a:schemeClr val="tx1"/>
+                </a:solidFill>
+              </a:rPr>
+              <a:t>Parts and sources</a:t>
+            </a:r>
+            <a:endParaRPr lang="en-US" sz="1400" dirty="0"/>
+          </a:p>
+          <a:p>
+            <a:pPr marL="342900" indent="-342900">
+              <a:spcAft>
+                <a:spcPts val="200"/>
+              </a:spcAft>
+              <a:buSzPct val="100000"/>
+              <a:buFont typeface="+mj-lt"/>
+              <a:buAutoNum type="arabicPeriod" startAt="1"/>
+            </a:pPr>
+            <a:r>
+              <a:rPr lang="en-US" sz="1400" dirty="0">
+                <a:solidFill>
+                  <a:schemeClr val="tx1"/>
+                </a:solidFill>
+              </a:rPr>
+              <a:t>How it was checked</a:t>
+            </a:r>
+            <a:endParaRPr lang="en-US" sz="1400" dirty="0"/>
+          </a:p>
+          <a:p>
+            <a:pPr marL="342900" indent="-342900">
+              <a:spcAft>
+                <a:spcPts val="200"/>
+              </a:spcAft>
+              <a:buSzPct val="100000"/>
+              <a:buFont typeface="+mj-lt"/>
+              <a:buAutoNum type="arabicPeriod" startAt="1"/>
+            </a:pPr>
+            <a:r>
+              <a:rPr lang="en-US" sz="1400" dirty="0">
+                <a:solidFill>
+                  <a:schemeClr val="tx1"/>
+                </a:solidFill>
+              </a:rPr>
+              <a:t>Screenshots</a:t>
+            </a:r>
+            <a:endParaRPr lang="en-US" sz="1400" dirty="0"/>
+          </a:p>
+          <a:p>
+            <a:pPr marL="342900" indent="-342900">
+              <a:spcAft>
+                <a:spcPts val="200"/>
+              </a:spcAft>
+              <a:buSzPct val="100000"/>
+              <a:buFont typeface="+mj-lt"/>
+              <a:buAutoNum type="arabicPeriod" startAt="1"/>
+            </a:pPr>
+            <a:r>
+              <a:rPr lang="en-US" sz="1400" dirty="0">
+                <a:solidFill>
+                  <a:schemeClr val="tx1"/>
+                </a:solidFill>
+              </a:rPr>
+              <a:t>Assumptions to verify</a:t>
+            </a:r>
+            <a:endParaRPr lang="en-US" sz="1400" dirty="0"/>
+          </a:p>
+          <a:p>
+            <a:pPr marL="342900" indent="-342900">
+              <a:spcAft>
+                <a:spcPts val="200"/>
+              </a:spcAft>
+              <a:buSzPct val="100000"/>
+              <a:buFont typeface="+mj-lt"/>
+              <a:buAutoNum type="arabicPeriod" startAt="1"/>
+            </a:pPr>
+            <a:r>
+              <a:rPr lang="en-US" sz="1400" dirty="0">
+                <a:solidFill>
+                  <a:schemeClr val="tx1"/>
+                </a:solidFill>
+              </a:rPr>
+              <a:t>Next steps</a:t>
+            </a:r>
+            <a:endParaRPr lang="en-US" sz="1400" dirty="0"/>
+          </a:p>
+        </p:txBody>
+      </p:sp>
+      <p:sp>
+        <p:nvSpPr>
+          <p:cNvPr id="7" name="Shape 4"/>
           <p:cNvSpPr/>
           <p:nvPr/>
         </p:nvSpPr>
         <p:spPr>
           <a:xfrm>
-            <a:off x="457200" y="1280160"/>
-            <a:ext cx="1874520" cy="2286000"/>
+            <a:off x="4937760" y="3977640"/>
+            <a:ext cx="3840480" cy="731520"/>
           </a:xfrm>
           <a:prstGeom prst="roundRect">
             <a:avLst>
-              <a:gd name="adj" fmla="val 3902"/>
+              <a:gd name="adj" fmla="val 10000"/>
             </a:avLst>
           </a:prstGeom>
           <a:solidFill>
@@ -7376,52 +7606,14 @@
       </p:sp>
       <p:sp>
         <p:nvSpPr>
-          <p:cNvPr id="4" name="Text 2"/>
+          <p:cNvPr id="8" name="Text 5"/>
           <p:cNvSpPr txBox="1"/>
           <p:nvPr/>
         </p:nvSpPr>
         <p:spPr>
           <a:xfrm>
-            <a:off x="1170432" y="1600200"/>
-            <a:ext cx="457200" cy="457200"/>
-          </a:xfrm>
-          <a:prstGeom prst="ellipse">
-            <a:avLst/>
-          </a:prstGeom>
-          <a:solidFill>
-            <a:schemeClr val="tx2"/>
-          </a:solidFill>
-          <a:ln/>
-        </p:spPr>
-        <p:txBody>
-          <a:bodyPr wrap="square" lIns="0" tIns="0" rIns="0" bIns="0" rtlCol="0" anchor="ctr"/>
-          <a:lstStyle/>
-          <a:p>
-            <a:pPr algn="ctr" indent="0" marL="0">
-              <a:buNone/>
-            </a:pPr>
-            <a:r>
-              <a:rPr lang="en-US" sz="1400" b="1" dirty="0">
-                <a:solidFill>
-                  <a:schemeClr val="bg1"/>
-                </a:solidFill>
-              </a:rPr>
-              <a:t>1</a:t>
-            </a:r>
-            <a:endParaRPr lang="en-US" sz="1400" dirty="0"/>
-          </a:p>
-        </p:txBody>
-      </p:sp>
-      <p:sp>
-        <p:nvSpPr>
-          <p:cNvPr id="5" name="Text 3"/>
-          <p:cNvSpPr txBox="1"/>
-          <p:nvPr/>
-        </p:nvSpPr>
-        <p:spPr>
-          <a:xfrm>
-            <a:off x="548640" y="2286000"/>
-            <a:ext cx="1691640" cy="1097280"/>
+            <a:off x="5120640" y="4069080"/>
+            <a:ext cx="3474720" cy="548640"/>
           </a:xfrm>
           <a:prstGeom prst="rect">
             <a:avLst/>
@@ -7433,485 +7625,18 @@
           <a:bodyPr wrap="square" lIns="0" tIns="0" rIns="0" bIns="0" rtlCol="0" anchor="t"/>
           <a:lstStyle/>
           <a:p>
-            <a:pPr algn="ctr" indent="0" marL="0">
-              <a:buNone/>
-            </a:pPr>
-            <a:r>
-              <a:rPr lang="en-US" sz="1500" b="1" dirty="0">
+            <a:pPr indent="0" marL="0">
+              <a:buNone/>
+            </a:pPr>
+            <a:r>
+              <a:rPr lang="en-US" sz="1300" dirty="0">
                 <a:solidFill>
                   <a:schemeClr val="tx1"/>
                 </a:solidFill>
               </a:rPr>
-              <a:t>Owner reviews</a:t>
-            </a:r>
-            <a:endParaRPr lang="en-US" sz="1400" dirty="0"/>
-          </a:p>
-          <a:p>
-            <a:pPr algn="ctr" indent="0" marL="0">
-              <a:buNone/>
-            </a:pPr>
-            <a:r>
-              <a:rPr lang="en-US" sz="1200" dirty="0">
-                <a:solidFill>
-                  <a:schemeClr val="accent2"/>
-                </a:solidFill>
-              </a:rPr>
-              <a:t>Starting with the brief</a:t>
-            </a:r>
-            <a:endParaRPr lang="en-US" sz="1400" dirty="0"/>
-          </a:p>
-        </p:txBody>
-      </p:sp>
-      <p:sp>
-        <p:nvSpPr>
-          <p:cNvPr id="6" name="Shape 4"/>
-          <p:cNvSpPr/>
-          <p:nvPr/>
-        </p:nvSpPr>
-        <p:spPr>
-          <a:xfrm>
-            <a:off x="2350008" y="2423160"/>
-            <a:ext cx="219456" cy="0"/>
-          </a:xfrm>
-          <a:prstGeom prst="line">
-            <a:avLst/>
-          </a:prstGeom>
-          <a:noFill/>
-          <a:ln w="19050">
-            <a:solidFill>
-              <a:schemeClr val="accent3"/>
-            </a:solidFill>
-            <a:prstDash val="solid"/>
-            <a:tailEnd type="triangle"/>
-          </a:ln>
-        </p:spPr>
-      </p:sp>
-      <p:sp>
-        <p:nvSpPr>
-          <p:cNvPr id="7" name="Shape 5"/>
-          <p:cNvSpPr/>
-          <p:nvPr/>
-        </p:nvSpPr>
-        <p:spPr>
-          <a:xfrm>
-            <a:off x="2587752" y="1280160"/>
-            <a:ext cx="1874520" cy="2286000"/>
-          </a:xfrm>
-          <a:prstGeom prst="roundRect">
-            <a:avLst>
-              <a:gd name="adj" fmla="val 3902"/>
-            </a:avLst>
-          </a:prstGeom>
-          <a:solidFill>
-            <a:schemeClr val="bg2"/>
-          </a:solidFill>
-          <a:ln w="12700">
-            <a:solidFill>
-              <a:schemeClr val="bg2"/>
-            </a:solidFill>
-            <a:prstDash val="solid"/>
-          </a:ln>
-        </p:spPr>
-      </p:sp>
-      <p:sp>
-        <p:nvSpPr>
-          <p:cNvPr id="8" name="Text 6"/>
-          <p:cNvSpPr txBox="1"/>
-          <p:nvPr/>
-        </p:nvSpPr>
-        <p:spPr>
-          <a:xfrm>
-            <a:off x="3300984" y="1600200"/>
-            <a:ext cx="457200" cy="457200"/>
-          </a:xfrm>
-          <a:prstGeom prst="ellipse">
-            <a:avLst/>
-          </a:prstGeom>
-          <a:solidFill>
-            <a:schemeClr val="tx2"/>
-          </a:solidFill>
-          <a:ln/>
-        </p:spPr>
-        <p:txBody>
-          <a:bodyPr wrap="square" lIns="0" tIns="0" rIns="0" bIns="0" rtlCol="0" anchor="ctr"/>
-          <a:lstStyle/>
-          <a:p>
-            <a:pPr algn="ctr" indent="0" marL="0">
-              <a:buNone/>
-            </a:pPr>
-            <a:r>
-              <a:rPr lang="en-US" sz="1400" b="1" dirty="0">
-                <a:solidFill>
-                  <a:schemeClr val="bg1"/>
-                </a:solidFill>
-              </a:rPr>
-              <a:t>2</a:t>
-            </a:r>
-            <a:endParaRPr lang="en-US" sz="1400" dirty="0"/>
-          </a:p>
-        </p:txBody>
-      </p:sp>
-      <p:sp>
-        <p:nvSpPr>
-          <p:cNvPr id="9" name="Text 7"/>
-          <p:cNvSpPr txBox="1"/>
-          <p:nvPr/>
-        </p:nvSpPr>
-        <p:spPr>
-          <a:xfrm>
-            <a:off x="2679192" y="2286000"/>
-            <a:ext cx="1691640" cy="1097280"/>
-          </a:xfrm>
-          <a:prstGeom prst="rect">
-            <a:avLst/>
-          </a:prstGeom>
-          <a:noFill/>
-          <a:ln/>
-        </p:spPr>
-        <p:txBody>
-          <a:bodyPr wrap="square" lIns="0" tIns="0" rIns="0" bIns="0" rtlCol="0" anchor="t"/>
-          <a:lstStyle/>
-          <a:p>
-            <a:pPr algn="ctr" indent="0" marL="0">
-              <a:buNone/>
-            </a:pPr>
-            <a:r>
-              <a:rPr lang="en-US" sz="1500" b="1" dirty="0">
-                <a:solidFill>
-                  <a:schemeClr val="tx1"/>
-                </a:solidFill>
-              </a:rPr>
-              <a:t>Comments</a:t>
-            </a:r>
-            <a:endParaRPr lang="en-US" sz="1400" dirty="0"/>
-          </a:p>
-          <a:p>
-            <a:pPr algn="ctr" indent="0" marL="0">
-              <a:buNone/>
-            </a:pPr>
-            <a:r>
-              <a:rPr lang="en-US" sz="1200" dirty="0">
-                <a:solidFill>
-                  <a:schemeClr val="accent2"/>
-                </a:solidFill>
-              </a:rPr>
-              <a:t>Questions or changes</a:t>
-            </a:r>
-            <a:endParaRPr lang="en-US" sz="1400" dirty="0"/>
-          </a:p>
-        </p:txBody>
-      </p:sp>
-      <p:sp>
-        <p:nvSpPr>
-          <p:cNvPr id="10" name="Shape 8"/>
-          <p:cNvSpPr/>
-          <p:nvPr/>
-        </p:nvSpPr>
-        <p:spPr>
-          <a:xfrm>
-            <a:off x="4480560" y="2423160"/>
-            <a:ext cx="219456" cy="0"/>
-          </a:xfrm>
-          <a:prstGeom prst="line">
-            <a:avLst/>
-          </a:prstGeom>
-          <a:noFill/>
-          <a:ln w="19050">
-            <a:solidFill>
-              <a:schemeClr val="accent3"/>
-            </a:solidFill>
-            <a:prstDash val="solid"/>
-            <a:tailEnd type="triangle"/>
-          </a:ln>
-        </p:spPr>
-      </p:sp>
-      <p:sp>
-        <p:nvSpPr>
-          <p:cNvPr id="11" name="Shape 9"/>
-          <p:cNvSpPr/>
-          <p:nvPr/>
-        </p:nvSpPr>
-        <p:spPr>
-          <a:xfrm>
-            <a:off x="4718304" y="1280160"/>
-            <a:ext cx="1874520" cy="2286000"/>
-          </a:xfrm>
-          <a:prstGeom prst="roundRect">
-            <a:avLst>
-              <a:gd name="adj" fmla="val 3902"/>
-            </a:avLst>
-          </a:prstGeom>
-          <a:solidFill>
-            <a:schemeClr val="bg2"/>
-          </a:solidFill>
-          <a:ln w="12700">
-            <a:solidFill>
-              <a:schemeClr val="bg2"/>
-            </a:solidFill>
-            <a:prstDash val="solid"/>
-          </a:ln>
-        </p:spPr>
-      </p:sp>
-      <p:sp>
-        <p:nvSpPr>
-          <p:cNvPr id="12" name="Text 10"/>
-          <p:cNvSpPr txBox="1"/>
-          <p:nvPr/>
-        </p:nvSpPr>
-        <p:spPr>
-          <a:xfrm>
-            <a:off x="5431536" y="1600200"/>
-            <a:ext cx="457200" cy="457200"/>
-          </a:xfrm>
-          <a:prstGeom prst="ellipse">
-            <a:avLst/>
-          </a:prstGeom>
-          <a:solidFill>
-            <a:schemeClr val="tx2"/>
-          </a:solidFill>
-          <a:ln/>
-        </p:spPr>
-        <p:txBody>
-          <a:bodyPr wrap="square" lIns="0" tIns="0" rIns="0" bIns="0" rtlCol="0" anchor="ctr"/>
-          <a:lstStyle/>
-          <a:p>
-            <a:pPr algn="ctr" indent="0" marL="0">
-              <a:buNone/>
-            </a:pPr>
-            <a:r>
-              <a:rPr lang="en-US" sz="1400" b="1" dirty="0">
-                <a:solidFill>
-                  <a:schemeClr val="bg1"/>
-                </a:solidFill>
-              </a:rPr>
-              <a:t>3</a:t>
-            </a:r>
-            <a:endParaRPr lang="en-US" sz="1400" dirty="0"/>
-          </a:p>
-        </p:txBody>
-      </p:sp>
-      <p:sp>
-        <p:nvSpPr>
-          <p:cNvPr id="13" name="Text 11"/>
-          <p:cNvSpPr txBox="1"/>
-          <p:nvPr/>
-        </p:nvSpPr>
-        <p:spPr>
-          <a:xfrm>
-            <a:off x="4809744" y="2286000"/>
-            <a:ext cx="1691640" cy="1097280"/>
-          </a:xfrm>
-          <a:prstGeom prst="rect">
-            <a:avLst/>
-          </a:prstGeom>
-          <a:noFill/>
-          <a:ln/>
-        </p:spPr>
-        <p:txBody>
-          <a:bodyPr wrap="square" lIns="0" tIns="0" rIns="0" bIns="0" rtlCol="0" anchor="t"/>
-          <a:lstStyle/>
-          <a:p>
-            <a:pPr algn="ctr" indent="0" marL="0">
-              <a:buNone/>
-            </a:pPr>
-            <a:r>
-              <a:rPr lang="en-US" sz="1500" b="1" dirty="0">
-                <a:solidFill>
-                  <a:schemeClr val="tx1"/>
-                </a:solidFill>
-              </a:rPr>
-              <a:t>Ask Claude</a:t>
-            </a:r>
-            <a:endParaRPr lang="en-US" sz="1400" dirty="0"/>
-          </a:p>
-          <a:p>
-            <a:pPr algn="ctr" indent="0" marL="0">
-              <a:buNone/>
-            </a:pPr>
-            <a:r>
-              <a:rPr lang="en-US" sz="1200" dirty="0">
-                <a:solidFill>
-                  <a:schemeClr val="accent2"/>
-                </a:solidFill>
-              </a:rPr>
-              <a:t>"let's work on the review comments"</a:t>
-            </a:r>
-            <a:endParaRPr lang="en-US" sz="1400" dirty="0"/>
-          </a:p>
-        </p:txBody>
-      </p:sp>
-      <p:sp>
-        <p:nvSpPr>
-          <p:cNvPr id="14" name="Shape 12"/>
-          <p:cNvSpPr/>
-          <p:nvPr/>
-        </p:nvSpPr>
-        <p:spPr>
-          <a:xfrm>
-            <a:off x="6611112" y="2423160"/>
-            <a:ext cx="219456" cy="0"/>
-          </a:xfrm>
-          <a:prstGeom prst="line">
-            <a:avLst/>
-          </a:prstGeom>
-          <a:noFill/>
-          <a:ln w="19050">
-            <a:solidFill>
-              <a:schemeClr val="accent3"/>
-            </a:solidFill>
-            <a:prstDash val="solid"/>
-            <a:tailEnd type="triangle"/>
-          </a:ln>
-        </p:spPr>
-      </p:sp>
-      <p:sp>
-        <p:nvSpPr>
-          <p:cNvPr id="15" name="Shape 13"/>
-          <p:cNvSpPr/>
-          <p:nvPr/>
-        </p:nvSpPr>
-        <p:spPr>
-          <a:xfrm>
-            <a:off x="6848856" y="1280160"/>
-            <a:ext cx="1874520" cy="2286000"/>
-          </a:xfrm>
-          <a:prstGeom prst="roundRect">
-            <a:avLst>
-              <a:gd name="adj" fmla="val 3902"/>
-            </a:avLst>
-          </a:prstGeom>
-          <a:solidFill>
-            <a:schemeClr val="tx2"/>
-          </a:solidFill>
-          <a:ln w="12700">
-            <a:solidFill>
-              <a:schemeClr val="tx2"/>
-            </a:solidFill>
-            <a:prstDash val="solid"/>
-          </a:ln>
-        </p:spPr>
-      </p:sp>
-      <p:sp>
-        <p:nvSpPr>
-          <p:cNvPr id="16" name="Text 14"/>
-          <p:cNvSpPr txBox="1"/>
-          <p:nvPr/>
-        </p:nvSpPr>
-        <p:spPr>
-          <a:xfrm>
-            <a:off x="7562088" y="1600200"/>
-            <a:ext cx="457200" cy="457200"/>
-          </a:xfrm>
-          <a:prstGeom prst="ellipse">
-            <a:avLst/>
-          </a:prstGeom>
-          <a:solidFill>
-            <a:schemeClr val="accent1"/>
-          </a:solidFill>
-          <a:ln/>
-        </p:spPr>
-        <p:txBody>
-          <a:bodyPr wrap="square" lIns="0" tIns="0" rIns="0" bIns="0" rtlCol="0" anchor="ctr"/>
-          <a:lstStyle/>
-          <a:p>
-            <a:pPr algn="ctr" indent="0" marL="0">
-              <a:buNone/>
-            </a:pPr>
-            <a:r>
-              <a:rPr lang="en-US" sz="1400" b="1" dirty="0">
-                <a:solidFill>
-                  <a:schemeClr val="bg1"/>
-                </a:solidFill>
-              </a:rPr>
-              <a:t>4</a:t>
-            </a:r>
-            <a:endParaRPr lang="en-US" sz="1400" dirty="0"/>
-          </a:p>
-        </p:txBody>
-      </p:sp>
-      <p:sp>
-        <p:nvSpPr>
-          <p:cNvPr id="17" name="Text 15"/>
-          <p:cNvSpPr txBox="1"/>
-          <p:nvPr/>
-        </p:nvSpPr>
-        <p:spPr>
-          <a:xfrm>
-            <a:off x="6940296" y="2286000"/>
-            <a:ext cx="1691640" cy="1097280"/>
-          </a:xfrm>
-          <a:prstGeom prst="rect">
-            <a:avLst/>
-          </a:prstGeom>
-          <a:noFill/>
-          <a:ln/>
-        </p:spPr>
-        <p:txBody>
-          <a:bodyPr wrap="square" lIns="0" tIns="0" rIns="0" bIns="0" rtlCol="0" anchor="t"/>
-          <a:lstStyle/>
-          <a:p>
-            <a:pPr algn="ctr" indent="0" marL="0">
-              <a:buNone/>
-            </a:pPr>
-            <a:r>
-              <a:rPr lang="en-US" sz="1500" b="1" dirty="0">
-                <a:solidFill>
-                  <a:schemeClr val="bg1"/>
-                </a:solidFill>
-              </a:rPr>
-              <a:t>Merged</a:t>
-            </a:r>
-            <a:endParaRPr lang="en-US" sz="1400" dirty="0"/>
-          </a:p>
-          <a:p>
-            <a:pPr algn="ctr" indent="0" marL="0">
-              <a:buNone/>
-            </a:pPr>
-            <a:r>
-              <a:rPr lang="en-US" sz="1200" dirty="0">
-                <a:solidFill>
-                  <a:schemeClr val="accent4"/>
-                </a:solidFill>
-              </a:rPr>
-              <a:t>Your piece is live</a:t>
-            </a:r>
-            <a:endParaRPr lang="en-US" sz="1400" dirty="0"/>
-          </a:p>
-        </p:txBody>
-      </p:sp>
-      <p:sp>
-        <p:nvSpPr>
-          <p:cNvPr id="18" name="Text 16"/>
-          <p:cNvSpPr txBox="1"/>
-          <p:nvPr/>
-        </p:nvSpPr>
-        <p:spPr>
-          <a:xfrm>
-            <a:off x="457200" y="3931920"/>
-            <a:ext cx="8229600" cy="548640"/>
-          </a:xfrm>
-          <a:prstGeom prst="rect">
-            <a:avLst/>
-          </a:prstGeom>
-          <a:noFill/>
-          <a:ln/>
-        </p:spPr>
-        <p:txBody>
-          <a:bodyPr wrap="square" lIns="0" tIns="0" rIns="0" bIns="0" rtlCol="0" anchor="t"/>
-          <a:lstStyle/>
-          <a:p>
-            <a:pPr indent="0" marL="0">
-              <a:buNone/>
-            </a:pPr>
-            <a:r>
-              <a:rPr lang="en-US" sz="1500" dirty="0">
-                <a:solidFill>
-                  <a:schemeClr val="accent2"/>
-                </a:solidFill>
-              </a:rPr>
-              <a:t>Changes go on the same pull request: open Code again (Local, the project folder), and Claude picks up the comments.</a:t>
-            </a:r>
-            <a:endParaRPr lang="en-US" sz="1500" dirty="0"/>
+              <a:t>Your one job: drag the screenshots into it on GitHub.</a:t>
+            </a:r>
+            <a:endParaRPr lang="en-US" sz="1300" dirty="0"/>
           </a:p>
         </p:txBody>
       </p:sp>
@@ -7995,6 +7720,682 @@
         </p:nvSpPr>
         <p:spPr>
           <a:xfrm>
+            <a:off x="457200" y="274320"/>
+            <a:ext cx="6400800" cy="640080"/>
+          </a:xfrm>
+          <a:prstGeom prst="rect">
+            <a:avLst/>
+          </a:prstGeom>
+          <a:noFill/>
+          <a:ln/>
+        </p:spPr>
+        <p:txBody>
+          <a:bodyPr wrap="square" lIns="0" tIns="0" rIns="0" bIns="0" rtlCol="0" anchor="ctr"/>
+          <a:lstStyle/>
+          <a:p>
+            <a:pPr algn="l" indent="0" marL="0">
+              <a:buNone/>
+            </a:pPr>
+            <a:r>
+              <a:rPr lang="en-US" sz="2400" b="1" dirty="0">
+                <a:solidFill>
+                  <a:schemeClr val="tx1"/>
+                </a:solidFill>
+              </a:rPr>
+              <a:t>After you send it</a:t>
+            </a:r>
+            <a:endParaRPr lang="en-US" sz="2400" dirty="0"/>
+          </a:p>
+        </p:txBody>
+      </p:sp>
+      <p:sp>
+        <p:nvSpPr>
+          <p:cNvPr id="3" name="Shape 1"/>
+          <p:cNvSpPr/>
+          <p:nvPr/>
+        </p:nvSpPr>
+        <p:spPr>
+          <a:xfrm>
+            <a:off x="457200" y="1280160"/>
+            <a:ext cx="1874520" cy="2286000"/>
+          </a:xfrm>
+          <a:prstGeom prst="roundRect">
+            <a:avLst>
+              <a:gd name="adj" fmla="val 3902"/>
+            </a:avLst>
+          </a:prstGeom>
+          <a:solidFill>
+            <a:schemeClr val="bg2"/>
+          </a:solidFill>
+          <a:ln w="12700">
+            <a:solidFill>
+              <a:schemeClr val="bg2"/>
+            </a:solidFill>
+            <a:prstDash val="solid"/>
+          </a:ln>
+        </p:spPr>
+      </p:sp>
+      <p:sp>
+        <p:nvSpPr>
+          <p:cNvPr id="4" name="Text 2"/>
+          <p:cNvSpPr txBox="1"/>
+          <p:nvPr/>
+        </p:nvSpPr>
+        <p:spPr>
+          <a:xfrm>
+            <a:off x="1170432" y="1600200"/>
+            <a:ext cx="457200" cy="457200"/>
+          </a:xfrm>
+          <a:prstGeom prst="ellipse">
+            <a:avLst/>
+          </a:prstGeom>
+          <a:solidFill>
+            <a:schemeClr val="tx2"/>
+          </a:solidFill>
+          <a:ln/>
+        </p:spPr>
+        <p:txBody>
+          <a:bodyPr wrap="square" lIns="0" tIns="0" rIns="0" bIns="0" rtlCol="0" anchor="ctr"/>
+          <a:lstStyle/>
+          <a:p>
+            <a:pPr algn="ctr" indent="0" marL="0">
+              <a:buNone/>
+            </a:pPr>
+            <a:r>
+              <a:rPr lang="en-US" sz="1400" b="1" dirty="0">
+                <a:solidFill>
+                  <a:schemeClr val="bg1"/>
+                </a:solidFill>
+              </a:rPr>
+              <a:t>1</a:t>
+            </a:r>
+            <a:endParaRPr lang="en-US" sz="1400" dirty="0"/>
+          </a:p>
+        </p:txBody>
+      </p:sp>
+      <p:sp>
+        <p:nvSpPr>
+          <p:cNvPr id="5" name="Text 3"/>
+          <p:cNvSpPr txBox="1"/>
+          <p:nvPr/>
+        </p:nvSpPr>
+        <p:spPr>
+          <a:xfrm>
+            <a:off x="548640" y="2286000"/>
+            <a:ext cx="1691640" cy="1097280"/>
+          </a:xfrm>
+          <a:prstGeom prst="rect">
+            <a:avLst/>
+          </a:prstGeom>
+          <a:noFill/>
+          <a:ln/>
+        </p:spPr>
+        <p:txBody>
+          <a:bodyPr wrap="square" lIns="0" tIns="0" rIns="0" bIns="0" rtlCol="0" anchor="t"/>
+          <a:lstStyle/>
+          <a:p>
+            <a:pPr algn="ctr" indent="0" marL="0">
+              <a:buNone/>
+            </a:pPr>
+            <a:r>
+              <a:rPr lang="en-US" sz="1500" b="1" dirty="0">
+                <a:solidFill>
+                  <a:schemeClr val="tx1"/>
+                </a:solidFill>
+              </a:rPr>
+              <a:t>Owner reviews</a:t>
+            </a:r>
+            <a:endParaRPr lang="en-US" sz="1400" dirty="0"/>
+          </a:p>
+          <a:p>
+            <a:pPr algn="ctr" indent="0" marL="0">
+              <a:buNone/>
+            </a:pPr>
+            <a:r>
+              <a:rPr lang="en-US" sz="1200" dirty="0">
+                <a:solidFill>
+                  <a:schemeClr val="accent2"/>
+                </a:solidFill>
+              </a:rPr>
+              <a:t>Starting with the brief</a:t>
+            </a:r>
+            <a:endParaRPr lang="en-US" sz="1400" dirty="0"/>
+          </a:p>
+        </p:txBody>
+      </p:sp>
+      <p:sp>
+        <p:nvSpPr>
+          <p:cNvPr id="6" name="Shape 4"/>
+          <p:cNvSpPr/>
+          <p:nvPr/>
+        </p:nvSpPr>
+        <p:spPr>
+          <a:xfrm>
+            <a:off x="2350008" y="2423160"/>
+            <a:ext cx="219456" cy="0"/>
+          </a:xfrm>
+          <a:prstGeom prst="line">
+            <a:avLst/>
+          </a:prstGeom>
+          <a:noFill/>
+          <a:ln w="19050">
+            <a:solidFill>
+              <a:schemeClr val="accent3"/>
+            </a:solidFill>
+            <a:prstDash val="solid"/>
+            <a:tailEnd type="triangle"/>
+          </a:ln>
+        </p:spPr>
+      </p:sp>
+      <p:sp>
+        <p:nvSpPr>
+          <p:cNvPr id="7" name="Shape 5"/>
+          <p:cNvSpPr/>
+          <p:nvPr/>
+        </p:nvSpPr>
+        <p:spPr>
+          <a:xfrm>
+            <a:off x="2587752" y="1280160"/>
+            <a:ext cx="1874520" cy="2286000"/>
+          </a:xfrm>
+          <a:prstGeom prst="roundRect">
+            <a:avLst>
+              <a:gd name="adj" fmla="val 3902"/>
+            </a:avLst>
+          </a:prstGeom>
+          <a:solidFill>
+            <a:schemeClr val="bg2"/>
+          </a:solidFill>
+          <a:ln w="12700">
+            <a:solidFill>
+              <a:schemeClr val="bg2"/>
+            </a:solidFill>
+            <a:prstDash val="solid"/>
+          </a:ln>
+        </p:spPr>
+      </p:sp>
+      <p:sp>
+        <p:nvSpPr>
+          <p:cNvPr id="8" name="Text 6"/>
+          <p:cNvSpPr txBox="1"/>
+          <p:nvPr/>
+        </p:nvSpPr>
+        <p:spPr>
+          <a:xfrm>
+            <a:off x="3300984" y="1600200"/>
+            <a:ext cx="457200" cy="457200"/>
+          </a:xfrm>
+          <a:prstGeom prst="ellipse">
+            <a:avLst/>
+          </a:prstGeom>
+          <a:solidFill>
+            <a:schemeClr val="tx2"/>
+          </a:solidFill>
+          <a:ln/>
+        </p:spPr>
+        <p:txBody>
+          <a:bodyPr wrap="square" lIns="0" tIns="0" rIns="0" bIns="0" rtlCol="0" anchor="ctr"/>
+          <a:lstStyle/>
+          <a:p>
+            <a:pPr algn="ctr" indent="0" marL="0">
+              <a:buNone/>
+            </a:pPr>
+            <a:r>
+              <a:rPr lang="en-US" sz="1400" b="1" dirty="0">
+                <a:solidFill>
+                  <a:schemeClr val="bg1"/>
+                </a:solidFill>
+              </a:rPr>
+              <a:t>2</a:t>
+            </a:r>
+            <a:endParaRPr lang="en-US" sz="1400" dirty="0"/>
+          </a:p>
+        </p:txBody>
+      </p:sp>
+      <p:sp>
+        <p:nvSpPr>
+          <p:cNvPr id="9" name="Text 7"/>
+          <p:cNvSpPr txBox="1"/>
+          <p:nvPr/>
+        </p:nvSpPr>
+        <p:spPr>
+          <a:xfrm>
+            <a:off x="2679192" y="2286000"/>
+            <a:ext cx="1691640" cy="1097280"/>
+          </a:xfrm>
+          <a:prstGeom prst="rect">
+            <a:avLst/>
+          </a:prstGeom>
+          <a:noFill/>
+          <a:ln/>
+        </p:spPr>
+        <p:txBody>
+          <a:bodyPr wrap="square" lIns="0" tIns="0" rIns="0" bIns="0" rtlCol="0" anchor="t"/>
+          <a:lstStyle/>
+          <a:p>
+            <a:pPr algn="ctr" indent="0" marL="0">
+              <a:buNone/>
+            </a:pPr>
+            <a:r>
+              <a:rPr lang="en-US" sz="1500" b="1" dirty="0">
+                <a:solidFill>
+                  <a:schemeClr val="tx1"/>
+                </a:solidFill>
+              </a:rPr>
+              <a:t>Comments</a:t>
+            </a:r>
+            <a:endParaRPr lang="en-US" sz="1400" dirty="0"/>
+          </a:p>
+          <a:p>
+            <a:pPr algn="ctr" indent="0" marL="0">
+              <a:buNone/>
+            </a:pPr>
+            <a:r>
+              <a:rPr lang="en-US" sz="1200" dirty="0">
+                <a:solidFill>
+                  <a:schemeClr val="accent2"/>
+                </a:solidFill>
+              </a:rPr>
+              <a:t>Questions or changes</a:t>
+            </a:r>
+            <a:endParaRPr lang="en-US" sz="1400" dirty="0"/>
+          </a:p>
+        </p:txBody>
+      </p:sp>
+      <p:sp>
+        <p:nvSpPr>
+          <p:cNvPr id="10" name="Shape 8"/>
+          <p:cNvSpPr/>
+          <p:nvPr/>
+        </p:nvSpPr>
+        <p:spPr>
+          <a:xfrm>
+            <a:off x="4480560" y="2423160"/>
+            <a:ext cx="219456" cy="0"/>
+          </a:xfrm>
+          <a:prstGeom prst="line">
+            <a:avLst/>
+          </a:prstGeom>
+          <a:noFill/>
+          <a:ln w="19050">
+            <a:solidFill>
+              <a:schemeClr val="accent3"/>
+            </a:solidFill>
+            <a:prstDash val="solid"/>
+            <a:tailEnd type="triangle"/>
+          </a:ln>
+        </p:spPr>
+      </p:sp>
+      <p:sp>
+        <p:nvSpPr>
+          <p:cNvPr id="11" name="Shape 9"/>
+          <p:cNvSpPr/>
+          <p:nvPr/>
+        </p:nvSpPr>
+        <p:spPr>
+          <a:xfrm>
+            <a:off x="4718304" y="1280160"/>
+            <a:ext cx="1874520" cy="2286000"/>
+          </a:xfrm>
+          <a:prstGeom prst="roundRect">
+            <a:avLst>
+              <a:gd name="adj" fmla="val 3902"/>
+            </a:avLst>
+          </a:prstGeom>
+          <a:solidFill>
+            <a:schemeClr val="bg2"/>
+          </a:solidFill>
+          <a:ln w="12700">
+            <a:solidFill>
+              <a:schemeClr val="bg2"/>
+            </a:solidFill>
+            <a:prstDash val="solid"/>
+          </a:ln>
+        </p:spPr>
+      </p:sp>
+      <p:sp>
+        <p:nvSpPr>
+          <p:cNvPr id="12" name="Text 10"/>
+          <p:cNvSpPr txBox="1"/>
+          <p:nvPr/>
+        </p:nvSpPr>
+        <p:spPr>
+          <a:xfrm>
+            <a:off x="5431536" y="1600200"/>
+            <a:ext cx="457200" cy="457200"/>
+          </a:xfrm>
+          <a:prstGeom prst="ellipse">
+            <a:avLst/>
+          </a:prstGeom>
+          <a:solidFill>
+            <a:schemeClr val="tx2"/>
+          </a:solidFill>
+          <a:ln/>
+        </p:spPr>
+        <p:txBody>
+          <a:bodyPr wrap="square" lIns="0" tIns="0" rIns="0" bIns="0" rtlCol="0" anchor="ctr"/>
+          <a:lstStyle/>
+          <a:p>
+            <a:pPr algn="ctr" indent="0" marL="0">
+              <a:buNone/>
+            </a:pPr>
+            <a:r>
+              <a:rPr lang="en-US" sz="1400" b="1" dirty="0">
+                <a:solidFill>
+                  <a:schemeClr val="bg1"/>
+                </a:solidFill>
+              </a:rPr>
+              <a:t>3</a:t>
+            </a:r>
+            <a:endParaRPr lang="en-US" sz="1400" dirty="0"/>
+          </a:p>
+        </p:txBody>
+      </p:sp>
+      <p:sp>
+        <p:nvSpPr>
+          <p:cNvPr id="13" name="Text 11"/>
+          <p:cNvSpPr txBox="1"/>
+          <p:nvPr/>
+        </p:nvSpPr>
+        <p:spPr>
+          <a:xfrm>
+            <a:off x="4809744" y="2286000"/>
+            <a:ext cx="1691640" cy="1097280"/>
+          </a:xfrm>
+          <a:prstGeom prst="rect">
+            <a:avLst/>
+          </a:prstGeom>
+          <a:noFill/>
+          <a:ln/>
+        </p:spPr>
+        <p:txBody>
+          <a:bodyPr wrap="square" lIns="0" tIns="0" rIns="0" bIns="0" rtlCol="0" anchor="t"/>
+          <a:lstStyle/>
+          <a:p>
+            <a:pPr algn="ctr" indent="0" marL="0">
+              <a:buNone/>
+            </a:pPr>
+            <a:r>
+              <a:rPr lang="en-US" sz="1500" b="1" dirty="0">
+                <a:solidFill>
+                  <a:schemeClr val="tx1"/>
+                </a:solidFill>
+              </a:rPr>
+              <a:t>Ask Claude</a:t>
+            </a:r>
+            <a:endParaRPr lang="en-US" sz="1400" dirty="0"/>
+          </a:p>
+          <a:p>
+            <a:pPr algn="ctr" indent="0" marL="0">
+              <a:buNone/>
+            </a:pPr>
+            <a:r>
+              <a:rPr lang="en-US" sz="1200" dirty="0">
+                <a:solidFill>
+                  <a:schemeClr val="accent2"/>
+                </a:solidFill>
+              </a:rPr>
+              <a:t>"let's work on the review comments"</a:t>
+            </a:r>
+            <a:endParaRPr lang="en-US" sz="1400" dirty="0"/>
+          </a:p>
+        </p:txBody>
+      </p:sp>
+      <p:sp>
+        <p:nvSpPr>
+          <p:cNvPr id="14" name="Shape 12"/>
+          <p:cNvSpPr/>
+          <p:nvPr/>
+        </p:nvSpPr>
+        <p:spPr>
+          <a:xfrm>
+            <a:off x="6611112" y="2423160"/>
+            <a:ext cx="219456" cy="0"/>
+          </a:xfrm>
+          <a:prstGeom prst="line">
+            <a:avLst/>
+          </a:prstGeom>
+          <a:noFill/>
+          <a:ln w="19050">
+            <a:solidFill>
+              <a:schemeClr val="accent3"/>
+            </a:solidFill>
+            <a:prstDash val="solid"/>
+            <a:tailEnd type="triangle"/>
+          </a:ln>
+        </p:spPr>
+      </p:sp>
+      <p:sp>
+        <p:nvSpPr>
+          <p:cNvPr id="15" name="Shape 13"/>
+          <p:cNvSpPr/>
+          <p:nvPr/>
+        </p:nvSpPr>
+        <p:spPr>
+          <a:xfrm>
+            <a:off x="6848856" y="1280160"/>
+            <a:ext cx="1874520" cy="2286000"/>
+          </a:xfrm>
+          <a:prstGeom prst="roundRect">
+            <a:avLst>
+              <a:gd name="adj" fmla="val 3902"/>
+            </a:avLst>
+          </a:prstGeom>
+          <a:solidFill>
+            <a:schemeClr val="tx2"/>
+          </a:solidFill>
+          <a:ln w="12700">
+            <a:solidFill>
+              <a:schemeClr val="tx2"/>
+            </a:solidFill>
+            <a:prstDash val="solid"/>
+          </a:ln>
+        </p:spPr>
+      </p:sp>
+      <p:sp>
+        <p:nvSpPr>
+          <p:cNvPr id="16" name="Text 14"/>
+          <p:cNvSpPr txBox="1"/>
+          <p:nvPr/>
+        </p:nvSpPr>
+        <p:spPr>
+          <a:xfrm>
+            <a:off x="7562088" y="1600200"/>
+            <a:ext cx="457200" cy="457200"/>
+          </a:xfrm>
+          <a:prstGeom prst="ellipse">
+            <a:avLst/>
+          </a:prstGeom>
+          <a:solidFill>
+            <a:schemeClr val="accent1"/>
+          </a:solidFill>
+          <a:ln/>
+        </p:spPr>
+        <p:txBody>
+          <a:bodyPr wrap="square" lIns="0" tIns="0" rIns="0" bIns="0" rtlCol="0" anchor="ctr"/>
+          <a:lstStyle/>
+          <a:p>
+            <a:pPr algn="ctr" indent="0" marL="0">
+              <a:buNone/>
+            </a:pPr>
+            <a:r>
+              <a:rPr lang="en-US" sz="1400" b="1" dirty="0">
+                <a:solidFill>
+                  <a:schemeClr val="bg1"/>
+                </a:solidFill>
+              </a:rPr>
+              <a:t>4</a:t>
+            </a:r>
+            <a:endParaRPr lang="en-US" sz="1400" dirty="0"/>
+          </a:p>
+        </p:txBody>
+      </p:sp>
+      <p:sp>
+        <p:nvSpPr>
+          <p:cNvPr id="17" name="Text 15"/>
+          <p:cNvSpPr txBox="1"/>
+          <p:nvPr/>
+        </p:nvSpPr>
+        <p:spPr>
+          <a:xfrm>
+            <a:off x="6940296" y="2286000"/>
+            <a:ext cx="1691640" cy="1097280"/>
+          </a:xfrm>
+          <a:prstGeom prst="rect">
+            <a:avLst/>
+          </a:prstGeom>
+          <a:noFill/>
+          <a:ln/>
+        </p:spPr>
+        <p:txBody>
+          <a:bodyPr wrap="square" lIns="0" tIns="0" rIns="0" bIns="0" rtlCol="0" anchor="t"/>
+          <a:lstStyle/>
+          <a:p>
+            <a:pPr algn="ctr" indent="0" marL="0">
+              <a:buNone/>
+            </a:pPr>
+            <a:r>
+              <a:rPr lang="en-US" sz="1500" b="1" dirty="0">
+                <a:solidFill>
+                  <a:schemeClr val="bg1"/>
+                </a:solidFill>
+              </a:rPr>
+              <a:t>Merged</a:t>
+            </a:r>
+            <a:endParaRPr lang="en-US" sz="1400" dirty="0"/>
+          </a:p>
+          <a:p>
+            <a:pPr algn="ctr" indent="0" marL="0">
+              <a:buNone/>
+            </a:pPr>
+            <a:r>
+              <a:rPr lang="en-US" sz="1200" dirty="0">
+                <a:solidFill>
+                  <a:schemeClr val="accent4"/>
+                </a:solidFill>
+              </a:rPr>
+              <a:t>Your piece is live</a:t>
+            </a:r>
+            <a:endParaRPr lang="en-US" sz="1400" dirty="0"/>
+          </a:p>
+        </p:txBody>
+      </p:sp>
+      <p:sp>
+        <p:nvSpPr>
+          <p:cNvPr id="18" name="Text 16"/>
+          <p:cNvSpPr txBox="1"/>
+          <p:nvPr/>
+        </p:nvSpPr>
+        <p:spPr>
+          <a:xfrm>
+            <a:off x="457200" y="3931920"/>
+            <a:ext cx="8229600" cy="548640"/>
+          </a:xfrm>
+          <a:prstGeom prst="rect">
+            <a:avLst/>
+          </a:prstGeom>
+          <a:noFill/>
+          <a:ln/>
+        </p:spPr>
+        <p:txBody>
+          <a:bodyPr wrap="square" lIns="0" tIns="0" rIns="0" bIns="0" rtlCol="0" anchor="t"/>
+          <a:lstStyle/>
+          <a:p>
+            <a:pPr indent="0" marL="0">
+              <a:buNone/>
+            </a:pPr>
+            <a:r>
+              <a:rPr lang="en-US" sz="1500" dirty="0">
+                <a:solidFill>
+                  <a:schemeClr val="accent2"/>
+                </a:solidFill>
+              </a:rPr>
+              <a:t>Changes go on the same pull request: open Code again (This computer, the project folder), and Claude picks up the comments.</a:t>
+            </a:r>
+            <a:endParaRPr lang="en-US" sz="1500" dirty="0"/>
+          </a:p>
+        </p:txBody>
+      </p:sp>
+      <p:sp>
+        <p:nvSpPr>
+          <p:cNvPr id="25" name="Slide Number Placeholder 0"/>
+          <p:cNvSpPr>
+            <a:spLocks noGrp="1"/>
+          </p:cNvSpPr>
+          <p:nvPr>
+            <p:ph type="sldNum" sz="quarter" idx="4294967295"/>
+          </p:nvPr>
+        </p:nvSpPr>
+        <p:spPr>
+          <a:xfrm>
+            <a:off x="8503920" y="4754880"/>
+            <a:ext cx="365760" cy="274320"/>
+          </a:xfrm>
+          <a:prstGeom prst="rect">
+            <a:avLst/>
+          </a:prstGeom>
+          <a:extLst>
+            <a:ext uri="{C572A759-6A51-4108-AA02-DFA0A04FC94B}">
+              <ma14:wrappingTextBoxFlag xmlns:ma14="http://schemas.microsoft.com/office/mac/drawingml/2011/main" val="0"/>
+            </a:ext>
+          </a:extLst>
+        </p:spPr>
+        <p:txBody>
+          <a:bodyPr/>
+          <a:lstStyle>
+            <a:lvl1pPr>
+              <a:defRPr sz="1000">
+                <a:solidFill>
+                  <a:schemeClr val="accent3"/>
+                </a:solidFill>
+              </a:defRPr>
+            </a:lvl1pPr>
+          </a:lstStyle>
+          <a:p>
+            <a:pPr algn="l"/>
+            <a:fld id="{F7021451-1387-4CA6-816F-3879F97B5CBC}" type="slidenum">
+              <a:rPr b="0" lang="en-US"/>
+              <a:t>21</a:t>
+            </a:fld>
+            <a:endParaRPr lang="en-US"/>
+          </a:p>
+        </p:txBody>
+      </p:sp>
+    </p:spTree>
+  </p:cSld>
+  <p:clrMapOvr>
+    <a:masterClrMapping/>
+  </p:clrMapOvr>
+</p:sld>
+</file>
+
+<file path=ppt/slides/slide22.xml><?xml version="1.0" encoding="utf-8"?>
+<p:sld xmlns:a="http://schemas.openxmlformats.org/drawingml/2006/main" xmlns:r="http://schemas.openxmlformats.org/officeDocument/2006/relationships" xmlns:p="http://schemas.openxmlformats.org/presentationml/2006/main">
+  <p:cSld name="Slide 22">
+    <p:spTree>
+      <p:nvGrpSpPr>
+        <p:cNvPr id="1" name=""/>
+        <p:cNvGrpSpPr/>
+        <p:nvPr/>
+      </p:nvGrpSpPr>
+      <p:grpSpPr>
+        <a:xfrm>
+          <a:off x="0" y="0"/>
+          <a:ext cx="0" cy="0"/>
+          <a:chOff x="0" y="0"/>
+          <a:chExt cx="0" cy="0"/>
+        </a:xfrm>
+      </p:grpSpPr>
+      <p:sp>
+        <p:nvSpPr>
+          <p:cNvPr id="2" name="Text 0"/>
+          <p:cNvSpPr/>
+          <p:nvPr>
+            <p:ph idx="100" type="title" hasCustomPrompt="1"/>
+          </p:nvPr>
+        </p:nvSpPr>
+        <p:spPr>
+          <a:xfrm>
             <a:off x="548640" y="1371600"/>
             <a:ext cx="4754880" cy="1463040"/>
           </a:xfrm>
@@ -8055,7 +8456,7 @@
                   <a:schemeClr val="accent4"/>
                 </a:solidFill>
               </a:rPr>
-              <a:t>Claude app → Code → Local → folder open-source-modular-furniture, then:</a:t>
+              <a:t>Claude app → Code → This computer → Choose… open-source-modular-furniture, then:</a:t>
             </a:r>
             <a:endParaRPr lang="en-US" sz="1600" dirty="0"/>
           </a:p>
@@ -11418,7 +11819,7 @@
                   <a:schemeClr val="tx1"/>
                 </a:solidFill>
               </a:rPr>
-              <a:t>Step 1: Code, then Local</a:t>
+              <a:t>Step 1: go to Code</a:t>
             </a:r>
             <a:endParaRPr lang="en-US" sz="2400" dirty="0"/>
           </a:p>
@@ -11464,7 +11865,7 @@
       </p:sp>
       <p:pic>
         <p:nvPicPr>
-          <p:cNvPr id="4" name="Step 1: Code, then Local" descr="small/app-code.jpg">    </p:cNvPr>
+          <p:cNvPr id="4" name="Step 1: go to Code" descr="small/app-code.jpg">    </p:cNvPr>
           <p:cNvPicPr>
             <a:picLocks noChangeAspect="1"/>
           </p:cNvPicPr>
@@ -11561,7 +11962,7 @@
                   <a:schemeClr val="tx1"/>
                 </a:solidFill>
               </a:rPr>
-              <a:t>Click Code, pick Local</a:t>
+              <a:t>Click Code</a:t>
             </a:r>
             <a:endParaRPr lang="en-US" sz="1400" dirty="0"/>
           </a:p>
@@ -11589,7 +11990,7 @@
                   <a:schemeClr val="accent2"/>
                 </a:solidFill>
               </a:rPr>
-              <a:t>In the sidebar, click Code. Under the message box, set the environment to Local: Claude then works on your computer, so the site opens in your own browser.</a:t>
+              <a:t>In the left sidebar, click Code. This is the part of the app that works on projects, not just chats.</a:t>
             </a:r>
             <a:endParaRPr lang="en-US" sz="1400" dirty="0"/>
           </a:p>

--- a/docs/contributing-guide.pptx
+++ b/docs/contributing-guide.pptx
@@ -128,7 +128,7 @@
   <p:extLst>
     <p:ext uri="{521415D9-36F7-43E2-AB2F-B90AF26B5E84}">
       <p14:sectionLst xmlns:p14="http://schemas.microsoft.com/office/powerpoint/2010/main">
-        <p14:section name="Why" id="{ea2ac870-da6c-b019-8c9a-a0223f988ffb}">
+        <p14:section name="Why" id="{e0a5b01c-7f92-5714-4e0b-71cf403bfd52}">
           <p14:sldIdLst>
             <p14:sldId id="256"/>
             <p14:sldId id="257"/>
@@ -138,7 +138,7 @@
             <p14:sldId id="261"/>
           </p14:sldIdLst>
         </p14:section>
-        <p14:section name="Get started" id="{4676ebc3-c221-ef88-e999-6a8a6d89adf2}">
+        <p14:section name="Get started" id="{a6761f0e-ac6a-1c19-0c27-3818c23e6db5}">
           <p14:sldIdLst>
             <p14:sldId id="262"/>
             <p14:sldId id="263"/>
@@ -150,7 +150,7 @@
             <p14:sldId id="269"/>
           </p14:sldIdLst>
         </p14:section>
-        <p14:section name="Work in rounds" id="{b3d14d97-93b1-a246-17aa-81f6910fb8b9}">
+        <p14:section name="Work in rounds" id="{ffd6f793-004e-f79f-e8f6-e5b86ddd3f2f}">
           <p14:sldIdLst>
             <p14:sldId id="270"/>
             <p14:sldId id="271"/>
@@ -159,13 +159,13 @@
             <p14:sldId id="274"/>
           </p14:sldIdLst>
         </p14:section>
-        <p14:section name="Send it" id="{29880790-9b18-aec9-6e2e-2742c0388a8a}">
+        <p14:section name="Send it" id="{814bbee0-66f3-3416-78f1-b8629e1cf07c}">
           <p14:sldIdLst>
             <p14:sldId id="275"/>
             <p14:sldId id="276"/>
           </p14:sldIdLst>
         </p14:section>
-        <p14:section name="Summary" id="{d398fd29-67d1-e880-ac1c-6589e0ceb1dc}">
+        <p14:section name="Summary" id="{d70ebda4-f930-0ced-984f-0f444947d891}">
           <p14:sldIdLst>
             <p14:sldId id="277"/>
           </p14:sldIdLst>
@@ -750,7 +750,7 @@
           <a:p>
             <a:r>
               <a:rPr lang="en-US" dirty="0"/>
-              <a:t>Illustration. Claude needs Git for this; if it is missing, Claude gives you the one link to install it.</a:t>
+              <a:t>Illustration of the folder picker. Any folder works; Documents is easy to find again.</a:t>
             </a:r>
             <a:endParaRPr lang="en-US" dirty="0"/>
           </a:p>
@@ -838,7 +838,7 @@
           <a:p>
             <a:r>
               <a:rPr lang="en-US" dirty="0"/>
-              <a:t>Illustration of the folder picker. Everything Claude needs (instructions, how to start the site) is inside this folder.</a:t>
+              <a:t>Illustration. "Clone" means download the project. Claude needs Git for it; if it is missing, Claude gives you the one link to install it. The project carries Claude's instructions, so as soon as it is downloaded Claude knows how to guide you.</a:t>
             </a:r>
             <a:endParaRPr lang="en-US" dirty="0"/>
           </a:p>
@@ -926,7 +926,7 @@
           <a:p>
             <a:r>
               <a:rPr lang="en-US" dirty="0"/>
-              <a:t>Simulated conversation; exact wording will vary. The instructions Claude follows live in the project itself (the contribute skill), so every session works the same way.</a:t>
+              <a:t>Simulated conversation; exact wording will vary. Next time, skip step 3: click Choose…, pick the open-source-modular-furniture folder in Documents and say "let's work on this".</a:t>
             </a:r>
             <a:endParaRPr lang="en-US" dirty="0"/>
           </a:p>
@@ -3225,7 +3225,7 @@
                   <a:schemeClr val="tx1"/>
                 </a:solidFill>
               </a:rPr>
-              <a:t>Then pick "This computer"</a:t>
+              <a:t>Step 2: pick "This computer"</a:t>
             </a:r>
             <a:endParaRPr lang="en-US" sz="2400" dirty="0"/>
           </a:p>
@@ -3294,7 +3294,7 @@
                   <a:schemeClr val="bg1"/>
                 </a:solidFill>
               </a:rPr>
-              <a:t>1</a:t>
+              <a:t>2</a:t>
             </a:r>
             <a:endParaRPr lang="en-US" sz="1400" dirty="0"/>
           </a:p>
@@ -3536,7 +3536,7 @@
                   <a:schemeClr val="tx1"/>
                 </a:solidFill>
               </a:rPr>
-              <a:t>First time only: get the project</a:t>
+              <a:t>Then Choose… your Documents</a:t>
             </a:r>
             <a:endParaRPr lang="en-US" sz="2400" dirty="0"/>
           </a:p>
@@ -3582,7 +3582,7 @@
       </p:sp>
       <p:pic>
         <p:nvPicPr>
-          <p:cNvPr id="4" name="First time only: get the project" descr="small/app-first.jpg">    </p:cNvPr>
+          <p:cNvPr id="4" name="Then Choose… your Documents" descr="small/app-folder.jpg">    </p:cNvPr>
           <p:cNvPicPr>
             <a:picLocks noChangeAspect="1"/>
           </p:cNvPicPr>
@@ -3643,7 +3643,7 @@
                   <a:schemeClr val="bg1"/>
                 </a:solidFill>
               </a:rPr>
-              <a:t>1×</a:t>
+              <a:t>2</a:t>
             </a:r>
             <a:endParaRPr lang="en-US" sz="1400" dirty="0"/>
           </a:p>
@@ -3679,7 +3679,7 @@
                   <a:schemeClr val="tx1"/>
                 </a:solidFill>
               </a:rPr>
-              <a:t>Claude downloads it</a:t>
+              <a:t>Pick Documents</a:t>
             </a:r>
             <a:endParaRPr lang="en-US" sz="1400" dirty="0"/>
           </a:p>
@@ -3707,7 +3707,7 @@
                   <a:schemeClr val="accent2"/>
                 </a:solidFill>
               </a:rPr>
-              <a:t>Click Choose…, pick your Documents folder and ask Claude to download the project. Do this once; afterwards the project lives in Documents.</a:t>
+              <a:t>Click Choose… (next to This computer) and pick your Documents folder. Claude will put the project there.</a:t>
             </a:r>
             <a:endParaRPr lang="en-US" sz="1400" dirty="0"/>
           </a:p>
@@ -3815,7 +3815,7 @@
                   <a:schemeClr val="tx1"/>
                 </a:solidFill>
               </a:rPr>
-              <a:t>Step 2: choose the project folder</a:t>
+              <a:t>Step 3: tell Claude the project</a:t>
             </a:r>
             <a:endParaRPr lang="en-US" sz="2400" dirty="0"/>
           </a:p>
@@ -3861,7 +3861,7 @@
       </p:sp>
       <p:pic>
         <p:nvPicPr>
-          <p:cNvPr id="4" name="Step 2: choose the project folder" descr="small/app-folder.jpg">    </p:cNvPr>
+          <p:cNvPr id="4" name="Step 3: tell Claude the project" descr="small/app-first.jpg">    </p:cNvPr>
           <p:cNvPicPr>
             <a:picLocks noChangeAspect="1"/>
           </p:cNvPicPr>
@@ -3922,7 +3922,7 @@
                   <a:schemeClr val="bg1"/>
                 </a:solidFill>
               </a:rPr>
-              <a:t>2</a:t>
+              <a:t>3</a:t>
             </a:r>
             <a:endParaRPr lang="en-US" sz="1400" dirty="0"/>
           </a:p>
@@ -3958,7 +3958,7 @@
                   <a:schemeClr val="tx1"/>
                 </a:solidFill>
               </a:rPr>
-              <a:t>Pick the folder</a:t>
+              <a:t>Paste this</a:t>
             </a:r>
             <a:endParaRPr lang="en-US" sz="1400" dirty="0"/>
           </a:p>
@@ -3986,7 +3986,7 @@
                   <a:schemeClr val="accent2"/>
                 </a:solidFill>
               </a:rPr>
-              <a:t>Click Choose… (next to This computer) and pick open-source-modular-furniture in your Documents. Do this at the start of every session.</a:t>
+              <a:t>"I want to work on this repository https://github.com/mfprado/open-source-modular-furniture. Clone it and let's start working there."</a:t>
             </a:r>
             <a:endParaRPr lang="en-US" sz="1400" dirty="0"/>
           </a:p>
@@ -4094,7 +4094,7 @@
                   <a:schemeClr val="tx1"/>
                 </a:solidFill>
               </a:rPr>
-              <a:t>Step 3: say "let's work on this"</a:t>
+              <a:t>Step 4: Claude takes it from there</a:t>
             </a:r>
             <a:endParaRPr lang="en-US" sz="2400" dirty="0"/>
           </a:p>
@@ -4140,7 +4140,7 @@
       </p:sp>
       <p:pic>
         <p:nvPicPr>
-          <p:cNvPr id="4" name="Simulated first conversation" descr="small/sim-start.jpg">    </p:cNvPr>
+          <p:cNvPr id="4" name="Simulated start of the work" descr="small/sim-start.jpg">    </p:cNvPr>
           <p:cNvPicPr>
             <a:picLocks noChangeAspect="1"/>
           </p:cNvPicPr>
@@ -4155,7 +4155,7 @@
         <p:spPr>
           <a:xfrm>
             <a:off x="457200" y="1051560"/>
-            <a:ext cx="5394960" cy="3117516"/>
+            <a:ext cx="5394960" cy="2069353"/>
           </a:xfrm>
           <a:prstGeom prst="rect">
             <a:avLst/>
@@ -8456,7 +8456,7 @@
                   <a:schemeClr val="accent4"/>
                 </a:solidFill>
               </a:rPr>
-              <a:t>Claude app → Code → This computer → Choose… open-source-modular-furniture, then:</a:t>
+              <a:t>Claude app → Code → This computer → Choose… (Documents the first time, then the project folder):</a:t>
             </a:r>
             <a:endParaRPr lang="en-US" sz="1600" dirty="0"/>
           </a:p>
@@ -8470,12 +8470,12 @@
         </p:nvSpPr>
         <p:spPr>
           <a:xfrm>
-            <a:off x="5394960" y="1097280"/>
-            <a:ext cx="3383280" cy="777240"/>
+            <a:off x="5394960" y="822960"/>
+            <a:ext cx="3383280" cy="1005840"/>
           </a:xfrm>
           <a:prstGeom prst="roundRect">
             <a:avLst>
-              <a:gd name="adj" fmla="val 9412"/>
+              <a:gd name="adj" fmla="val 7273"/>
             </a:avLst>
           </a:prstGeom>
           <a:solidFill>
@@ -8497,8 +8497,8 @@
         </p:nvSpPr>
         <p:spPr>
           <a:xfrm>
-            <a:off x="5577840" y="1097280"/>
-            <a:ext cx="3017520" cy="777240"/>
+            <a:off x="5577840" y="822960"/>
+            <a:ext cx="3017520" cy="1005840"/>
           </a:xfrm>
           <a:prstGeom prst="rect">
             <a:avLst/>
@@ -8514,7 +8514,7 @@
               <a:buNone/>
             </a:pPr>
             <a:r>
-              <a:rPr lang="en-US" sz="1400" dirty="0">
+              <a:rPr lang="en-US" sz="1200" dirty="0">
                 <a:solidFill>
                   <a:schemeClr val="bg1"/>
                 </a:solidFill>
@@ -8522,9 +8522,9 @@
                 <a:ea typeface="Courier New" pitchFamily="34" charset="-122"/>
                 <a:cs typeface="Courier New" pitchFamily="34" charset="-120"/>
               </a:rPr>
-              <a:t>"let's work on this"</a:t>
-            </a:r>
-            <a:endParaRPr lang="en-US" sz="1400" dirty="0"/>
+              <a:t>"I want to work on github.com/mfprado/open-source-modular-furniture. Clone it and let's start"</a:t>
+            </a:r>
+            <a:endParaRPr lang="en-US" sz="1200" dirty="0"/>
           </a:p>
         </p:txBody>
       </p:sp>
@@ -8536,12 +8536,12 @@
         </p:nvSpPr>
         <p:spPr>
           <a:xfrm>
-            <a:off x="5394960" y="2103120"/>
-            <a:ext cx="3383280" cy="777240"/>
+            <a:off x="5394960" y="2011680"/>
+            <a:ext cx="3383280" cy="1005840"/>
           </a:xfrm>
           <a:prstGeom prst="roundRect">
             <a:avLst>
-              <a:gd name="adj" fmla="val 9412"/>
+              <a:gd name="adj" fmla="val 7273"/>
             </a:avLst>
           </a:prstGeom>
           <a:solidFill>
@@ -8563,8 +8563,8 @@
         </p:nvSpPr>
         <p:spPr>
           <a:xfrm>
-            <a:off x="5577840" y="2103120"/>
-            <a:ext cx="3017520" cy="777240"/>
+            <a:off x="5577840" y="2011680"/>
+            <a:ext cx="3017520" cy="1005840"/>
           </a:xfrm>
           <a:prstGeom prst="rect">
             <a:avLst/>
@@ -8580,7 +8580,7 @@
               <a:buNone/>
             </a:pPr>
             <a:r>
-              <a:rPr lang="en-US" sz="1400" dirty="0">
+              <a:rPr lang="en-US" sz="1200" dirty="0">
                 <a:solidFill>
                   <a:schemeClr val="bg1"/>
                 </a:solidFill>
@@ -8588,9 +8588,9 @@
                 <a:ea typeface="Courier New" pitchFamily="34" charset="-122"/>
                 <a:cs typeface="Courier New" pitchFamily="34" charset="-120"/>
               </a:rPr>
-              <a:t>"I'm happy, let's send it"</a:t>
-            </a:r>
-            <a:endParaRPr lang="en-US" sz="1400" dirty="0"/>
+              <a:t>"let's work on this" (next times)</a:t>
+            </a:r>
+            <a:endParaRPr lang="en-US" sz="1200" dirty="0"/>
           </a:p>
         </p:txBody>
       </p:sp>
@@ -8602,12 +8602,12 @@
         </p:nvSpPr>
         <p:spPr>
           <a:xfrm>
-            <a:off x="5394960" y="3108960"/>
-            <a:ext cx="3383280" cy="777240"/>
+            <a:off x="5394960" y="3200400"/>
+            <a:ext cx="3383280" cy="1005840"/>
           </a:xfrm>
           <a:prstGeom prst="roundRect">
             <a:avLst>
-              <a:gd name="adj" fmla="val 9412"/>
+              <a:gd name="adj" fmla="val 7273"/>
             </a:avLst>
           </a:prstGeom>
           <a:solidFill>
@@ -8629,8 +8629,8 @@
         </p:nvSpPr>
         <p:spPr>
           <a:xfrm>
-            <a:off x="5577840" y="3108960"/>
-            <a:ext cx="3017520" cy="777240"/>
+            <a:off x="5577840" y="3200400"/>
+            <a:ext cx="3017520" cy="1005840"/>
           </a:xfrm>
           <a:prstGeom prst="rect">
             <a:avLst/>
@@ -8646,7 +8646,7 @@
               <a:buNone/>
             </a:pPr>
             <a:r>
-              <a:rPr lang="en-US" sz="1400" dirty="0">
+              <a:rPr lang="en-US" sz="1200" dirty="0">
                 <a:solidFill>
                   <a:schemeClr val="bg1"/>
                 </a:solidFill>
@@ -8654,9 +8654,9 @@
                 <a:ea typeface="Courier New" pitchFamily="34" charset="-122"/>
                 <a:cs typeface="Courier New" pitchFamily="34" charset="-120"/>
               </a:rPr>
-              <a:t>"let's work on the review comments"</a:t>
-            </a:r>
-            <a:endParaRPr lang="en-US" sz="1400" dirty="0"/>
+              <a:t>"I'm happy, let's send it"</a:t>
+            </a:r>
+            <a:endParaRPr lang="en-US" sz="1200" dirty="0"/>
           </a:p>
         </p:txBody>
       </p:sp>

--- a/docs/contributing-guide.pptx
+++ b/docs/contributing-guide.pptx
@@ -6,9 +6,7 @@
   </p:sldMasterIdLst>
   <p:sldIdLst>
     <p:sldId id="256" r:id="rId2"/>
-    <p:sldId id="257" r:id="rId3"/>
     <p:sldId id="258" r:id="rId4"/>
-    <p:sldId id="259" r:id="rId5"/>
     <p:sldId id="260" r:id="rId6"/>
     <p:sldId id="261" r:id="rId7"/>
     <p:sldId id="262" r:id="rId8"/>
@@ -1364,7 +1362,7 @@
           <a:p>
             <a:r>
               <a:rPr lang="en-US" dirty="0"/>
-              <a:t>Claude reads this list out one item at a time and waits for your answer.</a:t>
+              <a:t>Claude is prepared to guide you through all of these checks: it reads the list out one item at a time and waits for your answer.</a:t>
             </a:r>
             <a:endParaRPr lang="en-US" dirty="0"/>
           </a:p>
@@ -1494,94 +1492,6 @@
 </p:notes>
 </file>
 
-<file path=ppt/notesSlides/notesSlide2.xml><?xml version="1.0" encoding="utf-8"?>
-<p:notes xmlns:a="http://schemas.openxmlformats.org/drawingml/2006/main" xmlns:r="http://schemas.openxmlformats.org/officeDocument/2006/relationships" xmlns:p="http://schemas.openxmlformats.org/presentationml/2006/main">
-  <p:cSld>
-    <p:spTree>
-      <p:nvGrpSpPr>
-        <p:cNvPr id="1" name=""/>
-        <p:cNvGrpSpPr/>
-        <p:nvPr/>
-      </p:nvGrpSpPr>
-      <p:grpSpPr>
-        <a:xfrm>
-          <a:off x="0" y="0"/>
-          <a:ext cx="0" cy="0"/>
-          <a:chOff x="0" y="0"/>
-          <a:chExt cx="0" cy="0"/>
-        </a:xfrm>
-      </p:grpSpPr>
-      <p:sp>
-        <p:nvSpPr>
-          <p:cNvPr id="2" name="Slide Image Placeholder 1"/>
-          <p:cNvSpPr>
-            <a:spLocks noGrp="1" noRot="1" noChangeAspect="1"/>
-          </p:cNvSpPr>
-          <p:nvPr>
-            <p:ph type="sldImg"/>
-          </p:nvPr>
-        </p:nvSpPr>
-        <p:spPr/>
-      </p:sp>
-      <p:sp>
-        <p:nvSpPr>
-          <p:cNvPr id="3" name="Notes Placeholder 2"/>
-          <p:cNvSpPr>
-            <a:spLocks noGrp="1"/>
-          </p:cNvSpPr>
-          <p:nvPr>
-            <p:ph type="body" idx="1"/>
-          </p:nvPr>
-        </p:nvSpPr>
-        <p:spPr/>
-        <p:txBody>
-          <a:bodyPr/>
-          <a:lstStyle/>
-          <a:p>
-            <a:r>
-              <a:rPr lang="en-US" dirty="0"/>
-              <a:t>Live at mfprado.github.io/open-source-modular-furniture. A contribution adds a new page to the top menu, or improves one of these.</a:t>
-            </a:r>
-            <a:endParaRPr lang="en-US" dirty="0"/>
-          </a:p>
-        </p:txBody>
-      </p:sp>
-      <p:sp>
-        <p:nvSpPr>
-          <p:cNvPr id="4" name="Slide Number Placeholder 3"/>
-          <p:cNvSpPr>
-            <a:spLocks noGrp="1"/>
-          </p:cNvSpPr>
-          <p:nvPr>
-            <p:ph type="sldNum" sz="quarter" idx="10"/>
-          </p:nvPr>
-        </p:nvSpPr>
-        <p:spPr/>
-        <p:txBody>
-          <a:bodyPr/>
-          <a:lstStyle/>
-          <a:p>
-            <a:fld id="{F7021451-1387-4CA6-816F-3879F97B5CBC}" type="slidenum">
-              <a:rPr lang="en-US"/>
-              <a:t>2</a:t>
-            </a:fld>
-            <a:endParaRPr lang="en-US"/>
-          </a:p>
-        </p:txBody>
-      </p:sp>
-    </p:spTree>
-    <p:extLst>
-      <p:ext uri="{BB962C8B-B14F-4D97-AF65-F5344CB8AC3E}">
-        <p14:creationId xmlns:p14="http://schemas.microsoft.com/office/powerpoint/2010/main" val="1024086991"/>
-      </p:ext>
-    </p:extLst>
-  </p:cSld>
-  <p:clrMapOvr>
-    <a:masterClrMapping/>
-  </p:clrMapOvr>
-</p:notes>
-</file>
-
 <file path=ppt/notesSlides/notesSlide20.xml><?xml version="1.0" encoding="utf-8"?>
 <p:notes xmlns:a="http://schemas.openxmlformats.org/drawingml/2006/main" xmlns:r="http://schemas.openxmlformats.org/officeDocument/2006/relationships" xmlns:p="http://schemas.openxmlformats.org/presentationml/2006/main">
   <p:cSld>
@@ -1628,7 +1538,7 @@
           <a:p>
             <a:r>
               <a:rPr lang="en-US" dirty="0"/>
-              <a:t>Real pull request 10 as the owner sees it on GitHub: what it adds, the idea it closes (#4), the design brief, parts and sources. Merging it closes the idea issue, and the card leaves the Ideas board because the piece now has its own page.</a:t>
+              <a:t>Real pull request 10 as a reviewer sees it on GitHub: what it adds, the idea it closes (#4), the design brief, parts and sources. Merging it closes the idea issue, and the card leaves the Ideas board because the piece now has its own page.</a:t>
             </a:r>
             <a:endParaRPr lang="en-US" dirty="0"/>
           </a:p>
@@ -1804,7 +1714,7 @@
           <a:p>
             <a:r>
               <a:rPr lang="en-US" dirty="0"/>
-              <a:t>The whole process is a loop: see, try, improve by talking, and only when you are happy is the change sent to the owner.</a:t>
+              <a:t>The whole process is a loop: see, try, improve by talking, and only when you are happy is the change sent to the approved reviewers.</a:t>
             </a:r>
             <a:endParaRPr lang="en-US" dirty="0"/>
           </a:p>
@@ -1828,94 +1738,6 @@
             <a:fld id="{F7021451-1387-4CA6-816F-3879F97B5CBC}" type="slidenum">
               <a:rPr lang="en-US"/>
               <a:t>3</a:t>
-            </a:fld>
-            <a:endParaRPr lang="en-US"/>
-          </a:p>
-        </p:txBody>
-      </p:sp>
-    </p:spTree>
-    <p:extLst>
-      <p:ext uri="{BB962C8B-B14F-4D97-AF65-F5344CB8AC3E}">
-        <p14:creationId xmlns:p14="http://schemas.microsoft.com/office/powerpoint/2010/main" val="1024086991"/>
-      </p:ext>
-    </p:extLst>
-  </p:cSld>
-  <p:clrMapOvr>
-    <a:masterClrMapping/>
-  </p:clrMapOvr>
-</p:notes>
-</file>
-
-<file path=ppt/notesSlides/notesSlide4.xml><?xml version="1.0" encoding="utf-8"?>
-<p:notes xmlns:a="http://schemas.openxmlformats.org/drawingml/2006/main" xmlns:r="http://schemas.openxmlformats.org/officeDocument/2006/relationships" xmlns:p="http://schemas.openxmlformats.org/presentationml/2006/main">
-  <p:cSld>
-    <p:spTree>
-      <p:nvGrpSpPr>
-        <p:cNvPr id="1" name=""/>
-        <p:cNvGrpSpPr/>
-        <p:nvPr/>
-      </p:nvGrpSpPr>
-      <p:grpSpPr>
-        <a:xfrm>
-          <a:off x="0" y="0"/>
-          <a:ext cx="0" cy="0"/>
-          <a:chOff x="0" y="0"/>
-          <a:chExt cx="0" cy="0"/>
-        </a:xfrm>
-      </p:grpSpPr>
-      <p:sp>
-        <p:nvSpPr>
-          <p:cNvPr id="2" name="Slide Image Placeholder 1"/>
-          <p:cNvSpPr>
-            <a:spLocks noGrp="1" noRot="1" noChangeAspect="1"/>
-          </p:cNvSpPr>
-          <p:nvPr>
-            <p:ph type="sldImg"/>
-          </p:nvPr>
-        </p:nvSpPr>
-        <p:spPr/>
-      </p:sp>
-      <p:sp>
-        <p:nvSpPr>
-          <p:cNvPr id="3" name="Notes Placeholder 2"/>
-          <p:cNvSpPr>
-            <a:spLocks noGrp="1"/>
-          </p:cNvSpPr>
-          <p:nvPr>
-            <p:ph type="body" idx="1"/>
-          </p:nvPr>
-        </p:nvSpPr>
-        <p:spPr/>
-        <p:txBody>
-          <a:bodyPr/>
-          <a:lstStyle/>
-          <a:p>
-            <a:r>
-              <a:rPr lang="en-US" dirty="0"/>
-              <a:t>No terminal, no code editor. Everything happens in a chat in the Claude desktop app.</a:t>
-            </a:r>
-            <a:endParaRPr lang="en-US" dirty="0"/>
-          </a:p>
-        </p:txBody>
-      </p:sp>
-      <p:sp>
-        <p:nvSpPr>
-          <p:cNvPr id="4" name="Slide Number Placeholder 3"/>
-          <p:cNvSpPr>
-            <a:spLocks noGrp="1"/>
-          </p:cNvSpPr>
-          <p:nvPr>
-            <p:ph type="sldNum" sz="quarter" idx="10"/>
-          </p:nvPr>
-        </p:nvSpPr>
-        <p:spPr/>
-        <p:txBody>
-          <a:bodyPr/>
-          <a:lstStyle/>
-          <a:p>
-            <a:fld id="{F7021451-1387-4CA6-816F-3879F97B5CBC}" type="slidenum">
-              <a:rPr lang="en-US"/>
-              <a:t>4</a:t>
             </a:fld>
             <a:endParaRPr lang="en-US"/>
           </a:p>
@@ -4219,7 +4041,7 @@
                   <a:schemeClr val="accent2"/>
                 </a:solidFill>
               </a:rPr>
-              <a:t>Production: everyone sees it. It only changes after the owner approves.</a:t>
+              <a:t>Production: everyone sees it. It only changes after approved reviewers approve it.</a:t>
             </a:r>
             <a:endParaRPr lang="en-US" sz="1300" dirty="0"/>
           </a:p>
@@ -6459,6 +6281,20 @@
                   <a:schemeClr val="tx1"/>
                 </a:solidFill>
               </a:rPr>
+              <a:t>Claude is prepared to guide you through every check.</a:t>
+            </a:r>
+            <a:endParaRPr lang="en-US" sz="1300" dirty="0"/>
+          </a:p>
+          <a:p>
+            <a:pPr indent="0" marL="0">
+              <a:buNone/>
+            </a:pPr>
+            <a:r>
+              <a:rPr lang="en-US" sz="1300" b="1" dirty="0">
+                <a:solidFill>
+                  <a:schemeClr val="tx1"/>
+                </a:solidFill>
+              </a:rPr>
               <a:t>Found something odd? </a:t>
             </a:r>
             <a:pPr indent="0" marL="0">
@@ -6484,7 +6320,7 @@
                   <a:schemeClr val="accent2"/>
                 </a:solidFill>
               </a:rPr>
-              <a:t>Then Claude runs its own checks and takes the screenshots for the owner.</a:t>
+              <a:t>Then Claude runs its own checks and takes the screenshots for the approved reviewers.</a:t>
             </a:r>
             <a:endParaRPr lang="en-US" sz="1300" dirty="0"/>
           </a:p>
@@ -6492,7 +6328,7 @@
       </p:sp>
       <p:pic>
         <p:nvPicPr>
-          <p:cNvPr id="21" name="Brick bench with the bricks hidden and the sag warning" descr="small/bb-frame.jpg">    </p:cNvPr>
+          <p:cNvPr id="21" name="Brick bench with the bricks hidden and the sag warning" descr="Claude guiding a check beside the local Brick bench site">    </p:cNvPr>
           <p:cNvPicPr>
             <a:picLocks noChangeAspect="1"/>
           </p:cNvPicPr>
@@ -6506,8 +6342,8 @@
         </p:blipFill>
         <p:spPr>
           <a:xfrm>
-            <a:off x="5760720" y="1097280"/>
-            <a:ext cx="2926080" cy="1672046"/>
+            <a:off x="5577840" y="1097280"/>
+            <a:ext cx="3291840" cy="1958645"/>
           </a:xfrm>
           <a:prstGeom prst="rect">
             <a:avLst/>
@@ -6529,8 +6365,8 @@
         </p:nvSpPr>
         <p:spPr>
           <a:xfrm>
-            <a:off x="5760720" y="2880360"/>
-            <a:ext cx="2926080" cy="457200"/>
+            <a:off x="5577840" y="3147365"/>
+            <a:ext cx="3291840" cy="457200"/>
           </a:xfrm>
           <a:prstGeom prst="rect">
             <a:avLst/>
@@ -6551,7 +6387,7 @@
                   <a:schemeClr val="accent2"/>
                 </a:solidFill>
               </a:rPr>
-              <a:t>Real example: the Brick bench with Bricks in 3D hidden, and its sag warning</a:t>
+              <a:t>Real example: Claude walks you through each check and waits for your answer</a:t>
             </a:r>
             <a:endParaRPr lang="en-US" sz="1100" dirty="0"/>
           </a:p>
@@ -6737,7 +6573,7 @@
                   <a:schemeClr val="tx1"/>
                 </a:solidFill>
               </a:rPr>
-              <a:t>It holds the change, a description of it, and evidence of the proposed new version: screenshots and notes. The owner reviews it, and only once they approve does it reach the real site.</a:t>
+              <a:t>It holds the change, a description of it, and evidence of the proposed new version: screenshots and notes. The approved reviewers check it, and only once they approve does it reach the real site.</a:t>
             </a:r>
             <a:endParaRPr lang="en-US" sz="1300" dirty="0"/>
           </a:p>
@@ -6893,284 +6729,6 @@
             <a:fld id="{F7021451-1387-4CA6-816F-3879F97B5CBC}" type="slidenum">
               <a:rPr b="0" lang="en-US"/>
               <a:t>19</a:t>
-            </a:fld>
-            <a:endParaRPr lang="en-US"/>
-          </a:p>
-        </p:txBody>
-      </p:sp>
-    </p:spTree>
-  </p:cSld>
-  <p:clrMapOvr>
-    <a:masterClrMapping/>
-  </p:clrMapOvr>
-</p:sld>
-</file>
-
-<file path=ppt/slides/slide2.xml><?xml version="1.0" encoding="utf-8"?>
-<p:sld xmlns:a="http://schemas.openxmlformats.org/drawingml/2006/main" xmlns:r="http://schemas.openxmlformats.org/officeDocument/2006/relationships" xmlns:p="http://schemas.openxmlformats.org/presentationml/2006/main">
-  <p:cSld name="Slide 2">
-    <p:spTree>
-      <p:nvGrpSpPr>
-        <p:cNvPr id="1" name=""/>
-        <p:cNvGrpSpPr/>
-        <p:nvPr/>
-      </p:nvGrpSpPr>
-      <p:grpSpPr>
-        <a:xfrm>
-          <a:off x="0" y="0"/>
-          <a:ext cx="0" cy="0"/>
-          <a:chOff x="0" y="0"/>
-          <a:chExt cx="0" cy="0"/>
-        </a:xfrm>
-      </p:grpSpPr>
-      <p:sp>
-        <p:nvSpPr>
-          <p:cNvPr id="2" name="Text 2"/>
-          <p:cNvSpPr/>
-          <p:nvPr>
-            <p:ph idx="103" type="title" hasCustomPrompt="1"/>
-          </p:nvPr>
-        </p:nvSpPr>
-        <p:spPr>
-          <a:xfrm>
-            <a:off x="457200" y="502920"/>
-            <a:ext cx="8229600" cy="457200"/>
-          </a:xfrm>
-          <a:prstGeom prst="rect">
-            <a:avLst/>
-          </a:prstGeom>
-          <a:noFill/>
-          <a:ln/>
-        </p:spPr>
-        <p:txBody>
-          <a:bodyPr wrap="square" lIns="0" tIns="0" rIns="0" bIns="0" rtlCol="0" anchor="ctr"/>
-          <a:lstStyle/>
-          <a:p>
-            <a:pPr algn="l" indent="0" marL="0">
-              <a:buNone/>
-            </a:pPr>
-            <a:r>
-              <a:rPr lang="en-US" sz="2000" b="1" spc="200" kern="0" dirty="0">
-                <a:solidFill>
-                  <a:schemeClr val="tx1"/>
-                </a:solidFill>
-              </a:rPr>
-              <a:t>LEGO FOR ADULTS, SIZED BY ANYONE</a:t>
-            </a:r>
-            <a:endParaRPr lang="en-US" sz="2000" dirty="0"/>
-          </a:p>
-        </p:txBody>
-      </p:sp>
-      <p:sp>
-        <p:nvSpPr>
-          <p:cNvPr id="3" name="Text 1"/>
-          <p:cNvSpPr txBox="1"/>
-          <p:nvPr/>
-        </p:nvSpPr>
-        <p:spPr>
-          <a:xfrm>
-            <a:off x="457200" y="960120"/>
-            <a:ext cx="8229600" cy="548640"/>
-          </a:xfrm>
-          <a:prstGeom prst="rect">
-            <a:avLst/>
-          </a:prstGeom>
-          <a:noFill/>
-          <a:ln/>
-        </p:spPr>
-        <p:txBody>
-          <a:bodyPr wrap="square" lIns="0" tIns="0" rIns="0" bIns="0" rtlCol="0" anchor="t"/>
-          <a:lstStyle/>
-          <a:p>
-            <a:pPr indent="0" marL="0">
-              <a:buNone/>
-            </a:pPr>
-            <a:r>
-              <a:rPr lang="en-US" sz="1500" dirty="0">
-                <a:solidFill>
-                  <a:schemeClr val="accent2"/>
-                </a:solidFill>
-              </a:rPr>
-              <a:t>Standard parts you can buy anywhere, snapped together into furniture people size themselves. Each piece is a page on the site, picked from the top menu: a configurator.</a:t>
-            </a:r>
-            <a:endParaRPr lang="en-US" sz="1500" dirty="0"/>
-          </a:p>
-        </p:txBody>
-      </p:sp>
-      <p:pic>
-        <p:nvPicPr>
-          <p:cNvPr id="4" name="Rod shelf page" descr="small/shelf.jpg">    </p:cNvPr>
-          <p:cNvPicPr>
-            <a:picLocks noChangeAspect="1"/>
-          </p:cNvPicPr>
-          <p:nvPr/>
-        </p:nvPicPr>
-        <p:blipFill>
-          <a:blip r:embed="rId1"/>
-          <a:stretch>
-            <a:fillRect/>
-          </a:stretch>
-        </p:blipFill>
-        <p:spPr>
-          <a:xfrm>
-            <a:off x="457200" y="1645920"/>
-            <a:ext cx="3977640" cy="2270871"/>
-          </a:xfrm>
-          <a:prstGeom prst="rect">
-            <a:avLst/>
-          </a:prstGeom>
-          <a:effectLst>
-            <a:outerShdw sx="100000" sy="100000" kx="0" ky="0" algn="bl" rotWithShape="0" blurRad="76200" dist="25400" dir="5400000">
-              <a:srgbClr val="000000">
-                <a:alpha val="18000"/>
-              </a:srgbClr>
-            </a:outerShdw>
-          </a:effectLst>
-        </p:spPr>
-      </p:pic>
-      <p:pic>
-        <p:nvPicPr>
-          <p:cNvPr id="5" name="Profile desk page" descr="small/desk.jpg">    </p:cNvPr>
-          <p:cNvPicPr>
-            <a:picLocks noChangeAspect="1"/>
-          </p:cNvPicPr>
-          <p:nvPr/>
-        </p:nvPicPr>
-        <p:blipFill>
-          <a:blip r:embed="rId2"/>
-          <a:stretch>
-            <a:fillRect/>
-          </a:stretch>
-        </p:blipFill>
-        <p:spPr>
-          <a:xfrm>
-            <a:off x="4709160" y="1645920"/>
-            <a:ext cx="3977640" cy="2270871"/>
-          </a:xfrm>
-          <a:prstGeom prst="rect">
-            <a:avLst/>
-          </a:prstGeom>
-          <a:effectLst>
-            <a:outerShdw sx="100000" sy="100000" kx="0" ky="0" algn="bl" rotWithShape="0" blurRad="76200" dist="25400" dir="5400000">
-              <a:srgbClr val="000000">
-                <a:alpha val="18000"/>
-              </a:srgbClr>
-            </a:outerShdw>
-          </a:effectLst>
-        </p:spPr>
-      </p:pic>
-      <p:sp>
-        <p:nvSpPr>
-          <p:cNvPr id="6" name="Text 2"/>
-          <p:cNvSpPr txBox="1"/>
-          <p:nvPr/>
-        </p:nvSpPr>
-        <p:spPr>
-          <a:xfrm>
-            <a:off x="457200" y="4114800"/>
-            <a:ext cx="3977640" cy="365760"/>
-          </a:xfrm>
-          <a:prstGeom prst="rect">
-            <a:avLst/>
-          </a:prstGeom>
-          <a:noFill/>
-          <a:ln/>
-        </p:spPr>
-        <p:txBody>
-          <a:bodyPr wrap="square" lIns="0" tIns="0" rIns="0" bIns="0" rtlCol="0" anchor="t"/>
-          <a:lstStyle/>
-          <a:p>
-            <a:pPr algn="ctr" indent="0" marL="0">
-              <a:buNone/>
-            </a:pPr>
-            <a:r>
-              <a:rPr lang="en-US" sz="1200" dirty="0">
-                <a:solidFill>
-                  <a:schemeClr val="accent2"/>
-                </a:solidFill>
-              </a:rPr>
-              <a:t>Rod shelf: chrome rods, cross clamps, acrylic or wood sheets</a:t>
-            </a:r>
-            <a:endParaRPr lang="en-US" sz="1200" dirty="0"/>
-          </a:p>
-        </p:txBody>
-      </p:sp>
-      <p:sp>
-        <p:nvSpPr>
-          <p:cNvPr id="7" name="Text 3"/>
-          <p:cNvSpPr txBox="1"/>
-          <p:nvPr/>
-        </p:nvSpPr>
-        <p:spPr>
-          <a:xfrm>
-            <a:off x="4709160" y="4114800"/>
-            <a:ext cx="3977640" cy="365760"/>
-          </a:xfrm>
-          <a:prstGeom prst="rect">
-            <a:avLst/>
-          </a:prstGeom>
-          <a:noFill/>
-          <a:ln/>
-        </p:spPr>
-        <p:txBody>
-          <a:bodyPr wrap="square" lIns="0" tIns="0" rIns="0" bIns="0" rtlCol="0" anchor="t"/>
-          <a:lstStyle/>
-          <a:p>
-            <a:pPr algn="ctr" indent="0" marL="0">
-              <a:buNone/>
-            </a:pPr>
-            <a:r>
-              <a:rPr lang="en-US" sz="1200" dirty="0">
-                <a:solidFill>
-                  <a:schemeClr val="accent2"/>
-                </a:solidFill>
-              </a:rPr>
-              <a:t>Profile desk: T-slot aluminium, brackets, plywood top</a:t>
-            </a:r>
-            <a:endParaRPr lang="en-US" sz="1200" dirty="0"/>
-          </a:p>
-        </p:txBody>
-      </p:sp>
-      <p:sp>
-        <p:nvSpPr>
-          <p:cNvPr id="25" name="Slide Number Placeholder 0"/>
-          <p:cNvSpPr>
-            <a:spLocks noGrp="1"/>
-          </p:cNvSpPr>
-          <p:nvPr>
-            <p:ph type="sldNum" sz="quarter" idx="4294967295"/>
-          </p:nvPr>
-        </p:nvSpPr>
-        <p:spPr>
-          <a:xfrm>
-            <a:off x="8503920" y="4754880"/>
-            <a:ext cx="365760" cy="274320"/>
-          </a:xfrm>
-          <a:prstGeom prst="rect">
-            <a:avLst/>
-          </a:prstGeom>
-          <a:extLst>
-            <a:ext uri="{C572A759-6A51-4108-AA02-DFA0A04FC94B}">
-              <ma14:wrappingTextBoxFlag xmlns:ma14="http://schemas.microsoft.com/office/mac/drawingml/2011/main" val="0"/>
-            </a:ext>
-          </a:extLst>
-        </p:spPr>
-        <p:txBody>
-          <a:bodyPr/>
-          <a:lstStyle>
-            <a:lvl1pPr>
-              <a:defRPr sz="1000">
-                <a:solidFill>
-                  <a:schemeClr val="accent3"/>
-                </a:solidFill>
-              </a:defRPr>
-            </a:lvl1pPr>
-          </a:lstStyle>
-          <a:p>
-            <a:pPr algn="l"/>
-            <a:fld id="{F7021451-1387-4CA6-816F-3879F97B5CBC}" type="slidenum">
-              <a:rPr b="0" lang="en-US"/>
-              <a:t>2</a:t>
             </a:fld>
             <a:endParaRPr lang="en-US"/>
           </a:p>
@@ -7338,7 +6896,7 @@
                   <a:schemeClr val="tx1"/>
                 </a:solidFill>
               </a:rPr>
-              <a:t>Owner reviews</a:t>
+              <a:t>Approved reviewers review</a:t>
             </a:r>
             <a:endParaRPr lang="en-US" sz="1400" dirty="0"/>
           </a:p>
@@ -8591,7 +8149,7 @@
                   <a:schemeClr val="accent4"/>
                 </a:solidFill>
               </a:rPr>
-              <a:t>When you're happy, Claude sends your change to the owner for review.</a:t>
+              <a:t>When you're happy, Claude sends your change for review.</a:t>
             </a:r>
             <a:endParaRPr lang="en-US" sz="1400" dirty="0"/>
           </a:p>
@@ -8736,464 +8294,6 @@
             <a:fld id="{F7021451-1387-4CA6-816F-3879F97B5CBC}" type="slidenum">
               <a:rPr b="0" lang="en-US"/>
               <a:t>3</a:t>
-            </a:fld>
-            <a:endParaRPr lang="en-US"/>
-          </a:p>
-        </p:txBody>
-      </p:sp>
-    </p:spTree>
-  </p:cSld>
-  <p:clrMapOvr>
-    <a:masterClrMapping/>
-  </p:clrMapOvr>
-</p:sld>
-</file>
-
-<file path=ppt/slides/slide4.xml><?xml version="1.0" encoding="utf-8"?>
-<p:sld xmlns:a="http://schemas.openxmlformats.org/drawingml/2006/main" xmlns:r="http://schemas.openxmlformats.org/officeDocument/2006/relationships" xmlns:p="http://schemas.openxmlformats.org/presentationml/2006/main">
-  <p:cSld name="Slide 4">
-    <p:spTree>
-      <p:nvGrpSpPr>
-        <p:cNvPr id="1" name=""/>
-        <p:cNvGrpSpPr/>
-        <p:nvPr/>
-      </p:nvGrpSpPr>
-      <p:grpSpPr>
-        <a:xfrm>
-          <a:off x="0" y="0"/>
-          <a:ext cx="0" cy="0"/>
-          <a:chOff x="0" y="0"/>
-          <a:chExt cx="0" cy="0"/>
-        </a:xfrm>
-      </p:grpSpPr>
-      <p:sp>
-        <p:nvSpPr>
-          <p:cNvPr id="2" name="Text 2"/>
-          <p:cNvSpPr/>
-          <p:nvPr>
-            <p:ph idx="103" type="title" hasCustomPrompt="1"/>
-          </p:nvPr>
-        </p:nvSpPr>
-        <p:spPr>
-          <a:xfrm>
-            <a:off x="457200" y="502920"/>
-            <a:ext cx="8229600" cy="457200"/>
-          </a:xfrm>
-          <a:prstGeom prst="rect">
-            <a:avLst/>
-          </a:prstGeom>
-          <a:noFill/>
-          <a:ln/>
-        </p:spPr>
-        <p:txBody>
-          <a:bodyPr wrap="square" lIns="0" tIns="0" rIns="0" bIns="0" rtlCol="0" anchor="ctr"/>
-          <a:lstStyle/>
-          <a:p>
-            <a:pPr algn="l" indent="0" marL="0">
-              <a:buNone/>
-            </a:pPr>
-            <a:r>
-              <a:rPr lang="en-US" sz="2000" b="1" spc="200" kern="0" dirty="0">
-                <a:solidFill>
-                  <a:schemeClr val="tx1"/>
-                </a:solidFill>
-              </a:rPr>
-              <a:t>YOU DESIGN, CLAUDE BUILDS</a:t>
-            </a:r>
-            <a:endParaRPr lang="en-US" sz="2000" dirty="0"/>
-          </a:p>
-        </p:txBody>
-      </p:sp>
-      <p:sp>
-        <p:nvSpPr>
-          <p:cNvPr id="3" name="Shape 1"/>
-          <p:cNvSpPr/>
-          <p:nvPr/>
-        </p:nvSpPr>
-        <p:spPr>
-          <a:xfrm>
-            <a:off x="457200" y="1097280"/>
-            <a:ext cx="3931920" cy="3200400"/>
-          </a:xfrm>
-          <a:prstGeom prst="roundRect">
-            <a:avLst>
-              <a:gd name="adj" fmla="val 1143"/>
-            </a:avLst>
-          </a:prstGeom>
-          <a:solidFill>
-            <a:schemeClr val="bg2"/>
-          </a:solidFill>
-          <a:ln w="9525">
-            <a:solidFill>
-              <a:schemeClr val="accent4"/>
-            </a:solidFill>
-            <a:prstDash val="solid"/>
-          </a:ln>
-        </p:spPr>
-      </p:sp>
-      <p:sp>
-        <p:nvSpPr>
-          <p:cNvPr id="4" name="Shape 2"/>
-          <p:cNvSpPr/>
-          <p:nvPr/>
-        </p:nvSpPr>
-        <p:spPr>
-          <a:xfrm>
-            <a:off x="4754880" y="1097280"/>
-            <a:ext cx="3931920" cy="3200400"/>
-          </a:xfrm>
-          <a:prstGeom prst="roundRect">
-            <a:avLst>
-              <a:gd name="adj" fmla="val 1143"/>
-            </a:avLst>
-          </a:prstGeom>
-          <a:solidFill>
-            <a:schemeClr val="tx2"/>
-          </a:solidFill>
-          <a:ln w="9525">
-            <a:solidFill>
-              <a:schemeClr val="tx2"/>
-            </a:solidFill>
-            <a:prstDash val="solid"/>
-          </a:ln>
-        </p:spPr>
-      </p:sp>
-      <p:sp>
-        <p:nvSpPr>
-          <p:cNvPr id="5" name="Text 3"/>
-          <p:cNvSpPr txBox="1"/>
-          <p:nvPr/>
-        </p:nvSpPr>
-        <p:spPr>
-          <a:xfrm>
-            <a:off x="731520" y="1280160"/>
-            <a:ext cx="3474720" cy="365760"/>
-          </a:xfrm>
-          <a:prstGeom prst="rect">
-            <a:avLst/>
-          </a:prstGeom>
-          <a:noFill/>
-          <a:ln/>
-        </p:spPr>
-        <p:txBody>
-          <a:bodyPr wrap="square" lIns="0" tIns="0" rIns="0" bIns="0" rtlCol="0" anchor="t"/>
-          <a:lstStyle/>
-          <a:p>
-            <a:pPr indent="0" marL="0">
-              <a:buNone/>
-            </a:pPr>
-            <a:r>
-              <a:rPr lang="en-US" sz="1800" b="1" dirty="0">
-                <a:solidFill>
-                  <a:schemeClr val="tx1"/>
-                </a:solidFill>
-              </a:rPr>
-              <a:t>You, the designer</a:t>
-            </a:r>
-            <a:endParaRPr lang="en-US" sz="1800" dirty="0"/>
-          </a:p>
-        </p:txBody>
-      </p:sp>
-      <p:sp>
-        <p:nvSpPr>
-          <p:cNvPr id="6" name="Text 4"/>
-          <p:cNvSpPr txBox="1"/>
-          <p:nvPr/>
-        </p:nvSpPr>
-        <p:spPr>
-          <a:xfrm>
-            <a:off x="731520" y="1783080"/>
-            <a:ext cx="3474720" cy="2377440"/>
-          </a:xfrm>
-          <a:prstGeom prst="rect">
-            <a:avLst/>
-          </a:prstGeom>
-          <a:noFill/>
-          <a:ln/>
-        </p:spPr>
-        <p:txBody>
-          <a:bodyPr wrap="square" lIns="0" tIns="0" rIns="0" bIns="0" rtlCol="0" anchor="t"/>
-          <a:lstStyle/>
-          <a:p>
-            <a:pPr marL="342900" indent="-342900">
-              <a:spcAft>
-                <a:spcPts val="800"/>
-              </a:spcAft>
-              <a:buSzPct val="100000"/>
-              <a:buChar char="•"/>
-            </a:pPr>
-            <a:r>
-              <a:rPr lang="en-US" sz="1400" dirty="0">
-                <a:solidFill>
-                  <a:schemeClr val="tx1"/>
-                </a:solidFill>
-              </a:rPr>
-              <a:t>What the piece is and how it looks</a:t>
-            </a:r>
-            <a:endParaRPr lang="en-US" sz="1400" dirty="0"/>
-          </a:p>
-          <a:p>
-            <a:pPr marL="342900" indent="-342900">
-              <a:spcAft>
-                <a:spcPts val="800"/>
-              </a:spcAft>
-              <a:buSzPct val="100000"/>
-              <a:buChar char="•"/>
-            </a:pPr>
-            <a:r>
-              <a:rPr lang="en-US" sz="1400" dirty="0">
-                <a:solidFill>
-                  <a:schemeClr val="tx1"/>
-                </a:solidFill>
-              </a:rPr>
-              <a:t>Which real parts to buy, and their sizes</a:t>
-            </a:r>
-            <a:endParaRPr lang="en-US" sz="1400" dirty="0"/>
-          </a:p>
-          <a:p>
-            <a:pPr marL="342900" indent="-342900">
-              <a:spcAft>
-                <a:spcPts val="800"/>
-              </a:spcAft>
-              <a:buSzPct val="100000"/>
-              <a:buChar char="•"/>
-            </a:pPr>
-            <a:r>
-              <a:rPr lang="en-US" sz="1400" dirty="0">
-                <a:solidFill>
-                  <a:schemeClr val="tx1"/>
-                </a:solidFill>
-              </a:rPr>
-              <a:t>How it goes together, step by step</a:t>
-            </a:r>
-            <a:endParaRPr lang="en-US" sz="1400" dirty="0"/>
-          </a:p>
-          <a:p>
-            <a:pPr marL="342900" indent="-342900">
-              <a:spcAft>
-                <a:spcPts val="800"/>
-              </a:spcAft>
-              <a:buSzPct val="100000"/>
-              <a:buChar char="•"/>
-            </a:pPr>
-            <a:r>
-              <a:rPr lang="en-US" sz="1400" dirty="0">
-                <a:solidFill>
-                  <a:schemeClr val="tx1"/>
-                </a:solidFill>
-              </a:rPr>
-              <a:t>What people can change, and the limits</a:t>
-            </a:r>
-            <a:endParaRPr lang="en-US" sz="1400" dirty="0"/>
-          </a:p>
-          <a:p>
-            <a:pPr marL="342900" indent="-342900">
-              <a:spcAft>
-                <a:spcPts val="800"/>
-              </a:spcAft>
-              <a:buSzPct val="100000"/>
-              <a:buChar char="•"/>
-            </a:pPr>
-            <a:r>
-              <a:rPr lang="en-US" sz="1400" dirty="0">
-                <a:solidFill>
-                  <a:schemeClr val="tx1"/>
-                </a:solidFill>
-              </a:rPr>
-              <a:t>Saying "yes, that looks right" or "move this"</a:t>
-            </a:r>
-            <a:endParaRPr lang="en-US" sz="1400" dirty="0"/>
-          </a:p>
-        </p:txBody>
-      </p:sp>
-      <p:sp>
-        <p:nvSpPr>
-          <p:cNvPr id="7" name="Text 5"/>
-          <p:cNvSpPr txBox="1"/>
-          <p:nvPr/>
-        </p:nvSpPr>
-        <p:spPr>
-          <a:xfrm>
-            <a:off x="5029200" y="1280160"/>
-            <a:ext cx="3474720" cy="365760"/>
-          </a:xfrm>
-          <a:prstGeom prst="rect">
-            <a:avLst/>
-          </a:prstGeom>
-          <a:noFill/>
-          <a:ln/>
-        </p:spPr>
-        <p:txBody>
-          <a:bodyPr wrap="square" lIns="0" tIns="0" rIns="0" bIns="0" rtlCol="0" anchor="t"/>
-          <a:lstStyle/>
-          <a:p>
-            <a:pPr indent="0" marL="0">
-              <a:buNone/>
-            </a:pPr>
-            <a:r>
-              <a:rPr lang="en-US" sz="1800" b="1" dirty="0">
-                <a:solidFill>
-                  <a:schemeClr val="bg1"/>
-                </a:solidFill>
-              </a:rPr>
-              <a:t>Claude, in the desktop app</a:t>
-            </a:r>
-            <a:endParaRPr lang="en-US" sz="1800" dirty="0"/>
-          </a:p>
-        </p:txBody>
-      </p:sp>
-      <p:sp>
-        <p:nvSpPr>
-          <p:cNvPr id="8" name="Text 6"/>
-          <p:cNvSpPr txBox="1"/>
-          <p:nvPr/>
-        </p:nvSpPr>
-        <p:spPr>
-          <a:xfrm>
-            <a:off x="5029200" y="1783080"/>
-            <a:ext cx="3474720" cy="2377440"/>
-          </a:xfrm>
-          <a:prstGeom prst="rect">
-            <a:avLst/>
-          </a:prstGeom>
-          <a:noFill/>
-          <a:ln/>
-        </p:spPr>
-        <p:txBody>
-          <a:bodyPr wrap="square" lIns="0" tIns="0" rIns="0" bIns="0" rtlCol="0" anchor="t"/>
-          <a:lstStyle/>
-          <a:p>
-            <a:pPr marL="342900" indent="-342900">
-              <a:spcAft>
-                <a:spcPts val="800"/>
-              </a:spcAft>
-              <a:buSzPct val="100000"/>
-              <a:buChar char="•"/>
-            </a:pPr>
-            <a:r>
-              <a:rPr lang="en-US" sz="1400" dirty="0">
-                <a:solidFill>
-                  <a:schemeClr val="bg1"/>
-                </a:solidFill>
-              </a:rPr>
-              <a:t>Runs the private copy of the site for you</a:t>
-            </a:r>
-            <a:endParaRPr lang="en-US" sz="1400" dirty="0"/>
-          </a:p>
-          <a:p>
-            <a:pPr marL="342900" indent="-342900">
-              <a:spcAft>
-                <a:spcPts val="800"/>
-              </a:spcAft>
-              <a:buSzPct val="100000"/>
-              <a:buChar char="•"/>
-            </a:pPr>
-            <a:r>
-              <a:rPr lang="en-US" sz="1400" dirty="0">
-                <a:solidFill>
-                  <a:schemeClr val="bg1"/>
-                </a:solidFill>
-              </a:rPr>
-              <a:t>Writes the code and the tests</a:t>
-            </a:r>
-            <a:endParaRPr lang="en-US" sz="1400" dirty="0"/>
-          </a:p>
-          <a:p>
-            <a:pPr marL="342900" indent="-342900">
-              <a:spcAft>
-                <a:spcPts val="800"/>
-              </a:spcAft>
-              <a:buSzPct val="100000"/>
-              <a:buChar char="•"/>
-            </a:pPr>
-            <a:r>
-              <a:rPr lang="en-US" sz="1400" dirty="0">
-                <a:solidFill>
-                  <a:schemeClr val="bg1"/>
-                </a:solidFill>
-              </a:rPr>
-              <a:t>Shows you what changed after every round</a:t>
-            </a:r>
-            <a:endParaRPr lang="en-US" sz="1400" dirty="0"/>
-          </a:p>
-          <a:p>
-            <a:pPr marL="342900" indent="-342900">
-              <a:spcAft>
-                <a:spcPts val="800"/>
-              </a:spcAft>
-              <a:buSzPct val="100000"/>
-              <a:buChar char="•"/>
-            </a:pPr>
-            <a:r>
-              <a:rPr lang="en-US" sz="1400" dirty="0">
-                <a:solidFill>
-                  <a:schemeClr val="bg1"/>
-                </a:solidFill>
-              </a:rPr>
-              <a:t>Saves versions as it goes</a:t>
-            </a:r>
-            <a:endParaRPr lang="en-US" sz="1400" dirty="0"/>
-          </a:p>
-          <a:p>
-            <a:pPr marL="342900" indent="-342900">
-              <a:spcAft>
-                <a:spcPts val="800"/>
-              </a:spcAft>
-              <a:buSzPct val="100000"/>
-              <a:buChar char="•"/>
-            </a:pPr>
-            <a:r>
-              <a:rPr lang="en-US" sz="1400" dirty="0">
-                <a:solidFill>
-                  <a:schemeClr val="bg1"/>
-                </a:solidFill>
-              </a:rPr>
-              <a:t>Sends your change for review</a:t>
-            </a:r>
-            <a:endParaRPr lang="en-US" sz="1400" dirty="0"/>
-          </a:p>
-        </p:txBody>
-      </p:sp>
-      <p:sp>
-        <p:nvSpPr>
-          <p:cNvPr id="25" name="Slide Number Placeholder 0"/>
-          <p:cNvSpPr>
-            <a:spLocks noGrp="1"/>
-          </p:cNvSpPr>
-          <p:nvPr>
-            <p:ph type="sldNum" sz="quarter" idx="4294967295"/>
-          </p:nvPr>
-        </p:nvSpPr>
-        <p:spPr>
-          <a:xfrm>
-            <a:off x="8503920" y="4754880"/>
-            <a:ext cx="365760" cy="274320"/>
-          </a:xfrm>
-          <a:prstGeom prst="rect">
-            <a:avLst/>
-          </a:prstGeom>
-          <a:extLst>
-            <a:ext uri="{C572A759-6A51-4108-AA02-DFA0A04FC94B}">
-              <ma14:wrappingTextBoxFlag xmlns:ma14="http://schemas.microsoft.com/office/mac/drawingml/2011/main" val="0"/>
-            </a:ext>
-          </a:extLst>
-        </p:spPr>
-        <p:txBody>
-          <a:bodyPr/>
-          <a:lstStyle>
-            <a:lvl1pPr>
-              <a:defRPr sz="1000">
-                <a:solidFill>
-                  <a:schemeClr val="accent3"/>
-                </a:solidFill>
-              </a:defRPr>
-            </a:lvl1pPr>
-          </a:lstStyle>
-          <a:p>
-            <a:pPr algn="l"/>
-            <a:fld id="{F7021451-1387-4CA6-816F-3879F97B5CBC}" type="slidenum">
-              <a:rPr b="0" lang="en-US"/>
-              <a:t>4</a:t>
             </a:fld>
             <a:endParaRPr lang="en-US"/>
           </a:p>
@@ -9733,8 +8833,8 @@
         </p:blipFill>
         <p:spPr>
           <a:xfrm>
-            <a:off x="457200" y="1051560"/>
-            <a:ext cx="5852160" cy="3323191"/>
+            <a:off x="457200" y="1216222"/>
+            <a:ext cx="5852160" cy="2993866"/>
           </a:xfrm>
           <a:prstGeom prst="rect">
             <a:avLst/>
@@ -10017,8 +9117,8 @@
         </p:blipFill>
         <p:spPr>
           <a:xfrm>
-            <a:off x="457200" y="1051560"/>
-            <a:ext cx="5852160" cy="3323191"/>
+            <a:off x="457200" y="1216222"/>
+            <a:ext cx="5852160" cy="2993866"/>
           </a:xfrm>
           <a:prstGeom prst="rect">
             <a:avLst/>
@@ -10128,7 +9228,7 @@
                   <a:schemeClr val="accent2"/>
                 </a:solidFill>
               </a:rPr>
-              <a:t>In the left sidebar, click Code. This is the part of the app that works on projects, not just chats.</a:t>
+              <a:t>At the top of the sidebar, click the Code button (the &lt;/&gt; icon). This is the part of the app that works on projects, not just chats.</a:t>
             </a:r>
             <a:endParaRPr lang="en-US" sz="1400" dirty="0"/>
           </a:p>

--- a/docs/contributing-guide.pptx
+++ b/docs/contributing-guide.pptx
@@ -15,18 +15,14 @@
     <p:sldId id="265" r:id="rId11"/>
     <p:sldId id="266" r:id="rId12"/>
     <p:sldId id="267" r:id="rId13"/>
-    <p:sldId id="268" r:id="rId14"/>
-    <p:sldId id="269" r:id="rId15"/>
     <p:sldId id="270" r:id="rId16"/>
-    <p:sldId id="271" r:id="rId17"/>
     <p:sldId id="272" r:id="rId18"/>
     <p:sldId id="273" r:id="rId19"/>
     <p:sldId id="274" r:id="rId20"/>
     <p:sldId id="275" r:id="rId21"/>
-    <p:sldId id="276" r:id="rId22"/>
   </p:sldIdLst>
   <p:notesMasterIdLst>
-    <p:notesMasterId r:id="rId23"/>
+    <p:notesMasterId r:id="rId22"/>
   </p:notesMasterIdLst>
   <p:sldSz cx="9144000" cy="5143500"/>
   <p:notesSz cx="5143500" cy="9144000"/>
@@ -125,7 +121,7 @@
   <p:extLst>
     <p:ext uri="{521415D9-36F7-43E2-AB2F-B90AF26B5E84}">
       <p14:sectionLst xmlns:p14="http://schemas.microsoft.com/office/powerpoint/2010/main">
-        <p14:section name="Why" id="{4fd6b21a-9dd7-df11-5d07-aac99a45ab5b}">
+        <p14:section name="Why" id="{813cdaa1-9daf-a26a-3544-fa968d97c086}">
           <p14:sldIdLst>
             <p14:sldId id="256"/>
             <p14:sldId id="257"/>
@@ -133,7 +129,7 @@
             <p14:sldId id="259"/>
           </p14:sldIdLst>
         </p14:section>
-        <p14:section name="Get started" id="{9051859a-2cf3-a6a3-a122-74ab634413fa}">
+        <p14:section name="Get started" id="{e44c703b-82a2-7c21-4e99-7a74dcbf5094}">
           <p14:sldIdLst>
             <p14:sldId id="260"/>
             <p14:sldId id="261"/>
@@ -145,25 +141,24 @@
             <p14:sldId id="267"/>
           </p14:sldIdLst>
         </p14:section>
-        <p14:section name="Work in rounds" id="{bdab73f7-1fa4-20ab-777a-10d775704f13}">
+        <p14:section name="Work in rounds" id="{c0a7f095-29a5-347c-f08e-be0078ccbd80}">
           <p14:sldIdLst>
             <p14:sldId id="268"/>
             <p14:sldId id="269"/>
             <p14:sldId id="270"/>
             <p14:sldId id="271"/>
             <p14:sldId id="272"/>
-            <p14:sldId id="273"/>
           </p14:sldIdLst>
         </p14:section>
-        <p14:section name="Send it" id="{f466b6eb-cb6d-1665-e7dc-5e7b874a39d1}">
+        <p14:section name="Send it" id="{20da6371-438a-193a-aaac-951a7648737b}">
           <p14:sldIdLst>
+            <p14:sldId id="273"/>
             <p14:sldId id="274"/>
-            <p14:sldId id="275"/>
           </p14:sldIdLst>
         </p14:section>
-        <p14:section name="Summary" id="{6694bcf4-dd83-f504-95b9-aeeff2d54fdb}">
+        <p14:section name="Summary" id="{cdc15a36-4e2f-eedc-7afa-f8b2dd7c7305}">
           <p14:sldIdLst>
-            <p14:sldId id="276"/>
+            <p14:sldId id="275"/>
           </p14:sldIdLst>
         </p14:section>
       </p14:sectionLst>
@@ -746,7 +741,7 @@
           <a:p>
             <a:r>
               <a:rPr lang="en-US" dirty="0"/>
-              <a:t>Real screenshot from the Claude desktop app. Next time, skip step 3: click Choose…, pick the open-source-modular-furniture folder and say "let's work on this".</a:t>
+              <a:t>Simulated conversation; exact wording will vary. Next time, skip step 3: click Choose…, pick the open-source-modular-furniture folder in Documents and say "let's work on this".</a:t>
             </a:r>
             <a:endParaRPr lang="en-US" dirty="0"/>
           </a:p>
@@ -834,7 +829,7 @@
           <a:p>
             <a:r>
               <a:rPr lang="en-US" dirty="0"/>
-              <a:t>From here on, the screenshots follow a real session: the Brick stool idea (issue 4), designed as the Brick bench and sent as pull request 10.</a:t>
+              <a:t>The clamp lamp (issue 2) is the idea used in the simulated examples.</a:t>
             </a:r>
             <a:endParaRPr lang="en-US" dirty="0"/>
           </a:p>
@@ -858,182 +853,6 @@
             <a:fld id="{F7021451-1387-4CA6-816F-3879F97B5CBC}" type="slidenum">
               <a:rPr lang="en-US"/>
               <a:t>12</a:t>
-            </a:fld>
-            <a:endParaRPr lang="en-US"/>
-          </a:p>
-        </p:txBody>
-      </p:sp>
-    </p:spTree>
-    <p:extLst>
-      <p:ext uri="{BB962C8B-B14F-4D97-AF65-F5344CB8AC3E}">
-        <p14:creationId xmlns:p14="http://schemas.microsoft.com/office/powerpoint/2010/main" val="1024086991"/>
-      </p:ext>
-    </p:extLst>
-  </p:cSld>
-  <p:clrMapOvr>
-    <a:masterClrMapping/>
-  </p:clrMapOvr>
-</p:notes>
-</file>
-
-<file path=ppt/notesSlides/notesSlide13.xml><?xml version="1.0" encoding="utf-8"?>
-<p:notes xmlns:a="http://schemas.openxmlformats.org/drawingml/2006/main" xmlns:r="http://schemas.openxmlformats.org/officeDocument/2006/relationships" xmlns:p="http://schemas.openxmlformats.org/presentationml/2006/main">
-  <p:cSld>
-    <p:spTree>
-      <p:nvGrpSpPr>
-        <p:cNvPr id="1" name=""/>
-        <p:cNvGrpSpPr/>
-        <p:nvPr/>
-      </p:nvGrpSpPr>
-      <p:grpSpPr>
-        <a:xfrm>
-          <a:off x="0" y="0"/>
-          <a:ext cx="0" cy="0"/>
-          <a:chOff x="0" y="0"/>
-          <a:chExt cx="0" cy="0"/>
-        </a:xfrm>
-      </p:grpSpPr>
-      <p:sp>
-        <p:nvSpPr>
-          <p:cNvPr id="2" name="Slide Image Placeholder 1"/>
-          <p:cNvSpPr>
-            <a:spLocks noGrp="1" noRot="1" noChangeAspect="1"/>
-          </p:cNvSpPr>
-          <p:nvPr>
-            <p:ph type="sldImg"/>
-          </p:nvPr>
-        </p:nvSpPr>
-        <p:spPr/>
-      </p:sp>
-      <p:sp>
-        <p:nvSpPr>
-          <p:cNvPr id="3" name="Notes Placeholder 2"/>
-          <p:cNvSpPr>
-            <a:spLocks noGrp="1"/>
-          </p:cNvSpPr>
-          <p:nvPr>
-            <p:ph type="body" idx="1"/>
-          </p:nvPr>
-        </p:nvSpPr>
-        <p:spPr/>
-        <p:txBody>
-          <a:bodyPr/>
-          <a:lstStyle/>
-          <a:p>
-            <a:r>
-              <a:rPr lang="en-US" dirty="0"/>
-              <a:t>Real screenshot: Claude opened the private copy in the app's built-in browser, to the right of the chat, at localhost:8000. "localhost" just means "this computer". Breaking something here cannot break the real site.</a:t>
-            </a:r>
-            <a:endParaRPr lang="en-US" dirty="0"/>
-          </a:p>
-        </p:txBody>
-      </p:sp>
-      <p:sp>
-        <p:nvSpPr>
-          <p:cNvPr id="4" name="Slide Number Placeholder 3"/>
-          <p:cNvSpPr>
-            <a:spLocks noGrp="1"/>
-          </p:cNvSpPr>
-          <p:nvPr>
-            <p:ph type="sldNum" sz="quarter" idx="10"/>
-          </p:nvPr>
-        </p:nvSpPr>
-        <p:spPr/>
-        <p:txBody>
-          <a:bodyPr/>
-          <a:lstStyle/>
-          <a:p>
-            <a:fld id="{F7021451-1387-4CA6-816F-3879F97B5CBC}" type="slidenum">
-              <a:rPr lang="en-US"/>
-              <a:t>13</a:t>
-            </a:fld>
-            <a:endParaRPr lang="en-US"/>
-          </a:p>
-        </p:txBody>
-      </p:sp>
-    </p:spTree>
-    <p:extLst>
-      <p:ext uri="{BB962C8B-B14F-4D97-AF65-F5344CB8AC3E}">
-        <p14:creationId xmlns:p14="http://schemas.microsoft.com/office/powerpoint/2010/main" val="1024086991"/>
-      </p:ext>
-    </p:extLst>
-  </p:cSld>
-  <p:clrMapOvr>
-    <a:masterClrMapping/>
-  </p:clrMapOvr>
-</p:notes>
-</file>
-
-<file path=ppt/notesSlides/notesSlide14.xml><?xml version="1.0" encoding="utf-8"?>
-<p:notes xmlns:a="http://schemas.openxmlformats.org/drawingml/2006/main" xmlns:r="http://schemas.openxmlformats.org/officeDocument/2006/relationships" xmlns:p="http://schemas.openxmlformats.org/presentationml/2006/main">
-  <p:cSld>
-    <p:spTree>
-      <p:nvGrpSpPr>
-        <p:cNvPr id="1" name=""/>
-        <p:cNvGrpSpPr/>
-        <p:nvPr/>
-      </p:nvGrpSpPr>
-      <p:grpSpPr>
-        <a:xfrm>
-          <a:off x="0" y="0"/>
-          <a:ext cx="0" cy="0"/>
-          <a:chOff x="0" y="0"/>
-          <a:chExt cx="0" cy="0"/>
-        </a:xfrm>
-      </p:grpSpPr>
-      <p:sp>
-        <p:nvSpPr>
-          <p:cNvPr id="2" name="Slide Image Placeholder 1"/>
-          <p:cNvSpPr>
-            <a:spLocks noGrp="1" noRot="1" noChangeAspect="1"/>
-          </p:cNvSpPr>
-          <p:nvPr>
-            <p:ph type="sldImg"/>
-          </p:nvPr>
-        </p:nvSpPr>
-        <p:spPr/>
-      </p:sp>
-      <p:sp>
-        <p:nvSpPr>
-          <p:cNvPr id="3" name="Notes Placeholder 2"/>
-          <p:cNvSpPr>
-            <a:spLocks noGrp="1"/>
-          </p:cNvSpPr>
-          <p:nvPr>
-            <p:ph type="body" idx="1"/>
-          </p:nvPr>
-        </p:nvSpPr>
-        <p:spPr/>
-        <p:txBody>
-          <a:bodyPr/>
-          <a:lstStyle/>
-          <a:p>
-            <a:r>
-              <a:rPr lang="en-US" dirty="0"/>
-              <a:t>Real screenshot of the site card Claude posts in the chat. Keep the session open: closing it switches the private copy off.</a:t>
-            </a:r>
-            <a:endParaRPr lang="en-US" dirty="0"/>
-          </a:p>
-        </p:txBody>
-      </p:sp>
-      <p:sp>
-        <p:nvSpPr>
-          <p:cNvPr id="4" name="Slide Number Placeholder 3"/>
-          <p:cNvSpPr>
-            <a:spLocks noGrp="1"/>
-          </p:cNvSpPr>
-          <p:nvPr>
-            <p:ph type="sldNum" sz="quarter" idx="10"/>
-          </p:nvPr>
-        </p:nvSpPr>
-        <p:spPr/>
-        <p:txBody>
-          <a:bodyPr/>
-          <a:lstStyle/>
-          <a:p>
-            <a:fld id="{F7021451-1387-4CA6-816F-3879F97B5CBC}" type="slidenum">
-              <a:rPr lang="en-US"/>
-              <a:t>14</a:t>
             </a:fld>
             <a:endParaRPr lang="en-US"/>
           </a:p>
@@ -1098,7 +917,7 @@
           <a:p>
             <a:r>
               <a:rPr lang="en-US" dirty="0"/>
-              <a:t>Real screenshot of a round on the Brick bench: the new page (Seating, Brick bench) open next to the chat, Claude asking "Does the 3D bench look like the piece?", and the designer typing the changes: profile 2020 by default, bricks framed by the profiles, more London-brick-like bricks, and a toggle to hide the bricks and see the frame.</a:t>
+              <a:t>A real round building the brick bench: Claude on the left, the local site on the right. A new piece usually takes five rounds: parts list, page and settings, 3D model, part info, PDF guide.</a:t>
             </a:r>
             <a:endParaRPr lang="en-US" dirty="0"/>
           </a:p>
@@ -1122,94 +941,6 @@
             <a:fld id="{F7021451-1387-4CA6-816F-3879F97B5CBC}" type="slidenum">
               <a:rPr lang="en-US"/>
               <a:t>15</a:t>
-            </a:fld>
-            <a:endParaRPr lang="en-US"/>
-          </a:p>
-        </p:txBody>
-      </p:sp>
-    </p:spTree>
-    <p:extLst>
-      <p:ext uri="{BB962C8B-B14F-4D97-AF65-F5344CB8AC3E}">
-        <p14:creationId xmlns:p14="http://schemas.microsoft.com/office/powerpoint/2010/main" val="1024086991"/>
-      </p:ext>
-    </p:extLst>
-  </p:cSld>
-  <p:clrMapOvr>
-    <a:masterClrMapping/>
-  </p:clrMapOvr>
-</p:notes>
-</file>
-
-<file path=ppt/notesSlides/notesSlide16.xml><?xml version="1.0" encoding="utf-8"?>
-<p:notes xmlns:a="http://schemas.openxmlformats.org/drawingml/2006/main" xmlns:r="http://schemas.openxmlformats.org/officeDocument/2006/relationships" xmlns:p="http://schemas.openxmlformats.org/presentationml/2006/main">
-  <p:cSld>
-    <p:spTree>
-      <p:nvGrpSpPr>
-        <p:cNvPr id="1" name=""/>
-        <p:cNvGrpSpPr/>
-        <p:nvPr/>
-      </p:nvGrpSpPr>
-      <p:grpSpPr>
-        <a:xfrm>
-          <a:off x="0" y="0"/>
-          <a:ext cx="0" cy="0"/>
-          <a:chOff x="0" y="0"/>
-          <a:chExt cx="0" cy="0"/>
-        </a:xfrm>
-      </p:grpSpPr>
-      <p:sp>
-        <p:nvSpPr>
-          <p:cNvPr id="2" name="Slide Image Placeholder 1"/>
-          <p:cNvSpPr>
-            <a:spLocks noGrp="1" noRot="1" noChangeAspect="1"/>
-          </p:cNvSpPr>
-          <p:nvPr>
-            <p:ph type="sldImg"/>
-          </p:nvPr>
-        </p:nvSpPr>
-        <p:spPr/>
-      </p:sp>
-      <p:sp>
-        <p:nvSpPr>
-          <p:cNvPr id="3" name="Notes Placeholder 2"/>
-          <p:cNvSpPr>
-            <a:spLocks noGrp="1"/>
-          </p:cNvSpPr>
-          <p:nvPr>
-            <p:ph type="body" idx="1"/>
-          </p:nvPr>
-        </p:nvSpPr>
-        <p:spPr/>
-        <p:txBody>
-          <a:bodyPr/>
-          <a:lstStyle/>
-          <a:p>
-            <a:r>
-              <a:rPr lang="en-US" dirty="0"/>
-              <a:t>Real brief from the Brick bench pull request. The brick size came from the designer's note on London stock bricks; the rod support block is known only from a picture, so its sizes are listed as unknown.</a:t>
-            </a:r>
-            <a:endParaRPr lang="en-US" dirty="0"/>
-          </a:p>
-        </p:txBody>
-      </p:sp>
-      <p:sp>
-        <p:nvSpPr>
-          <p:cNvPr id="4" name="Slide Number Placeholder 3"/>
-          <p:cNvSpPr>
-            <a:spLocks noGrp="1"/>
-          </p:cNvSpPr>
-          <p:nvPr>
-            <p:ph type="sldNum" sz="quarter" idx="10"/>
-          </p:nvPr>
-        </p:nvSpPr>
-        <p:spPr/>
-        <p:txBody>
-          <a:bodyPr/>
-          <a:lstStyle/>
-          <a:p>
-            <a:fld id="{F7021451-1387-4CA6-816F-3879F97B5CBC}" type="slidenum">
-              <a:rPr lang="en-US"/>
-              <a:t>16</a:t>
             </a:fld>
             <a:endParaRPr lang="en-US"/>
           </a:p>
@@ -1274,7 +1005,7 @@
           <a:p>
             <a:r>
               <a:rPr lang="en-US" dirty="0"/>
-              <a:t>Simulated conversation for a site design change. After the plan is agreed, it works in rounds like any other change: Claude builds a step, you look at it, and say what to adjust.</a:t>
+              <a:t>Claude is prepared to guide you through all of these checks: it reads the list out one item at a time and waits for your answer.</a:t>
             </a:r>
             <a:endParaRPr lang="en-US" dirty="0"/>
           </a:p>
@@ -1362,7 +1093,7 @@
           <a:p>
             <a:r>
               <a:rPr lang="en-US" dirty="0"/>
-              <a:t>Claude is prepared to guide you through all of these checks: it reads the list out one item at a time and waits for your answer.</a:t>
+              <a:t>GitHub only accepts images uploaded through the page, which is why the screenshots are the one manual step.</a:t>
             </a:r>
             <a:endParaRPr lang="en-US" dirty="0"/>
           </a:p>
@@ -1450,7 +1181,7 @@
           <a:p>
             <a:r>
               <a:rPr lang="en-US" dirty="0"/>
-              <a:t>Real screenshot: the last check ("Yes, I am happy"), then "Step 6 of 6: the brick bench pull request is open". GitHub only accepts images uploaded through the page, which is why the screenshots are the one manual step.</a:t>
+              <a:t>If the piece came from an idea, the pull request closes that idea issue when merged, and the card leaves the Ideas board because the piece now has its own page.</a:t>
             </a:r>
             <a:endParaRPr lang="en-US" dirty="0"/>
           </a:p>
@@ -1538,7 +1269,7 @@
           <a:p>
             <a:r>
               <a:rPr lang="en-US" dirty="0"/>
-              <a:t>Real pull request 10 as a reviewer sees it on GitHub: what it adds, the idea it closes (#4), the design brief, parts and sources. Merging it closes the idea issue, and the card leaves the Ideas board because the piece now has its own page.</a:t>
+              <a:t>That is all you need to remember. Start each one in a new session in the Code section, with the project selected.</a:t>
             </a:r>
             <a:endParaRPr lang="en-US" dirty="0"/>
           </a:p>
@@ -1562,94 +1293,6 @@
             <a:fld id="{F7021451-1387-4CA6-816F-3879F97B5CBC}" type="slidenum">
               <a:rPr lang="en-US"/>
               <a:t>20</a:t>
-            </a:fld>
-            <a:endParaRPr lang="en-US"/>
-          </a:p>
-        </p:txBody>
-      </p:sp>
-    </p:spTree>
-    <p:extLst>
-      <p:ext uri="{BB962C8B-B14F-4D97-AF65-F5344CB8AC3E}">
-        <p14:creationId xmlns:p14="http://schemas.microsoft.com/office/powerpoint/2010/main" val="1024086991"/>
-      </p:ext>
-    </p:extLst>
-  </p:cSld>
-  <p:clrMapOvr>
-    <a:masterClrMapping/>
-  </p:clrMapOvr>
-</p:notes>
-</file>
-
-<file path=ppt/notesSlides/notesSlide21.xml><?xml version="1.0" encoding="utf-8"?>
-<p:notes xmlns:a="http://schemas.openxmlformats.org/drawingml/2006/main" xmlns:r="http://schemas.openxmlformats.org/officeDocument/2006/relationships" xmlns:p="http://schemas.openxmlformats.org/presentationml/2006/main">
-  <p:cSld>
-    <p:spTree>
-      <p:nvGrpSpPr>
-        <p:cNvPr id="1" name=""/>
-        <p:cNvGrpSpPr/>
-        <p:nvPr/>
-      </p:nvGrpSpPr>
-      <p:grpSpPr>
-        <a:xfrm>
-          <a:off x="0" y="0"/>
-          <a:ext cx="0" cy="0"/>
-          <a:chOff x="0" y="0"/>
-          <a:chExt cx="0" cy="0"/>
-        </a:xfrm>
-      </p:grpSpPr>
-      <p:sp>
-        <p:nvSpPr>
-          <p:cNvPr id="2" name="Slide Image Placeholder 1"/>
-          <p:cNvSpPr>
-            <a:spLocks noGrp="1" noRot="1" noChangeAspect="1"/>
-          </p:cNvSpPr>
-          <p:nvPr>
-            <p:ph type="sldImg"/>
-          </p:nvPr>
-        </p:nvSpPr>
-        <p:spPr/>
-      </p:sp>
-      <p:sp>
-        <p:nvSpPr>
-          <p:cNvPr id="3" name="Notes Placeholder 2"/>
-          <p:cNvSpPr>
-            <a:spLocks noGrp="1"/>
-          </p:cNvSpPr>
-          <p:nvPr>
-            <p:ph type="body" idx="1"/>
-          </p:nvPr>
-        </p:nvSpPr>
-        <p:spPr/>
-        <p:txBody>
-          <a:bodyPr/>
-          <a:lstStyle/>
-          <a:p>
-            <a:r>
-              <a:rPr lang="en-US" dirty="0"/>
-              <a:t>That is all you need to remember. Start each one in a new session in the Code section, with the project selected.</a:t>
-            </a:r>
-            <a:endParaRPr lang="en-US" dirty="0"/>
-          </a:p>
-        </p:txBody>
-      </p:sp>
-      <p:sp>
-        <p:nvSpPr>
-          <p:cNvPr id="4" name="Slide Number Placeholder 3"/>
-          <p:cNvSpPr>
-            <a:spLocks noGrp="1"/>
-          </p:cNvSpPr>
-          <p:nvPr>
-            <p:ph type="sldNum" sz="quarter" idx="10"/>
-          </p:nvPr>
-        </p:nvSpPr>
-        <p:spPr/>
-        <p:txBody>
-          <a:bodyPr/>
-          <a:lstStyle/>
-          <a:p>
-            <a:fld id="{F7021451-1387-4CA6-816F-3879F97B5CBC}" type="slidenum">
-              <a:rPr lang="en-US"/>
-              <a:t>21</a:t>
             </a:fld>
             <a:endParaRPr lang="en-US"/>
           </a:p>
@@ -3017,7 +2660,7 @@
       </p:sp>
       <p:pic>
         <p:nvPicPr>
-          <p:cNvPr id="4" name="Brick bench page, designed with this process" descr="small/bb-default.jpg">    </p:cNvPr>
+          <p:cNvPr id="4" name="Profile desk page" descr="small/desk.jpg">    </p:cNvPr>
           <p:cNvPicPr>
             <a:picLocks noChangeAspect="1"/>
           </p:cNvPicPr>
@@ -3032,7 +2675,7 @@
         <p:spPr>
           <a:xfrm>
             <a:off x="5394960" y="1143000"/>
-            <a:ext cx="3383280" cy="1933303"/>
+            <a:ext cx="3383280" cy="1931545"/>
           </a:xfrm>
           <a:prstGeom prst="rect">
             <a:avLst/>
@@ -3169,7 +2812,7 @@
         <p:spPr>
           <a:xfrm>
             <a:off x="457200" y="1051560"/>
-            <a:ext cx="4260010" cy="3611880"/>
+            <a:ext cx="4605311" cy="3611880"/>
           </a:xfrm>
           <a:prstGeom prst="rect">
             <a:avLst/>
@@ -3393,9 +3036,52 @@
           </a:p>
         </p:txBody>
       </p:sp>
+      <p:sp>
+        <p:nvSpPr>
+          <p:cNvPr id="3" name="SIMULATED EXAMPLE tag"/>
+          <p:cNvSpPr txBox="1"/>
+          <p:nvPr/>
+        </p:nvSpPr>
+        <p:spPr>
+          <a:xfrm>
+            <a:off x="6949440" y="73152"/>
+            <a:ext cx="1920240" cy="237744"/>
+          </a:xfrm>
+          <a:prstGeom prst="rect">
+            <a:avLst/>
+          </a:prstGeom>
+          <a:noFill/>
+          <a:ln w="9525">
+            <a:solidFill>
+              <a:srgbClr val="8A8F94"/>
+            </a:solidFill>
+          </a:ln>
+        </p:spPr>
+        <p:txBody>
+          <a:bodyPr wrap="square" lIns="0" tIns="0" rIns="0" bIns="0" rtlCol="0" anchor="ctr"/>
+          <a:lstStyle/>
+          <a:p>
+            <a:pPr algn="ctr" indent="0" marL="0">
+              <a:buNone/>
+            </a:pPr>
+            <a:r>
+              <a:rPr lang="en-US" sz="800" b="1" spc="100" kern="0" dirty="0">
+                <a:solidFill>
+                  <a:srgbClr val="E9EBED"/>
+                </a:solidFill>
+                <a:latin typeface="Courier New" pitchFamily="34" charset="0"/>
+                <a:ea typeface="Courier New" pitchFamily="34" charset="-122"/>
+                <a:cs typeface="Courier New" pitchFamily="34" charset="-120"/>
+              </a:rPr>
+              <a:t>SIMULATED EXAMPLE</a:t>
+            </a:r>
+            <a:endParaRPr lang="en-US" sz="800" dirty="0"/>
+          </a:p>
+        </p:txBody>
+      </p:sp>
       <p:pic>
         <p:nvPicPr>
-          <p:cNvPr id="3" name="Clickable question in the Claude app" descr="small/real-question.jpg">    </p:cNvPr>
+          <p:cNvPr id="4" name="Simulated start of the work" descr="small/app-start.jpg">    </p:cNvPr>
           <p:cNvPicPr>
             <a:picLocks noChangeAspect="1"/>
           </p:cNvPicPr>
@@ -3410,7 +3096,7 @@
         <p:spPr>
           <a:xfrm>
             <a:off x="457200" y="1051560"/>
-            <a:ext cx="3271331" cy="3611880"/>
+            <a:ext cx="5235828" cy="3657600"/>
           </a:xfrm>
           <a:prstGeom prst="rect">
             <a:avLst/>
@@ -3426,14 +3112,14 @@
       </p:pic>
       <p:sp>
         <p:nvSpPr>
-          <p:cNvPr id="4" name="Text 1"/>
+          <p:cNvPr id="5" name="Text 2"/>
           <p:cNvSpPr txBox="1"/>
           <p:nvPr/>
         </p:nvSpPr>
         <p:spPr>
           <a:xfrm>
-            <a:off x="4572000" y="1188720"/>
-            <a:ext cx="4206240" cy="3474720"/>
+            <a:off x="6126480" y="1188720"/>
+            <a:ext cx="2651760" cy="3474720"/>
           </a:xfrm>
           <a:prstGeom prst="rect">
             <a:avLst/>
@@ -3468,7 +3154,7 @@
                   <a:schemeClr val="accent2"/>
                 </a:solidFill>
               </a:rPr>
-              <a:t>The project carries step-by-step instructions for Claude ("Ran skill /contribute"), so it knows how to guide you.</a:t>
+              <a:t>The project carries step-by-step instructions for Claude, so it knows how to guide you.</a:t>
             </a:r>
             <a:endParaRPr lang="en-US" sz="1400" dirty="0"/>
           </a:p>
@@ -3510,7 +3196,7 @@
                   <a:schemeClr val="accent2"/>
                 </a:solidFill>
               </a:rPr>
-              <a:t>Claude asks with buttons. Pick one and click Submit, or choose Other and type your own.</a:t>
+              <a:t>Claude asks with buttons. Pick one, or choose Other and type your own.</a:t>
             </a:r>
             <a:endParaRPr lang="en-US" sz="1400" dirty="0"/>
           </a:p>
@@ -3552,7 +3238,7 @@
                   <a:schemeClr val="accent2"/>
                 </a:solidFill>
               </a:rPr>
-              <a:t>And opens it for you.</a:t>
+              <a:t>And tells you where to open it.</a:t>
             </a:r>
             <a:endParaRPr lang="en-US" sz="1400" dirty="0"/>
           </a:p>
@@ -3706,7 +3392,7 @@
         <p:spPr>
           <a:xfrm>
             <a:off x="5852160" y="1188720"/>
-            <a:ext cx="2926080" cy="3474720"/>
+            <a:ext cx="2926080" cy="3383280"/>
           </a:xfrm>
           <a:prstGeom prst="rect">
             <a:avLst/>
@@ -3784,34 +3470,6 @@
                 </a:solidFill>
               </a:rPr>
               <a:t>Tell Claude which one; it reads the issue and its pictures.</a:t>
-            </a:r>
-            <a:endParaRPr lang="en-US" sz="1400" dirty="0"/>
-          </a:p>
-          <a:p>
-            <a:pPr indent="0" marL="0">
-              <a:buNone/>
-            </a:pPr>
-            <a:r>
-              <a:rPr lang="en-US" sz="1400" dirty="0">
-                <a:solidFill>
-                  <a:schemeClr val="tx1"/>
-                </a:solidFill>
-              </a:rPr>
-              <a:t> </a:t>
-            </a:r>
-            <a:endParaRPr lang="en-US" sz="1400" dirty="0"/>
-          </a:p>
-          <a:p>
-            <a:pPr indent="0" marL="0">
-              <a:buNone/>
-            </a:pPr>
-            <a:r>
-              <a:rPr lang="en-US" sz="1400" i="1" dirty="0">
-                <a:solidFill>
-                  <a:schemeClr val="tx1"/>
-                </a:solidFill>
-              </a:rPr>
-              <a:t>The real example in this guide: the Brick stool (idea #4) became the Brick bench.</a:t>
             </a:r>
             <a:endParaRPr lang="en-US" sz="1400" dirty="0"/>
           </a:p>
@@ -3857,804 +3515,6 @@
             <a:fld id="{F7021451-1387-4CA6-816F-3879F97B5CBC}" type="slidenum">
               <a:rPr b="0" lang="en-US"/>
               <a:t>12</a:t>
-            </a:fld>
-            <a:endParaRPr lang="en-US"/>
-          </a:p>
-        </p:txBody>
-      </p:sp>
-    </p:spTree>
-  </p:cSld>
-  <p:clrMapOvr>
-    <a:masterClrMapping/>
-  </p:clrMapOvr>
-</p:sld>
-</file>
-
-<file path=ppt/slides/slide13.xml><?xml version="1.0" encoding="utf-8"?>
-<p:sld xmlns:a="http://schemas.openxmlformats.org/drawingml/2006/main" xmlns:r="http://schemas.openxmlformats.org/officeDocument/2006/relationships" xmlns:p="http://schemas.openxmlformats.org/presentationml/2006/main">
-  <p:cSld name="Slide 13">
-    <p:spTree>
-      <p:nvGrpSpPr>
-        <p:cNvPr id="1" name=""/>
-        <p:cNvGrpSpPr/>
-        <p:nvPr/>
-      </p:nvGrpSpPr>
-      <p:grpSpPr>
-        <a:xfrm>
-          <a:off x="0" y="0"/>
-          <a:ext cx="0" cy="0"/>
-          <a:chOff x="0" y="0"/>
-          <a:chExt cx="0" cy="0"/>
-        </a:xfrm>
-      </p:grpSpPr>
-      <p:sp>
-        <p:nvSpPr>
-          <p:cNvPr id="2" name="Text 2"/>
-          <p:cNvSpPr/>
-          <p:nvPr>
-            <p:ph idx="103" type="title" hasCustomPrompt="1"/>
-          </p:nvPr>
-        </p:nvSpPr>
-        <p:spPr>
-          <a:xfrm>
-            <a:off x="457200" y="502920"/>
-            <a:ext cx="8229600" cy="457200"/>
-          </a:xfrm>
-          <a:prstGeom prst="rect">
-            <a:avLst/>
-          </a:prstGeom>
-          <a:noFill/>
-          <a:ln/>
-        </p:spPr>
-        <p:txBody>
-          <a:bodyPr wrap="square" lIns="0" tIns="0" rIns="0" bIns="0" rtlCol="0" anchor="ctr"/>
-          <a:lstStyle/>
-          <a:p>
-            <a:pPr algn="l" indent="0" marL="0">
-              <a:buNone/>
-            </a:pPr>
-            <a:r>
-              <a:rPr lang="en-US" sz="2000" b="1" spc="200" kern="0" dirty="0">
-                <a:solidFill>
-                  <a:schemeClr val="tx1"/>
-                </a:solidFill>
-              </a:rPr>
-              <a:t>YOUR PRIVATE COPY, NEXT TO THE CHAT</a:t>
-            </a:r>
-            <a:endParaRPr lang="en-US" sz="2000" dirty="0"/>
-          </a:p>
-        </p:txBody>
-      </p:sp>
-      <p:pic>
-        <p:nvPicPr>
-          <p:cNvPr id="3" name="Chat on the left, the private copy of the site on the right" descr="small/real-browser.jpg">    </p:cNvPr>
-          <p:cNvPicPr>
-            <a:picLocks noChangeAspect="1"/>
-          </p:cNvPicPr>
-          <p:nvPr/>
-        </p:nvPicPr>
-        <p:blipFill>
-          <a:blip r:embed="rId1"/>
-          <a:stretch>
-            <a:fillRect/>
-          </a:stretch>
-        </p:blipFill>
-        <p:spPr>
-          <a:xfrm>
-            <a:off x="457200" y="1051560"/>
-            <a:ext cx="4750931" cy="2514600"/>
-          </a:xfrm>
-          <a:prstGeom prst="rect">
-            <a:avLst/>
-          </a:prstGeom>
-          <a:effectLst>
-            <a:outerShdw sx="100000" sy="100000" kx="0" ky="0" algn="bl" rotWithShape="0" blurRad="76200" dist="25400" dir="5400000">
-              <a:srgbClr val="000000">
-                <a:alpha val="18000"/>
-              </a:srgbClr>
-            </a:outerShdw>
-          </a:effectLst>
-        </p:spPr>
-      </p:pic>
-      <p:sp>
-        <p:nvSpPr>
-          <p:cNvPr id="4" name="Shape 1"/>
-          <p:cNvSpPr/>
-          <p:nvPr/>
-        </p:nvSpPr>
-        <p:spPr>
-          <a:xfrm>
-            <a:off x="457200" y="3703320"/>
-            <a:ext cx="4023360" cy="960120"/>
-          </a:xfrm>
-          <a:prstGeom prst="roundRect">
-            <a:avLst>
-              <a:gd name="adj" fmla="val 3810"/>
-            </a:avLst>
-          </a:prstGeom>
-          <a:solidFill>
-            <a:schemeClr val="bg2"/>
-          </a:solidFill>
-          <a:ln w="9525">
-            <a:solidFill>
-              <a:schemeClr val="accent4"/>
-            </a:solidFill>
-            <a:prstDash val="solid"/>
-          </a:ln>
-        </p:spPr>
-      </p:sp>
-      <p:sp>
-        <p:nvSpPr>
-          <p:cNvPr id="5" name="Text 2"/>
-          <p:cNvSpPr txBox="1"/>
-          <p:nvPr/>
-        </p:nvSpPr>
-        <p:spPr>
-          <a:xfrm>
-            <a:off x="594360" y="3767328"/>
-            <a:ext cx="3749040" cy="868680"/>
-          </a:xfrm>
-          <a:prstGeom prst="rect">
-            <a:avLst/>
-          </a:prstGeom>
-          <a:noFill/>
-          <a:ln/>
-        </p:spPr>
-        <p:txBody>
-          <a:bodyPr wrap="square" lIns="0" tIns="0" rIns="0" bIns="0" rtlCol="0" anchor="ctr"/>
-          <a:lstStyle/>
-          <a:p>
-            <a:pPr indent="0" marL="0">
-              <a:buNone/>
-            </a:pPr>
-            <a:r>
-              <a:rPr lang="en-US" sz="1300" b="1" dirty="0">
-                <a:solidFill>
-                  <a:schemeClr val="tx1"/>
-                </a:solidFill>
-              </a:rPr>
-              <a:t>The real site  </a:t>
-            </a:r>
-            <a:pPr indent="0" marL="0">
-              <a:buNone/>
-            </a:pPr>
-            <a:r>
-              <a:rPr lang="en-US" sz="1100" dirty="0">
-                <a:solidFill>
-                  <a:schemeClr val="accent2"/>
-                </a:solidFill>
-                <a:latin typeface="Courier New" pitchFamily="34" charset="0"/>
-                <a:ea typeface="Courier New" pitchFamily="34" charset="-122"/>
-                <a:cs typeface="Courier New" pitchFamily="34" charset="-120"/>
-              </a:rPr>
-              <a:t>mfprado.github.io/…</a:t>
-            </a:r>
-            <a:endParaRPr lang="en-US" sz="1300" dirty="0"/>
-          </a:p>
-          <a:p>
-            <a:pPr indent="0" marL="0">
-              <a:buNone/>
-            </a:pPr>
-            <a:r>
-              <a:rPr lang="en-US" sz="1200" dirty="0">
-                <a:solidFill>
-                  <a:schemeClr val="accent2"/>
-                </a:solidFill>
-              </a:rPr>
-              <a:t>Production: everyone sees it. It only changes after approved reviewers approve it.</a:t>
-            </a:r>
-            <a:endParaRPr lang="en-US" sz="1300" dirty="0"/>
-          </a:p>
-        </p:txBody>
-      </p:sp>
-      <p:sp>
-        <p:nvSpPr>
-          <p:cNvPr id="6" name="Shape 3"/>
-          <p:cNvSpPr/>
-          <p:nvPr/>
-        </p:nvSpPr>
-        <p:spPr>
-          <a:xfrm>
-            <a:off x="4663440" y="3703320"/>
-            <a:ext cx="4023360" cy="960120"/>
-          </a:xfrm>
-          <a:prstGeom prst="roundRect">
-            <a:avLst>
-              <a:gd name="adj" fmla="val 3810"/>
-            </a:avLst>
-          </a:prstGeom>
-          <a:solidFill>
-            <a:schemeClr val="tx2"/>
-          </a:solidFill>
-          <a:ln w="9525">
-            <a:solidFill>
-              <a:schemeClr val="tx2"/>
-            </a:solidFill>
-            <a:prstDash val="solid"/>
-          </a:ln>
-        </p:spPr>
-      </p:sp>
-      <p:sp>
-        <p:nvSpPr>
-          <p:cNvPr id="7" name="Text 4"/>
-          <p:cNvSpPr txBox="1"/>
-          <p:nvPr/>
-        </p:nvSpPr>
-        <p:spPr>
-          <a:xfrm>
-            <a:off x="4800600" y="3767328"/>
-            <a:ext cx="3749040" cy="868680"/>
-          </a:xfrm>
-          <a:prstGeom prst="rect">
-            <a:avLst/>
-          </a:prstGeom>
-          <a:noFill/>
-          <a:ln/>
-        </p:spPr>
-        <p:txBody>
-          <a:bodyPr wrap="square" lIns="0" tIns="0" rIns="0" bIns="0" rtlCol="0" anchor="ctr"/>
-          <a:lstStyle/>
-          <a:p>
-            <a:pPr indent="0" marL="0">
-              <a:buNone/>
-            </a:pPr>
-            <a:r>
-              <a:rPr lang="en-US" sz="1300" b="1" dirty="0">
-                <a:solidFill>
-                  <a:schemeClr val="bg1"/>
-                </a:solidFill>
-              </a:rPr>
-              <a:t>Your private copy  </a:t>
-            </a:r>
-            <a:pPr indent="0" marL="0">
-              <a:buNone/>
-            </a:pPr>
-            <a:r>
-              <a:rPr lang="en-US" sz="1100" dirty="0">
-                <a:solidFill>
-                  <a:schemeClr val="accent4"/>
-                </a:solidFill>
-                <a:latin typeface="Courier New" pitchFamily="34" charset="0"/>
-                <a:ea typeface="Courier New" pitchFamily="34" charset="-122"/>
-                <a:cs typeface="Courier New" pitchFamily="34" charset="-120"/>
-              </a:rPr>
-              <a:t>localhost:8000</a:t>
-            </a:r>
-            <a:endParaRPr lang="en-US" sz="1300" dirty="0"/>
-          </a:p>
-          <a:p>
-            <a:pPr indent="0" marL="0">
-              <a:buNone/>
-            </a:pPr>
-            <a:r>
-              <a:rPr lang="en-US" sz="1200" dirty="0">
-                <a:solidFill>
-                  <a:schemeClr val="accent4"/>
-                </a:solidFill>
-              </a:rPr>
-              <a:t>Non-production: only on your computer, and it shows your changes straight away.</a:t>
-            </a:r>
-            <a:endParaRPr lang="en-US" sz="1300" dirty="0"/>
-          </a:p>
-        </p:txBody>
-      </p:sp>
-      <p:sp>
-        <p:nvSpPr>
-          <p:cNvPr id="25" name="Slide Number Placeholder 0"/>
-          <p:cNvSpPr>
-            <a:spLocks noGrp="1"/>
-          </p:cNvSpPr>
-          <p:nvPr>
-            <p:ph type="sldNum" sz="quarter" idx="4294967295"/>
-          </p:nvPr>
-        </p:nvSpPr>
-        <p:spPr>
-          <a:xfrm>
-            <a:off x="8503920" y="4754880"/>
-            <a:ext cx="365760" cy="274320"/>
-          </a:xfrm>
-          <a:prstGeom prst="rect">
-            <a:avLst/>
-          </a:prstGeom>
-          <a:extLst>
-            <a:ext uri="{C572A759-6A51-4108-AA02-DFA0A04FC94B}">
-              <ma14:wrappingTextBoxFlag xmlns:ma14="http://schemas.microsoft.com/office/mac/drawingml/2011/main" val="0"/>
-            </a:ext>
-          </a:extLst>
-        </p:spPr>
-        <p:txBody>
-          <a:bodyPr/>
-          <a:lstStyle>
-            <a:lvl1pPr>
-              <a:defRPr sz="1000">
-                <a:solidFill>
-                  <a:schemeClr val="accent3"/>
-                </a:solidFill>
-              </a:defRPr>
-            </a:lvl1pPr>
-          </a:lstStyle>
-          <a:p>
-            <a:pPr algn="l"/>
-            <a:fld id="{F7021451-1387-4CA6-816F-3879F97B5CBC}" type="slidenum">
-              <a:rPr b="0" lang="en-US"/>
-              <a:t>13</a:t>
-            </a:fld>
-            <a:endParaRPr lang="en-US"/>
-          </a:p>
-        </p:txBody>
-      </p:sp>
-    </p:spTree>
-  </p:cSld>
-  <p:clrMapOvr>
-    <a:masterClrMapping/>
-  </p:clrMapOvr>
-</p:sld>
-</file>
-
-<file path=ppt/slides/slide14.xml><?xml version="1.0" encoding="utf-8"?>
-<p:sld xmlns:a="http://schemas.openxmlformats.org/drawingml/2006/main" xmlns:r="http://schemas.openxmlformats.org/officeDocument/2006/relationships" xmlns:p="http://schemas.openxmlformats.org/presentationml/2006/main">
-  <p:cSld name="Slide 14">
-    <p:spTree>
-      <p:nvGrpSpPr>
-        <p:cNvPr id="1" name=""/>
-        <p:cNvGrpSpPr/>
-        <p:nvPr/>
-      </p:nvGrpSpPr>
-      <p:grpSpPr>
-        <a:xfrm>
-          <a:off x="0" y="0"/>
-          <a:ext cx="0" cy="0"/>
-          <a:chOff x="0" y="0"/>
-          <a:chExt cx="0" cy="0"/>
-        </a:xfrm>
-      </p:grpSpPr>
-      <p:sp>
-        <p:nvSpPr>
-          <p:cNvPr id="2" name="Text 2"/>
-          <p:cNvSpPr/>
-          <p:nvPr>
-            <p:ph idx="103" type="title" hasCustomPrompt="1"/>
-          </p:nvPr>
-        </p:nvSpPr>
-        <p:spPr>
-          <a:xfrm>
-            <a:off x="457200" y="502920"/>
-            <a:ext cx="8229600" cy="457200"/>
-          </a:xfrm>
-          <a:prstGeom prst="rect">
-            <a:avLst/>
-          </a:prstGeom>
-          <a:noFill/>
-          <a:ln/>
-        </p:spPr>
-        <p:txBody>
-          <a:bodyPr wrap="square" lIns="0" tIns="0" rIns="0" bIns="0" rtlCol="0" anchor="ctr"/>
-          <a:lstStyle/>
-          <a:p>
-            <a:pPr algn="l" indent="0" marL="0">
-              <a:buNone/>
-            </a:pPr>
-            <a:r>
-              <a:rPr lang="en-US" sz="2000" b="1" spc="200" kern="0" dirty="0">
-                <a:solidFill>
-                  <a:schemeClr val="tx1"/>
-                </a:solidFill>
-              </a:rPr>
-              <a:t>WHERE TO LOOK AT IT</a:t>
-            </a:r>
-            <a:endParaRPr lang="en-US" sz="2000" dirty="0"/>
-          </a:p>
-        </p:txBody>
-      </p:sp>
-      <p:pic>
-        <p:nvPicPr>
-          <p:cNvPr id="3" name="The site card in the chat, with Open" descr="small/real-sitecard.jpg">    </p:cNvPr>
-          <p:cNvPicPr>
-            <a:picLocks noChangeAspect="1"/>
-          </p:cNvPicPr>
-          <p:nvPr/>
-        </p:nvPicPr>
-        <p:blipFill>
-          <a:blip r:embed="rId1"/>
-          <a:stretch>
-            <a:fillRect/>
-          </a:stretch>
-        </p:blipFill>
-        <p:spPr>
-          <a:xfrm>
-            <a:off x="457200" y="1051560"/>
-            <a:ext cx="2981901" cy="3611880"/>
-          </a:xfrm>
-          <a:prstGeom prst="rect">
-            <a:avLst/>
-          </a:prstGeom>
-          <a:effectLst>
-            <a:outerShdw sx="100000" sy="100000" kx="0" ky="0" algn="bl" rotWithShape="0" blurRad="76200" dist="25400" dir="5400000">
-              <a:srgbClr val="000000">
-                <a:alpha val="18000"/>
-              </a:srgbClr>
-            </a:outerShdw>
-          </a:effectLst>
-        </p:spPr>
-      </p:pic>
-      <p:sp>
-        <p:nvSpPr>
-          <p:cNvPr id="4" name="Text 1"/>
-          <p:cNvSpPr txBox="1"/>
-          <p:nvPr/>
-        </p:nvSpPr>
-        <p:spPr>
-          <a:xfrm>
-            <a:off x="3840480" y="1097280"/>
-            <a:ext cx="411480" cy="411480"/>
-          </a:xfrm>
-          <a:prstGeom prst="ellipse">
-            <a:avLst/>
-          </a:prstGeom>
-          <a:solidFill>
-            <a:schemeClr val="accent1"/>
-          </a:solidFill>
-          <a:ln/>
-        </p:spPr>
-        <p:txBody>
-          <a:bodyPr wrap="square" lIns="0" tIns="0" rIns="0" bIns="0" rtlCol="0" anchor="ctr"/>
-          <a:lstStyle/>
-          <a:p>
-            <a:pPr algn="ctr" indent="0" marL="0">
-              <a:buNone/>
-            </a:pPr>
-            <a:r>
-              <a:rPr lang="en-US" sz="1400" b="1" dirty="0">
-                <a:solidFill>
-                  <a:schemeClr val="bg1"/>
-                </a:solidFill>
-              </a:rPr>
-              <a:t>1</a:t>
-            </a:r>
-            <a:endParaRPr lang="en-US" sz="1400" dirty="0"/>
-          </a:p>
-        </p:txBody>
-      </p:sp>
-      <p:sp>
-        <p:nvSpPr>
-          <p:cNvPr id="5" name="Text 2"/>
-          <p:cNvSpPr txBox="1"/>
-          <p:nvPr/>
-        </p:nvSpPr>
-        <p:spPr>
-          <a:xfrm>
-            <a:off x="4389120" y="1051560"/>
-            <a:ext cx="4389120" cy="868680"/>
-          </a:xfrm>
-          <a:prstGeom prst="rect">
-            <a:avLst/>
-          </a:prstGeom>
-          <a:noFill/>
-          <a:ln/>
-        </p:spPr>
-        <p:txBody>
-          <a:bodyPr wrap="square" lIns="0" tIns="0" rIns="0" bIns="0" rtlCol="0" anchor="t"/>
-          <a:lstStyle/>
-          <a:p>
-            <a:pPr indent="0" marL="0">
-              <a:buNone/>
-            </a:pPr>
-            <a:r>
-              <a:rPr lang="en-US" sz="1500" b="1" dirty="0">
-                <a:solidFill>
-                  <a:schemeClr val="tx1"/>
-                </a:solidFill>
-              </a:rPr>
-              <a:t>Click the link Claude sends</a:t>
-            </a:r>
-            <a:endParaRPr lang="en-US" sz="1400" dirty="0"/>
-          </a:p>
-          <a:p>
-            <a:pPr indent="0" marL="0">
-              <a:buNone/>
-            </a:pPr>
-            <a:r>
-              <a:rPr lang="en-US" sz="1300" dirty="0">
-                <a:solidFill>
-                  <a:schemeClr val="accent2"/>
-                </a:solidFill>
-              </a:rPr>
-              <a:t>Like localhost:8000/#brickbench. It opens the page next to the chat, up to date.</a:t>
-            </a:r>
-            <a:endParaRPr lang="en-US" sz="1400" dirty="0"/>
-          </a:p>
-        </p:txBody>
-      </p:sp>
-      <p:sp>
-        <p:nvSpPr>
-          <p:cNvPr id="6" name="Text 3"/>
-          <p:cNvSpPr txBox="1"/>
-          <p:nvPr/>
-        </p:nvSpPr>
-        <p:spPr>
-          <a:xfrm>
-            <a:off x="3840480" y="2029968"/>
-            <a:ext cx="411480" cy="411480"/>
-          </a:xfrm>
-          <a:prstGeom prst="ellipse">
-            <a:avLst/>
-          </a:prstGeom>
-          <a:solidFill>
-            <a:schemeClr val="accent1"/>
-          </a:solidFill>
-          <a:ln/>
-        </p:spPr>
-        <p:txBody>
-          <a:bodyPr wrap="square" lIns="0" tIns="0" rIns="0" bIns="0" rtlCol="0" anchor="ctr"/>
-          <a:lstStyle/>
-          <a:p>
-            <a:pPr algn="ctr" indent="0" marL="0">
-              <a:buNone/>
-            </a:pPr>
-            <a:r>
-              <a:rPr lang="en-US" sz="1400" b="1" dirty="0">
-                <a:solidFill>
-                  <a:schemeClr val="bg1"/>
-                </a:solidFill>
-              </a:rPr>
-              <a:t>2</a:t>
-            </a:r>
-            <a:endParaRPr lang="en-US" sz="1400" dirty="0"/>
-          </a:p>
-        </p:txBody>
-      </p:sp>
-      <p:sp>
-        <p:nvSpPr>
-          <p:cNvPr id="7" name="Text 4"/>
-          <p:cNvSpPr txBox="1"/>
-          <p:nvPr/>
-        </p:nvSpPr>
-        <p:spPr>
-          <a:xfrm>
-            <a:off x="4389120" y="1984248"/>
-            <a:ext cx="4389120" cy="868680"/>
-          </a:xfrm>
-          <a:prstGeom prst="rect">
-            <a:avLst/>
-          </a:prstGeom>
-          <a:noFill/>
-          <a:ln/>
-        </p:spPr>
-        <p:txBody>
-          <a:bodyPr wrap="square" lIns="0" tIns="0" rIns="0" bIns="0" rtlCol="0" anchor="t"/>
-          <a:lstStyle/>
-          <a:p>
-            <a:pPr indent="0" marL="0">
-              <a:buNone/>
-            </a:pPr>
-            <a:r>
-              <a:rPr lang="en-US" sz="1500" b="1" dirty="0">
-                <a:solidFill>
-                  <a:schemeClr val="tx1"/>
-                </a:solidFill>
-              </a:rPr>
-              <a:t>Or the site card</a:t>
-            </a:r>
-            <a:endParaRPr lang="en-US" sz="1400" dirty="0"/>
-          </a:p>
-          <a:p>
-            <a:pPr indent="0" marL="0">
-              <a:buNone/>
-            </a:pPr>
-            <a:r>
-              <a:rPr lang="en-US" sz="1300" dirty="0">
-                <a:solidFill>
-                  <a:schemeClr val="accent2"/>
-                </a:solidFill>
-              </a:rPr>
-              <a:t>Click Open on the card in the chat. The same link also works in Chrome.</a:t>
-            </a:r>
-            <a:endParaRPr lang="en-US" sz="1400" dirty="0"/>
-          </a:p>
-        </p:txBody>
-      </p:sp>
-      <p:sp>
-        <p:nvSpPr>
-          <p:cNvPr id="8" name="Text 5"/>
-          <p:cNvSpPr txBox="1"/>
-          <p:nvPr/>
-        </p:nvSpPr>
-        <p:spPr>
-          <a:xfrm>
-            <a:off x="3840480" y="2962656"/>
-            <a:ext cx="411480" cy="411480"/>
-          </a:xfrm>
-          <a:prstGeom prst="ellipse">
-            <a:avLst/>
-          </a:prstGeom>
-          <a:solidFill>
-            <a:schemeClr val="accent1"/>
-          </a:solidFill>
-          <a:ln/>
-        </p:spPr>
-        <p:txBody>
-          <a:bodyPr wrap="square" lIns="0" tIns="0" rIns="0" bIns="0" rtlCol="0" anchor="ctr"/>
-          <a:lstStyle/>
-          <a:p>
-            <a:pPr algn="ctr" indent="0" marL="0">
-              <a:buNone/>
-            </a:pPr>
-            <a:r>
-              <a:rPr lang="en-US" sz="1400" b="1" dirty="0">
-                <a:solidFill>
-                  <a:schemeClr val="bg1"/>
-                </a:solidFill>
-              </a:rPr>
-              <a:t>3</a:t>
-            </a:r>
-            <a:endParaRPr lang="en-US" sz="1400" dirty="0"/>
-          </a:p>
-        </p:txBody>
-      </p:sp>
-      <p:sp>
-        <p:nvSpPr>
-          <p:cNvPr id="9" name="Text 6"/>
-          <p:cNvSpPr txBox="1"/>
-          <p:nvPr/>
-        </p:nvSpPr>
-        <p:spPr>
-          <a:xfrm>
-            <a:off x="4389120" y="2916936"/>
-            <a:ext cx="4389120" cy="868680"/>
-          </a:xfrm>
-          <a:prstGeom prst="rect">
-            <a:avLst/>
-          </a:prstGeom>
-          <a:noFill/>
-          <a:ln/>
-        </p:spPr>
-        <p:txBody>
-          <a:bodyPr wrap="square" lIns="0" tIns="0" rIns="0" bIns="0" rtlCol="0" anchor="t"/>
-          <a:lstStyle/>
-          <a:p>
-            <a:pPr indent="0" marL="0">
-              <a:buNone/>
-            </a:pPr>
-            <a:r>
-              <a:rPr lang="en-US" sz="1500" b="1" dirty="0">
-                <a:solidFill>
-                  <a:schemeClr val="tx1"/>
-                </a:solidFill>
-              </a:rPr>
-              <a:t>After each change</a:t>
-            </a:r>
-            <a:endParaRPr lang="en-US" sz="1400" dirty="0"/>
-          </a:p>
-          <a:p>
-            <a:pPr indent="0" marL="0">
-              <a:buNone/>
-            </a:pPr>
-            <a:r>
-              <a:rPr lang="en-US" sz="1300" dirty="0">
-                <a:solidFill>
-                  <a:schemeClr val="accent2"/>
-                </a:solidFill>
-              </a:rPr>
-              <a:t>Claude sends the link again, or press the ↻ refresh button.</a:t>
-            </a:r>
-            <a:endParaRPr lang="en-US" sz="1400" dirty="0"/>
-          </a:p>
-        </p:txBody>
-      </p:sp>
-      <p:sp>
-        <p:nvSpPr>
-          <p:cNvPr id="10" name="Shape 7"/>
-          <p:cNvSpPr/>
-          <p:nvPr/>
-        </p:nvSpPr>
-        <p:spPr>
-          <a:xfrm>
-            <a:off x="3840480" y="3886200"/>
-            <a:ext cx="4846320" cy="777240"/>
-          </a:xfrm>
-          <a:prstGeom prst="roundRect">
-            <a:avLst>
-              <a:gd name="adj" fmla="val 4706"/>
-            </a:avLst>
-          </a:prstGeom>
-          <a:solidFill>
-            <a:schemeClr val="tx2"/>
-          </a:solidFill>
-          <a:ln w="9525">
-            <a:solidFill>
-              <a:schemeClr val="tx2"/>
-            </a:solidFill>
-            <a:prstDash val="solid"/>
-          </a:ln>
-        </p:spPr>
-      </p:sp>
-      <p:sp>
-        <p:nvSpPr>
-          <p:cNvPr id="11" name="Text 8"/>
-          <p:cNvSpPr txBox="1"/>
-          <p:nvPr/>
-        </p:nvSpPr>
-        <p:spPr>
-          <a:xfrm>
-            <a:off x="4023360" y="3931920"/>
-            <a:ext cx="4572000" cy="685800"/>
-          </a:xfrm>
-          <a:prstGeom prst="rect">
-            <a:avLst/>
-          </a:prstGeom>
-          <a:noFill/>
-          <a:ln/>
-        </p:spPr>
-        <p:txBody>
-          <a:bodyPr wrap="square" lIns="0" tIns="0" rIns="0" bIns="0" rtlCol="0" anchor="ctr"/>
-          <a:lstStyle/>
-          <a:p>
-            <a:pPr indent="0" marL="0">
-              <a:buNone/>
-            </a:pPr>
-            <a:r>
-              <a:rPr lang="en-US" sz="1300" b="1" dirty="0">
-                <a:solidFill>
-                  <a:schemeClr val="bg1"/>
-                </a:solidFill>
-              </a:rPr>
-              <a:t>"This site can't be reached"? </a:t>
-            </a:r>
-            <a:pPr indent="0" marL="0">
-              <a:buNone/>
-            </a:pPr>
-            <a:r>
-              <a:rPr lang="en-US" sz="1300" dirty="0">
-                <a:solidFill>
-                  <a:schemeClr val="bg1"/>
-                </a:solidFill>
-              </a:rPr>
-              <a:t>The copy is switched off. Ask Claude to start the site again.</a:t>
-            </a:r>
-            <a:endParaRPr lang="en-US" sz="1300" dirty="0"/>
-          </a:p>
-        </p:txBody>
-      </p:sp>
-      <p:sp>
-        <p:nvSpPr>
-          <p:cNvPr id="25" name="Slide Number Placeholder 0"/>
-          <p:cNvSpPr>
-            <a:spLocks noGrp="1"/>
-          </p:cNvSpPr>
-          <p:nvPr>
-            <p:ph type="sldNum" sz="quarter" idx="4294967295"/>
-          </p:nvPr>
-        </p:nvSpPr>
-        <p:spPr>
-          <a:xfrm>
-            <a:off x="8503920" y="4754880"/>
-            <a:ext cx="365760" cy="274320"/>
-          </a:xfrm>
-          <a:prstGeom prst="rect">
-            <a:avLst/>
-          </a:prstGeom>
-          <a:extLst>
-            <a:ext uri="{C572A759-6A51-4108-AA02-DFA0A04FC94B}">
-              <ma14:wrappingTextBoxFlag xmlns:ma14="http://schemas.microsoft.com/office/mac/drawingml/2011/main" val="0"/>
-            </a:ext>
-          </a:extLst>
-        </p:spPr>
-        <p:txBody>
-          <a:bodyPr/>
-          <a:lstStyle>
-            <a:lvl1pPr>
-              <a:defRPr sz="1000">
-                <a:solidFill>
-                  <a:schemeClr val="accent3"/>
-                </a:solidFill>
-              </a:defRPr>
-            </a:lvl1pPr>
-          </a:lstStyle>
-          <a:p>
-            <a:pPr algn="l"/>
-            <a:fld id="{F7021451-1387-4CA6-816F-3879F97B5CBC}" type="slidenum">
-              <a:rPr b="0" lang="en-US"/>
-              <a:t>14</a:t>
             </a:fld>
             <a:endParaRPr lang="en-US"/>
           </a:p>
@@ -4725,7 +3585,7 @@
       </p:sp>
       <p:pic>
         <p:nvPicPr>
-          <p:cNvPr id="3" name="A round: the chat on the left, the new page on the right" descr="small/real-round.jpg">    </p:cNvPr>
+          <p:cNvPr id="4" name="Simulated round" descr="Claude Code session beside the local Brick bench site">    </p:cNvPr>
           <p:cNvPicPr>
             <a:picLocks noChangeAspect="1"/>
           </p:cNvPicPr>
@@ -4739,8 +3599,8 @@
         </p:blipFill>
         <p:spPr>
           <a:xfrm>
-            <a:off x="457200" y="1051560"/>
-            <a:ext cx="5669280" cy="3429914"/>
+            <a:off x="457200" y="1220724"/>
+            <a:ext cx="5486400" cy="3319272"/>
           </a:xfrm>
           <a:prstGeom prst="rect">
             <a:avLst/>
@@ -4756,14 +3616,14 @@
       </p:pic>
       <p:sp>
         <p:nvSpPr>
-          <p:cNvPr id="4" name="Text 1"/>
+          <p:cNvPr id="5" name="Text 2"/>
           <p:cNvSpPr txBox="1"/>
           <p:nvPr/>
         </p:nvSpPr>
         <p:spPr>
           <a:xfrm>
-            <a:off x="6400800" y="1188720"/>
-            <a:ext cx="2377440" cy="2743200"/>
+            <a:off x="6126480" y="1188720"/>
+            <a:ext cx="2651760" cy="2743200"/>
           </a:xfrm>
           <a:prstGeom prst="rect">
             <a:avLst/>
@@ -4779,28 +3639,28 @@
               <a:buNone/>
             </a:pPr>
             <a:r>
-              <a:rPr lang="en-US" sz="1300" b="1" dirty="0">
+              <a:rPr lang="en-US" sz="1400" b="1" dirty="0">
                 <a:solidFill>
                   <a:schemeClr val="tx1"/>
                 </a:solidFill>
               </a:rPr>
               <a:t>Claude makes one change</a:t>
             </a:r>
-            <a:endParaRPr lang="en-US" sz="1300" dirty="0"/>
-          </a:p>
-          <a:p>
-            <a:pPr indent="0" marL="0">
-              <a:buNone/>
-            </a:pPr>
-            <a:r>
-              <a:rPr lang="en-US" sz="1300" dirty="0">
+            <a:endParaRPr lang="en-US" sz="1400" dirty="0"/>
+          </a:p>
+          <a:p>
+            <a:pPr indent="0" marL="0">
+              <a:buNone/>
+            </a:pPr>
+            <a:r>
+              <a:rPr lang="en-US" sz="1400" dirty="0">
                 <a:solidFill>
                   <a:schemeClr val="accent2"/>
                 </a:solidFill>
               </a:rPr>
-              <a:t>And asks if it looks right.</a:t>
-            </a:r>
-            <a:endParaRPr lang="en-US" sz="1300" dirty="0"/>
+              <a:t>And tells you exactly where to look.</a:t>
+            </a:r>
+            <a:endParaRPr lang="en-US" sz="1400" dirty="0"/>
           </a:p>
           <a:p>
             <a:pPr indent="0" marL="0">
@@ -4814,35 +3674,35 @@
               </a:rPr>
               <a:t> </a:t>
             </a:r>
-            <a:endParaRPr lang="en-US" sz="1300" dirty="0"/>
-          </a:p>
-          <a:p>
-            <a:pPr indent="0" marL="0">
-              <a:buNone/>
-            </a:pPr>
-            <a:r>
-              <a:rPr lang="en-US" sz="1300" b="1" dirty="0">
+            <a:endParaRPr lang="en-US" sz="1400" dirty="0"/>
+          </a:p>
+          <a:p>
+            <a:pPr indent="0" marL="0">
+              <a:buNone/>
+            </a:pPr>
+            <a:r>
+              <a:rPr lang="en-US" sz="1400" b="1" dirty="0">
                 <a:solidFill>
                   <a:schemeClr val="tx1"/>
                 </a:solidFill>
               </a:rPr>
-              <a:t>You look at it, right there</a:t>
-            </a:r>
-            <a:endParaRPr lang="en-US" sz="1300" dirty="0"/>
-          </a:p>
-          <a:p>
-            <a:pPr indent="0" marL="0">
-              <a:buNone/>
-            </a:pPr>
-            <a:r>
-              <a:rPr lang="en-US" sz="1300" dirty="0">
+              <a:t>You check the local site</a:t>
+            </a:r>
+            <a:endParaRPr lang="en-US" sz="1400" dirty="0"/>
+          </a:p>
+          <a:p>
+            <a:pPr indent="0" marL="0">
+              <a:buNone/>
+            </a:pPr>
+            <a:r>
+              <a:rPr lang="en-US" sz="1400" dirty="0">
                 <a:solidFill>
                   <a:schemeClr val="accent2"/>
                 </a:solidFill>
               </a:rPr>
-              <a:t>Orbit the 3D view, change the settings, read the parts list.</a:t>
-            </a:r>
-            <a:endParaRPr lang="en-US" sz="1300" dirty="0"/>
+              <a:t>Try it, come back to the chat.</a:t>
+            </a:r>
+            <a:endParaRPr lang="en-US" sz="1400" dirty="0"/>
           </a:p>
           <a:p>
             <a:pPr indent="0" marL="0">
@@ -4856,48 +3716,48 @@
               </a:rPr>
               <a:t> </a:t>
             </a:r>
-            <a:endParaRPr lang="en-US" sz="1300" dirty="0"/>
-          </a:p>
-          <a:p>
-            <a:pPr indent="0" marL="0">
-              <a:buNone/>
-            </a:pPr>
-            <a:r>
-              <a:rPr lang="en-US" sz="1300" b="1" dirty="0">
+            <a:endParaRPr lang="en-US" sz="1400" dirty="0"/>
+          </a:p>
+          <a:p>
+            <a:pPr indent="0" marL="0">
+              <a:buNone/>
+            </a:pPr>
+            <a:r>
+              <a:rPr lang="en-US" sz="1400" b="1" dirty="0">
                 <a:solidFill>
                   <a:schemeClr val="tx1"/>
                 </a:solidFill>
               </a:rPr>
-              <a:t>You say what to change</a:t>
-            </a:r>
-            <a:endParaRPr lang="en-US" sz="1300" dirty="0"/>
-          </a:p>
-          <a:p>
-            <a:pPr indent="0" marL="0">
-              <a:buNone/>
-            </a:pPr>
-            <a:r>
-              <a:rPr lang="en-US" sz="1300" dirty="0">
+              <a:t>You say what you think</a:t>
+            </a:r>
+            <a:endParaRPr lang="en-US" sz="1400" dirty="0"/>
+          </a:p>
+          <a:p>
+            <a:pPr indent="0" marL="0">
+              <a:buNone/>
+            </a:pPr>
+            <a:r>
+              <a:rPr lang="en-US" sz="1400" dirty="0">
                 <a:solidFill>
                   <a:schemeClr val="accent2"/>
                 </a:solidFill>
               </a:rPr>
-              <a:t>In plain words, as a list if you like. Claude does the next round.</a:t>
-            </a:r>
-            <a:endParaRPr lang="en-US" sz="1300" dirty="0"/>
-          </a:p>
-        </p:txBody>
-      </p:sp>
-      <p:sp>
-        <p:nvSpPr>
-          <p:cNvPr id="5" name="Shape 2"/>
+              <a:t>Click "Looks right", or say it in plain words: "rename this", "add a height setting".</a:t>
+            </a:r>
+            <a:endParaRPr lang="en-US" sz="1400" dirty="0"/>
+          </a:p>
+        </p:txBody>
+      </p:sp>
+      <p:sp>
+        <p:nvSpPr>
+          <p:cNvPr id="6" name="Shape 3"/>
           <p:cNvSpPr/>
           <p:nvPr/>
         </p:nvSpPr>
         <p:spPr>
           <a:xfrm>
-            <a:off x="6400800" y="3291840"/>
-            <a:ext cx="2377440" cy="777240"/>
+            <a:off x="6126480" y="3611880"/>
+            <a:ext cx="2651760" cy="777240"/>
           </a:xfrm>
           <a:prstGeom prst="roundRect">
             <a:avLst>
@@ -4917,14 +3777,14 @@
       </p:sp>
       <p:sp>
         <p:nvSpPr>
-          <p:cNvPr id="6" name="Text 3"/>
+          <p:cNvPr id="7" name="Text 4"/>
           <p:cNvSpPr txBox="1"/>
           <p:nvPr/>
         </p:nvSpPr>
         <p:spPr>
           <a:xfrm>
-            <a:off x="6510528" y="3337560"/>
-            <a:ext cx="2194560" cy="685800"/>
+            <a:off x="6263640" y="3657600"/>
+            <a:ext cx="2377440" cy="685800"/>
           </a:xfrm>
           <a:prstGeom prst="rect">
             <a:avLst/>
@@ -4940,14 +3800,14 @@
               <a:buNone/>
             </a:pPr>
             <a:r>
-              <a:rPr lang="en-US" sz="1100" dirty="0">
+              <a:rPr lang="en-US" sz="1200" dirty="0">
                 <a:solidFill>
                   <a:schemeClr val="tx1"/>
                 </a:solidFill>
               </a:rPr>
               <a:t>Each round is saved, so nothing is lost if you change your mind.</a:t>
             </a:r>
-            <a:endParaRPr lang="en-US" sz="1100" dirty="0"/>
+            <a:endParaRPr lang="en-US" sz="1200" dirty="0"/>
           </a:p>
         </p:txBody>
       </p:sp>
@@ -4991,279 +3851,6 @@
             <a:fld id="{F7021451-1387-4CA6-816F-3879F97B5CBC}" type="slidenum">
               <a:rPr b="0" lang="en-US"/>
               <a:t>15</a:t>
-            </a:fld>
-            <a:endParaRPr lang="en-US"/>
-          </a:p>
-        </p:txBody>
-      </p:sp>
-    </p:spTree>
-  </p:cSld>
-  <p:clrMapOvr>
-    <a:masterClrMapping/>
-  </p:clrMapOvr>
-</p:sld>
-</file>
-
-<file path=ppt/slides/slide16.xml><?xml version="1.0" encoding="utf-8"?>
-<p:sld xmlns:a="http://schemas.openxmlformats.org/drawingml/2006/main" xmlns:r="http://schemas.openxmlformats.org/officeDocument/2006/relationships" xmlns:p="http://schemas.openxmlformats.org/presentationml/2006/main">
-  <p:cSld name="Slide 16">
-    <p:spTree>
-      <p:nvGrpSpPr>
-        <p:cNvPr id="1" name=""/>
-        <p:cNvGrpSpPr/>
-        <p:nvPr/>
-      </p:nvGrpSpPr>
-      <p:grpSpPr>
-        <a:xfrm>
-          <a:off x="0" y="0"/>
-          <a:ext cx="0" cy="0"/>
-          <a:chOff x="0" y="0"/>
-          <a:chExt cx="0" cy="0"/>
-        </a:xfrm>
-      </p:grpSpPr>
-      <p:sp>
-        <p:nvSpPr>
-          <p:cNvPr id="2" name="Text 2"/>
-          <p:cNvSpPr/>
-          <p:nvPr>
-            <p:ph idx="103" type="title" hasCustomPrompt="1"/>
-          </p:nvPr>
-        </p:nvSpPr>
-        <p:spPr>
-          <a:xfrm>
-            <a:off x="457200" y="502920"/>
-            <a:ext cx="8229600" cy="457200"/>
-          </a:xfrm>
-          <a:prstGeom prst="rect">
-            <a:avLst/>
-          </a:prstGeom>
-          <a:noFill/>
-          <a:ln/>
-        </p:spPr>
-        <p:txBody>
-          <a:bodyPr wrap="square" lIns="0" tIns="0" rIns="0" bIns="0" rtlCol="0" anchor="ctr"/>
-          <a:lstStyle/>
-          <a:p>
-            <a:pPr algn="l" indent="0" marL="0">
-              <a:buNone/>
-            </a:pPr>
-            <a:r>
-              <a:rPr lang="en-US" sz="2000" b="1" spc="200" kern="0" dirty="0">
-                <a:solidFill>
-                  <a:schemeClr val="tx1"/>
-                </a:solidFill>
-              </a:rPr>
-              <a:t>NEW PIECE? IT STARTS WITH A BRIEF</a:t>
-            </a:r>
-            <a:endParaRPr lang="en-US" sz="2000" dirty="0"/>
-          </a:p>
-        </p:txBody>
-      </p:sp>
-      <p:pic>
-        <p:nvPicPr>
-          <p:cNvPr id="3" name="The Brick bench design brief on GitHub" descr="small/gh-brief.jpg">    </p:cNvPr>
-          <p:cNvPicPr>
-            <a:picLocks noChangeAspect="1"/>
-          </p:cNvPicPr>
-          <p:nvPr/>
-        </p:nvPicPr>
-        <p:blipFill>
-          <a:blip r:embed="rId1"/>
-          <a:stretch>
-            <a:fillRect/>
-          </a:stretch>
-        </p:blipFill>
-        <p:spPr>
-          <a:xfrm>
-            <a:off x="457200" y="1051560"/>
-            <a:ext cx="4708946" cy="3611880"/>
-          </a:xfrm>
-          <a:prstGeom prst="rect">
-            <a:avLst/>
-          </a:prstGeom>
-          <a:effectLst>
-            <a:outerShdw sx="100000" sy="100000" kx="0" ky="0" algn="bl" rotWithShape="0" blurRad="76200" dist="25400" dir="5400000">
-              <a:srgbClr val="000000">
-                <a:alpha val="18000"/>
-              </a:srgbClr>
-            </a:outerShdw>
-          </a:effectLst>
-        </p:spPr>
-      </p:pic>
-      <p:sp>
-        <p:nvSpPr>
-          <p:cNvPr id="4" name="Text 1"/>
-          <p:cNvSpPr txBox="1"/>
-          <p:nvPr/>
-        </p:nvSpPr>
-        <p:spPr>
-          <a:xfrm>
-            <a:off x="5669280" y="1188720"/>
-            <a:ext cx="3108960" cy="3474720"/>
-          </a:xfrm>
-          <a:prstGeom prst="rect">
-            <a:avLst/>
-          </a:prstGeom>
-          <a:noFill/>
-          <a:ln/>
-        </p:spPr>
-        <p:txBody>
-          <a:bodyPr wrap="square" lIns="0" tIns="0" rIns="0" bIns="0" rtlCol="0" anchor="t"/>
-          <a:lstStyle/>
-          <a:p>
-            <a:pPr indent="0" marL="0">
-              <a:buNone/>
-            </a:pPr>
-            <a:r>
-              <a:rPr lang="en-US" sz="1300" b="1" dirty="0">
-                <a:solidFill>
-                  <a:schemeClr val="tx1"/>
-                </a:solidFill>
-              </a:rPr>
-              <a:t>An interview first</a:t>
-            </a:r>
-            <a:endParaRPr lang="en-US" sz="1300" dirty="0"/>
-          </a:p>
-          <a:p>
-            <a:pPr indent="0" marL="0">
-              <a:buNone/>
-            </a:pPr>
-            <a:r>
-              <a:rPr lang="en-US" sz="1300" dirty="0">
-                <a:solidFill>
-                  <a:schemeClr val="accent2"/>
-                </a:solidFill>
-              </a:rPr>
-              <a:t>Claude asks one topic at a time: pictures, parts, how it goes together, what people can change.</a:t>
-            </a:r>
-            <a:endParaRPr lang="en-US" sz="1300" dirty="0"/>
-          </a:p>
-          <a:p>
-            <a:pPr indent="0" marL="0">
-              <a:buNone/>
-            </a:pPr>
-            <a:r>
-              <a:rPr lang="en-US" sz="800" dirty="0">
-                <a:solidFill>
-                  <a:schemeClr val="tx1"/>
-                </a:solidFill>
-              </a:rPr>
-              <a:t> </a:t>
-            </a:r>
-            <a:endParaRPr lang="en-US" sz="1300" dirty="0"/>
-          </a:p>
-          <a:p>
-            <a:pPr indent="0" marL="0">
-              <a:buNone/>
-            </a:pPr>
-            <a:r>
-              <a:rPr lang="en-US" sz="1300" b="1" dirty="0">
-                <a:solidFill>
-                  <a:schemeClr val="tx1"/>
-                </a:solidFill>
-              </a:rPr>
-              <a:t>Written down as a brief</a:t>
-            </a:r>
-            <a:endParaRPr lang="en-US" sz="1300" dirty="0"/>
-          </a:p>
-          <a:p>
-            <a:pPr indent="0" marL="0">
-              <a:buNone/>
-            </a:pPr>
-            <a:r>
-              <a:rPr lang="en-US" sz="1300" dirty="0">
-                <a:solidFill>
-                  <a:schemeClr val="accent2"/>
-                </a:solidFill>
-              </a:rPr>
-              <a:t>docs/designs/brick-bench.md: parts and sources, settings, rules, warnings, assembly.</a:t>
-            </a:r>
-            <a:endParaRPr lang="en-US" sz="1300" dirty="0"/>
-          </a:p>
-          <a:p>
-            <a:pPr indent="0" marL="0">
-              <a:buNone/>
-            </a:pPr>
-            <a:r>
-              <a:rPr lang="en-US" sz="800" dirty="0">
-                <a:solidFill>
-                  <a:schemeClr val="tx1"/>
-                </a:solidFill>
-              </a:rPr>
-              <a:t> </a:t>
-            </a:r>
-            <a:endParaRPr lang="en-US" sz="1300" dirty="0"/>
-          </a:p>
-          <a:p>
-            <a:pPr indent="0" marL="0">
-              <a:buNone/>
-            </a:pPr>
-            <a:r>
-              <a:rPr lang="en-US" sz="1300" b="1" dirty="0">
-                <a:solidFill>
-                  <a:schemeClr val="tx1"/>
-                </a:solidFill>
-              </a:rPr>
-              <a:t>Unknown means unknown</a:t>
-            </a:r>
-            <a:endParaRPr lang="en-US" sz="1300" dirty="0"/>
-          </a:p>
-          <a:p>
-            <a:pPr indent="0" marL="0">
-              <a:buNone/>
-            </a:pPr>
-            <a:r>
-              <a:rPr lang="en-US" sz="1300" dirty="0">
-                <a:solidFill>
-                  <a:schemeClr val="accent2"/>
-                </a:solidFill>
-              </a:rPr>
-              <a:t>The rod support block's sizes went on a "to measure" list instead of a guess.</a:t>
-            </a:r>
-            <a:endParaRPr lang="en-US" sz="1300" dirty="0"/>
-          </a:p>
-        </p:txBody>
-      </p:sp>
-      <p:sp>
-        <p:nvSpPr>
-          <p:cNvPr id="25" name="Slide Number Placeholder 0"/>
-          <p:cNvSpPr>
-            <a:spLocks noGrp="1"/>
-          </p:cNvSpPr>
-          <p:nvPr>
-            <p:ph type="sldNum" sz="quarter" idx="4294967295"/>
-          </p:nvPr>
-        </p:nvSpPr>
-        <p:spPr>
-          <a:xfrm>
-            <a:off x="8503920" y="4754880"/>
-            <a:ext cx="365760" cy="274320"/>
-          </a:xfrm>
-          <a:prstGeom prst="rect">
-            <a:avLst/>
-          </a:prstGeom>
-          <a:extLst>
-            <a:ext uri="{C572A759-6A51-4108-AA02-DFA0A04FC94B}">
-              <ma14:wrappingTextBoxFlag xmlns:ma14="http://schemas.microsoft.com/office/mac/drawingml/2011/main" val="0"/>
-            </a:ext>
-          </a:extLst>
-        </p:spPr>
-        <p:txBody>
-          <a:bodyPr/>
-          <a:lstStyle>
-            <a:lvl1pPr>
-              <a:defRPr sz="1000">
-                <a:solidFill>
-                  <a:schemeClr val="accent3"/>
-                </a:solidFill>
-              </a:defRPr>
-            </a:lvl1pPr>
-          </a:lstStyle>
-          <a:p>
-            <a:pPr algn="l"/>
-            <a:fld id="{F7021451-1387-4CA6-816F-3879F97B5CBC}" type="slidenum">
-              <a:rPr b="0" lang="en-US"/>
-              <a:t>16</a:t>
             </a:fld>
             <a:endParaRPr lang="en-US"/>
           </a:p>
@@ -5326,7 +3913,7 @@
                   <a:schemeClr val="tx1"/>
                 </a:solidFill>
               </a:rPr>
-              <a:t>CHANGING THE SITE? SHOW WHAT YOU MEAN</a:t>
+              <a:t>BEFORE SENDING: TRY IT ALL</a:t>
             </a:r>
             <a:endParaRPr lang="en-US" sz="2000" dirty="0"/>
           </a:p>
@@ -5334,50 +3921,685 @@
       </p:sp>
       <p:sp>
         <p:nvSpPr>
-          <p:cNvPr id="3" name="SIMULATED EXAMPLE tag"/>
+          <p:cNvPr id="3" name="Text 1"/>
           <p:cNvSpPr txBox="1"/>
           <p:nvPr/>
         </p:nvSpPr>
         <p:spPr>
           <a:xfrm>
-            <a:off x="6949440" y="73152"/>
-            <a:ext cx="1920240" cy="237744"/>
+            <a:off x="457200" y="1097280"/>
+            <a:ext cx="274320" cy="365760"/>
           </a:xfrm>
           <a:prstGeom prst="rect">
             <a:avLst/>
           </a:prstGeom>
           <a:noFill/>
+          <a:ln/>
+        </p:spPr>
+        <p:txBody>
+          <a:bodyPr wrap="square" lIns="0" tIns="0" rIns="0" bIns="0" rtlCol="0" anchor="t"/>
+          <a:lstStyle/>
+          <a:p>
+            <a:pPr indent="0" marL="0">
+              <a:buNone/>
+            </a:pPr>
+            <a:r>
+              <a:rPr lang="en-US" sz="1600" b="1" dirty="0">
+                <a:solidFill>
+                  <a:schemeClr val="accent1"/>
+                </a:solidFill>
+              </a:rPr>
+              <a:t>✓</a:t>
+            </a:r>
+            <a:endParaRPr lang="en-US" sz="1600" dirty="0"/>
+          </a:p>
+        </p:txBody>
+      </p:sp>
+      <p:sp>
+        <p:nvSpPr>
+          <p:cNvPr id="4" name="Text 2"/>
+          <p:cNvSpPr txBox="1"/>
+          <p:nvPr/>
+        </p:nvSpPr>
+        <p:spPr>
+          <a:xfrm>
+            <a:off x="777240" y="1115568"/>
+            <a:ext cx="2194560" cy="411480"/>
+          </a:xfrm>
+          <a:prstGeom prst="rect">
+            <a:avLst/>
+          </a:prstGeom>
+          <a:noFill/>
+          <a:ln/>
+        </p:spPr>
+        <p:txBody>
+          <a:bodyPr wrap="square" lIns="0" tIns="0" rIns="0" bIns="0" rtlCol="0" anchor="t"/>
+          <a:lstStyle/>
+          <a:p>
+            <a:pPr indent="0" marL="0">
+              <a:buNone/>
+            </a:pPr>
+            <a:r>
+              <a:rPr lang="en-US" sz="1400" dirty="0">
+                <a:solidFill>
+                  <a:schemeClr val="tx1"/>
+                </a:solidFill>
+              </a:rPr>
+              <a:t>Smallest and largest sizes</a:t>
+            </a:r>
+            <a:endParaRPr lang="en-US" sz="1400" dirty="0"/>
+          </a:p>
+        </p:txBody>
+      </p:sp>
+      <p:sp>
+        <p:nvSpPr>
+          <p:cNvPr id="5" name="Text 3"/>
+          <p:cNvSpPr txBox="1"/>
+          <p:nvPr/>
+        </p:nvSpPr>
+        <p:spPr>
+          <a:xfrm>
+            <a:off x="3017520" y="1097280"/>
+            <a:ext cx="274320" cy="365760"/>
+          </a:xfrm>
+          <a:prstGeom prst="rect">
+            <a:avLst/>
+          </a:prstGeom>
+          <a:noFill/>
+          <a:ln/>
+        </p:spPr>
+        <p:txBody>
+          <a:bodyPr wrap="square" lIns="0" tIns="0" rIns="0" bIns="0" rtlCol="0" anchor="t"/>
+          <a:lstStyle/>
+          <a:p>
+            <a:pPr indent="0" marL="0">
+              <a:buNone/>
+            </a:pPr>
+            <a:r>
+              <a:rPr lang="en-US" sz="1600" b="1" dirty="0">
+                <a:solidFill>
+                  <a:schemeClr val="accent1"/>
+                </a:solidFill>
+              </a:rPr>
+              <a:t>✓</a:t>
+            </a:r>
+            <a:endParaRPr lang="en-US" sz="1600" dirty="0"/>
+          </a:p>
+        </p:txBody>
+      </p:sp>
+      <p:sp>
+        <p:nvSpPr>
+          <p:cNvPr id="6" name="Text 4"/>
+          <p:cNvSpPr txBox="1"/>
+          <p:nvPr/>
+        </p:nvSpPr>
+        <p:spPr>
+          <a:xfrm>
+            <a:off x="3337560" y="1115568"/>
+            <a:ext cx="2194560" cy="411480"/>
+          </a:xfrm>
+          <a:prstGeom prst="rect">
+            <a:avLst/>
+          </a:prstGeom>
+          <a:noFill/>
+          <a:ln/>
+        </p:spPr>
+        <p:txBody>
+          <a:bodyPr wrap="square" lIns="0" tIns="0" rIns="0" bIns="0" rtlCol="0" anchor="t"/>
+          <a:lstStyle/>
+          <a:p>
+            <a:pPr indent="0" marL="0">
+              <a:buNone/>
+            </a:pPr>
+            <a:r>
+              <a:rPr lang="en-US" sz="1400" dirty="0">
+                <a:solidFill>
+                  <a:schemeClr val="tx1"/>
+                </a:solidFill>
+              </a:rPr>
+              <a:t>Each option on and off</a:t>
+            </a:r>
+            <a:endParaRPr lang="en-US" sz="1400" dirty="0"/>
+          </a:p>
+        </p:txBody>
+      </p:sp>
+      <p:sp>
+        <p:nvSpPr>
+          <p:cNvPr id="7" name="Text 5"/>
+          <p:cNvSpPr txBox="1"/>
+          <p:nvPr/>
+        </p:nvSpPr>
+        <p:spPr>
+          <a:xfrm>
+            <a:off x="457200" y="1645920"/>
+            <a:ext cx="274320" cy="365760"/>
+          </a:xfrm>
+          <a:prstGeom prst="rect">
+            <a:avLst/>
+          </a:prstGeom>
+          <a:noFill/>
+          <a:ln/>
+        </p:spPr>
+        <p:txBody>
+          <a:bodyPr wrap="square" lIns="0" tIns="0" rIns="0" bIns="0" rtlCol="0" anchor="t"/>
+          <a:lstStyle/>
+          <a:p>
+            <a:pPr indent="0" marL="0">
+              <a:buNone/>
+            </a:pPr>
+            <a:r>
+              <a:rPr lang="en-US" sz="1600" b="1" dirty="0">
+                <a:solidFill>
+                  <a:schemeClr val="accent1"/>
+                </a:solidFill>
+              </a:rPr>
+              <a:t>✓</a:t>
+            </a:r>
+            <a:endParaRPr lang="en-US" sz="1600" dirty="0"/>
+          </a:p>
+        </p:txBody>
+      </p:sp>
+      <p:sp>
+        <p:nvSpPr>
+          <p:cNvPr id="8" name="Text 6"/>
+          <p:cNvSpPr txBox="1"/>
+          <p:nvPr/>
+        </p:nvSpPr>
+        <p:spPr>
+          <a:xfrm>
+            <a:off x="777240" y="1664208"/>
+            <a:ext cx="2194560" cy="411480"/>
+          </a:xfrm>
+          <a:prstGeom prst="rect">
+            <a:avLst/>
+          </a:prstGeom>
+          <a:noFill/>
+          <a:ln/>
+        </p:spPr>
+        <p:txBody>
+          <a:bodyPr wrap="square" lIns="0" tIns="0" rIns="0" bIns="0" rtlCol="0" anchor="t"/>
+          <a:lstStyle/>
+          <a:p>
+            <a:pPr indent="0" marL="0">
+              <a:buNone/>
+            </a:pPr>
+            <a:r>
+              <a:rPr lang="en-US" sz="1400" dirty="0">
+                <a:solidFill>
+                  <a:schemeClr val="tx1"/>
+                </a:solidFill>
+              </a:rPr>
+              <a:t>Make each warning appear</a:t>
+            </a:r>
+            <a:endParaRPr lang="en-US" sz="1400" dirty="0"/>
+          </a:p>
+        </p:txBody>
+      </p:sp>
+      <p:sp>
+        <p:nvSpPr>
+          <p:cNvPr id="9" name="Text 7"/>
+          <p:cNvSpPr txBox="1"/>
+          <p:nvPr/>
+        </p:nvSpPr>
+        <p:spPr>
+          <a:xfrm>
+            <a:off x="3017520" y="1645920"/>
+            <a:ext cx="274320" cy="365760"/>
+          </a:xfrm>
+          <a:prstGeom prst="rect">
+            <a:avLst/>
+          </a:prstGeom>
+          <a:noFill/>
+          <a:ln/>
+        </p:spPr>
+        <p:txBody>
+          <a:bodyPr wrap="square" lIns="0" tIns="0" rIns="0" bIns="0" rtlCol="0" anchor="t"/>
+          <a:lstStyle/>
+          <a:p>
+            <a:pPr indent="0" marL="0">
+              <a:buNone/>
+            </a:pPr>
+            <a:r>
+              <a:rPr lang="en-US" sz="1600" b="1" dirty="0">
+                <a:solidFill>
+                  <a:schemeClr val="accent1"/>
+                </a:solidFill>
+              </a:rPr>
+              <a:t>✓</a:t>
+            </a:r>
+            <a:endParaRPr lang="en-US" sz="1600" dirty="0"/>
+          </a:p>
+        </p:txBody>
+      </p:sp>
+      <p:sp>
+        <p:nvSpPr>
+          <p:cNvPr id="10" name="Text 8"/>
+          <p:cNvSpPr txBox="1"/>
+          <p:nvPr/>
+        </p:nvSpPr>
+        <p:spPr>
+          <a:xfrm>
+            <a:off x="3337560" y="1664208"/>
+            <a:ext cx="2194560" cy="411480"/>
+          </a:xfrm>
+          <a:prstGeom prst="rect">
+            <a:avLst/>
+          </a:prstGeom>
+          <a:noFill/>
+          <a:ln/>
+        </p:spPr>
+        <p:txBody>
+          <a:bodyPr wrap="square" lIns="0" tIns="0" rIns="0" bIns="0" rtlCol="0" anchor="t"/>
+          <a:lstStyle/>
+          <a:p>
+            <a:pPr indent="0" marL="0">
+              <a:buNone/>
+            </a:pPr>
+            <a:r>
+              <a:rPr lang="en-US" sz="1400" dirty="0">
+                <a:solidFill>
+                  <a:schemeClr val="tx1"/>
+                </a:solidFill>
+              </a:rPr>
+              <a:t>Click parts in the 3D view</a:t>
+            </a:r>
+            <a:endParaRPr lang="en-US" sz="1400" dirty="0"/>
+          </a:p>
+        </p:txBody>
+      </p:sp>
+      <p:sp>
+        <p:nvSpPr>
+          <p:cNvPr id="11" name="Text 9"/>
+          <p:cNvSpPr txBox="1"/>
+          <p:nvPr/>
+        </p:nvSpPr>
+        <p:spPr>
+          <a:xfrm>
+            <a:off x="457200" y="2194560"/>
+            <a:ext cx="274320" cy="365760"/>
+          </a:xfrm>
+          <a:prstGeom prst="rect">
+            <a:avLst/>
+          </a:prstGeom>
+          <a:noFill/>
+          <a:ln/>
+        </p:spPr>
+        <p:txBody>
+          <a:bodyPr wrap="square" lIns="0" tIns="0" rIns="0" bIns="0" rtlCol="0" anchor="t"/>
+          <a:lstStyle/>
+          <a:p>
+            <a:pPr indent="0" marL="0">
+              <a:buNone/>
+            </a:pPr>
+            <a:r>
+              <a:rPr lang="en-US" sz="1600" b="1" dirty="0">
+                <a:solidFill>
+                  <a:schemeClr val="accent1"/>
+                </a:solidFill>
+              </a:rPr>
+              <a:t>✓</a:t>
+            </a:r>
+            <a:endParaRPr lang="en-US" sz="1600" dirty="0"/>
+          </a:p>
+        </p:txBody>
+      </p:sp>
+      <p:sp>
+        <p:nvSpPr>
+          <p:cNvPr id="12" name="Text 10"/>
+          <p:cNvSpPr txBox="1"/>
+          <p:nvPr/>
+        </p:nvSpPr>
+        <p:spPr>
+          <a:xfrm>
+            <a:off x="777240" y="2212848"/>
+            <a:ext cx="2194560" cy="411480"/>
+          </a:xfrm>
+          <a:prstGeom prst="rect">
+            <a:avLst/>
+          </a:prstGeom>
+          <a:noFill/>
+          <a:ln/>
+        </p:spPr>
+        <p:txBody>
+          <a:bodyPr wrap="square" lIns="0" tIns="0" rIns="0" bIns="0" rtlCol="0" anchor="t"/>
+          <a:lstStyle/>
+          <a:p>
+            <a:pPr indent="0" marL="0">
+              <a:buNone/>
+            </a:pPr>
+            <a:r>
+              <a:rPr lang="en-US" sz="1400" dirty="0">
+                <a:solidFill>
+                  <a:schemeClr val="tx1"/>
+                </a:solidFill>
+              </a:rPr>
+              <a:t>Find it in the top menu</a:t>
+            </a:r>
+            <a:endParaRPr lang="en-US" sz="1400" dirty="0"/>
+          </a:p>
+        </p:txBody>
+      </p:sp>
+      <p:sp>
+        <p:nvSpPr>
+          <p:cNvPr id="13" name="Text 11"/>
+          <p:cNvSpPr txBox="1"/>
+          <p:nvPr/>
+        </p:nvSpPr>
+        <p:spPr>
+          <a:xfrm>
+            <a:off x="3017520" y="2194560"/>
+            <a:ext cx="274320" cy="365760"/>
+          </a:xfrm>
+          <a:prstGeom prst="rect">
+            <a:avLst/>
+          </a:prstGeom>
+          <a:noFill/>
+          <a:ln/>
+        </p:spPr>
+        <p:txBody>
+          <a:bodyPr wrap="square" lIns="0" tIns="0" rIns="0" bIns="0" rtlCol="0" anchor="t"/>
+          <a:lstStyle/>
+          <a:p>
+            <a:pPr indent="0" marL="0">
+              <a:buNone/>
+            </a:pPr>
+            <a:r>
+              <a:rPr lang="en-US" sz="1600" b="1" dirty="0">
+                <a:solidFill>
+                  <a:schemeClr val="accent1"/>
+                </a:solidFill>
+              </a:rPr>
+              <a:t>✓</a:t>
+            </a:r>
+            <a:endParaRPr lang="en-US" sz="1600" dirty="0"/>
+          </a:p>
+        </p:txBody>
+      </p:sp>
+      <p:sp>
+        <p:nvSpPr>
+          <p:cNvPr id="14" name="Text 12"/>
+          <p:cNvSpPr txBox="1"/>
+          <p:nvPr/>
+        </p:nvSpPr>
+        <p:spPr>
+          <a:xfrm>
+            <a:off x="3337560" y="2212848"/>
+            <a:ext cx="2194560" cy="411480"/>
+          </a:xfrm>
+          <a:prstGeom prst="rect">
+            <a:avLst/>
+          </a:prstGeom>
+          <a:noFill/>
+          <a:ln/>
+        </p:spPr>
+        <p:txBody>
+          <a:bodyPr wrap="square" lIns="0" tIns="0" rIns="0" bIns="0" rtlCol="0" anchor="t"/>
+          <a:lstStyle/>
+          <a:p>
+            <a:pPr indent="0" marL="0">
+              <a:buNone/>
+            </a:pPr>
+            <a:r>
+              <a:rPr lang="en-US" sz="1400" dirty="0">
+                <a:solidFill>
+                  <a:schemeClr val="tx1"/>
+                </a:solidFill>
+              </a:rPr>
+              <a:t>Download and read the PDF</a:t>
+            </a:r>
+            <a:endParaRPr lang="en-US" sz="1400" dirty="0"/>
+          </a:p>
+        </p:txBody>
+      </p:sp>
+      <p:sp>
+        <p:nvSpPr>
+          <p:cNvPr id="15" name="Text 13"/>
+          <p:cNvSpPr txBox="1"/>
+          <p:nvPr/>
+        </p:nvSpPr>
+        <p:spPr>
+          <a:xfrm>
+            <a:off x="457200" y="2743200"/>
+            <a:ext cx="274320" cy="365760"/>
+          </a:xfrm>
+          <a:prstGeom prst="rect">
+            <a:avLst/>
+          </a:prstGeom>
+          <a:noFill/>
+          <a:ln/>
+        </p:spPr>
+        <p:txBody>
+          <a:bodyPr wrap="square" lIns="0" tIns="0" rIns="0" bIns="0" rtlCol="0" anchor="t"/>
+          <a:lstStyle/>
+          <a:p>
+            <a:pPr indent="0" marL="0">
+              <a:buNone/>
+            </a:pPr>
+            <a:r>
+              <a:rPr lang="en-US" sz="1600" b="1" dirty="0">
+                <a:solidFill>
+                  <a:schemeClr val="accent1"/>
+                </a:solidFill>
+              </a:rPr>
+              <a:t>✓</a:t>
+            </a:r>
+            <a:endParaRPr lang="en-US" sz="1600" dirty="0"/>
+          </a:p>
+        </p:txBody>
+      </p:sp>
+      <p:sp>
+        <p:nvSpPr>
+          <p:cNvPr id="16" name="Text 14"/>
+          <p:cNvSpPr txBox="1"/>
+          <p:nvPr/>
+        </p:nvSpPr>
+        <p:spPr>
+          <a:xfrm>
+            <a:off x="777240" y="2761488"/>
+            <a:ext cx="2194560" cy="411480"/>
+          </a:xfrm>
+          <a:prstGeom prst="rect">
+            <a:avLst/>
+          </a:prstGeom>
+          <a:noFill/>
+          <a:ln/>
+        </p:spPr>
+        <p:txBody>
+          <a:bodyPr wrap="square" lIns="0" tIns="0" rIns="0" bIns="0" rtlCol="0" anchor="t"/>
+          <a:lstStyle/>
+          <a:p>
+            <a:pPr indent="0" marL="0">
+              <a:buNone/>
+            </a:pPr>
+            <a:r>
+              <a:rPr lang="en-US" sz="1400" dirty="0">
+                <a:solidFill>
+                  <a:schemeClr val="tx1"/>
+                </a:solidFill>
+              </a:rPr>
+              <a:t>Shelf and desk still work</a:t>
+            </a:r>
+            <a:endParaRPr lang="en-US" sz="1400" dirty="0"/>
+          </a:p>
+        </p:txBody>
+      </p:sp>
+      <p:sp>
+        <p:nvSpPr>
+          <p:cNvPr id="17" name="Text 15"/>
+          <p:cNvSpPr txBox="1"/>
+          <p:nvPr/>
+        </p:nvSpPr>
+        <p:spPr>
+          <a:xfrm>
+            <a:off x="3017520" y="2743200"/>
+            <a:ext cx="274320" cy="365760"/>
+          </a:xfrm>
+          <a:prstGeom prst="rect">
+            <a:avLst/>
+          </a:prstGeom>
+          <a:noFill/>
+          <a:ln/>
+        </p:spPr>
+        <p:txBody>
+          <a:bodyPr wrap="square" lIns="0" tIns="0" rIns="0" bIns="0" rtlCol="0" anchor="t"/>
+          <a:lstStyle/>
+          <a:p>
+            <a:pPr indent="0" marL="0">
+              <a:buNone/>
+            </a:pPr>
+            <a:r>
+              <a:rPr lang="en-US" sz="1600" b="1" dirty="0">
+                <a:solidFill>
+                  <a:schemeClr val="accent1"/>
+                </a:solidFill>
+              </a:rPr>
+              <a:t>✓</a:t>
+            </a:r>
+            <a:endParaRPr lang="en-US" sz="1600" dirty="0"/>
+          </a:p>
+        </p:txBody>
+      </p:sp>
+      <p:sp>
+        <p:nvSpPr>
+          <p:cNvPr id="18" name="Text 16"/>
+          <p:cNvSpPr txBox="1"/>
+          <p:nvPr/>
+        </p:nvSpPr>
+        <p:spPr>
+          <a:xfrm>
+            <a:off x="3337560" y="2761488"/>
+            <a:ext cx="2194560" cy="411480"/>
+          </a:xfrm>
+          <a:prstGeom prst="rect">
+            <a:avLst/>
+          </a:prstGeom>
+          <a:noFill/>
+          <a:ln/>
+        </p:spPr>
+        <p:txBody>
+          <a:bodyPr wrap="square" lIns="0" tIns="0" rIns="0" bIns="0" rtlCol="0" anchor="t"/>
+          <a:lstStyle/>
+          <a:p>
+            <a:pPr indent="0" marL="0">
+              <a:buNone/>
+            </a:pPr>
+            <a:r>
+              <a:rPr lang="en-US" sz="1400" dirty="0">
+                <a:solidFill>
+                  <a:schemeClr val="tx1"/>
+                </a:solidFill>
+              </a:rPr>
+              <a:t>Narrow window, like a phone</a:t>
+            </a:r>
+            <a:endParaRPr lang="en-US" sz="1400" dirty="0"/>
+          </a:p>
+        </p:txBody>
+      </p:sp>
+      <p:sp>
+        <p:nvSpPr>
+          <p:cNvPr id="19" name="Shape 17"/>
+          <p:cNvSpPr/>
+          <p:nvPr/>
+        </p:nvSpPr>
+        <p:spPr>
+          <a:xfrm>
+            <a:off x="457200" y="3383280"/>
+            <a:ext cx="5029200" cy="1188720"/>
+          </a:xfrm>
+          <a:prstGeom prst="roundRect">
+            <a:avLst>
+              <a:gd name="adj" fmla="val 3077"/>
+            </a:avLst>
+          </a:prstGeom>
+          <a:solidFill>
+            <a:schemeClr val="bg2"/>
+          </a:solidFill>
           <a:ln w="9525">
             <a:solidFill>
-              <a:srgbClr val="8A8F94"/>
+              <a:schemeClr val="accent4"/>
             </a:solidFill>
+            <a:prstDash val="solid"/>
           </a:ln>
         </p:spPr>
-        <p:txBody>
-          <a:bodyPr wrap="square" lIns="0" tIns="0" rIns="0" bIns="0" rtlCol="0" anchor="ctr"/>
-          <a:lstStyle/>
-          <a:p>
-            <a:pPr algn="ctr" indent="0" marL="0">
-              <a:buNone/>
-            </a:pPr>
-            <a:r>
-              <a:rPr lang="en-US" sz="800" b="1" spc="100" kern="0" dirty="0">
-                <a:solidFill>
-                  <a:srgbClr val="E9EBED"/>
-                </a:solidFill>
-                <a:latin typeface="Courier New" pitchFamily="34" charset="0"/>
-                <a:ea typeface="Courier New" pitchFamily="34" charset="-122"/>
-                <a:cs typeface="Courier New" pitchFamily="34" charset="-120"/>
-              </a:rPr>
-              <a:t>SIMULATED EXAMPLE</a:t>
-            </a:r>
-            <a:endParaRPr lang="en-US" sz="800" dirty="0"/>
+      </p:sp>
+      <p:sp>
+        <p:nvSpPr>
+          <p:cNvPr id="20" name="Text 18"/>
+          <p:cNvSpPr txBox="1"/>
+          <p:nvPr/>
+        </p:nvSpPr>
+        <p:spPr>
+          <a:xfrm>
+            <a:off x="640080" y="3493008"/>
+            <a:ext cx="4663440" cy="1005840"/>
+          </a:xfrm>
+          <a:prstGeom prst="rect">
+            <a:avLst/>
+          </a:prstGeom>
+          <a:noFill/>
+          <a:ln/>
+        </p:spPr>
+        <p:txBody>
+          <a:bodyPr wrap="square" lIns="0" tIns="0" rIns="0" bIns="0" rtlCol="0" anchor="t"/>
+          <a:lstStyle/>
+          <a:p>
+            <a:pPr indent="0" marL="0">
+              <a:buNone/>
+            </a:pPr>
+            <a:r>
+              <a:rPr lang="en-US" sz="1300" b="1" dirty="0">
+                <a:solidFill>
+                  <a:schemeClr val="tx1"/>
+                </a:solidFill>
+              </a:rPr>
+              <a:t>Claude is prepared to guide you through every check.</a:t>
+            </a:r>
+            <a:endParaRPr lang="en-US" sz="1300" dirty="0"/>
+          </a:p>
+          <a:p>
+            <a:pPr indent="0" marL="0">
+              <a:buNone/>
+            </a:pPr>
+            <a:r>
+              <a:rPr lang="en-US" sz="1300" b="1" dirty="0">
+                <a:solidFill>
+                  <a:schemeClr val="tx1"/>
+                </a:solidFill>
+              </a:rPr>
+              <a:t>Found something odd? </a:t>
+            </a:r>
+            <a:pPr indent="0" marL="0">
+              <a:buNone/>
+            </a:pPr>
+            <a:r>
+              <a:rPr lang="en-US" sz="1300" dirty="0">
+                <a:solidFill>
+                  <a:schemeClr val="tx1"/>
+                </a:solidFill>
+              </a:rPr>
+              <a:t>Tell Claude, refresh, check again.</a:t>
+            </a:r>
+            <a:endParaRPr lang="en-US" sz="1300" dirty="0"/>
+          </a:p>
+          <a:p>
+            <a:pPr indent="0" marL="0">
+              <a:buNone/>
+            </a:pPr>
+            <a:r>
+              <a:rPr lang="en-US" sz="1300" dirty="0">
+                <a:solidFill>
+                  <a:schemeClr val="accent2"/>
+                </a:solidFill>
+              </a:rPr>
+              <a:t>Then Claude runs its own checks and takes the screenshots for the approved reviewers.</a:t>
+            </a:r>
+            <a:endParaRPr lang="en-US" sz="1300" dirty="0"/>
           </a:p>
         </p:txBody>
       </p:sp>
       <p:pic>
         <p:nvPicPr>
-          <p:cNvPr id="4" name="Simulated site change conversation" descr="small/app-site.jpg">    </p:cNvPr>
+          <p:cNvPr id="21" name="Warning scenario screenshot" descr="Claude guiding a check beside the local Brick bench site">    </p:cNvPr>
           <p:cNvPicPr>
             <a:picLocks noChangeAspect="1"/>
           </p:cNvPicPr>
@@ -5391,8 +4613,8 @@
         </p:blipFill>
         <p:spPr>
           <a:xfrm>
-            <a:off x="457200" y="1051560"/>
-            <a:ext cx="3692769" cy="3703320"/>
+            <a:off x="5577840" y="1097280"/>
+            <a:ext cx="3291840" cy="1958645"/>
           </a:xfrm>
           <a:prstGeom prst="rect">
             <a:avLst/>
@@ -5408,14 +4630,14 @@
       </p:pic>
       <p:sp>
         <p:nvSpPr>
-          <p:cNvPr id="5" name="Text 2"/>
+          <p:cNvPr id="22" name="Text 19"/>
           <p:cNvSpPr txBox="1"/>
           <p:nvPr/>
         </p:nvSpPr>
         <p:spPr>
           <a:xfrm>
-            <a:off x="6126480" y="1188720"/>
-            <a:ext cx="2651760" cy="3566160"/>
+            <a:off x="5577840" y="3147365"/>
+            <a:ext cx="3291840" cy="457200"/>
           </a:xfrm>
           <a:prstGeom prst="rect">
             <a:avLst/>
@@ -5427,116 +4649,18 @@
           <a:bodyPr wrap="square" lIns="0" tIns="0" rIns="0" bIns="0" rtlCol="0" anchor="t"/>
           <a:lstStyle/>
           <a:p>
-            <a:pPr indent="0" marL="0">
-              <a:buNone/>
-            </a:pPr>
-            <a:r>
-              <a:rPr lang="en-US" sz="1400" b="1" dirty="0">
-                <a:solidFill>
-                  <a:schemeClr val="tx1"/>
-                </a:solidFill>
-              </a:rPr>
-              <a:t>Say what and why</a:t>
-            </a:r>
-            <a:endParaRPr lang="en-US" sz="1400" dirty="0"/>
-          </a:p>
-          <a:p>
-            <a:pPr indent="0" marL="0">
-              <a:buNone/>
-            </a:pPr>
-            <a:r>
-              <a:rPr lang="en-US" sz="1400" dirty="0">
+            <a:pPr algn="ctr" indent="0" marL="0">
+              <a:buNone/>
+            </a:pPr>
+            <a:r>
+              <a:rPr lang="en-US" sz="1100" dirty="0">
                 <a:solidFill>
                   <a:schemeClr val="accent2"/>
                 </a:solidFill>
               </a:rPr>
-              <a:t>For example a sidebar listing every piece, because the menus hide what the site offers.</a:t>
-            </a:r>
-            <a:endParaRPr lang="en-US" sz="1400" dirty="0"/>
-          </a:p>
-          <a:p>
-            <a:pPr indent="0" marL="0">
-              <a:buNone/>
-            </a:pPr>
-            <a:r>
-              <a:rPr lang="en-US" sz="800" dirty="0">
-                <a:solidFill>
-                  <a:schemeClr val="tx1"/>
-                </a:solidFill>
-              </a:rPr>
-              <a:t> </a:t>
-            </a:r>
-            <a:endParaRPr lang="en-US" sz="1400" dirty="0"/>
-          </a:p>
-          <a:p>
-            <a:pPr indent="0" marL="0">
-              <a:buNone/>
-            </a:pPr>
-            <a:r>
-              <a:rPr lang="en-US" sz="1400" b="1" dirty="0">
-                <a:solidFill>
-                  <a:schemeClr val="tx1"/>
-                </a:solidFill>
-              </a:rPr>
-              <a:t>Share a picture if you have one</a:t>
-            </a:r>
-            <a:endParaRPr lang="en-US" sz="1400" dirty="0"/>
-          </a:p>
-          <a:p>
-            <a:pPr indent="0" marL="0">
-              <a:buNone/>
-            </a:pPr>
-            <a:r>
-              <a:rPr lang="en-US" sz="1400" dirty="0">
-                <a:solidFill>
-                  <a:schemeClr val="accent2"/>
-                </a:solidFill>
-              </a:rPr>
-              <a:t>A sketch, a site you like, or a marked-up screenshot.</a:t>
-            </a:r>
-            <a:endParaRPr lang="en-US" sz="1400" dirty="0"/>
-          </a:p>
-          <a:p>
-            <a:pPr indent="0" marL="0">
-              <a:buNone/>
-            </a:pPr>
-            <a:r>
-              <a:rPr lang="en-US" sz="800" dirty="0">
-                <a:solidFill>
-                  <a:schemeClr val="tx1"/>
-                </a:solidFill>
-              </a:rPr>
-              <a:t> </a:t>
-            </a:r>
-            <a:endParaRPr lang="en-US" sz="1400" dirty="0"/>
-          </a:p>
-          <a:p>
-            <a:pPr indent="0" marL="0">
-              <a:buNone/>
-            </a:pPr>
-            <a:r>
-              <a:rPr lang="en-US" sz="1400" b="1" dirty="0">
-                <a:solidFill>
-                  <a:schemeClr val="tx1"/>
-                </a:solidFill>
-              </a:rPr>
-              <a:t>Agree a short plan</a:t>
-            </a:r>
-            <a:endParaRPr lang="en-US" sz="1400" dirty="0"/>
-          </a:p>
-          <a:p>
-            <a:pPr indent="0" marL="0">
-              <a:buNone/>
-            </a:pPr>
-            <a:r>
-              <a:rPr lang="en-US" sz="1400" dirty="0">
-                <a:solidFill>
-                  <a:schemeClr val="accent2"/>
-                </a:solidFill>
-              </a:rPr>
-              <a:t>Claude shows the site today, asks a question or two, and sums up the change before building it.</a:t>
-            </a:r>
-            <a:endParaRPr lang="en-US" sz="1400" dirty="0"/>
+              <a:t>Real example: Claude walks you through each check and waits for your answer</a:t>
+            </a:r>
+            <a:endParaRPr lang="en-US" sz="1100" dirty="0"/>
           </a:p>
         </p:txBody>
       </p:sp>
@@ -5642,7 +4766,7 @@
                   <a:schemeClr val="tx1"/>
                 </a:solidFill>
               </a:rPr>
-              <a:t>BEFORE SENDING: TRY IT ALL</a:t>
+              <a:t>LAST STEP: SEND IT AS A PULL REQUEST</a:t>
             </a:r>
             <a:endParaRPr lang="en-US" sz="2000" dirty="0"/>
           </a:p>
@@ -5650,14 +4774,88 @@
       </p:sp>
       <p:sp>
         <p:nvSpPr>
-          <p:cNvPr id="3" name="Text 1"/>
+          <p:cNvPr id="3" name="SIMULATED EXAMPLE tag"/>
           <p:cNvSpPr txBox="1"/>
           <p:nvPr/>
         </p:nvSpPr>
         <p:spPr>
           <a:xfrm>
-            <a:off x="457200" y="1097280"/>
-            <a:ext cx="274320" cy="365760"/>
+            <a:off x="6949440" y="73152"/>
+            <a:ext cx="1920240" cy="237744"/>
+          </a:xfrm>
+          <a:prstGeom prst="rect">
+            <a:avLst/>
+          </a:prstGeom>
+          <a:noFill/>
+          <a:ln w="9525">
+            <a:solidFill>
+              <a:srgbClr val="8A8F94"/>
+            </a:solidFill>
+          </a:ln>
+        </p:spPr>
+        <p:txBody>
+          <a:bodyPr wrap="square" lIns="0" tIns="0" rIns="0" bIns="0" rtlCol="0" anchor="ctr"/>
+          <a:lstStyle/>
+          <a:p>
+            <a:pPr algn="ctr" indent="0" marL="0">
+              <a:buNone/>
+            </a:pPr>
+            <a:r>
+              <a:rPr lang="en-US" sz="800" b="1" spc="100" kern="0" dirty="0">
+                <a:solidFill>
+                  <a:srgbClr val="E9EBED"/>
+                </a:solidFill>
+                <a:latin typeface="Courier New" pitchFamily="34" charset="0"/>
+                <a:ea typeface="Courier New" pitchFamily="34" charset="-122"/>
+                <a:cs typeface="Courier New" pitchFamily="34" charset="-120"/>
+              </a:rPr>
+              <a:t>SIMULATED EXAMPLE</a:t>
+            </a:r>
+            <a:endParaRPr lang="en-US" sz="800" dirty="0"/>
+          </a:p>
+        </p:txBody>
+      </p:sp>
+      <p:pic>
+        <p:nvPicPr>
+          <p:cNvPr id="4" name="Simulated pull request" descr="small/sim-pr.jpg">    </p:cNvPr>
+          <p:cNvPicPr>
+            <a:picLocks noChangeAspect="1"/>
+          </p:cNvPicPr>
+          <p:nvPr/>
+        </p:nvPicPr>
+        <p:blipFill>
+          <a:blip r:embed="rId1"/>
+          <a:stretch>
+            <a:fillRect/>
+          </a:stretch>
+        </p:blipFill>
+        <p:spPr>
+          <a:xfrm>
+            <a:off x="457200" y="1005840"/>
+            <a:ext cx="3307282" cy="3749040"/>
+          </a:xfrm>
+          <a:prstGeom prst="rect">
+            <a:avLst/>
+          </a:prstGeom>
+          <a:effectLst>
+            <a:outerShdw sx="100000" sy="100000" kx="0" ky="0" algn="bl" rotWithShape="0" blurRad="76200" dist="25400" dir="5400000">
+              <a:srgbClr val="000000">
+                <a:alpha val="18000"/>
+              </a:srgbClr>
+            </a:outerShdw>
+          </a:effectLst>
+        </p:spPr>
+      </p:pic>
+      <p:sp>
+        <p:nvSpPr>
+          <p:cNvPr id="5" name="Text 2"/>
+          <p:cNvSpPr txBox="1"/>
+          <p:nvPr/>
+        </p:nvSpPr>
+        <p:spPr>
+          <a:xfrm>
+            <a:off x="4937760" y="1051560"/>
+            <a:ext cx="3840480" cy="1463040"/>
           </a:xfrm>
           <a:prstGeom prst="rect">
             <a:avLst/>
@@ -5673,27 +4871,38 @@
               <a:buNone/>
             </a:pPr>
             <a:r>
-              <a:rPr lang="en-US" sz="1600" b="1" dirty="0">
-                <a:solidFill>
-                  <a:schemeClr val="accent1"/>
-                </a:solidFill>
-              </a:rPr>
-              <a:t>✓</a:t>
-            </a:r>
-            <a:endParaRPr lang="en-US" sz="1600" dirty="0"/>
-          </a:p>
-        </p:txBody>
-      </p:sp>
-      <p:sp>
-        <p:nvSpPr>
-          <p:cNvPr id="4" name="Text 2"/>
+              <a:rPr lang="en-US" sz="1400" b="1" dirty="0">
+                <a:solidFill>
+                  <a:schemeClr val="tx1"/>
+                </a:solidFill>
+              </a:rPr>
+              <a:t>A pull request (PR) is your proposed change. </a:t>
+            </a:r>
+            <a:pPr indent="0" marL="0">
+              <a:buNone/>
+            </a:pPr>
+            <a:r>
+              <a:rPr lang="en-US" sz="1400" dirty="0">
+                <a:solidFill>
+                  <a:schemeClr val="tx1"/>
+                </a:solidFill>
+              </a:rPr>
+              <a:t>It holds the change, a description of it, and evidence of the proposed new version: screenshots and notes. The approved reviewers check it, and only once they approve does it reach the real site.</a:t>
+            </a:r>
+            <a:endParaRPr lang="en-US" sz="1400" dirty="0"/>
+          </a:p>
+        </p:txBody>
+      </p:sp>
+      <p:sp>
+        <p:nvSpPr>
+          <p:cNvPr id="6" name="Text 3"/>
           <p:cNvSpPr txBox="1"/>
           <p:nvPr/>
         </p:nvSpPr>
         <p:spPr>
           <a:xfrm>
-            <a:off x="777240" y="1115568"/>
-            <a:ext cx="2194560" cy="411480"/>
+            <a:off x="4937760" y="2606040"/>
+            <a:ext cx="3840480" cy="1234440"/>
           </a:xfrm>
           <a:prstGeom prst="rect">
             <a:avLst/>
@@ -5709,535 +4918,42 @@
               <a:buNone/>
             </a:pPr>
             <a:r>
-              <a:rPr lang="en-US" sz="1400" dirty="0">
-                <a:solidFill>
-                  <a:schemeClr val="tx1"/>
-                </a:solidFill>
-              </a:rPr>
-              <a:t>Smallest and largest sizes</a:t>
-            </a:r>
-            <a:endParaRPr lang="en-US" sz="1400" dirty="0"/>
-          </a:p>
-        </p:txBody>
-      </p:sp>
-      <p:sp>
-        <p:nvSpPr>
-          <p:cNvPr id="5" name="Text 3"/>
-          <p:cNvSpPr txBox="1"/>
-          <p:nvPr/>
-        </p:nvSpPr>
-        <p:spPr>
-          <a:xfrm>
-            <a:off x="3017520" y="1097280"/>
-            <a:ext cx="274320" cy="365760"/>
-          </a:xfrm>
-          <a:prstGeom prst="rect">
-            <a:avLst/>
-          </a:prstGeom>
-          <a:noFill/>
-          <a:ln/>
-        </p:spPr>
-        <p:txBody>
-          <a:bodyPr wrap="square" lIns="0" tIns="0" rIns="0" bIns="0" rtlCol="0" anchor="t"/>
-          <a:lstStyle/>
-          <a:p>
-            <a:pPr indent="0" marL="0">
-              <a:buNone/>
-            </a:pPr>
-            <a:r>
-              <a:rPr lang="en-US" sz="1600" b="1" dirty="0">
-                <a:solidFill>
-                  <a:schemeClr val="accent1"/>
-                </a:solidFill>
-              </a:rPr>
-              <a:t>✓</a:t>
-            </a:r>
-            <a:endParaRPr lang="en-US" sz="1600" dirty="0"/>
-          </a:p>
-        </p:txBody>
-      </p:sp>
-      <p:sp>
-        <p:nvSpPr>
-          <p:cNvPr id="6" name="Text 4"/>
-          <p:cNvSpPr txBox="1"/>
-          <p:nvPr/>
-        </p:nvSpPr>
-        <p:spPr>
-          <a:xfrm>
-            <a:off x="3337560" y="1115568"/>
-            <a:ext cx="2194560" cy="411480"/>
-          </a:xfrm>
-          <a:prstGeom prst="rect">
-            <a:avLst/>
-          </a:prstGeom>
-          <a:noFill/>
-          <a:ln/>
-        </p:spPr>
-        <p:txBody>
-          <a:bodyPr wrap="square" lIns="0" tIns="0" rIns="0" bIns="0" rtlCol="0" anchor="t"/>
-          <a:lstStyle/>
-          <a:p>
-            <a:pPr indent="0" marL="0">
-              <a:buNone/>
-            </a:pPr>
-            <a:r>
-              <a:rPr lang="en-US" sz="1400" dirty="0">
-                <a:solidFill>
-                  <a:schemeClr val="tx1"/>
-                </a:solidFill>
-              </a:rPr>
-              <a:t>Each option on and off</a:t>
-            </a:r>
-            <a:endParaRPr lang="en-US" sz="1400" dirty="0"/>
-          </a:p>
-        </p:txBody>
-      </p:sp>
-      <p:sp>
-        <p:nvSpPr>
-          <p:cNvPr id="7" name="Text 5"/>
-          <p:cNvSpPr txBox="1"/>
-          <p:nvPr/>
-        </p:nvSpPr>
-        <p:spPr>
-          <a:xfrm>
-            <a:off x="457200" y="1645920"/>
-            <a:ext cx="274320" cy="365760"/>
-          </a:xfrm>
-          <a:prstGeom prst="rect">
-            <a:avLst/>
-          </a:prstGeom>
-          <a:noFill/>
-          <a:ln/>
-        </p:spPr>
-        <p:txBody>
-          <a:bodyPr wrap="square" lIns="0" tIns="0" rIns="0" bIns="0" rtlCol="0" anchor="t"/>
-          <a:lstStyle/>
-          <a:p>
-            <a:pPr indent="0" marL="0">
-              <a:buNone/>
-            </a:pPr>
-            <a:r>
-              <a:rPr lang="en-US" sz="1600" b="1" dirty="0">
-                <a:solidFill>
-                  <a:schemeClr val="accent1"/>
-                </a:solidFill>
-              </a:rPr>
-              <a:t>✓</a:t>
-            </a:r>
-            <a:endParaRPr lang="en-US" sz="1600" dirty="0"/>
-          </a:p>
-        </p:txBody>
-      </p:sp>
-      <p:sp>
-        <p:nvSpPr>
-          <p:cNvPr id="8" name="Text 6"/>
-          <p:cNvSpPr txBox="1"/>
-          <p:nvPr/>
-        </p:nvSpPr>
-        <p:spPr>
-          <a:xfrm>
-            <a:off x="777240" y="1664208"/>
-            <a:ext cx="2194560" cy="411480"/>
-          </a:xfrm>
-          <a:prstGeom prst="rect">
-            <a:avLst/>
-          </a:prstGeom>
-          <a:noFill/>
-          <a:ln/>
-        </p:spPr>
-        <p:txBody>
-          <a:bodyPr wrap="square" lIns="0" tIns="0" rIns="0" bIns="0" rtlCol="0" anchor="t"/>
-          <a:lstStyle/>
-          <a:p>
-            <a:pPr indent="0" marL="0">
-              <a:buNone/>
-            </a:pPr>
-            <a:r>
-              <a:rPr lang="en-US" sz="1400" dirty="0">
-                <a:solidFill>
-                  <a:schemeClr val="tx1"/>
-                </a:solidFill>
-              </a:rPr>
-              <a:t>Make each warning appear</a:t>
-            </a:r>
-            <a:endParaRPr lang="en-US" sz="1400" dirty="0"/>
-          </a:p>
-        </p:txBody>
-      </p:sp>
-      <p:sp>
-        <p:nvSpPr>
-          <p:cNvPr id="9" name="Text 7"/>
-          <p:cNvSpPr txBox="1"/>
-          <p:nvPr/>
-        </p:nvSpPr>
-        <p:spPr>
-          <a:xfrm>
-            <a:off x="3017520" y="1645920"/>
-            <a:ext cx="274320" cy="365760"/>
-          </a:xfrm>
-          <a:prstGeom prst="rect">
-            <a:avLst/>
-          </a:prstGeom>
-          <a:noFill/>
-          <a:ln/>
-        </p:spPr>
-        <p:txBody>
-          <a:bodyPr wrap="square" lIns="0" tIns="0" rIns="0" bIns="0" rtlCol="0" anchor="t"/>
-          <a:lstStyle/>
-          <a:p>
-            <a:pPr indent="0" marL="0">
-              <a:buNone/>
-            </a:pPr>
-            <a:r>
-              <a:rPr lang="en-US" sz="1600" b="1" dirty="0">
-                <a:solidFill>
-                  <a:schemeClr val="accent1"/>
-                </a:solidFill>
-              </a:rPr>
-              <a:t>✓</a:t>
-            </a:r>
-            <a:endParaRPr lang="en-US" sz="1600" dirty="0"/>
-          </a:p>
-        </p:txBody>
-      </p:sp>
-      <p:sp>
-        <p:nvSpPr>
-          <p:cNvPr id="10" name="Text 8"/>
-          <p:cNvSpPr txBox="1"/>
-          <p:nvPr/>
-        </p:nvSpPr>
-        <p:spPr>
-          <a:xfrm>
-            <a:off x="3337560" y="1664208"/>
-            <a:ext cx="2194560" cy="411480"/>
-          </a:xfrm>
-          <a:prstGeom prst="rect">
-            <a:avLst/>
-          </a:prstGeom>
-          <a:noFill/>
-          <a:ln/>
-        </p:spPr>
-        <p:txBody>
-          <a:bodyPr wrap="square" lIns="0" tIns="0" rIns="0" bIns="0" rtlCol="0" anchor="t"/>
-          <a:lstStyle/>
-          <a:p>
-            <a:pPr indent="0" marL="0">
-              <a:buNone/>
-            </a:pPr>
-            <a:r>
-              <a:rPr lang="en-US" sz="1400" dirty="0">
-                <a:solidFill>
-                  <a:schemeClr val="tx1"/>
-                </a:solidFill>
-              </a:rPr>
-              <a:t>Click parts in the 3D view</a:t>
-            </a:r>
-            <a:endParaRPr lang="en-US" sz="1400" dirty="0"/>
-          </a:p>
-        </p:txBody>
-      </p:sp>
-      <p:sp>
-        <p:nvSpPr>
-          <p:cNvPr id="11" name="Text 9"/>
-          <p:cNvSpPr txBox="1"/>
-          <p:nvPr/>
-        </p:nvSpPr>
-        <p:spPr>
-          <a:xfrm>
-            <a:off x="457200" y="2194560"/>
-            <a:ext cx="274320" cy="365760"/>
-          </a:xfrm>
-          <a:prstGeom prst="rect">
-            <a:avLst/>
-          </a:prstGeom>
-          <a:noFill/>
-          <a:ln/>
-        </p:spPr>
-        <p:txBody>
-          <a:bodyPr wrap="square" lIns="0" tIns="0" rIns="0" bIns="0" rtlCol="0" anchor="t"/>
-          <a:lstStyle/>
-          <a:p>
-            <a:pPr indent="0" marL="0">
-              <a:buNone/>
-            </a:pPr>
-            <a:r>
-              <a:rPr lang="en-US" sz="1600" b="1" dirty="0">
-                <a:solidFill>
-                  <a:schemeClr val="accent1"/>
-                </a:solidFill>
-              </a:rPr>
-              <a:t>✓</a:t>
-            </a:r>
-            <a:endParaRPr lang="en-US" sz="1600" dirty="0"/>
-          </a:p>
-        </p:txBody>
-      </p:sp>
-      <p:sp>
-        <p:nvSpPr>
-          <p:cNvPr id="12" name="Text 10"/>
-          <p:cNvSpPr txBox="1"/>
-          <p:nvPr/>
-        </p:nvSpPr>
-        <p:spPr>
-          <a:xfrm>
-            <a:off x="777240" y="2212848"/>
-            <a:ext cx="2194560" cy="411480"/>
-          </a:xfrm>
-          <a:prstGeom prst="rect">
-            <a:avLst/>
-          </a:prstGeom>
-          <a:noFill/>
-          <a:ln/>
-        </p:spPr>
-        <p:txBody>
-          <a:bodyPr wrap="square" lIns="0" tIns="0" rIns="0" bIns="0" rtlCol="0" anchor="t"/>
-          <a:lstStyle/>
-          <a:p>
-            <a:pPr indent="0" marL="0">
-              <a:buNone/>
-            </a:pPr>
-            <a:r>
-              <a:rPr lang="en-US" sz="1400" dirty="0">
-                <a:solidFill>
-                  <a:schemeClr val="tx1"/>
-                </a:solidFill>
-              </a:rPr>
-              <a:t>Find it in the top menu</a:t>
-            </a:r>
-            <a:endParaRPr lang="en-US" sz="1400" dirty="0"/>
-          </a:p>
-        </p:txBody>
-      </p:sp>
-      <p:sp>
-        <p:nvSpPr>
-          <p:cNvPr id="13" name="Text 11"/>
-          <p:cNvSpPr txBox="1"/>
-          <p:nvPr/>
-        </p:nvSpPr>
-        <p:spPr>
-          <a:xfrm>
-            <a:off x="3017520" y="2194560"/>
-            <a:ext cx="274320" cy="365760"/>
-          </a:xfrm>
-          <a:prstGeom prst="rect">
-            <a:avLst/>
-          </a:prstGeom>
-          <a:noFill/>
-          <a:ln/>
-        </p:spPr>
-        <p:txBody>
-          <a:bodyPr wrap="square" lIns="0" tIns="0" rIns="0" bIns="0" rtlCol="0" anchor="t"/>
-          <a:lstStyle/>
-          <a:p>
-            <a:pPr indent="0" marL="0">
-              <a:buNone/>
-            </a:pPr>
-            <a:r>
-              <a:rPr lang="en-US" sz="1600" b="1" dirty="0">
-                <a:solidFill>
-                  <a:schemeClr val="accent1"/>
-                </a:solidFill>
-              </a:rPr>
-              <a:t>✓</a:t>
-            </a:r>
-            <a:endParaRPr lang="en-US" sz="1600" dirty="0"/>
-          </a:p>
-        </p:txBody>
-      </p:sp>
-      <p:sp>
-        <p:nvSpPr>
-          <p:cNvPr id="14" name="Text 12"/>
-          <p:cNvSpPr txBox="1"/>
-          <p:nvPr/>
-        </p:nvSpPr>
-        <p:spPr>
-          <a:xfrm>
-            <a:off x="3337560" y="2212848"/>
-            <a:ext cx="2194560" cy="411480"/>
-          </a:xfrm>
-          <a:prstGeom prst="rect">
-            <a:avLst/>
-          </a:prstGeom>
-          <a:noFill/>
-          <a:ln/>
-        </p:spPr>
-        <p:txBody>
-          <a:bodyPr wrap="square" lIns="0" tIns="0" rIns="0" bIns="0" rtlCol="0" anchor="t"/>
-          <a:lstStyle/>
-          <a:p>
-            <a:pPr indent="0" marL="0">
-              <a:buNone/>
-            </a:pPr>
-            <a:r>
-              <a:rPr lang="en-US" sz="1400" dirty="0">
-                <a:solidFill>
-                  <a:schemeClr val="tx1"/>
-                </a:solidFill>
-              </a:rPr>
-              <a:t>Download and read the PDF</a:t>
-            </a:r>
-            <a:endParaRPr lang="en-US" sz="1400" dirty="0"/>
-          </a:p>
-        </p:txBody>
-      </p:sp>
-      <p:sp>
-        <p:nvSpPr>
-          <p:cNvPr id="15" name="Text 13"/>
-          <p:cNvSpPr txBox="1"/>
-          <p:nvPr/>
-        </p:nvSpPr>
-        <p:spPr>
-          <a:xfrm>
-            <a:off x="457200" y="2743200"/>
-            <a:ext cx="274320" cy="365760"/>
-          </a:xfrm>
-          <a:prstGeom prst="rect">
-            <a:avLst/>
-          </a:prstGeom>
-          <a:noFill/>
-          <a:ln/>
-        </p:spPr>
-        <p:txBody>
-          <a:bodyPr wrap="square" lIns="0" tIns="0" rIns="0" bIns="0" rtlCol="0" anchor="t"/>
-          <a:lstStyle/>
-          <a:p>
-            <a:pPr indent="0" marL="0">
-              <a:buNone/>
-            </a:pPr>
-            <a:r>
-              <a:rPr lang="en-US" sz="1600" b="1" dirty="0">
-                <a:solidFill>
-                  <a:schemeClr val="accent1"/>
-                </a:solidFill>
-              </a:rPr>
-              <a:t>✓</a:t>
-            </a:r>
-            <a:endParaRPr lang="en-US" sz="1600" dirty="0"/>
-          </a:p>
-        </p:txBody>
-      </p:sp>
-      <p:sp>
-        <p:nvSpPr>
-          <p:cNvPr id="16" name="Text 14"/>
-          <p:cNvSpPr txBox="1"/>
-          <p:nvPr/>
-        </p:nvSpPr>
-        <p:spPr>
-          <a:xfrm>
-            <a:off x="777240" y="2761488"/>
-            <a:ext cx="2194560" cy="411480"/>
-          </a:xfrm>
-          <a:prstGeom prst="rect">
-            <a:avLst/>
-          </a:prstGeom>
-          <a:noFill/>
-          <a:ln/>
-        </p:spPr>
-        <p:txBody>
-          <a:bodyPr wrap="square" lIns="0" tIns="0" rIns="0" bIns="0" rtlCol="0" anchor="t"/>
-          <a:lstStyle/>
-          <a:p>
-            <a:pPr indent="0" marL="0">
-              <a:buNone/>
-            </a:pPr>
-            <a:r>
-              <a:rPr lang="en-US" sz="1400" dirty="0">
-                <a:solidFill>
-                  <a:schemeClr val="tx1"/>
-                </a:solidFill>
-              </a:rPr>
-              <a:t>Shelf and desk still work</a:t>
-            </a:r>
-            <a:endParaRPr lang="en-US" sz="1400" dirty="0"/>
-          </a:p>
-        </p:txBody>
-      </p:sp>
-      <p:sp>
-        <p:nvSpPr>
-          <p:cNvPr id="17" name="Text 15"/>
-          <p:cNvSpPr txBox="1"/>
-          <p:nvPr/>
-        </p:nvSpPr>
-        <p:spPr>
-          <a:xfrm>
-            <a:off x="3017520" y="2743200"/>
-            <a:ext cx="274320" cy="365760"/>
-          </a:xfrm>
-          <a:prstGeom prst="rect">
-            <a:avLst/>
-          </a:prstGeom>
-          <a:noFill/>
-          <a:ln/>
-        </p:spPr>
-        <p:txBody>
-          <a:bodyPr wrap="square" lIns="0" tIns="0" rIns="0" bIns="0" rtlCol="0" anchor="t"/>
-          <a:lstStyle/>
-          <a:p>
-            <a:pPr indent="0" marL="0">
-              <a:buNone/>
-            </a:pPr>
-            <a:r>
-              <a:rPr lang="en-US" sz="1600" b="1" dirty="0">
-                <a:solidFill>
-                  <a:schemeClr val="accent1"/>
-                </a:solidFill>
-              </a:rPr>
-              <a:t>✓</a:t>
-            </a:r>
-            <a:endParaRPr lang="en-US" sz="1600" dirty="0"/>
-          </a:p>
-        </p:txBody>
-      </p:sp>
-      <p:sp>
-        <p:nvSpPr>
-          <p:cNvPr id="18" name="Text 16"/>
-          <p:cNvSpPr txBox="1"/>
-          <p:nvPr/>
-        </p:nvSpPr>
-        <p:spPr>
-          <a:xfrm>
-            <a:off x="3337560" y="2761488"/>
-            <a:ext cx="2194560" cy="411480"/>
-          </a:xfrm>
-          <a:prstGeom prst="rect">
-            <a:avLst/>
-          </a:prstGeom>
-          <a:noFill/>
-          <a:ln/>
-        </p:spPr>
-        <p:txBody>
-          <a:bodyPr wrap="square" lIns="0" tIns="0" rIns="0" bIns="0" rtlCol="0" anchor="t"/>
-          <a:lstStyle/>
-          <a:p>
-            <a:pPr indent="0" marL="0">
-              <a:buNone/>
-            </a:pPr>
-            <a:r>
-              <a:rPr lang="en-US" sz="1400" dirty="0">
-                <a:solidFill>
-                  <a:schemeClr val="tx1"/>
-                </a:solidFill>
-              </a:rPr>
-              <a:t>Narrow window, like a phone</a:t>
-            </a:r>
-            <a:endParaRPr lang="en-US" sz="1400" dirty="0"/>
-          </a:p>
-        </p:txBody>
-      </p:sp>
-      <p:sp>
-        <p:nvSpPr>
-          <p:cNvPr id="19" name="Shape 17"/>
+              <a:rPr lang="en-US" sz="1300" b="1" dirty="0">
+                <a:solidFill>
+                  <a:schemeClr val="accent2"/>
+                </a:solidFill>
+              </a:rPr>
+              <a:t>When you say "I'm happy, let's send it", </a:t>
+            </a:r>
+            <a:pPr indent="0" marL="0">
+              <a:buNone/>
+            </a:pPr>
+            <a:r>
+              <a:rPr lang="en-US" sz="1300" dirty="0">
+                <a:solidFill>
+                  <a:schemeClr val="accent2"/>
+                </a:solidFill>
+              </a:rPr>
+              <a:t>Claude writes it for you: what it adds, the brief, the parts and where their sizes come from, how it was checked, screenshots, and open questions.</a:t>
+            </a:r>
+            <a:endParaRPr lang="en-US" sz="1300" dirty="0"/>
+          </a:p>
+        </p:txBody>
+      </p:sp>
+      <p:sp>
+        <p:nvSpPr>
+          <p:cNvPr id="7" name="Shape 4"/>
           <p:cNvSpPr/>
           <p:nvPr/>
         </p:nvSpPr>
         <p:spPr>
           <a:xfrm>
-            <a:off x="457200" y="3383280"/>
-            <a:ext cx="5029200" cy="1188720"/>
+            <a:off x="4937760" y="3977640"/>
+            <a:ext cx="3840480" cy="731520"/>
           </a:xfrm>
           <a:prstGeom prst="roundRect">
             <a:avLst>
-              <a:gd name="adj" fmla="val 3077"/>
+              <a:gd name="adj" fmla="val 5000"/>
             </a:avLst>
           </a:prstGeom>
           <a:solidFill>
@@ -6253,14 +4969,14 @@
       </p:sp>
       <p:sp>
         <p:nvSpPr>
-          <p:cNvPr id="20" name="Text 18"/>
+          <p:cNvPr id="8" name="Text 5"/>
           <p:cNvSpPr txBox="1"/>
           <p:nvPr/>
         </p:nvSpPr>
         <p:spPr>
           <a:xfrm>
-            <a:off x="640080" y="3493008"/>
-            <a:ext cx="4663440" cy="1005840"/>
+            <a:off x="5120640" y="4069080"/>
+            <a:ext cx="3474720" cy="548640"/>
           </a:xfrm>
           <a:prstGeom prst="rect">
             <a:avLst/>
@@ -6276,120 +4992,14 @@
               <a:buNone/>
             </a:pPr>
             <a:r>
-              <a:rPr lang="en-US" sz="1300" b="1" dirty="0">
+              <a:rPr lang="en-US" sz="1300" dirty="0">
                 <a:solidFill>
                   <a:schemeClr val="tx1"/>
                 </a:solidFill>
               </a:rPr>
-              <a:t>Claude is prepared to guide you through every check.</a:t>
+              <a:t>Your one job: drag the screenshots into it on GitHub.</a:t>
             </a:r>
             <a:endParaRPr lang="en-US" sz="1300" dirty="0"/>
-          </a:p>
-          <a:p>
-            <a:pPr indent="0" marL="0">
-              <a:buNone/>
-            </a:pPr>
-            <a:r>
-              <a:rPr lang="en-US" sz="1300" b="1" dirty="0">
-                <a:solidFill>
-                  <a:schemeClr val="tx1"/>
-                </a:solidFill>
-              </a:rPr>
-              <a:t>Found something odd? </a:t>
-            </a:r>
-            <a:pPr indent="0" marL="0">
-              <a:buNone/>
-            </a:pPr>
-            <a:r>
-              <a:rPr lang="en-US" sz="1300" dirty="0">
-                <a:solidFill>
-                  <a:schemeClr val="tx1"/>
-                </a:solidFill>
-              </a:rPr>
-              <a:t>Tell Claude, refresh, check again.</a:t>
-            </a:r>
-            <a:endParaRPr lang="en-US" sz="1300" dirty="0"/>
-          </a:p>
-          <a:p>
-            <a:pPr indent="0" marL="0">
-              <a:buNone/>
-            </a:pPr>
-            <a:r>
-              <a:rPr lang="en-US" sz="1300" dirty="0">
-                <a:solidFill>
-                  <a:schemeClr val="accent2"/>
-                </a:solidFill>
-              </a:rPr>
-              <a:t>Then Claude runs its own checks and takes the screenshots for the approved reviewers.</a:t>
-            </a:r>
-            <a:endParaRPr lang="en-US" sz="1300" dirty="0"/>
-          </a:p>
-        </p:txBody>
-      </p:sp>
-      <p:pic>
-        <p:nvPicPr>
-          <p:cNvPr id="21" name="Brick bench with the bricks hidden and the sag warning" descr="Claude guiding a check beside the local Brick bench site">    </p:cNvPr>
-          <p:cNvPicPr>
-            <a:picLocks noChangeAspect="1"/>
-          </p:cNvPicPr>
-          <p:nvPr/>
-        </p:nvPicPr>
-        <p:blipFill>
-          <a:blip r:embed="rId1"/>
-          <a:stretch>
-            <a:fillRect/>
-          </a:stretch>
-        </p:blipFill>
-        <p:spPr>
-          <a:xfrm>
-            <a:off x="5577840" y="1097280"/>
-            <a:ext cx="3291840" cy="1958645"/>
-          </a:xfrm>
-          <a:prstGeom prst="rect">
-            <a:avLst/>
-          </a:prstGeom>
-          <a:effectLst>
-            <a:outerShdw sx="100000" sy="100000" kx="0" ky="0" algn="bl" rotWithShape="0" blurRad="76200" dist="25400" dir="5400000">
-              <a:srgbClr val="000000">
-                <a:alpha val="18000"/>
-              </a:srgbClr>
-            </a:outerShdw>
-          </a:effectLst>
-        </p:spPr>
-      </p:pic>
-      <p:sp>
-        <p:nvSpPr>
-          <p:cNvPr id="22" name="Text 19"/>
-          <p:cNvSpPr txBox="1"/>
-          <p:nvPr/>
-        </p:nvSpPr>
-        <p:spPr>
-          <a:xfrm>
-            <a:off x="5577840" y="3147365"/>
-            <a:ext cx="3291840" cy="457200"/>
-          </a:xfrm>
-          <a:prstGeom prst="rect">
-            <a:avLst/>
-          </a:prstGeom>
-          <a:noFill/>
-          <a:ln/>
-        </p:spPr>
-        <p:txBody>
-          <a:bodyPr wrap="square" lIns="0" tIns="0" rIns="0" bIns="0" rtlCol="0" anchor="t"/>
-          <a:lstStyle/>
-          <a:p>
-            <a:pPr algn="ctr" indent="0" marL="0">
-              <a:buNone/>
-            </a:pPr>
-            <a:r>
-              <a:rPr lang="en-US" sz="1100" dirty="0">
-                <a:solidFill>
-                  <a:schemeClr val="accent2"/>
-                </a:solidFill>
-              </a:rPr>
-              <a:t>Real example: Claude walks you through each check and waits for your answer</a:t>
-            </a:r>
-            <a:endParaRPr lang="en-US" sz="1100" dirty="0"/>
           </a:p>
         </p:txBody>
       </p:sp>
@@ -6495,151 +5105,26 @@
                   <a:schemeClr val="tx1"/>
                 </a:solidFill>
               </a:rPr>
-              <a:t>LAST STEP: SEND IT AS A PULL REQUEST</a:t>
+              <a:t>AFTER YOU SEND IT</a:t>
             </a:r>
             <a:endParaRPr lang="en-US" sz="2000" dirty="0"/>
           </a:p>
         </p:txBody>
       </p:sp>
-      <p:pic>
-        <p:nvPicPr>
-          <p:cNvPr id="3" name="Final check answered, and the pull request open" descr="small/real-done.jpg">    </p:cNvPr>
-          <p:cNvPicPr>
-            <a:picLocks noChangeAspect="1"/>
-          </p:cNvPicPr>
-          <p:nvPr/>
-        </p:nvPicPr>
-        <p:blipFill>
-          <a:blip r:embed="rId1"/>
-          <a:stretch>
-            <a:fillRect/>
-          </a:stretch>
-        </p:blipFill>
-        <p:spPr>
-          <a:xfrm>
-            <a:off x="457200" y="1051560"/>
-            <a:ext cx="4937760" cy="2937967"/>
-          </a:xfrm>
-          <a:prstGeom prst="rect">
-            <a:avLst/>
-          </a:prstGeom>
-          <a:effectLst>
-            <a:outerShdw sx="100000" sy="100000" kx="0" ky="0" algn="bl" rotWithShape="0" blurRad="76200" dist="25400" dir="5400000">
-              <a:srgbClr val="000000">
-                <a:alpha val="18000"/>
-              </a:srgbClr>
-            </a:outerShdw>
-          </a:effectLst>
-        </p:spPr>
-      </p:pic>
-      <p:sp>
-        <p:nvSpPr>
-          <p:cNvPr id="4" name="Text 1"/>
-          <p:cNvSpPr txBox="1"/>
-          <p:nvPr/>
-        </p:nvSpPr>
-        <p:spPr>
-          <a:xfrm>
-            <a:off x="5669280" y="1097280"/>
-            <a:ext cx="3108960" cy="1783080"/>
-          </a:xfrm>
-          <a:prstGeom prst="rect">
-            <a:avLst/>
-          </a:prstGeom>
-          <a:noFill/>
-          <a:ln/>
-        </p:spPr>
-        <p:txBody>
-          <a:bodyPr wrap="square" lIns="0" tIns="0" rIns="0" bIns="0" rtlCol="0" anchor="t"/>
-          <a:lstStyle/>
-          <a:p>
-            <a:pPr indent="0" marL="0">
-              <a:buNone/>
-            </a:pPr>
-            <a:r>
-              <a:rPr lang="en-US" sz="1300" b="1" dirty="0">
-                <a:solidFill>
-                  <a:schemeClr val="tx1"/>
-                </a:solidFill>
-              </a:rPr>
-              <a:t>A pull request (PR) is your proposed change. </a:t>
-            </a:r>
-            <a:pPr indent="0" marL="0">
-              <a:buNone/>
-            </a:pPr>
-            <a:r>
-              <a:rPr lang="en-US" sz="1300" dirty="0">
-                <a:solidFill>
-                  <a:schemeClr val="tx1"/>
-                </a:solidFill>
-              </a:rPr>
-              <a:t>It holds the change, a description of it, and evidence of the proposed new version: screenshots and notes. The approved reviewers check it, and only once they approve does it reach the real site.</a:t>
-            </a:r>
-            <a:endParaRPr lang="en-US" sz="1300" dirty="0"/>
-          </a:p>
-        </p:txBody>
-      </p:sp>
-      <p:sp>
-        <p:nvSpPr>
-          <p:cNvPr id="5" name="Text 2"/>
-          <p:cNvSpPr txBox="1"/>
-          <p:nvPr/>
-        </p:nvSpPr>
-        <p:spPr>
-          <a:xfrm>
-            <a:off x="5669280" y="2880360"/>
-            <a:ext cx="3108960" cy="1005840"/>
-          </a:xfrm>
-          <a:prstGeom prst="rect">
-            <a:avLst/>
-          </a:prstGeom>
-          <a:noFill/>
-          <a:ln/>
-        </p:spPr>
-        <p:txBody>
-          <a:bodyPr wrap="square" lIns="0" tIns="0" rIns="0" bIns="0" rtlCol="0" anchor="t"/>
-          <a:lstStyle/>
-          <a:p>
-            <a:pPr indent="0" marL="0">
-              <a:buNone/>
-            </a:pPr>
-            <a:r>
-              <a:rPr lang="en-US" sz="1200" b="1" dirty="0">
-                <a:solidFill>
-                  <a:schemeClr val="accent2"/>
-                </a:solidFill>
-              </a:rPr>
-              <a:t>When you say "I'm happy", </a:t>
-            </a:r>
-            <a:pPr indent="0" marL="0">
-              <a:buNone/>
-            </a:pPr>
-            <a:r>
-              <a:rPr lang="en-US" sz="1200" dirty="0">
-                <a:solidFill>
-                  <a:schemeClr val="accent2"/>
-                </a:solidFill>
-              </a:rPr>
-              <a:t>Claude runs its own checks, takes the screenshots and opens the PR, here "Add brick bench configurator" (#10).</a:t>
-            </a:r>
-            <a:endParaRPr lang="en-US" sz="1200" dirty="0"/>
-          </a:p>
-        </p:txBody>
-      </p:sp>
-      <p:sp>
-        <p:nvSpPr>
-          <p:cNvPr id="6" name="Shape 3"/>
+      <p:sp>
+        <p:nvSpPr>
+          <p:cNvPr id="3" name="Shape 1"/>
           <p:cNvSpPr/>
           <p:nvPr/>
         </p:nvSpPr>
         <p:spPr>
           <a:xfrm>
-            <a:off x="5669280" y="3931920"/>
-            <a:ext cx="3108960" cy="731520"/>
+            <a:off x="457200" y="1280160"/>
+            <a:ext cx="1874520" cy="2286000"/>
           </a:xfrm>
           <a:prstGeom prst="roundRect">
             <a:avLst>
-              <a:gd name="adj" fmla="val 5000"/>
+              <a:gd name="adj" fmla="val 1951"/>
             </a:avLst>
           </a:prstGeom>
           <a:solidFill>
@@ -6655,14 +5140,52 @@
       </p:sp>
       <p:sp>
         <p:nvSpPr>
-          <p:cNvPr id="7" name="Text 4"/>
+          <p:cNvPr id="4" name="Text 2"/>
           <p:cNvSpPr txBox="1"/>
           <p:nvPr/>
         </p:nvSpPr>
         <p:spPr>
           <a:xfrm>
-            <a:off x="5806440" y="3977640"/>
-            <a:ext cx="2834640" cy="640080"/>
+            <a:off x="1170432" y="1600200"/>
+            <a:ext cx="457200" cy="457200"/>
+          </a:xfrm>
+          <a:prstGeom prst="ellipse">
+            <a:avLst/>
+          </a:prstGeom>
+          <a:solidFill>
+            <a:schemeClr val="tx2"/>
+          </a:solidFill>
+          <a:ln/>
+        </p:spPr>
+        <p:txBody>
+          <a:bodyPr wrap="square" lIns="0" tIns="0" rIns="0" bIns="0" rtlCol="0" anchor="ctr"/>
+          <a:lstStyle/>
+          <a:p>
+            <a:pPr algn="ctr" indent="0" marL="0">
+              <a:buNone/>
+            </a:pPr>
+            <a:r>
+              <a:rPr lang="en-US" sz="1400" b="1" dirty="0">
+                <a:solidFill>
+                  <a:schemeClr val="bg1"/>
+                </a:solidFill>
+              </a:rPr>
+              <a:t>1</a:t>
+            </a:r>
+            <a:endParaRPr lang="en-US" sz="1400" dirty="0"/>
+          </a:p>
+        </p:txBody>
+      </p:sp>
+      <p:sp>
+        <p:nvSpPr>
+          <p:cNvPr id="5" name="Text 3"/>
+          <p:cNvSpPr txBox="1"/>
+          <p:nvPr/>
+        </p:nvSpPr>
+        <p:spPr>
+          <a:xfrm>
+            <a:off x="548640" y="2286000"/>
+            <a:ext cx="1691640" cy="1097280"/>
           </a:xfrm>
           <a:prstGeom prst="rect">
             <a:avLst/>
@@ -6671,21 +5194,488 @@
           <a:ln/>
         </p:spPr>
         <p:txBody>
+          <a:bodyPr wrap="square" lIns="0" tIns="0" rIns="0" bIns="0" rtlCol="0" anchor="t"/>
+          <a:lstStyle/>
+          <a:p>
+            <a:pPr algn="ctr" indent="0" marL="0">
+              <a:buNone/>
+            </a:pPr>
+            <a:r>
+              <a:rPr lang="en-US" sz="1500" b="1" dirty="0">
+                <a:solidFill>
+                  <a:schemeClr val="tx1"/>
+                </a:solidFill>
+              </a:rPr>
+              <a:t>Approved reviewers review</a:t>
+            </a:r>
+            <a:endParaRPr lang="en-US" sz="1400" dirty="0"/>
+          </a:p>
+          <a:p>
+            <a:pPr algn="ctr" indent="0" marL="0">
+              <a:buNone/>
+            </a:pPr>
+            <a:r>
+              <a:rPr lang="en-US" sz="1200" dirty="0">
+                <a:solidFill>
+                  <a:schemeClr val="accent2"/>
+                </a:solidFill>
+              </a:rPr>
+              <a:t>Starting with the brief</a:t>
+            </a:r>
+            <a:endParaRPr lang="en-US" sz="1400" dirty="0"/>
+          </a:p>
+        </p:txBody>
+      </p:sp>
+      <p:sp>
+        <p:nvSpPr>
+          <p:cNvPr id="6" name="Shape 4"/>
+          <p:cNvSpPr/>
+          <p:nvPr/>
+        </p:nvSpPr>
+        <p:spPr>
+          <a:xfrm>
+            <a:off x="2350008" y="2423160"/>
+            <a:ext cx="219456" cy="0"/>
+          </a:xfrm>
+          <a:prstGeom prst="line">
+            <a:avLst/>
+          </a:prstGeom>
+          <a:noFill/>
+          <a:ln w="19050">
+            <a:solidFill>
+              <a:schemeClr val="accent3"/>
+            </a:solidFill>
+            <a:prstDash val="solid"/>
+            <a:tailEnd type="triangle"/>
+          </a:ln>
+        </p:spPr>
+      </p:sp>
+      <p:sp>
+        <p:nvSpPr>
+          <p:cNvPr id="7" name="Shape 5"/>
+          <p:cNvSpPr/>
+          <p:nvPr/>
+        </p:nvSpPr>
+        <p:spPr>
+          <a:xfrm>
+            <a:off x="2587752" y="1280160"/>
+            <a:ext cx="1874520" cy="2286000"/>
+          </a:xfrm>
+          <a:prstGeom prst="roundRect">
+            <a:avLst>
+              <a:gd name="adj" fmla="val 1951"/>
+            </a:avLst>
+          </a:prstGeom>
+          <a:solidFill>
+            <a:schemeClr val="bg2"/>
+          </a:solidFill>
+          <a:ln w="9525">
+            <a:solidFill>
+              <a:schemeClr val="accent4"/>
+            </a:solidFill>
+            <a:prstDash val="solid"/>
+          </a:ln>
+        </p:spPr>
+      </p:sp>
+      <p:sp>
+        <p:nvSpPr>
+          <p:cNvPr id="8" name="Text 6"/>
+          <p:cNvSpPr txBox="1"/>
+          <p:nvPr/>
+        </p:nvSpPr>
+        <p:spPr>
+          <a:xfrm>
+            <a:off x="3300984" y="1600200"/>
+            <a:ext cx="457200" cy="457200"/>
+          </a:xfrm>
+          <a:prstGeom prst="ellipse">
+            <a:avLst/>
+          </a:prstGeom>
+          <a:solidFill>
+            <a:schemeClr val="tx2"/>
+          </a:solidFill>
+          <a:ln/>
+        </p:spPr>
+        <p:txBody>
           <a:bodyPr wrap="square" lIns="0" tIns="0" rIns="0" bIns="0" rtlCol="0" anchor="ctr"/>
           <a:lstStyle/>
           <a:p>
-            <a:pPr indent="0" marL="0">
+            <a:pPr algn="ctr" indent="0" marL="0">
+              <a:buNone/>
+            </a:pPr>
+            <a:r>
+              <a:rPr lang="en-US" sz="1400" b="1" dirty="0">
+                <a:solidFill>
+                  <a:schemeClr val="bg1"/>
+                </a:solidFill>
+              </a:rPr>
+              <a:t>2</a:t>
+            </a:r>
+            <a:endParaRPr lang="en-US" sz="1400" dirty="0"/>
+          </a:p>
+        </p:txBody>
+      </p:sp>
+      <p:sp>
+        <p:nvSpPr>
+          <p:cNvPr id="9" name="Text 7"/>
+          <p:cNvSpPr txBox="1"/>
+          <p:nvPr/>
+        </p:nvSpPr>
+        <p:spPr>
+          <a:xfrm>
+            <a:off x="2679192" y="2286000"/>
+            <a:ext cx="1691640" cy="1097280"/>
+          </a:xfrm>
+          <a:prstGeom prst="rect">
+            <a:avLst/>
+          </a:prstGeom>
+          <a:noFill/>
+          <a:ln/>
+        </p:spPr>
+        <p:txBody>
+          <a:bodyPr wrap="square" lIns="0" tIns="0" rIns="0" bIns="0" rtlCol="0" anchor="t"/>
+          <a:lstStyle/>
+          <a:p>
+            <a:pPr algn="ctr" indent="0" marL="0">
+              <a:buNone/>
+            </a:pPr>
+            <a:r>
+              <a:rPr lang="en-US" sz="1500" b="1" dirty="0">
+                <a:solidFill>
+                  <a:schemeClr val="tx1"/>
+                </a:solidFill>
+              </a:rPr>
+              <a:t>Comments</a:t>
+            </a:r>
+            <a:endParaRPr lang="en-US" sz="1400" dirty="0"/>
+          </a:p>
+          <a:p>
+            <a:pPr algn="ctr" indent="0" marL="0">
               <a:buNone/>
             </a:pPr>
             <a:r>
               <a:rPr lang="en-US" sz="1200" dirty="0">
                 <a:solidFill>
+                  <a:schemeClr val="accent2"/>
+                </a:solidFill>
+              </a:rPr>
+              <a:t>Questions or changes</a:t>
+            </a:r>
+            <a:endParaRPr lang="en-US" sz="1400" dirty="0"/>
+          </a:p>
+        </p:txBody>
+      </p:sp>
+      <p:sp>
+        <p:nvSpPr>
+          <p:cNvPr id="10" name="Shape 8"/>
+          <p:cNvSpPr/>
+          <p:nvPr/>
+        </p:nvSpPr>
+        <p:spPr>
+          <a:xfrm>
+            <a:off x="4480560" y="2423160"/>
+            <a:ext cx="219456" cy="0"/>
+          </a:xfrm>
+          <a:prstGeom prst="line">
+            <a:avLst/>
+          </a:prstGeom>
+          <a:noFill/>
+          <a:ln w="19050">
+            <a:solidFill>
+              <a:schemeClr val="accent3"/>
+            </a:solidFill>
+            <a:prstDash val="solid"/>
+            <a:tailEnd type="triangle"/>
+          </a:ln>
+        </p:spPr>
+      </p:sp>
+      <p:sp>
+        <p:nvSpPr>
+          <p:cNvPr id="11" name="Shape 9"/>
+          <p:cNvSpPr/>
+          <p:nvPr/>
+        </p:nvSpPr>
+        <p:spPr>
+          <a:xfrm>
+            <a:off x="4718304" y="1280160"/>
+            <a:ext cx="1874520" cy="2286000"/>
+          </a:xfrm>
+          <a:prstGeom prst="roundRect">
+            <a:avLst>
+              <a:gd name="adj" fmla="val 1951"/>
+            </a:avLst>
+          </a:prstGeom>
+          <a:solidFill>
+            <a:schemeClr val="bg2"/>
+          </a:solidFill>
+          <a:ln w="9525">
+            <a:solidFill>
+              <a:schemeClr val="accent4"/>
+            </a:solidFill>
+            <a:prstDash val="solid"/>
+          </a:ln>
+        </p:spPr>
+      </p:sp>
+      <p:sp>
+        <p:nvSpPr>
+          <p:cNvPr id="12" name="Text 10"/>
+          <p:cNvSpPr txBox="1"/>
+          <p:nvPr/>
+        </p:nvSpPr>
+        <p:spPr>
+          <a:xfrm>
+            <a:off x="5431536" y="1600200"/>
+            <a:ext cx="457200" cy="457200"/>
+          </a:xfrm>
+          <a:prstGeom prst="ellipse">
+            <a:avLst/>
+          </a:prstGeom>
+          <a:solidFill>
+            <a:schemeClr val="tx2"/>
+          </a:solidFill>
+          <a:ln/>
+        </p:spPr>
+        <p:txBody>
+          <a:bodyPr wrap="square" lIns="0" tIns="0" rIns="0" bIns="0" rtlCol="0" anchor="ctr"/>
+          <a:lstStyle/>
+          <a:p>
+            <a:pPr algn="ctr" indent="0" marL="0">
+              <a:buNone/>
+            </a:pPr>
+            <a:r>
+              <a:rPr lang="en-US" sz="1400" b="1" dirty="0">
+                <a:solidFill>
+                  <a:schemeClr val="bg1"/>
+                </a:solidFill>
+              </a:rPr>
+              <a:t>3</a:t>
+            </a:r>
+            <a:endParaRPr lang="en-US" sz="1400" dirty="0"/>
+          </a:p>
+        </p:txBody>
+      </p:sp>
+      <p:sp>
+        <p:nvSpPr>
+          <p:cNvPr id="13" name="Text 11"/>
+          <p:cNvSpPr txBox="1"/>
+          <p:nvPr/>
+        </p:nvSpPr>
+        <p:spPr>
+          <a:xfrm>
+            <a:off x="4809744" y="2286000"/>
+            <a:ext cx="1691640" cy="1097280"/>
+          </a:xfrm>
+          <a:prstGeom prst="rect">
+            <a:avLst/>
+          </a:prstGeom>
+          <a:noFill/>
+          <a:ln/>
+        </p:spPr>
+        <p:txBody>
+          <a:bodyPr wrap="square" lIns="0" tIns="0" rIns="0" bIns="0" rtlCol="0" anchor="t"/>
+          <a:lstStyle/>
+          <a:p>
+            <a:pPr algn="ctr" indent="0" marL="0">
+              <a:buNone/>
+            </a:pPr>
+            <a:r>
+              <a:rPr lang="en-US" sz="1500" b="1" dirty="0">
+                <a:solidFill>
                   <a:schemeClr val="tx1"/>
                 </a:solidFill>
               </a:rPr>
-              <a:t>Your one job: drag the screenshots into it on GitHub.</a:t>
-            </a:r>
-            <a:endParaRPr lang="en-US" sz="1200" dirty="0"/>
+              <a:t>Ask Claude</a:t>
+            </a:r>
+            <a:endParaRPr lang="en-US" sz="1400" dirty="0"/>
+          </a:p>
+          <a:p>
+            <a:pPr algn="ctr" indent="0" marL="0">
+              <a:buNone/>
+            </a:pPr>
+            <a:r>
+              <a:rPr lang="en-US" sz="1200" dirty="0">
+                <a:solidFill>
+                  <a:schemeClr val="accent2"/>
+                </a:solidFill>
+              </a:rPr>
+              <a:t>"let's work on the review comments"</a:t>
+            </a:r>
+            <a:endParaRPr lang="en-US" sz="1400" dirty="0"/>
+          </a:p>
+        </p:txBody>
+      </p:sp>
+      <p:sp>
+        <p:nvSpPr>
+          <p:cNvPr id="14" name="Shape 12"/>
+          <p:cNvSpPr/>
+          <p:nvPr/>
+        </p:nvSpPr>
+        <p:spPr>
+          <a:xfrm>
+            <a:off x="6611112" y="2423160"/>
+            <a:ext cx="219456" cy="0"/>
+          </a:xfrm>
+          <a:prstGeom prst="line">
+            <a:avLst/>
+          </a:prstGeom>
+          <a:noFill/>
+          <a:ln w="19050">
+            <a:solidFill>
+              <a:schemeClr val="accent3"/>
+            </a:solidFill>
+            <a:prstDash val="solid"/>
+            <a:tailEnd type="triangle"/>
+          </a:ln>
+        </p:spPr>
+      </p:sp>
+      <p:sp>
+        <p:nvSpPr>
+          <p:cNvPr id="15" name="Shape 13"/>
+          <p:cNvSpPr/>
+          <p:nvPr/>
+        </p:nvSpPr>
+        <p:spPr>
+          <a:xfrm>
+            <a:off x="6848856" y="1280160"/>
+            <a:ext cx="1874520" cy="2286000"/>
+          </a:xfrm>
+          <a:prstGeom prst="roundRect">
+            <a:avLst>
+              <a:gd name="adj" fmla="val 1951"/>
+            </a:avLst>
+          </a:prstGeom>
+          <a:solidFill>
+            <a:schemeClr val="tx2"/>
+          </a:solidFill>
+          <a:ln w="9525">
+            <a:solidFill>
+              <a:schemeClr val="tx2"/>
+            </a:solidFill>
+            <a:prstDash val="solid"/>
+          </a:ln>
+        </p:spPr>
+      </p:sp>
+      <p:sp>
+        <p:nvSpPr>
+          <p:cNvPr id="16" name="Text 14"/>
+          <p:cNvSpPr txBox="1"/>
+          <p:nvPr/>
+        </p:nvSpPr>
+        <p:spPr>
+          <a:xfrm>
+            <a:off x="7562088" y="1600200"/>
+            <a:ext cx="457200" cy="457200"/>
+          </a:xfrm>
+          <a:prstGeom prst="ellipse">
+            <a:avLst/>
+          </a:prstGeom>
+          <a:solidFill>
+            <a:schemeClr val="accent1"/>
+          </a:solidFill>
+          <a:ln/>
+        </p:spPr>
+        <p:txBody>
+          <a:bodyPr wrap="square" lIns="0" tIns="0" rIns="0" bIns="0" rtlCol="0" anchor="ctr"/>
+          <a:lstStyle/>
+          <a:p>
+            <a:pPr algn="ctr" indent="0" marL="0">
+              <a:buNone/>
+            </a:pPr>
+            <a:r>
+              <a:rPr lang="en-US" sz="1400" b="1" dirty="0">
+                <a:solidFill>
+                  <a:schemeClr val="bg1"/>
+                </a:solidFill>
+              </a:rPr>
+              <a:t>4</a:t>
+            </a:r>
+            <a:endParaRPr lang="en-US" sz="1400" dirty="0"/>
+          </a:p>
+        </p:txBody>
+      </p:sp>
+      <p:sp>
+        <p:nvSpPr>
+          <p:cNvPr id="17" name="Text 15"/>
+          <p:cNvSpPr txBox="1"/>
+          <p:nvPr/>
+        </p:nvSpPr>
+        <p:spPr>
+          <a:xfrm>
+            <a:off x="6940296" y="2286000"/>
+            <a:ext cx="1691640" cy="1097280"/>
+          </a:xfrm>
+          <a:prstGeom prst="rect">
+            <a:avLst/>
+          </a:prstGeom>
+          <a:noFill/>
+          <a:ln/>
+        </p:spPr>
+        <p:txBody>
+          <a:bodyPr wrap="square" lIns="0" tIns="0" rIns="0" bIns="0" rtlCol="0" anchor="t"/>
+          <a:lstStyle/>
+          <a:p>
+            <a:pPr algn="ctr" indent="0" marL="0">
+              <a:buNone/>
+            </a:pPr>
+            <a:r>
+              <a:rPr lang="en-US" sz="1500" b="1" dirty="0">
+                <a:solidFill>
+                  <a:schemeClr val="bg1"/>
+                </a:solidFill>
+              </a:rPr>
+              <a:t>Merged</a:t>
+            </a:r>
+            <a:endParaRPr lang="en-US" sz="1400" dirty="0"/>
+          </a:p>
+          <a:p>
+            <a:pPr algn="ctr" indent="0" marL="0">
+              <a:buNone/>
+            </a:pPr>
+            <a:r>
+              <a:rPr lang="en-US" sz="1200" dirty="0">
+                <a:solidFill>
+                  <a:schemeClr val="accent4"/>
+                </a:solidFill>
+              </a:rPr>
+              <a:t>Your piece is live</a:t>
+            </a:r>
+            <a:endParaRPr lang="en-US" sz="1400" dirty="0"/>
+          </a:p>
+        </p:txBody>
+      </p:sp>
+      <p:sp>
+        <p:nvSpPr>
+          <p:cNvPr id="18" name="Text 16"/>
+          <p:cNvSpPr txBox="1"/>
+          <p:nvPr/>
+        </p:nvSpPr>
+        <p:spPr>
+          <a:xfrm>
+            <a:off x="457200" y="3931920"/>
+            <a:ext cx="8229600" cy="548640"/>
+          </a:xfrm>
+          <a:prstGeom prst="rect">
+            <a:avLst/>
+          </a:prstGeom>
+          <a:noFill/>
+          <a:ln/>
+        </p:spPr>
+        <p:txBody>
+          <a:bodyPr wrap="square" lIns="0" tIns="0" rIns="0" bIns="0" rtlCol="0" anchor="t"/>
+          <a:lstStyle/>
+          <a:p>
+            <a:pPr indent="0" marL="0">
+              <a:buNone/>
+            </a:pPr>
+            <a:r>
+              <a:rPr lang="en-US" sz="1500" dirty="0">
+                <a:solidFill>
+                  <a:schemeClr val="accent2"/>
+                </a:solidFill>
+              </a:rPr>
+              <a:t>Changes go on the same pull request: open Code again (This computer, the project folder), and Claude picks up the comments.</a:t>
+            </a:r>
+            <a:endParaRPr lang="en-US" sz="1500" dirty="0"/>
           </a:p>
         </p:txBody>
       </p:sp>
@@ -6761,533 +5751,6 @@
       </p:grpSpPr>
       <p:sp>
         <p:nvSpPr>
-          <p:cNvPr id="2" name="Text 2"/>
-          <p:cNvSpPr/>
-          <p:nvPr>
-            <p:ph idx="103" type="title" hasCustomPrompt="1"/>
-          </p:nvPr>
-        </p:nvSpPr>
-        <p:spPr>
-          <a:xfrm>
-            <a:off x="457200" y="502920"/>
-            <a:ext cx="8229600" cy="457200"/>
-          </a:xfrm>
-          <a:prstGeom prst="rect">
-            <a:avLst/>
-          </a:prstGeom>
-          <a:noFill/>
-          <a:ln/>
-        </p:spPr>
-        <p:txBody>
-          <a:bodyPr wrap="square" lIns="0" tIns="0" rIns="0" bIns="0" rtlCol="0" anchor="ctr"/>
-          <a:lstStyle/>
-          <a:p>
-            <a:pPr algn="l" indent="0" marL="0">
-              <a:buNone/>
-            </a:pPr>
-            <a:r>
-              <a:rPr lang="en-US" sz="2000" b="1" spc="200" kern="0" dirty="0">
-                <a:solidFill>
-                  <a:schemeClr val="tx1"/>
-                </a:solidFill>
-              </a:rPr>
-              <a:t>AFTER YOU SEND IT</a:t>
-            </a:r>
-            <a:endParaRPr lang="en-US" sz="2000" dirty="0"/>
-          </a:p>
-        </p:txBody>
-      </p:sp>
-      <p:pic>
-        <p:nvPicPr>
-          <p:cNvPr id="3" name="Pull request 10 on GitHub" descr="small/gh-pr.jpg">    </p:cNvPr>
-          <p:cNvPicPr>
-            <a:picLocks noChangeAspect="1"/>
-          </p:cNvPicPr>
-          <p:nvPr/>
-        </p:nvPicPr>
-        <p:blipFill>
-          <a:blip r:embed="rId1"/>
-          <a:stretch>
-            <a:fillRect/>
-          </a:stretch>
-        </p:blipFill>
-        <p:spPr>
-          <a:xfrm>
-            <a:off x="457200" y="1051560"/>
-            <a:ext cx="5060819" cy="2880360"/>
-          </a:xfrm>
-          <a:prstGeom prst="rect">
-            <a:avLst/>
-          </a:prstGeom>
-          <a:effectLst>
-            <a:outerShdw sx="100000" sy="100000" kx="0" ky="0" algn="bl" rotWithShape="0" blurRad="76200" dist="25400" dir="5400000">
-              <a:srgbClr val="000000">
-                <a:alpha val="18000"/>
-              </a:srgbClr>
-            </a:outerShdw>
-          </a:effectLst>
-        </p:spPr>
-      </p:pic>
-      <p:sp>
-        <p:nvSpPr>
-          <p:cNvPr id="4" name="Text 1"/>
-          <p:cNvSpPr txBox="1"/>
-          <p:nvPr/>
-        </p:nvSpPr>
-        <p:spPr>
-          <a:xfrm>
-            <a:off x="5852160" y="1097280"/>
-            <a:ext cx="411480" cy="411480"/>
-          </a:xfrm>
-          <a:prstGeom prst="ellipse">
-            <a:avLst/>
-          </a:prstGeom>
-          <a:solidFill>
-            <a:schemeClr val="tx2"/>
-          </a:solidFill>
-          <a:ln/>
-        </p:spPr>
-        <p:txBody>
-          <a:bodyPr wrap="square" lIns="0" tIns="0" rIns="0" bIns="0" rtlCol="0" anchor="ctr"/>
-          <a:lstStyle/>
-          <a:p>
-            <a:pPr algn="ctr" indent="0" marL="0">
-              <a:buNone/>
-            </a:pPr>
-            <a:r>
-              <a:rPr lang="en-US" sz="1400" b="1" dirty="0">
-                <a:solidFill>
-                  <a:schemeClr val="bg1"/>
-                </a:solidFill>
-              </a:rPr>
-              <a:t>1</a:t>
-            </a:r>
-            <a:endParaRPr lang="en-US" sz="1400" dirty="0"/>
-          </a:p>
-        </p:txBody>
-      </p:sp>
-      <p:sp>
-        <p:nvSpPr>
-          <p:cNvPr id="5" name="Text 2"/>
-          <p:cNvSpPr txBox="1"/>
-          <p:nvPr/>
-        </p:nvSpPr>
-        <p:spPr>
-          <a:xfrm>
-            <a:off x="6400800" y="1051560"/>
-            <a:ext cx="2377440" cy="685800"/>
-          </a:xfrm>
-          <a:prstGeom prst="rect">
-            <a:avLst/>
-          </a:prstGeom>
-          <a:noFill/>
-          <a:ln/>
-        </p:spPr>
-        <p:txBody>
-          <a:bodyPr wrap="square" lIns="0" tIns="0" rIns="0" bIns="0" rtlCol="0" anchor="t"/>
-          <a:lstStyle/>
-          <a:p>
-            <a:pPr indent="0" marL="0">
-              <a:buNone/>
-            </a:pPr>
-            <a:r>
-              <a:rPr lang="en-US" sz="1400" b="1" dirty="0">
-                <a:solidFill>
-                  <a:schemeClr val="tx1"/>
-                </a:solidFill>
-              </a:rPr>
-              <a:t>Approved reviewers review</a:t>
-            </a:r>
-            <a:endParaRPr lang="en-US" sz="1400" dirty="0"/>
-          </a:p>
-          <a:p>
-            <a:pPr indent="0" marL="0">
-              <a:buNone/>
-            </a:pPr>
-            <a:r>
-              <a:rPr lang="en-US" sz="1200" dirty="0">
-                <a:solidFill>
-                  <a:schemeClr val="accent2"/>
-                </a:solidFill>
-              </a:rPr>
-              <a:t>Starting with the brief and the screenshots</a:t>
-            </a:r>
-            <a:endParaRPr lang="en-US" sz="1400" dirty="0"/>
-          </a:p>
-        </p:txBody>
-      </p:sp>
-      <p:sp>
-        <p:nvSpPr>
-          <p:cNvPr id="6" name="Text 3"/>
-          <p:cNvSpPr txBox="1"/>
-          <p:nvPr/>
-        </p:nvSpPr>
-        <p:spPr>
-          <a:xfrm>
-            <a:off x="5852160" y="1828800"/>
-            <a:ext cx="411480" cy="411480"/>
-          </a:xfrm>
-          <a:prstGeom prst="ellipse">
-            <a:avLst/>
-          </a:prstGeom>
-          <a:solidFill>
-            <a:schemeClr val="tx2"/>
-          </a:solidFill>
-          <a:ln/>
-        </p:spPr>
-        <p:txBody>
-          <a:bodyPr wrap="square" lIns="0" tIns="0" rIns="0" bIns="0" rtlCol="0" anchor="ctr"/>
-          <a:lstStyle/>
-          <a:p>
-            <a:pPr algn="ctr" indent="0" marL="0">
-              <a:buNone/>
-            </a:pPr>
-            <a:r>
-              <a:rPr lang="en-US" sz="1400" b="1" dirty="0">
-                <a:solidFill>
-                  <a:schemeClr val="bg1"/>
-                </a:solidFill>
-              </a:rPr>
-              <a:t>2</a:t>
-            </a:r>
-            <a:endParaRPr lang="en-US" sz="1400" dirty="0"/>
-          </a:p>
-        </p:txBody>
-      </p:sp>
-      <p:sp>
-        <p:nvSpPr>
-          <p:cNvPr id="7" name="Text 4"/>
-          <p:cNvSpPr txBox="1"/>
-          <p:nvPr/>
-        </p:nvSpPr>
-        <p:spPr>
-          <a:xfrm>
-            <a:off x="6400800" y="1783080"/>
-            <a:ext cx="2377440" cy="685800"/>
-          </a:xfrm>
-          <a:prstGeom prst="rect">
-            <a:avLst/>
-          </a:prstGeom>
-          <a:noFill/>
-          <a:ln/>
-        </p:spPr>
-        <p:txBody>
-          <a:bodyPr wrap="square" lIns="0" tIns="0" rIns="0" bIns="0" rtlCol="0" anchor="t"/>
-          <a:lstStyle/>
-          <a:p>
-            <a:pPr indent="0" marL="0">
-              <a:buNone/>
-            </a:pPr>
-            <a:r>
-              <a:rPr lang="en-US" sz="1400" b="1" dirty="0">
-                <a:solidFill>
-                  <a:schemeClr val="tx1"/>
-                </a:solidFill>
-              </a:rPr>
-              <a:t>Comments</a:t>
-            </a:r>
-            <a:endParaRPr lang="en-US" sz="1400" dirty="0"/>
-          </a:p>
-          <a:p>
-            <a:pPr indent="0" marL="0">
-              <a:buNone/>
-            </a:pPr>
-            <a:r>
-              <a:rPr lang="en-US" sz="1200" dirty="0">
-                <a:solidFill>
-                  <a:schemeClr val="accent2"/>
-                </a:solidFill>
-              </a:rPr>
-              <a:t>Questions or changes, on GitHub</a:t>
-            </a:r>
-            <a:endParaRPr lang="en-US" sz="1400" dirty="0"/>
-          </a:p>
-        </p:txBody>
-      </p:sp>
-      <p:sp>
-        <p:nvSpPr>
-          <p:cNvPr id="8" name="Text 5"/>
-          <p:cNvSpPr txBox="1"/>
-          <p:nvPr/>
-        </p:nvSpPr>
-        <p:spPr>
-          <a:xfrm>
-            <a:off x="5852160" y="2560320"/>
-            <a:ext cx="411480" cy="411480"/>
-          </a:xfrm>
-          <a:prstGeom prst="ellipse">
-            <a:avLst/>
-          </a:prstGeom>
-          <a:solidFill>
-            <a:schemeClr val="tx2"/>
-          </a:solidFill>
-          <a:ln/>
-        </p:spPr>
-        <p:txBody>
-          <a:bodyPr wrap="square" lIns="0" tIns="0" rIns="0" bIns="0" rtlCol="0" anchor="ctr"/>
-          <a:lstStyle/>
-          <a:p>
-            <a:pPr algn="ctr" indent="0" marL="0">
-              <a:buNone/>
-            </a:pPr>
-            <a:r>
-              <a:rPr lang="en-US" sz="1400" b="1" dirty="0">
-                <a:solidFill>
-                  <a:schemeClr val="bg1"/>
-                </a:solidFill>
-              </a:rPr>
-              <a:t>3</a:t>
-            </a:r>
-            <a:endParaRPr lang="en-US" sz="1400" dirty="0"/>
-          </a:p>
-        </p:txBody>
-      </p:sp>
-      <p:sp>
-        <p:nvSpPr>
-          <p:cNvPr id="9" name="Text 6"/>
-          <p:cNvSpPr txBox="1"/>
-          <p:nvPr/>
-        </p:nvSpPr>
-        <p:spPr>
-          <a:xfrm>
-            <a:off x="6400800" y="2514600"/>
-            <a:ext cx="2377440" cy="685800"/>
-          </a:xfrm>
-          <a:prstGeom prst="rect">
-            <a:avLst/>
-          </a:prstGeom>
-          <a:noFill/>
-          <a:ln/>
-        </p:spPr>
-        <p:txBody>
-          <a:bodyPr wrap="square" lIns="0" tIns="0" rIns="0" bIns="0" rtlCol="0" anchor="t"/>
-          <a:lstStyle/>
-          <a:p>
-            <a:pPr indent="0" marL="0">
-              <a:buNone/>
-            </a:pPr>
-            <a:r>
-              <a:rPr lang="en-US" sz="1400" b="1" dirty="0">
-                <a:solidFill>
-                  <a:schemeClr val="tx1"/>
-                </a:solidFill>
-              </a:rPr>
-              <a:t>Ask Claude</a:t>
-            </a:r>
-            <a:endParaRPr lang="en-US" sz="1400" dirty="0"/>
-          </a:p>
-          <a:p>
-            <a:pPr indent="0" marL="0">
-              <a:buNone/>
-            </a:pPr>
-            <a:r>
-              <a:rPr lang="en-US" sz="1200" dirty="0">
-                <a:solidFill>
-                  <a:schemeClr val="accent2"/>
-                </a:solidFill>
-              </a:rPr>
-              <a:t>"let's work on the review comments"</a:t>
-            </a:r>
-            <a:endParaRPr lang="en-US" sz="1400" dirty="0"/>
-          </a:p>
-        </p:txBody>
-      </p:sp>
-      <p:sp>
-        <p:nvSpPr>
-          <p:cNvPr id="10" name="Text 7"/>
-          <p:cNvSpPr txBox="1"/>
-          <p:nvPr/>
-        </p:nvSpPr>
-        <p:spPr>
-          <a:xfrm>
-            <a:off x="5852160" y="3291840"/>
-            <a:ext cx="411480" cy="411480"/>
-          </a:xfrm>
-          <a:prstGeom prst="ellipse">
-            <a:avLst/>
-          </a:prstGeom>
-          <a:solidFill>
-            <a:schemeClr val="accent1"/>
-          </a:solidFill>
-          <a:ln/>
-        </p:spPr>
-        <p:txBody>
-          <a:bodyPr wrap="square" lIns="0" tIns="0" rIns="0" bIns="0" rtlCol="0" anchor="ctr"/>
-          <a:lstStyle/>
-          <a:p>
-            <a:pPr algn="ctr" indent="0" marL="0">
-              <a:buNone/>
-            </a:pPr>
-            <a:r>
-              <a:rPr lang="en-US" sz="1400" b="1" dirty="0">
-                <a:solidFill>
-                  <a:schemeClr val="bg1"/>
-                </a:solidFill>
-              </a:rPr>
-              <a:t>4</a:t>
-            </a:r>
-            <a:endParaRPr lang="en-US" sz="1400" dirty="0"/>
-          </a:p>
-        </p:txBody>
-      </p:sp>
-      <p:sp>
-        <p:nvSpPr>
-          <p:cNvPr id="11" name="Text 8"/>
-          <p:cNvSpPr txBox="1"/>
-          <p:nvPr/>
-        </p:nvSpPr>
-        <p:spPr>
-          <a:xfrm>
-            <a:off x="6400800" y="3246120"/>
-            <a:ext cx="2377440" cy="685800"/>
-          </a:xfrm>
-          <a:prstGeom prst="rect">
-            <a:avLst/>
-          </a:prstGeom>
-          <a:noFill/>
-          <a:ln/>
-        </p:spPr>
-        <p:txBody>
-          <a:bodyPr wrap="square" lIns="0" tIns="0" rIns="0" bIns="0" rtlCol="0" anchor="t"/>
-          <a:lstStyle/>
-          <a:p>
-            <a:pPr indent="0" marL="0">
-              <a:buNone/>
-            </a:pPr>
-            <a:r>
-              <a:rPr lang="en-US" sz="1400" b="1" dirty="0">
-                <a:solidFill>
-                  <a:schemeClr val="tx1"/>
-                </a:solidFill>
-              </a:rPr>
-              <a:t>Merged</a:t>
-            </a:r>
-            <a:endParaRPr lang="en-US" sz="1400" dirty="0"/>
-          </a:p>
-          <a:p>
-            <a:pPr indent="0" marL="0">
-              <a:buNone/>
-            </a:pPr>
-            <a:r>
-              <a:rPr lang="en-US" sz="1200" dirty="0">
-                <a:solidFill>
-                  <a:schemeClr val="accent2"/>
-                </a:solidFill>
-              </a:rPr>
-              <a:t>Your piece is live on the site</a:t>
-            </a:r>
-            <a:endParaRPr lang="en-US" sz="1400" dirty="0"/>
-          </a:p>
-        </p:txBody>
-      </p:sp>
-      <p:sp>
-        <p:nvSpPr>
-          <p:cNvPr id="12" name="Text 9"/>
-          <p:cNvSpPr txBox="1"/>
-          <p:nvPr/>
-        </p:nvSpPr>
-        <p:spPr>
-          <a:xfrm>
-            <a:off x="457200" y="4069080"/>
-            <a:ext cx="8229600" cy="548640"/>
-          </a:xfrm>
-          <a:prstGeom prst="rect">
-            <a:avLst/>
-          </a:prstGeom>
-          <a:noFill/>
-          <a:ln/>
-        </p:spPr>
-        <p:txBody>
-          <a:bodyPr wrap="square" lIns="0" tIns="0" rIns="0" bIns="0" rtlCol="0" anchor="t"/>
-          <a:lstStyle/>
-          <a:p>
-            <a:pPr indent="0" marL="0">
-              <a:buNone/>
-            </a:pPr>
-            <a:r>
-              <a:rPr lang="en-US" sz="1300" dirty="0">
-                <a:solidFill>
-                  <a:schemeClr val="accent2"/>
-                </a:solidFill>
-              </a:rPr>
-              <a:t>Changes go on the same pull request: open Code again (This computer, the project folder), and Claude picks up the comments.</a:t>
-            </a:r>
-            <a:endParaRPr lang="en-US" sz="1300" dirty="0"/>
-          </a:p>
-        </p:txBody>
-      </p:sp>
-      <p:sp>
-        <p:nvSpPr>
-          <p:cNvPr id="25" name="Slide Number Placeholder 0"/>
-          <p:cNvSpPr>
-            <a:spLocks noGrp="1"/>
-          </p:cNvSpPr>
-          <p:nvPr>
-            <p:ph type="sldNum" sz="quarter" idx="4294967295"/>
-          </p:nvPr>
-        </p:nvSpPr>
-        <p:spPr>
-          <a:xfrm>
-            <a:off x="8503920" y="4754880"/>
-            <a:ext cx="365760" cy="274320"/>
-          </a:xfrm>
-          <a:prstGeom prst="rect">
-            <a:avLst/>
-          </a:prstGeom>
-          <a:extLst>
-            <a:ext uri="{C572A759-6A51-4108-AA02-DFA0A04FC94B}">
-              <ma14:wrappingTextBoxFlag xmlns:ma14="http://schemas.microsoft.com/office/mac/drawingml/2011/main" val="0"/>
-            </a:ext>
-          </a:extLst>
-        </p:spPr>
-        <p:txBody>
-          <a:bodyPr/>
-          <a:lstStyle>
-            <a:lvl1pPr>
-              <a:defRPr sz="1000">
-                <a:solidFill>
-                  <a:schemeClr val="accent3"/>
-                </a:solidFill>
-              </a:defRPr>
-            </a:lvl1pPr>
-          </a:lstStyle>
-          <a:p>
-            <a:pPr algn="l"/>
-            <a:fld id="{F7021451-1387-4CA6-816F-3879F97B5CBC}" type="slidenum">
-              <a:rPr b="0" lang="en-US"/>
-              <a:t>20</a:t>
-            </a:fld>
-            <a:endParaRPr lang="en-US"/>
-          </a:p>
-        </p:txBody>
-      </p:sp>
-    </p:spTree>
-  </p:cSld>
-  <p:clrMapOvr>
-    <a:masterClrMapping/>
-  </p:clrMapOvr>
-</p:sld>
-</file>
-
-<file path=ppt/slides/slide21.xml><?xml version="1.0" encoding="utf-8"?>
-<p:sld xmlns:a="http://schemas.openxmlformats.org/drawingml/2006/main" xmlns:r="http://schemas.openxmlformats.org/officeDocument/2006/relationships" xmlns:p="http://schemas.openxmlformats.org/presentationml/2006/main">
-  <p:cSld name="Slide 21">
-    <p:spTree>
-      <p:nvGrpSpPr>
-        <p:cNvPr id="1" name=""/>
-        <p:cNvGrpSpPr/>
-        <p:nvPr/>
-      </p:nvGrpSpPr>
-      <p:grpSpPr>
-        <a:xfrm>
-          <a:off x="0" y="0"/>
-          <a:ext cx="0" cy="0"/>
-          <a:chOff x="0" y="0"/>
-          <a:chExt cx="0" cy="0"/>
-        </a:xfrm>
-      </p:grpSpPr>
-      <p:sp>
-        <p:nvSpPr>
           <p:cNvPr id="2" name="Text 1"/>
           <p:cNvSpPr/>
           <p:nvPr>
@@ -8819,7 +7282,7 @@
       </p:sp>
       <p:pic>
         <p:nvPicPr>
-          <p:cNvPr id="4" name="Step 0: open the Claude app" descr="small/app-home.jpg">    </p:cNvPr>
+          <p:cNvPr id="4" name="Step 0: open the Claude app" descr="Claude desktop app sidebar">    </p:cNvPr>
           <p:cNvPicPr>
             <a:picLocks noChangeAspect="1"/>
           </p:cNvPicPr>
@@ -9103,7 +7566,7 @@
       </p:sp>
       <p:pic>
         <p:nvPicPr>
-          <p:cNvPr id="4" name="Step 1: go to Code" descr="small/app-code.jpg">    </p:cNvPr>
+          <p:cNvPr id="4" name="Step 1: go to Code" descr="Claude desktop app sidebar with the Code toggle at the top">    </p:cNvPr>
           <p:cNvPicPr>
             <a:picLocks noChangeAspect="1"/>
           </p:cNvPicPr>

--- a/docs/contributing-guide.pptx
+++ b/docs/contributing-guide.pptx
@@ -13,7 +13,6 @@
     <p:sldId id="263" r:id="rId9"/>
     <p:sldId id="264" r:id="rId10"/>
     <p:sldId id="265" r:id="rId11"/>
-    <p:sldId id="266" r:id="rId12"/>
     <p:sldId id="267" r:id="rId13"/>
     <p:sldId id="270" r:id="rId16"/>
     <p:sldId id="272" r:id="rId18"/>
@@ -653,7 +652,7 @@
           <a:p>
             <a:r>
               <a:rPr lang="en-US" dirty="0"/>
-              <a:t>Illustration. "Clone" means download the project. Claude needs Git for it; if it is missing, Claude gives you the one link to install it. The project carries Claude's instructions, so as soon as it is downloaded Claude knows how to guide you.</a:t>
+              <a:t>Simulated conversation; exact wording will vary. Next time, skip this step: click Choose…, pick the open-source-modular-furniture folder in Documents and say "let's work on this". Illustration. "Clone" means download the project. Claude needs Git for it; if it is missing, Claude gives you the one link to install it. The project carries Claude's instructions, so as soon as it is downloaded Claude knows how to guide you.</a:t>
             </a:r>
             <a:endParaRPr lang="en-US" dirty="0"/>
           </a:p>
@@ -677,94 +676,6 @@
             <a:fld id="{F7021451-1387-4CA6-816F-3879F97B5CBC}" type="slidenum">
               <a:rPr lang="en-US"/>
               <a:t>10</a:t>
-            </a:fld>
-            <a:endParaRPr lang="en-US"/>
-          </a:p>
-        </p:txBody>
-      </p:sp>
-    </p:spTree>
-    <p:extLst>
-      <p:ext uri="{BB962C8B-B14F-4D97-AF65-F5344CB8AC3E}">
-        <p14:creationId xmlns:p14="http://schemas.microsoft.com/office/powerpoint/2010/main" val="1024086991"/>
-      </p:ext>
-    </p:extLst>
-  </p:cSld>
-  <p:clrMapOvr>
-    <a:masterClrMapping/>
-  </p:clrMapOvr>
-</p:notes>
-</file>
-
-<file path=ppt/notesSlides/notesSlide11.xml><?xml version="1.0" encoding="utf-8"?>
-<p:notes xmlns:a="http://schemas.openxmlformats.org/drawingml/2006/main" xmlns:r="http://schemas.openxmlformats.org/officeDocument/2006/relationships" xmlns:p="http://schemas.openxmlformats.org/presentationml/2006/main">
-  <p:cSld>
-    <p:spTree>
-      <p:nvGrpSpPr>
-        <p:cNvPr id="1" name=""/>
-        <p:cNvGrpSpPr/>
-        <p:nvPr/>
-      </p:nvGrpSpPr>
-      <p:grpSpPr>
-        <a:xfrm>
-          <a:off x="0" y="0"/>
-          <a:ext cx="0" cy="0"/>
-          <a:chOff x="0" y="0"/>
-          <a:chExt cx="0" cy="0"/>
-        </a:xfrm>
-      </p:grpSpPr>
-      <p:sp>
-        <p:nvSpPr>
-          <p:cNvPr id="2" name="Slide Image Placeholder 1"/>
-          <p:cNvSpPr>
-            <a:spLocks noGrp="1" noRot="1" noChangeAspect="1"/>
-          </p:cNvSpPr>
-          <p:nvPr>
-            <p:ph type="sldImg"/>
-          </p:nvPr>
-        </p:nvSpPr>
-        <p:spPr/>
-      </p:sp>
-      <p:sp>
-        <p:nvSpPr>
-          <p:cNvPr id="3" name="Notes Placeholder 2"/>
-          <p:cNvSpPr>
-            <a:spLocks noGrp="1"/>
-          </p:cNvSpPr>
-          <p:nvPr>
-            <p:ph type="body" idx="1"/>
-          </p:nvPr>
-        </p:nvSpPr>
-        <p:spPr/>
-        <p:txBody>
-          <a:bodyPr/>
-          <a:lstStyle/>
-          <a:p>
-            <a:r>
-              <a:rPr lang="en-US" dirty="0"/>
-              <a:t>Simulated conversation; exact wording will vary. Next time, skip step 3: click Choose…, pick the open-source-modular-furniture folder in Documents and say "let's work on this".</a:t>
-            </a:r>
-            <a:endParaRPr lang="en-US" dirty="0"/>
-          </a:p>
-        </p:txBody>
-      </p:sp>
-      <p:sp>
-        <p:nvSpPr>
-          <p:cNvPr id="4" name="Slide Number Placeholder 3"/>
-          <p:cNvSpPr>
-            <a:spLocks noGrp="1"/>
-          </p:cNvSpPr>
-          <p:nvPr>
-            <p:ph type="sldNum" sz="quarter" idx="10"/>
-          </p:nvPr>
-        </p:nvSpPr>
-        <p:spPr/>
-        <p:txBody>
-          <a:bodyPr/>
-          <a:lstStyle/>
-          <a:p>
-            <a:fld id="{F7021451-1387-4CA6-816F-3879F97B5CBC}" type="slidenum">
-              <a:rPr lang="en-US"/>
-              <a:t>11</a:t>
             </a:fld>
             <a:endParaRPr lang="en-US"/>
           </a:p>
@@ -2746,7 +2657,7 @@
                   <a:schemeClr val="tx1"/>
                 </a:solidFill>
               </a:rPr>
-              <a:t>STEP 3: TELL CLAUDE THE PROJECT</a:t>
+              <a:t>STEP 3: PASTE IT, CLAUDE TAKES OVER</a:t>
             </a:r>
             <a:endParaRPr lang="en-US" sz="2000" dirty="0"/>
           </a:p>
@@ -2789,7 +2700,7 @@
                 <a:ea typeface="Courier New" pitchFamily="34" charset="-122"/>
                 <a:cs typeface="Courier New" pitchFamily="34" charset="-120"/>
               </a:rPr>
-              <a:t>ILLUSTRATION</a:t>
+              <a:t>SIMULATED EXAMPLE</a:t>
             </a:r>
             <a:endParaRPr lang="en-US" sz="800" dirty="0"/>
           </a:p>
@@ -2797,7 +2708,7 @@
       </p:sp>
       <p:pic>
         <p:nvPicPr>
-          <p:cNvPr id="4" name="Step 3: tell Claude the project" descr="small/app-first.jpg">    </p:cNvPr>
+          <p:cNvPr id="4" name="Step 3: tell Claude the project" descr="Claude Code session after pasting the repository link"/>
           <p:cNvPicPr>
             <a:picLocks noChangeAspect="1"/>
           </p:cNvPicPr>
@@ -2811,14 +2722,14 @@
         </p:blipFill>
         <p:spPr>
           <a:xfrm>
-            <a:off x="457200" y="1051560"/>
-            <a:ext cx="4605311" cy="3611880"/>
+            <a:off x="457200" y="1005840"/>
+            <a:ext cx="3291840" cy="2581743"/>
           </a:xfrm>
           <a:prstGeom prst="rect">
             <a:avLst/>
           </a:prstGeom>
           <a:effectLst>
-            <a:outerShdw sx="100000" sy="100000" kx="0" ky="0" algn="bl" rotWithShape="0" blurRad="76200" dist="25400" dir="5400000">
+            <a:outerShdw blurRad="76200" dist="25400" dir="5400000" algn="bl" rotWithShape="0">
               <a:srgbClr val="000000">
                 <a:alpha val="18000"/>
               </a:srgbClr>
@@ -2826,16 +2737,47 @@
           </a:effectLst>
         </p:spPr>
       </p:pic>
-      <p:sp>
-        <p:nvSpPr>
-          <p:cNvPr id="5" name="Text 2"/>
+      <p:pic>
+        <p:nvPicPr>
+          <p:cNvPr id="5" name="Step 4: Claude takes it from there" descr="Simulated start of the work"/>
+          <p:cNvPicPr>
+            <a:picLocks noChangeAspect="1"/>
+          </p:cNvPicPr>
+          <p:nvPr/>
+        </p:nvPicPr>
+        <p:blipFill>
+          <a:blip r:embed="rId90"/>
+          <a:stretch>
+            <a:fillRect/>
+          </a:stretch>
+        </p:blipFill>
+        <p:spPr>
+          <a:xfrm>
+            <a:off x="5394960" y="1005840"/>
+            <a:ext cx="3291840" cy="2299585"/>
+          </a:xfrm>
+          <a:prstGeom prst="rect">
+            <a:avLst/>
+          </a:prstGeom>
+          <a:effectLst>
+            <a:outerShdw blurRad="76200" dist="25400" dir="5400000" algn="bl" rotWithShape="0">
+              <a:srgbClr val="000000">
+                <a:alpha val="18000"/>
+              </a:srgbClr>
+            </a:outerShdw>
+          </a:effectLst>
+        </p:spPr>
+      </p:pic>
+      <p:sp>
+        <p:nvSpPr>
+          <p:cNvPr id="6" name="Step number 3"/>
           <p:cNvSpPr txBox="1"/>
           <p:nvPr/>
         </p:nvSpPr>
         <p:spPr>
           <a:xfrm>
-            <a:off x="6583680" y="1188720"/>
-            <a:ext cx="548640" cy="548640"/>
+            <a:off x="457200" y="3679023"/>
+            <a:ext cx="320040" cy="320040"/>
           </a:xfrm>
           <a:prstGeom prst="ellipse">
             <a:avLst/>
@@ -2843,88 +2785,162 @@
           <a:solidFill>
             <a:schemeClr val="accent1"/>
           </a:solidFill>
-          <a:ln/>
-        </p:spPr>
-        <p:txBody>
-          <a:bodyPr wrap="square" lIns="0" tIns="0" rIns="0" bIns="0" rtlCol="0" anchor="ctr"/>
-          <a:lstStyle/>
-          <a:p>
-            <a:pPr algn="ctr" indent="0" marL="0">
-              <a:buNone/>
-            </a:pPr>
-            <a:r>
-              <a:rPr lang="en-US" sz="1400" b="1" dirty="0">
+        </p:spPr>
+        <p:txBody>
+          <a:bodyPr wrap="square" lIns="0" tIns="0" rIns="0" bIns="0" anchor="ctr"/>
+          <a:lstStyle/>
+          <a:p>
+            <a:pPr algn="ctr"/>
+            <a:r>
+              <a:rPr lang="en-US" sz="1200" b="1" dirty="0">
                 <a:solidFill>
                   <a:schemeClr val="bg1"/>
                 </a:solidFill>
               </a:rPr>
               <a:t>3</a:t>
             </a:r>
-            <a:endParaRPr lang="en-US" sz="1400" dirty="0"/>
-          </a:p>
-        </p:txBody>
-      </p:sp>
-      <p:sp>
-        <p:nvSpPr>
-          <p:cNvPr id="6" name="Text 3"/>
+          </a:p>
+        </p:txBody>
+      </p:sp>
+      <p:sp>
+        <p:nvSpPr>
+          <p:cNvPr id="7" name="Step number 4"/>
           <p:cNvSpPr txBox="1"/>
           <p:nvPr/>
         </p:nvSpPr>
         <p:spPr>
           <a:xfrm>
-            <a:off x="6583680" y="1920240"/>
-            <a:ext cx="2194560" cy="2651760"/>
+            <a:off x="5394960" y="3679023"/>
+            <a:ext cx="320040" cy="320040"/>
+          </a:xfrm>
+          <a:prstGeom prst="ellipse">
+            <a:avLst/>
+          </a:prstGeom>
+          <a:solidFill>
+            <a:schemeClr val="accent1"/>
+          </a:solidFill>
+        </p:spPr>
+        <p:txBody>
+          <a:bodyPr wrap="square" lIns="0" tIns="0" rIns="0" bIns="0" anchor="ctr"/>
+          <a:lstStyle/>
+          <a:p>
+            <a:pPr algn="ctr"/>
+            <a:r>
+              <a:rPr lang="en-US" sz="1200" b="1" dirty="0">
+                <a:solidFill>
+                  <a:schemeClr val="bg1"/>
+                </a:solidFill>
+              </a:rPr>
+              <a:t>4</a:t>
+            </a:r>
+          </a:p>
+        </p:txBody>
+      </p:sp>
+      <p:sp>
+        <p:nvSpPr>
+          <p:cNvPr id="30" name="Step 3 text"/>
+          <p:cNvSpPr txBox="1"/>
+          <p:nvPr/>
+        </p:nvSpPr>
+        <p:spPr>
+          <a:xfrm>
+            <a:off x="868680" y="3679023"/>
+            <a:ext cx="2880360" cy="1005840"/>
           </a:xfrm>
           <a:prstGeom prst="rect">
             <a:avLst/>
           </a:prstGeom>
           <a:noFill/>
-          <a:ln/>
-        </p:spPr>
-        <p:txBody>
-          <a:bodyPr wrap="square" lIns="0" tIns="0" rIns="0" bIns="0" rtlCol="0" anchor="t"/>
+        </p:spPr>
+        <p:txBody>
+          <a:bodyPr wrap="square" lIns="0" tIns="0" rIns="0" bIns="0" anchor="t"/>
           <a:lstStyle/>
           <a:p>
             <a:pPr indent="0" marL="0">
               <a:buNone/>
             </a:pPr>
             <a:r>
-              <a:rPr lang="en-US" sz="1700" b="1" dirty="0">
+              <a:rPr lang="en-US" sz="1300" b="1" dirty="0">
                 <a:solidFill>
                   <a:schemeClr val="tx1"/>
                 </a:solidFill>
               </a:rPr>
               <a:t>Paste this</a:t>
             </a:r>
-            <a:endParaRPr lang="en-US" sz="1400" dirty="0"/>
           </a:p>
           <a:p>
             <a:pPr indent="0" marL="0">
               <a:buNone/>
             </a:pPr>
             <a:r>
-              <a:rPr lang="en-US" sz="800" dirty="0">
+              <a:rPr lang="en-US" sz="1100" b="0" dirty="0">
+                <a:solidFill>
+                  <a:schemeClr val="accent2"/>
+                </a:solidFill>
+              </a:rPr>
+              <a:t>"I want to work on this repository </a:t>
+            </a:r>
+            <a:r>
+              <a:rPr lang="en-US" sz="1100" dirty="0">
+                <a:hlinkClick r:id="rId900"/>
+              </a:rPr>
+              <a:t>https://github.com/mfprado/open-source-modular-furniture</a:t>
+            </a:r>
+            <a:r>
+              <a:rPr lang="en-US" sz="1100" b="0" dirty="0">
+                <a:solidFill>
+                  <a:schemeClr val="accent2"/>
+                </a:solidFill>
+              </a:rPr>
+              <a:t>. Clone it and let's start working there."</a:t>
+            </a:r>
+          </a:p>
+        </p:txBody>
+      </p:sp>
+      <p:sp>
+        <p:nvSpPr>
+          <p:cNvPr id="31" name="Step 4 text"/>
+          <p:cNvSpPr txBox="1"/>
+          <p:nvPr/>
+        </p:nvSpPr>
+        <p:spPr>
+          <a:xfrm>
+            <a:off x="5806440" y="3679023"/>
+            <a:ext cx="2880360" cy="1005840"/>
+          </a:xfrm>
+          <a:prstGeom prst="rect">
+            <a:avLst/>
+          </a:prstGeom>
+          <a:noFill/>
+        </p:spPr>
+        <p:txBody>
+          <a:bodyPr wrap="square" lIns="0" tIns="0" rIns="0" bIns="0" anchor="t"/>
+          <a:lstStyle/>
+          <a:p>
+            <a:pPr indent="0" marL="0">
+              <a:buNone/>
+            </a:pPr>
+            <a:r>
+              <a:rPr lang="en-US" sz="1300" b="1" dirty="0">
                 <a:solidFill>
                   <a:schemeClr val="tx1"/>
                 </a:solidFill>
               </a:rPr>
-              <a:t> </a:t>
-            </a:r>
-            <a:endParaRPr lang="en-US" sz="1400" dirty="0"/>
+              <a:t>Claude takes it from there</a:t>
+            </a:r>
           </a:p>
           <a:p>
             <a:pPr indent="0" marL="0">
               <a:buNone/>
             </a:pPr>
             <a:r>
-              <a:rPr lang="en-US" sz="1400" dirty="0">
+              <a:rPr lang="en-US" sz="1100" b="0" dirty="0">
                 <a:solidFill>
                   <a:schemeClr val="accent2"/>
                 </a:solidFill>
               </a:rPr>
-              <a:t>"I want to work on this repository https://github.com/mfprado/open-source-modular-furniture. Clone it and let's start working there."</a:t>
-            </a:r>
-            <a:endParaRPr lang="en-US" sz="1400" dirty="0"/>
+              <a:t>The project carries step-by-step instructions for Claude, so it guides you. Click your answers: Claude asks with buttons. It starts your private copy and tells you where to open it.</a:t>
+            </a:r>
           </a:p>
         </p:txBody>
       </p:sp>
@@ -2968,322 +2984,6 @@
             <a:fld id="{F7021451-1387-4CA6-816F-3879F97B5CBC}" type="slidenum">
               <a:rPr b="0" lang="en-US"/>
               <a:t>10</a:t>
-            </a:fld>
-            <a:endParaRPr lang="en-US"/>
-          </a:p>
-        </p:txBody>
-      </p:sp>
-    </p:spTree>
-  </p:cSld>
-  <p:clrMapOvr>
-    <a:masterClrMapping/>
-  </p:clrMapOvr>
-</p:sld>
-</file>
-
-<file path=ppt/slides/slide11.xml><?xml version="1.0" encoding="utf-8"?>
-<p:sld xmlns:a="http://schemas.openxmlformats.org/drawingml/2006/main" xmlns:r="http://schemas.openxmlformats.org/officeDocument/2006/relationships" xmlns:p="http://schemas.openxmlformats.org/presentationml/2006/main">
-  <p:cSld name="Slide 11">
-    <p:spTree>
-      <p:nvGrpSpPr>
-        <p:cNvPr id="1" name=""/>
-        <p:cNvGrpSpPr/>
-        <p:nvPr/>
-      </p:nvGrpSpPr>
-      <p:grpSpPr>
-        <a:xfrm>
-          <a:off x="0" y="0"/>
-          <a:ext cx="0" cy="0"/>
-          <a:chOff x="0" y="0"/>
-          <a:chExt cx="0" cy="0"/>
-        </a:xfrm>
-      </p:grpSpPr>
-      <p:sp>
-        <p:nvSpPr>
-          <p:cNvPr id="2" name="Text 2"/>
-          <p:cNvSpPr/>
-          <p:nvPr>
-            <p:ph idx="103" type="title" hasCustomPrompt="1"/>
-          </p:nvPr>
-        </p:nvSpPr>
-        <p:spPr>
-          <a:xfrm>
-            <a:off x="457200" y="502920"/>
-            <a:ext cx="8229600" cy="457200"/>
-          </a:xfrm>
-          <a:prstGeom prst="rect">
-            <a:avLst/>
-          </a:prstGeom>
-          <a:noFill/>
-          <a:ln/>
-        </p:spPr>
-        <p:txBody>
-          <a:bodyPr wrap="square" lIns="0" tIns="0" rIns="0" bIns="0" rtlCol="0" anchor="ctr"/>
-          <a:lstStyle/>
-          <a:p>
-            <a:pPr algn="l" indent="0" marL="0">
-              <a:buNone/>
-            </a:pPr>
-            <a:r>
-              <a:rPr lang="en-US" sz="2000" b="1" spc="200" kern="0" dirty="0">
-                <a:solidFill>
-                  <a:schemeClr val="tx1"/>
-                </a:solidFill>
-              </a:rPr>
-              <a:t>STEP 4: CLAUDE TAKES IT FROM THERE</a:t>
-            </a:r>
-            <a:endParaRPr lang="en-US" sz="2000" dirty="0"/>
-          </a:p>
-        </p:txBody>
-      </p:sp>
-      <p:sp>
-        <p:nvSpPr>
-          <p:cNvPr id="3" name="SIMULATED EXAMPLE tag"/>
-          <p:cNvSpPr txBox="1"/>
-          <p:nvPr/>
-        </p:nvSpPr>
-        <p:spPr>
-          <a:xfrm>
-            <a:off x="6949440" y="73152"/>
-            <a:ext cx="1920240" cy="237744"/>
-          </a:xfrm>
-          <a:prstGeom prst="rect">
-            <a:avLst/>
-          </a:prstGeom>
-          <a:noFill/>
-          <a:ln w="9525">
-            <a:solidFill>
-              <a:srgbClr val="8A8F94"/>
-            </a:solidFill>
-          </a:ln>
-        </p:spPr>
-        <p:txBody>
-          <a:bodyPr wrap="square" lIns="0" tIns="0" rIns="0" bIns="0" rtlCol="0" anchor="ctr"/>
-          <a:lstStyle/>
-          <a:p>
-            <a:pPr algn="ctr" indent="0" marL="0">
-              <a:buNone/>
-            </a:pPr>
-            <a:r>
-              <a:rPr lang="en-US" sz="800" b="1" spc="100" kern="0" dirty="0">
-                <a:solidFill>
-                  <a:srgbClr val="E9EBED"/>
-                </a:solidFill>
-                <a:latin typeface="Courier New" pitchFamily="34" charset="0"/>
-                <a:ea typeface="Courier New" pitchFamily="34" charset="-122"/>
-                <a:cs typeface="Courier New" pitchFamily="34" charset="-120"/>
-              </a:rPr>
-              <a:t>SIMULATED EXAMPLE</a:t>
-            </a:r>
-            <a:endParaRPr lang="en-US" sz="800" dirty="0"/>
-          </a:p>
-        </p:txBody>
-      </p:sp>
-      <p:pic>
-        <p:nvPicPr>
-          <p:cNvPr id="4" name="Simulated start of the work" descr="small/app-start.jpg">    </p:cNvPr>
-          <p:cNvPicPr>
-            <a:picLocks noChangeAspect="1"/>
-          </p:cNvPicPr>
-          <p:nvPr/>
-        </p:nvPicPr>
-        <p:blipFill>
-          <a:blip r:embed="rId1"/>
-          <a:stretch>
-            <a:fillRect/>
-          </a:stretch>
-        </p:blipFill>
-        <p:spPr>
-          <a:xfrm>
-            <a:off x="457200" y="1051560"/>
-            <a:ext cx="5235828" cy="3657600"/>
-          </a:xfrm>
-          <a:prstGeom prst="rect">
-            <a:avLst/>
-          </a:prstGeom>
-          <a:effectLst>
-            <a:outerShdw sx="100000" sy="100000" kx="0" ky="0" algn="bl" rotWithShape="0" blurRad="76200" dist="25400" dir="5400000">
-              <a:srgbClr val="000000">
-                <a:alpha val="18000"/>
-              </a:srgbClr>
-            </a:outerShdw>
-          </a:effectLst>
-        </p:spPr>
-      </p:pic>
-      <p:sp>
-        <p:nvSpPr>
-          <p:cNvPr id="5" name="Text 2"/>
-          <p:cNvSpPr txBox="1"/>
-          <p:nvPr/>
-        </p:nvSpPr>
-        <p:spPr>
-          <a:xfrm>
-            <a:off x="6126480" y="1188720"/>
-            <a:ext cx="2651760" cy="3474720"/>
-          </a:xfrm>
-          <a:prstGeom prst="rect">
-            <a:avLst/>
-          </a:prstGeom>
-          <a:noFill/>
-          <a:ln/>
-        </p:spPr>
-        <p:txBody>
-          <a:bodyPr wrap="square" lIns="0" tIns="0" rIns="0" bIns="0" rtlCol="0" anchor="t"/>
-          <a:lstStyle/>
-          <a:p>
-            <a:pPr indent="0" marL="0">
-              <a:buNone/>
-            </a:pPr>
-            <a:r>
-              <a:rPr lang="en-US" sz="1400" b="1" dirty="0">
-                <a:solidFill>
-                  <a:schemeClr val="tx1"/>
-                </a:solidFill>
-              </a:rPr>
-              <a:t>Everything is prepared</a:t>
-            </a:r>
-            <a:endParaRPr lang="en-US" sz="1400" dirty="0"/>
-          </a:p>
-          <a:p>
-            <a:pPr indent="0" marL="0">
-              <a:buNone/>
-            </a:pPr>
-            <a:r>
-              <a:rPr lang="en-US" sz="1400" dirty="0">
-                <a:solidFill>
-                  <a:schemeClr val="accent2"/>
-                </a:solidFill>
-              </a:rPr>
-              <a:t>The project carries step-by-step instructions for Claude, so it knows how to guide you.</a:t>
-            </a:r>
-            <a:endParaRPr lang="en-US" sz="1400" dirty="0"/>
-          </a:p>
-          <a:p>
-            <a:pPr indent="0" marL="0">
-              <a:buNone/>
-            </a:pPr>
-            <a:r>
-              <a:rPr lang="en-US" sz="800" dirty="0">
-                <a:solidFill>
-                  <a:schemeClr val="tx1"/>
-                </a:solidFill>
-              </a:rPr>
-              <a:t> </a:t>
-            </a:r>
-            <a:endParaRPr lang="en-US" sz="1400" dirty="0"/>
-          </a:p>
-          <a:p>
-            <a:pPr indent="0" marL="0">
-              <a:buNone/>
-            </a:pPr>
-            <a:r>
-              <a:rPr lang="en-US" sz="1400" b="1" dirty="0">
-                <a:solidFill>
-                  <a:schemeClr val="tx1"/>
-                </a:solidFill>
-              </a:rPr>
-              <a:t>Click your answers</a:t>
-            </a:r>
-            <a:endParaRPr lang="en-US" sz="1400" dirty="0"/>
-          </a:p>
-          <a:p>
-            <a:pPr indent="0" marL="0">
-              <a:buNone/>
-            </a:pPr>
-            <a:r>
-              <a:rPr lang="en-US" sz="1400" dirty="0">
-                <a:solidFill>
-                  <a:schemeClr val="accent2"/>
-                </a:solidFill>
-              </a:rPr>
-              <a:t>Claude asks with buttons. Pick one, or choose Other and type your own.</a:t>
-            </a:r>
-            <a:endParaRPr lang="en-US" sz="1400" dirty="0"/>
-          </a:p>
-          <a:p>
-            <a:pPr indent="0" marL="0">
-              <a:buNone/>
-            </a:pPr>
-            <a:r>
-              <a:rPr lang="en-US" sz="800" dirty="0">
-                <a:solidFill>
-                  <a:schemeClr val="tx1"/>
-                </a:solidFill>
-              </a:rPr>
-              <a:t> </a:t>
-            </a:r>
-            <a:endParaRPr lang="en-US" sz="1400" dirty="0"/>
-          </a:p>
-          <a:p>
-            <a:pPr indent="0" marL="0">
-              <a:buNone/>
-            </a:pPr>
-            <a:r>
-              <a:rPr lang="en-US" sz="1400" b="1" dirty="0">
-                <a:solidFill>
-                  <a:schemeClr val="tx1"/>
-                </a:solidFill>
-              </a:rPr>
-              <a:t>It starts your private copy</a:t>
-            </a:r>
-            <a:endParaRPr lang="en-US" sz="1400" dirty="0"/>
-          </a:p>
-          <a:p>
-            <a:pPr indent="0" marL="0">
-              <a:buNone/>
-            </a:pPr>
-            <a:r>
-              <a:rPr lang="en-US" sz="1400" dirty="0">
-                <a:solidFill>
-                  <a:schemeClr val="accent2"/>
-                </a:solidFill>
-              </a:rPr>
-              <a:t>And tells you where to open it.</a:t>
-            </a:r>
-            <a:endParaRPr lang="en-US" sz="1400" dirty="0"/>
-          </a:p>
-        </p:txBody>
-      </p:sp>
-      <p:sp>
-        <p:nvSpPr>
-          <p:cNvPr id="25" name="Slide Number Placeholder 0"/>
-          <p:cNvSpPr>
-            <a:spLocks noGrp="1"/>
-          </p:cNvSpPr>
-          <p:nvPr>
-            <p:ph type="sldNum" sz="quarter" idx="4294967295"/>
-          </p:nvPr>
-        </p:nvSpPr>
-        <p:spPr>
-          <a:xfrm>
-            <a:off x="8503920" y="4754880"/>
-            <a:ext cx="365760" cy="274320"/>
-          </a:xfrm>
-          <a:prstGeom prst="rect">
-            <a:avLst/>
-          </a:prstGeom>
-          <a:extLst>
-            <a:ext uri="{C572A759-6A51-4108-AA02-DFA0A04FC94B}">
-              <ma14:wrappingTextBoxFlag xmlns:ma14="http://schemas.microsoft.com/office/mac/drawingml/2011/main" val="0"/>
-            </a:ext>
-          </a:extLst>
-        </p:spPr>
-        <p:txBody>
-          <a:bodyPr/>
-          <a:lstStyle>
-            <a:lvl1pPr>
-              <a:defRPr sz="1000">
-                <a:solidFill>
-                  <a:schemeClr val="accent3"/>
-                </a:solidFill>
-              </a:defRPr>
-            </a:lvl1pPr>
-          </a:lstStyle>
-          <a:p>
-            <a:pPr algn="l"/>
-            <a:fld id="{F7021451-1387-4CA6-816F-3879F97B5CBC}" type="slidenum">
-              <a:rPr b="0" lang="en-US"/>
-              <a:t>11</a:t>
             </a:fld>
             <a:endParaRPr lang="en-US"/>
           </a:p>
@@ -3963,8 +3663,8 @@
         </p:nvSpPr>
         <p:spPr>
           <a:xfrm>
-            <a:off x="777240" y="1115568"/>
-            <a:ext cx="2194560" cy="411480"/>
+            <a:off x="731520" y="1115568"/>
+            <a:ext cx="1645920" cy="411480"/>
           </a:xfrm>
           <a:prstGeom prst="rect">
             <a:avLst/>
@@ -3985,7 +3685,7 @@
                   <a:schemeClr val="tx1"/>
                 </a:solidFill>
               </a:rPr>
-              <a:t>Smallest and largest sizes</a:t>
+              <a:t>Smallest and largest</a:t>
             </a:r>
             <a:endParaRPr lang="en-US" sz="1400" dirty="0"/>
           </a:p>
@@ -3999,7 +3699,7 @@
         </p:nvSpPr>
         <p:spPr>
           <a:xfrm>
-            <a:off x="3017520" y="1097280"/>
+            <a:off x="2468880" y="1097280"/>
             <a:ext cx="274320" cy="365760"/>
           </a:xfrm>
           <a:prstGeom prst="rect">
@@ -4035,8 +3735,8 @@
         </p:nvSpPr>
         <p:spPr>
           <a:xfrm>
-            <a:off x="3337560" y="1115568"/>
-            <a:ext cx="2194560" cy="411480"/>
+            <a:off x="2788920" y="1115568"/>
+            <a:ext cx="1645920" cy="411480"/>
           </a:xfrm>
           <a:prstGeom prst="rect">
             <a:avLst/>
@@ -4107,8 +3807,8 @@
         </p:nvSpPr>
         <p:spPr>
           <a:xfrm>
-            <a:off x="777240" y="1664208"/>
-            <a:ext cx="2194560" cy="411480"/>
+            <a:off x="731520" y="1664208"/>
+            <a:ext cx="1645920" cy="411480"/>
           </a:xfrm>
           <a:prstGeom prst="rect">
             <a:avLst/>
@@ -4129,7 +3829,7 @@
                   <a:schemeClr val="tx1"/>
                 </a:solidFill>
               </a:rPr>
-              <a:t>Make each warning appear</a:t>
+              <a:t>Trigger each warning</a:t>
             </a:r>
             <a:endParaRPr lang="en-US" sz="1400" dirty="0"/>
           </a:p>
@@ -4143,7 +3843,7 @@
         </p:nvSpPr>
         <p:spPr>
           <a:xfrm>
-            <a:off x="3017520" y="1645920"/>
+            <a:off x="2468880" y="1645920"/>
             <a:ext cx="274320" cy="365760"/>
           </a:xfrm>
           <a:prstGeom prst="rect">
@@ -4179,8 +3879,8 @@
         </p:nvSpPr>
         <p:spPr>
           <a:xfrm>
-            <a:off x="3337560" y="1664208"/>
-            <a:ext cx="2194560" cy="411480"/>
+            <a:off x="2788920" y="1664208"/>
+            <a:ext cx="1645920" cy="411480"/>
           </a:xfrm>
           <a:prstGeom prst="rect">
             <a:avLst/>
@@ -4201,7 +3901,7 @@
                   <a:schemeClr val="tx1"/>
                 </a:solidFill>
               </a:rPr>
-              <a:t>Click parts in the 3D view</a:t>
+              <a:t>Click parts in 3D</a:t>
             </a:r>
             <a:endParaRPr lang="en-US" sz="1400" dirty="0"/>
           </a:p>
@@ -4251,8 +3951,8 @@
         </p:nvSpPr>
         <p:spPr>
           <a:xfrm>
-            <a:off x="777240" y="2212848"/>
-            <a:ext cx="2194560" cy="411480"/>
+            <a:off x="731520" y="2212848"/>
+            <a:ext cx="1645920" cy="411480"/>
           </a:xfrm>
           <a:prstGeom prst="rect">
             <a:avLst/>
@@ -4273,7 +3973,7 @@
                   <a:schemeClr val="tx1"/>
                 </a:solidFill>
               </a:rPr>
-              <a:t>Find it in the top menu</a:t>
+              <a:t>Find it in the menu</a:t>
             </a:r>
             <a:endParaRPr lang="en-US" sz="1400" dirty="0"/>
           </a:p>
@@ -4287,7 +3987,7 @@
         </p:nvSpPr>
         <p:spPr>
           <a:xfrm>
-            <a:off x="3017520" y="2194560"/>
+            <a:off x="2468880" y="2194560"/>
             <a:ext cx="274320" cy="365760"/>
           </a:xfrm>
           <a:prstGeom prst="rect">
@@ -4323,8 +4023,8 @@
         </p:nvSpPr>
         <p:spPr>
           <a:xfrm>
-            <a:off x="3337560" y="2212848"/>
-            <a:ext cx="2194560" cy="411480"/>
+            <a:off x="2788920" y="2212848"/>
+            <a:ext cx="1645920" cy="411480"/>
           </a:xfrm>
           <a:prstGeom prst="rect">
             <a:avLst/>
@@ -4345,7 +4045,7 @@
                   <a:schemeClr val="tx1"/>
                 </a:solidFill>
               </a:rPr>
-              <a:t>Download and read the PDF</a:t>
+              <a:t>Read the PDF</a:t>
             </a:r>
             <a:endParaRPr lang="en-US" sz="1400" dirty="0"/>
           </a:p>
@@ -4395,8 +4095,8 @@
         </p:nvSpPr>
         <p:spPr>
           <a:xfrm>
-            <a:off x="777240" y="2761488"/>
-            <a:ext cx="2194560" cy="411480"/>
+            <a:off x="731520" y="2761488"/>
+            <a:ext cx="1645920" cy="411480"/>
           </a:xfrm>
           <a:prstGeom prst="rect">
             <a:avLst/>
@@ -4417,7 +4117,7 @@
                   <a:schemeClr val="tx1"/>
                 </a:solidFill>
               </a:rPr>
-              <a:t>Shelf and desk still work</a:t>
+              <a:t>Shelf and desk work</a:t>
             </a:r>
             <a:endParaRPr lang="en-US" sz="1400" dirty="0"/>
           </a:p>
@@ -4431,7 +4131,7 @@
         </p:nvSpPr>
         <p:spPr>
           <a:xfrm>
-            <a:off x="3017520" y="2743200"/>
+            <a:off x="2468880" y="2743200"/>
             <a:ext cx="274320" cy="365760"/>
           </a:xfrm>
           <a:prstGeom prst="rect">
@@ -4467,8 +4167,8 @@
         </p:nvSpPr>
         <p:spPr>
           <a:xfrm>
-            <a:off x="3337560" y="2761488"/>
-            <a:ext cx="2194560" cy="411480"/>
+            <a:off x="2788920" y="2761488"/>
+            <a:ext cx="1645920" cy="411480"/>
           </a:xfrm>
           <a:prstGeom prst="rect">
             <a:avLst/>
@@ -4489,7 +4189,7 @@
                   <a:schemeClr val="tx1"/>
                 </a:solidFill>
               </a:rPr>
-              <a:t>Narrow window, like a phone</a:t>
+              <a:t>Phone-width window</a:t>
             </a:r>
             <a:endParaRPr lang="en-US" sz="1400" dirty="0"/>
           </a:p>
@@ -4503,8 +4203,8 @@
         </p:nvSpPr>
         <p:spPr>
           <a:xfrm>
-            <a:off x="457200" y="3383280"/>
-            <a:ext cx="5029200" cy="1188720"/>
+            <a:off x="457200" y="3291840"/>
+            <a:ext cx="3931920" cy="1371600"/>
           </a:xfrm>
           <a:prstGeom prst="roundRect">
             <a:avLst>
@@ -4530,8 +4230,8 @@
         </p:nvSpPr>
         <p:spPr>
           <a:xfrm>
-            <a:off x="640080" y="3493008"/>
-            <a:ext cx="4663440" cy="1005840"/>
+            <a:off x="594360" y="3383280"/>
+            <a:ext cx="3566160" cy="1188720"/>
           </a:xfrm>
           <a:prstGeom prst="rect">
             <a:avLst/>
@@ -4613,8 +4313,8 @@
         </p:blipFill>
         <p:spPr>
           <a:xfrm>
-            <a:off x="5577840" y="1097280"/>
-            <a:ext cx="3291840" cy="1958645"/>
+            <a:off x="4617720" y="1097280"/>
+            <a:ext cx="4251960" cy="2529916"/>
           </a:xfrm>
           <a:prstGeom prst="rect">
             <a:avLst/>
@@ -4636,8 +4336,8 @@
         </p:nvSpPr>
         <p:spPr>
           <a:xfrm>
-            <a:off x="5577840" y="3147365"/>
-            <a:ext cx="3291840" cy="457200"/>
+            <a:off x="4617720" y="3718636"/>
+            <a:ext cx="4251960" cy="320040"/>
           </a:xfrm>
           <a:prstGeom prst="rect">
             <a:avLst/>
@@ -4942,47 +4642,19 @@
       </p:sp>
       <p:sp>
         <p:nvSpPr>
-          <p:cNvPr id="7" name="Shape 4"/>
-          <p:cNvSpPr/>
+          <p:cNvPr id="40" name="Real PR link"/>
+          <p:cNvSpPr txBox="1"/>
           <p:nvPr/>
         </p:nvSpPr>
         <p:spPr>
           <a:xfrm>
             <a:off x="4937760" y="3977640"/>
-            <a:ext cx="3840480" cy="731520"/>
-          </a:xfrm>
-          <a:prstGeom prst="roundRect">
-            <a:avLst>
-              <a:gd name="adj" fmla="val 5000"/>
-            </a:avLst>
-          </a:prstGeom>
-          <a:solidFill>
-            <a:schemeClr val="bg2"/>
-          </a:solidFill>
-          <a:ln w="9525">
-            <a:solidFill>
-              <a:schemeClr val="accent4"/>
-            </a:solidFill>
-            <a:prstDash val="solid"/>
-          </a:ln>
-        </p:spPr>
-      </p:sp>
-      <p:sp>
-        <p:nvSpPr>
-          <p:cNvPr id="8" name="Text 5"/>
-          <p:cNvSpPr txBox="1"/>
-          <p:nvPr/>
-        </p:nvSpPr>
-        <p:spPr>
-          <a:xfrm>
-            <a:off x="5120640" y="4069080"/>
-            <a:ext cx="3474720" cy="548640"/>
+            <a:ext cx="3840480" cy="640080"/>
           </a:xfrm>
           <a:prstGeom prst="rect">
             <a:avLst/>
           </a:prstGeom>
           <a:noFill/>
-          <a:ln/>
         </p:spPr>
         <p:txBody>
           <a:bodyPr wrap="square" lIns="0" tIns="0" rIns="0" bIns="0" rtlCol="0" anchor="t"/>
@@ -4992,14 +4664,19 @@
               <a:buNone/>
             </a:pPr>
             <a:r>
+              <a:rPr lang="en-US" sz="1300" b="1" dirty="0">
+                <a:solidFill>
+                  <a:schemeClr val="tx1"/>
+                </a:solidFill>
+              </a:rPr>
+              <a:t>See a real pull request: </a:t>
+            </a:r>
+            <a:r>
               <a:rPr lang="en-US" sz="1300" dirty="0">
-                <a:solidFill>
-                  <a:schemeClr val="tx1"/>
-                </a:solidFill>
-              </a:rPr>
-              <a:t>Your one job: drag the screenshots into it on GitHub.</a:t>
-            </a:r>
-            <a:endParaRPr lang="en-US" sz="1300" dirty="0"/>
+                <a:hlinkClick r:id="rId900"/>
+              </a:rPr>
+              <a:t>github.com/mfprado/open-source-modular-furniture/pull/10</a:t>
+            </a:r>
           </a:p>
         </p:txBody>
       </p:sp>
@@ -5885,7 +5562,30 @@
                 <a:ea typeface="Courier New" pitchFamily="34" charset="-122"/>
                 <a:cs typeface="Courier New" pitchFamily="34" charset="-120"/>
               </a:rPr>
-              <a:t>"I want to work on github.com/mfprado/open-source-modular-furniture. Clone it and let's start"</a:t>
+              <a:t>"I want to work on </a:t>
+            </a:r>
+            <a:r>
+              <a:rPr lang="en-US" sz="1200" dirty="0">
+                <a:solidFill>
+                  <a:schemeClr val="bg1"/>
+                </a:solidFill>
+                <a:latin typeface="Courier New" pitchFamily="34" charset="0"/>
+                <a:ea typeface="Courier New" pitchFamily="34" charset="-122"/>
+                <a:cs typeface="Courier New" pitchFamily="34" charset="-120"/>
+                <a:hlinkClick r:id="rId900"/>
+              </a:rPr>
+              <a:t>github.com/mfprado/open-source-modular-furniture</a:t>
+            </a:r>
+            <a:r>
+              <a:rPr lang="en-US" sz="1200" dirty="0">
+                <a:solidFill>
+                  <a:schemeClr val="bg1"/>
+                </a:solidFill>
+                <a:latin typeface="Courier New" pitchFamily="34" charset="0"/>
+                <a:ea typeface="Courier New" pitchFamily="34" charset="-122"/>
+                <a:cs typeface="Courier New" pitchFamily="34" charset="-120"/>
+              </a:rPr>
+              <a:t>. Clone it and let's start"</a:t>
             </a:r>
             <a:endParaRPr lang="en-US" sz="1200" dirty="0"/>
           </a:p>
@@ -6934,7 +6634,24 @@
                   <a:schemeClr val="accent2"/>
                 </a:solidFill>
               </a:rPr>
-              <a:t>Free, at github.com/signup. GitHub is where the project lives.</a:t>
+              <a:t>Free, at </a:t>
+            </a:r>
+            <a:r>
+              <a:rPr lang="en-US" sz="1400" dirty="0">
+                <a:solidFill>
+                  <a:schemeClr val="accent2"/>
+                </a:solidFill>
+                <a:hlinkClick r:id="rId900"/>
+              </a:rPr>
+              <a:t>github.com/signup</a:t>
+            </a:r>
+            <a:r>
+              <a:rPr lang="en-US" sz="1400" dirty="0">
+                <a:solidFill>
+                  <a:schemeClr val="accent2"/>
+                </a:solidFill>
+              </a:rPr>
+              <a:t>. GitHub is where the project lives.</a:t>
             </a:r>
             <a:endParaRPr lang="en-US" sz="1400" dirty="0"/>
           </a:p>
@@ -7049,7 +6766,24 @@
                   <a:schemeClr val="accent2"/>
                 </a:solidFill>
               </a:rPr>
-              <a:t>Download it from claude.ai/download, install it and sign in.</a:t>
+              <a:t>Download it from </a:t>
+            </a:r>
+            <a:r>
+              <a:rPr lang="en-US" sz="1400" dirty="0">
+                <a:solidFill>
+                  <a:schemeClr val="accent2"/>
+                </a:solidFill>
+                <a:hlinkClick r:id="rId901"/>
+              </a:rPr>
+              <a:t>claude.ai/download</a:t>
+            </a:r>
+            <a:r>
+              <a:rPr lang="en-US" sz="1400" dirty="0">
+                <a:solidFill>
+                  <a:schemeClr val="accent2"/>
+                </a:solidFill>
+              </a:rPr>
+              <a:t>, install it and sign in.</a:t>
             </a:r>
             <a:endParaRPr lang="en-US" sz="1400" dirty="0"/>
           </a:p>
